--- a/react-aula3.pptx
+++ b/react-aula3.pptx
@@ -5,7 +5,7 @@
     <p:sldMasterId id="2147483648" r:id="rId1"/>
   </p:sldMasterIdLst>
   <p:notesMasterIdLst>
-    <p:notesMasterId r:id="rId21"/>
+    <p:notesMasterId r:id="rId22"/>
   </p:notesMasterIdLst>
   <p:sldIdLst>
     <p:sldId id="256" r:id="rId2"/>
@@ -20,13 +20,14 @@
     <p:sldId id="264" r:id="rId11"/>
     <p:sldId id="274" r:id="rId12"/>
     <p:sldId id="265" r:id="rId13"/>
-    <p:sldId id="266" r:id="rId14"/>
-    <p:sldId id="267" r:id="rId15"/>
-    <p:sldId id="268" r:id="rId16"/>
-    <p:sldId id="269" r:id="rId17"/>
-    <p:sldId id="270" r:id="rId18"/>
-    <p:sldId id="271" r:id="rId19"/>
-    <p:sldId id="272" r:id="rId20"/>
+    <p:sldId id="275" r:id="rId14"/>
+    <p:sldId id="266" r:id="rId15"/>
+    <p:sldId id="267" r:id="rId16"/>
+    <p:sldId id="268" r:id="rId17"/>
+    <p:sldId id="269" r:id="rId18"/>
+    <p:sldId id="270" r:id="rId19"/>
+    <p:sldId id="271" r:id="rId20"/>
+    <p:sldId id="272" r:id="rId21"/>
   </p:sldIdLst>
   <p:sldSz cx="9144000" cy="5143500" type="screen16x9"/>
   <p:notesSz cx="5143500" cy="9144000"/>
@@ -648,7 +649,13 @@
   <p:cSld>
     <p:spTree>
       <p:nvGrpSpPr>
-        <p:cNvPr id="1" name=""/>
+        <p:cNvPr id="1" name="">
+          <a:extLst>
+            <a:ext uri="{FF2B5EF4-FFF2-40B4-BE49-F238E27FC236}">
+              <a16:creationId xmlns:a16="http://schemas.microsoft.com/office/drawing/2014/main" id="{0FEE5C7F-0A84-A11A-60D0-7C7BFA743E86}"/>
+            </a:ext>
+          </a:extLst>
+        </p:cNvPr>
         <p:cNvGrpSpPr/>
         <p:nvPr/>
       </p:nvGrpSpPr>
@@ -662,7 +669,13 @@
       </p:grpSpPr>
       <p:sp>
         <p:nvSpPr>
-          <p:cNvPr id="2" name="Slide Image Placeholder 1"/>
+          <p:cNvPr id="2" name="Slide Image Placeholder 1">
+            <a:extLst>
+              <a:ext uri="{FF2B5EF4-FFF2-40B4-BE49-F238E27FC236}">
+                <a16:creationId xmlns:a16="http://schemas.microsoft.com/office/drawing/2014/main" id="{52A30A6F-C594-8967-08BB-4F867909DD68}"/>
+              </a:ext>
+            </a:extLst>
+          </p:cNvPr>
           <p:cNvSpPr>
             <a:spLocks noGrp="1" noRot="1" noChangeAspect="1"/>
           </p:cNvSpPr>
@@ -681,7 +694,13 @@
       </p:sp>
       <p:sp>
         <p:nvSpPr>
-          <p:cNvPr id="3" name="Notes Placeholder 2"/>
+          <p:cNvPr id="3" name="Notes Placeholder 2">
+            <a:extLst>
+              <a:ext uri="{FF2B5EF4-FFF2-40B4-BE49-F238E27FC236}">
+                <a16:creationId xmlns:a16="http://schemas.microsoft.com/office/drawing/2014/main" id="{F2DA45AE-2A25-645D-4B3A-5429E6277A90}"/>
+              </a:ext>
+            </a:extLst>
+          </p:cNvPr>
           <p:cNvSpPr>
             <a:spLocks noGrp="1"/>
           </p:cNvSpPr>
@@ -700,7 +719,13 @@
       </p:sp>
       <p:sp>
         <p:nvSpPr>
-          <p:cNvPr id="4" name="Slide Number Placeholder 3"/>
+          <p:cNvPr id="4" name="Slide Number Placeholder 3">
+            <a:extLst>
+              <a:ext uri="{FF2B5EF4-FFF2-40B4-BE49-F238E27FC236}">
+                <a16:creationId xmlns:a16="http://schemas.microsoft.com/office/drawing/2014/main" id="{E18DCA02-2B67-3D4E-926C-0CEE6934E0B7}"/>
+              </a:ext>
+            </a:extLst>
+          </p:cNvPr>
           <p:cNvSpPr>
             <a:spLocks noGrp="1"/>
           </p:cNvSpPr>
@@ -724,7 +749,7 @@
     </p:spTree>
     <p:extLst>
       <p:ext uri="{BB962C8B-B14F-4D97-AF65-F5344CB8AC3E}">
-        <p14:creationId xmlns:p14="http://schemas.microsoft.com/office/powerpoint/2010/main" val="1024086991"/>
+        <p14:creationId xmlns:p14="http://schemas.microsoft.com/office/powerpoint/2010/main" val="3393772946"/>
       </p:ext>
     </p:extLst>
   </p:cSld>
@@ -1353,6 +1378,97 @@
             <a:fld id="{F7021451-1387-4CA6-816F-3879F97B5CBC}" type="slidenum">
               <a:rPr lang="en-US"/>
               <a:t>2</a:t>
+            </a:fld>
+            <a:endParaRPr lang="en-US"/>
+          </a:p>
+        </p:txBody>
+      </p:sp>
+    </p:spTree>
+    <p:extLst>
+      <p:ext uri="{BB962C8B-B14F-4D97-AF65-F5344CB8AC3E}">
+        <p14:creationId xmlns:p14="http://schemas.microsoft.com/office/powerpoint/2010/main" val="1024086991"/>
+      </p:ext>
+    </p:extLst>
+  </p:cSld>
+  <p:clrMapOvr>
+    <a:masterClrMapping/>
+  </p:clrMapOvr>
+</p:notes>
+</file>
+
+<file path=ppt/notesSlides/notesSlide20.xml><?xml version="1.0" encoding="utf-8"?>
+<p:notes xmlns:a="http://schemas.openxmlformats.org/drawingml/2006/main" xmlns:r="http://schemas.openxmlformats.org/officeDocument/2006/relationships" xmlns:p="http://schemas.openxmlformats.org/presentationml/2006/main">
+  <p:cSld>
+    <p:spTree>
+      <p:nvGrpSpPr>
+        <p:cNvPr id="1" name=""/>
+        <p:cNvGrpSpPr/>
+        <p:nvPr/>
+      </p:nvGrpSpPr>
+      <p:grpSpPr>
+        <a:xfrm>
+          <a:off x="0" y="0"/>
+          <a:ext cx="0" cy="0"/>
+          <a:chOff x="0" y="0"/>
+          <a:chExt cx="0" cy="0"/>
+        </a:xfrm>
+      </p:grpSpPr>
+      <p:sp>
+        <p:nvSpPr>
+          <p:cNvPr id="2" name="Slide Image Placeholder 1"/>
+          <p:cNvSpPr>
+            <a:spLocks noGrp="1" noRot="1" noChangeAspect="1"/>
+          </p:cNvSpPr>
+          <p:nvPr>
+            <p:ph type="sldImg"/>
+          </p:nvPr>
+        </p:nvSpPr>
+        <p:spPr/>
+        <p:txBody>
+          <a:bodyPr/>
+          <a:lstStyle/>
+          <a:p>
+            <a:endParaRPr lang="pt-BR"/>
+          </a:p>
+        </p:txBody>
+      </p:sp>
+      <p:sp>
+        <p:nvSpPr>
+          <p:cNvPr id="3" name="Notes Placeholder 2"/>
+          <p:cNvSpPr>
+            <a:spLocks noGrp="1"/>
+          </p:cNvSpPr>
+          <p:nvPr>
+            <p:ph type="body" idx="1"/>
+          </p:nvPr>
+        </p:nvSpPr>
+        <p:spPr/>
+        <p:txBody>
+          <a:bodyPr/>
+          <a:lstStyle/>
+          <a:p>
+            <a:endParaRPr lang="en-US" dirty="0"/>
+          </a:p>
+        </p:txBody>
+      </p:sp>
+      <p:sp>
+        <p:nvSpPr>
+          <p:cNvPr id="4" name="Slide Number Placeholder 3"/>
+          <p:cNvSpPr>
+            <a:spLocks noGrp="1"/>
+          </p:cNvSpPr>
+          <p:nvPr>
+            <p:ph type="sldNum" sz="quarter" idx="10"/>
+          </p:nvPr>
+        </p:nvSpPr>
+        <p:spPr/>
+        <p:txBody>
+          <a:bodyPr/>
+          <a:lstStyle/>
+          <a:p>
+            <a:fld id="{F7021451-1387-4CA6-816F-3879F97B5CBC}" type="slidenum">
+              <a:rPr lang="en-US"/>
+              <a:t>20</a:t>
             </a:fld>
             <a:endParaRPr lang="en-US"/>
           </a:p>
@@ -5781,14 +5897,46 @@
       </p:sp>
       <p:sp>
         <p:nvSpPr>
-          <p:cNvPr id="8" name="Text 6"/>
-          <p:cNvSpPr/>
-          <p:nvPr/>
-        </p:nvSpPr>
-        <p:spPr>
-          <a:xfrm>
-            <a:off x="457200" y="1600200"/>
-            <a:ext cx="1828800" cy="320040"/>
+          <p:cNvPr id="11" name="Shape 9"/>
+          <p:cNvSpPr/>
+          <p:nvPr/>
+        </p:nvSpPr>
+        <p:spPr>
+          <a:xfrm>
+            <a:off x="457200" y="2370121"/>
+            <a:ext cx="2606040" cy="1342089"/>
+          </a:xfrm>
+          <a:prstGeom prst="rect">
+            <a:avLst/>
+          </a:prstGeom>
+          <a:solidFill>
+            <a:srgbClr val="D4EDDA"/>
+          </a:solidFill>
+          <a:ln w="25400">
+            <a:solidFill>
+              <a:srgbClr val="28A745"/>
+            </a:solidFill>
+            <a:prstDash val="solid"/>
+          </a:ln>
+        </p:spPr>
+        <p:txBody>
+          <a:bodyPr/>
+          <a:lstStyle/>
+          <a:p>
+            <a:endParaRPr lang="pt-BR"/>
+          </a:p>
+        </p:txBody>
+      </p:sp>
+      <p:sp>
+        <p:nvSpPr>
+          <p:cNvPr id="12" name="Text 10"/>
+          <p:cNvSpPr/>
+          <p:nvPr/>
+        </p:nvSpPr>
+        <p:spPr>
+          <a:xfrm>
+            <a:off x="502920" y="2404999"/>
+            <a:ext cx="2423160" cy="320040"/>
           </a:xfrm>
           <a:prstGeom prst="rect">
             <a:avLst/>
@@ -5808,6 +5956,561 @@
                 <a:solidFill>
                   <a:srgbClr val="20232A"/>
                 </a:solidFill>
+                <a:latin typeface="Consolas" pitchFamily="34" charset="0"/>
+                <a:ea typeface="Consolas" pitchFamily="34" charset="-122"/>
+                <a:cs typeface="Consolas" pitchFamily="34" charset="-120"/>
+              </a:rPr>
+              <a:t>Estado (state)</a:t>
+            </a:r>
+            <a:endParaRPr lang="en-US" sz="1300" dirty="0"/>
+          </a:p>
+        </p:txBody>
+      </p:sp>
+      <p:sp>
+        <p:nvSpPr>
+          <p:cNvPr id="13" name="Text 11"/>
+          <p:cNvSpPr/>
+          <p:nvPr/>
+        </p:nvSpPr>
+        <p:spPr>
+          <a:xfrm>
+            <a:off x="548640" y="2745675"/>
+            <a:ext cx="2423160" cy="763175"/>
+          </a:xfrm>
+          <a:prstGeom prst="rect">
+            <a:avLst/>
+          </a:prstGeom>
+          <a:noFill/>
+          <a:ln/>
+        </p:spPr>
+        <p:txBody>
+          <a:bodyPr wrap="square" lIns="0" tIns="0" rIns="0" bIns="0" rtlCol="0" anchor="ctr"/>
+          <a:lstStyle/>
+          <a:p>
+            <a:pPr fontAlgn="t">
+              <a:lnSpc>
+                <a:spcPts val="1500"/>
+              </a:lnSpc>
+              <a:buNone/>
+            </a:pPr>
+            <a:r>
+              <a:rPr lang="pt-BR" sz="1000" dirty="0">
+                <a:latin typeface="Segoe UI" panose="020B0502040204020203" pitchFamily="34" charset="0"/>
+              </a:rPr>
+              <a:t>É </a:t>
+            </a:r>
+            <a:r>
+              <a:rPr lang="pt-BR" sz="1000" b="1" dirty="0">
+                <a:latin typeface="Segoe UI" panose="020B0502040204020203" pitchFamily="34" charset="0"/>
+              </a:rPr>
+              <a:t>o valor atual</a:t>
+            </a:r>
+            <a:r>
+              <a:rPr lang="pt-BR" sz="1000" dirty="0">
+                <a:latin typeface="Segoe UI" panose="020B0502040204020203" pitchFamily="34" charset="0"/>
+              </a:rPr>
+              <a:t>, que o </a:t>
+            </a:r>
+            <a:r>
+              <a:rPr lang="pt-BR" sz="1000" dirty="0" err="1">
+                <a:latin typeface="Segoe UI" panose="020B0502040204020203" pitchFamily="34" charset="0"/>
+              </a:rPr>
+              <a:t>React</a:t>
+            </a:r>
+            <a:r>
+              <a:rPr lang="pt-BR" sz="1000" dirty="0">
+                <a:latin typeface="Segoe UI" panose="020B0502040204020203" pitchFamily="34" charset="0"/>
+              </a:rPr>
+              <a:t> monitora.</a:t>
+            </a:r>
+          </a:p>
+          <a:p>
+            <a:pPr fontAlgn="t">
+              <a:lnSpc>
+                <a:spcPts val="1500"/>
+              </a:lnSpc>
+            </a:pPr>
+            <a:r>
+              <a:rPr lang="pt-BR" sz="1000" dirty="0">
+                <a:latin typeface="Segoe UI" panose="020B0502040204020203" pitchFamily="34" charset="0"/>
+              </a:rPr>
+              <a:t>- Guarda o dado</a:t>
+            </a:r>
+          </a:p>
+          <a:p>
+            <a:pPr fontAlgn="t">
+              <a:lnSpc>
+                <a:spcPts val="1500"/>
+              </a:lnSpc>
+            </a:pPr>
+            <a:r>
+              <a:rPr lang="pt-BR" sz="1000" dirty="0">
+                <a:latin typeface="Segoe UI" panose="020B0502040204020203" pitchFamily="34" charset="0"/>
+              </a:rPr>
+              <a:t>- Quando você usa no JSX, aparece na tela</a:t>
+            </a:r>
+          </a:p>
+          <a:p>
+            <a:pPr fontAlgn="t">
+              <a:lnSpc>
+                <a:spcPts val="1500"/>
+              </a:lnSpc>
+            </a:pPr>
+            <a:r>
+              <a:rPr lang="pt-BR" sz="1000" dirty="0">
+                <a:latin typeface="Segoe UI" panose="020B0502040204020203" pitchFamily="34" charset="0"/>
+              </a:rPr>
+              <a:t>- Quando muda, a interface renderiza de novo automaticamente</a:t>
+            </a:r>
+          </a:p>
+        </p:txBody>
+      </p:sp>
+      <p:sp>
+        <p:nvSpPr>
+          <p:cNvPr id="14" name="Shape 12"/>
+          <p:cNvSpPr/>
+          <p:nvPr/>
+        </p:nvSpPr>
+        <p:spPr>
+          <a:xfrm>
+            <a:off x="3246120" y="2370121"/>
+            <a:ext cx="2606040" cy="1342089"/>
+          </a:xfrm>
+          <a:prstGeom prst="rect">
+            <a:avLst/>
+          </a:prstGeom>
+          <a:solidFill>
+            <a:srgbClr val="D1ECF1"/>
+          </a:solidFill>
+          <a:ln w="25400">
+            <a:solidFill>
+              <a:srgbClr val="17A2B8"/>
+            </a:solidFill>
+            <a:prstDash val="solid"/>
+          </a:ln>
+        </p:spPr>
+        <p:txBody>
+          <a:bodyPr/>
+          <a:lstStyle/>
+          <a:p>
+            <a:endParaRPr lang="pt-BR"/>
+          </a:p>
+        </p:txBody>
+      </p:sp>
+      <p:sp>
+        <p:nvSpPr>
+          <p:cNvPr id="15" name="Text 13"/>
+          <p:cNvSpPr/>
+          <p:nvPr/>
+        </p:nvSpPr>
+        <p:spPr>
+          <a:xfrm>
+            <a:off x="3337560" y="2431034"/>
+            <a:ext cx="2423160" cy="320040"/>
+          </a:xfrm>
+          <a:prstGeom prst="rect">
+            <a:avLst/>
+          </a:prstGeom>
+          <a:noFill/>
+          <a:ln/>
+        </p:spPr>
+        <p:txBody>
+          <a:bodyPr wrap="square" lIns="0" tIns="0" rIns="0" bIns="0" rtlCol="0" anchor="ctr"/>
+          <a:lstStyle/>
+          <a:p>
+            <a:pPr marL="0" indent="0">
+              <a:buNone/>
+            </a:pPr>
+            <a:r>
+              <a:rPr lang="en-US" sz="1300" b="1" dirty="0" err="1">
+                <a:solidFill>
+                  <a:srgbClr val="20232A"/>
+                </a:solidFill>
+                <a:latin typeface="Consolas" pitchFamily="34" charset="0"/>
+                <a:ea typeface="Consolas" pitchFamily="34" charset="-122"/>
+                <a:cs typeface="Consolas" pitchFamily="34" charset="-120"/>
+              </a:rPr>
+              <a:t>Definidor</a:t>
+            </a:r>
+            <a:r>
+              <a:rPr lang="en-US" sz="1300" b="1" dirty="0">
+                <a:solidFill>
+                  <a:srgbClr val="20232A"/>
+                </a:solidFill>
+                <a:latin typeface="Consolas" pitchFamily="34" charset="0"/>
+                <a:ea typeface="Consolas" pitchFamily="34" charset="-122"/>
+                <a:cs typeface="Consolas" pitchFamily="34" charset="-120"/>
+              </a:rPr>
+              <a:t> (setter)</a:t>
+            </a:r>
+            <a:endParaRPr lang="en-US" sz="1300" dirty="0"/>
+          </a:p>
+        </p:txBody>
+      </p:sp>
+      <p:sp>
+        <p:nvSpPr>
+          <p:cNvPr id="16" name="Text 14"/>
+          <p:cNvSpPr/>
+          <p:nvPr/>
+        </p:nvSpPr>
+        <p:spPr>
+          <a:xfrm>
+            <a:off x="3337560" y="2678333"/>
+            <a:ext cx="2423160" cy="893383"/>
+          </a:xfrm>
+          <a:prstGeom prst="rect">
+            <a:avLst/>
+          </a:prstGeom>
+          <a:noFill/>
+          <a:ln/>
+        </p:spPr>
+        <p:txBody>
+          <a:bodyPr wrap="square" lIns="0" tIns="0" rIns="0" bIns="0" rtlCol="0" anchor="ctr"/>
+          <a:lstStyle/>
+          <a:p>
+            <a:pPr fontAlgn="t">
+              <a:lnSpc>
+                <a:spcPts val="1500"/>
+              </a:lnSpc>
+              <a:buNone/>
+            </a:pPr>
+            <a:r>
+              <a:rPr lang="pt-BR" sz="1000" dirty="0">
+                <a:latin typeface="Segoe UI" panose="020B0502040204020203" pitchFamily="34" charset="0"/>
+              </a:rPr>
+              <a:t>É uma </a:t>
+            </a:r>
+            <a:r>
+              <a:rPr lang="pt-BR" sz="1000" b="1" dirty="0">
+                <a:latin typeface="Segoe UI" panose="020B0502040204020203" pitchFamily="34" charset="0"/>
+              </a:rPr>
+              <a:t>função que muda o estado</a:t>
+            </a:r>
+            <a:r>
+              <a:rPr lang="pt-BR" sz="1000" dirty="0">
+                <a:latin typeface="Segoe UI" panose="020B0502040204020203" pitchFamily="34" charset="0"/>
+              </a:rPr>
+              <a:t>.</a:t>
+            </a:r>
+          </a:p>
+          <a:p>
+            <a:pPr fontAlgn="t">
+              <a:lnSpc>
+                <a:spcPts val="1500"/>
+              </a:lnSpc>
+            </a:pPr>
+            <a:r>
+              <a:rPr lang="pt-BR" sz="1000" dirty="0">
+                <a:latin typeface="Segoe UI" panose="020B0502040204020203" pitchFamily="34" charset="0"/>
+              </a:rPr>
+              <a:t>- O valor muda</a:t>
+            </a:r>
+          </a:p>
+          <a:p>
+            <a:pPr fontAlgn="t">
+              <a:lnSpc>
+                <a:spcPts val="1500"/>
+              </a:lnSpc>
+            </a:pPr>
+            <a:r>
+              <a:rPr lang="pt-BR" sz="1000" dirty="0">
+                <a:latin typeface="Segoe UI" panose="020B0502040204020203" pitchFamily="34" charset="0"/>
+              </a:rPr>
+              <a:t>- O </a:t>
+            </a:r>
+            <a:r>
+              <a:rPr lang="pt-BR" sz="1000" dirty="0" err="1">
+                <a:latin typeface="Segoe UI" panose="020B0502040204020203" pitchFamily="34" charset="0"/>
+              </a:rPr>
+              <a:t>React</a:t>
+            </a:r>
+            <a:r>
+              <a:rPr lang="pt-BR" sz="1000" dirty="0">
+                <a:latin typeface="Segoe UI" panose="020B0502040204020203" pitchFamily="34" charset="0"/>
+              </a:rPr>
+              <a:t> redesenha a tela</a:t>
+            </a:r>
+          </a:p>
+          <a:p>
+            <a:pPr fontAlgn="t">
+              <a:lnSpc>
+                <a:spcPts val="1500"/>
+              </a:lnSpc>
+            </a:pPr>
+            <a:r>
+              <a:rPr lang="pt-BR" sz="1000" dirty="0">
+                <a:latin typeface="Segoe UI" panose="020B0502040204020203" pitchFamily="34" charset="0"/>
+              </a:rPr>
+              <a:t>- Tudo fica sincronizado</a:t>
+            </a:r>
+          </a:p>
+        </p:txBody>
+      </p:sp>
+      <p:sp>
+        <p:nvSpPr>
+          <p:cNvPr id="17" name="Shape 15"/>
+          <p:cNvSpPr/>
+          <p:nvPr/>
+        </p:nvSpPr>
+        <p:spPr>
+          <a:xfrm>
+            <a:off x="6035040" y="2370121"/>
+            <a:ext cx="2606040" cy="1342089"/>
+          </a:xfrm>
+          <a:prstGeom prst="rect">
+            <a:avLst/>
+          </a:prstGeom>
+          <a:solidFill>
+            <a:srgbClr val="FFF3CD"/>
+          </a:solidFill>
+          <a:ln w="25400">
+            <a:solidFill>
+              <a:srgbClr val="FFC107"/>
+            </a:solidFill>
+            <a:prstDash val="solid"/>
+          </a:ln>
+        </p:spPr>
+        <p:txBody>
+          <a:bodyPr/>
+          <a:lstStyle/>
+          <a:p>
+            <a:endParaRPr lang="pt-BR"/>
+          </a:p>
+        </p:txBody>
+      </p:sp>
+      <p:sp>
+        <p:nvSpPr>
+          <p:cNvPr id="18" name="Text 16"/>
+          <p:cNvSpPr/>
+          <p:nvPr/>
+        </p:nvSpPr>
+        <p:spPr>
+          <a:xfrm>
+            <a:off x="6126480" y="2401109"/>
+            <a:ext cx="2423160" cy="320040"/>
+          </a:xfrm>
+          <a:prstGeom prst="rect">
+            <a:avLst/>
+          </a:prstGeom>
+          <a:noFill/>
+          <a:ln/>
+        </p:spPr>
+        <p:txBody>
+          <a:bodyPr wrap="square" lIns="0" tIns="0" rIns="0" bIns="0" rtlCol="0" anchor="ctr"/>
+          <a:lstStyle/>
+          <a:p>
+            <a:pPr marL="0" indent="0">
+              <a:buNone/>
+            </a:pPr>
+            <a:r>
+              <a:rPr lang="en-US" sz="1300" b="1" dirty="0">
+                <a:solidFill>
+                  <a:srgbClr val="20232A"/>
+                </a:solidFill>
+                <a:latin typeface="Consolas" pitchFamily="34" charset="0"/>
+                <a:ea typeface="Consolas" pitchFamily="34" charset="-122"/>
+                <a:cs typeface="Consolas" pitchFamily="34" charset="-120"/>
+              </a:rPr>
+              <a:t>valorInicial</a:t>
+            </a:r>
+            <a:endParaRPr lang="en-US" sz="1300" dirty="0"/>
+          </a:p>
+        </p:txBody>
+      </p:sp>
+      <p:sp>
+        <p:nvSpPr>
+          <p:cNvPr id="19" name="Text 17"/>
+          <p:cNvSpPr/>
+          <p:nvPr/>
+        </p:nvSpPr>
+        <p:spPr>
+          <a:xfrm>
+            <a:off x="6141720" y="3056890"/>
+            <a:ext cx="2423160" cy="640080"/>
+          </a:xfrm>
+          <a:prstGeom prst="rect">
+            <a:avLst/>
+          </a:prstGeom>
+          <a:noFill/>
+          <a:ln/>
+        </p:spPr>
+        <p:txBody>
+          <a:bodyPr wrap="square" lIns="0" tIns="0" rIns="0" bIns="0" rtlCol="0" anchor="ctr"/>
+          <a:lstStyle/>
+          <a:p>
+            <a:pPr marL="0" indent="0">
+              <a:buNone/>
+            </a:pPr>
+            <a:r>
+              <a:rPr lang="en-US" sz="1000" dirty="0">
+                <a:solidFill>
+                  <a:srgbClr val="20232A"/>
+                </a:solidFill>
+              </a:rPr>
+              <a:t>O primeiro valor. Também define o TIPO de dado (texto, número, </a:t>
+            </a:r>
+            <a:r>
+              <a:rPr lang="en-US" sz="1000" dirty="0" err="1">
+                <a:solidFill>
+                  <a:srgbClr val="20232A"/>
+                </a:solidFill>
+              </a:rPr>
+              <a:t>lista</a:t>
+            </a:r>
+            <a:r>
+              <a:rPr lang="en-US" sz="1000" dirty="0">
+                <a:solidFill>
+                  <a:srgbClr val="20232A"/>
+                </a:solidFill>
+              </a:rPr>
+              <a:t>...).</a:t>
+            </a:r>
+          </a:p>
+          <a:p>
+            <a:endParaRPr lang="pt-BR" sz="1000" dirty="0">
+              <a:solidFill>
+                <a:srgbClr val="20232A"/>
+              </a:solidFill>
+            </a:endParaRPr>
+          </a:p>
+          <a:p>
+            <a:r>
+              <a:rPr lang="pt-BR" sz="1000" dirty="0">
+                <a:solidFill>
+                  <a:srgbClr val="20232A"/>
+                </a:solidFill>
+              </a:rPr>
+              <a:t>número → </a:t>
+            </a:r>
+            <a:r>
+              <a:rPr lang="pt-BR" sz="1000" dirty="0" err="1">
+                <a:solidFill>
+                  <a:srgbClr val="20232A"/>
+                </a:solidFill>
+              </a:rPr>
+              <a:t>useState</a:t>
+            </a:r>
+            <a:r>
+              <a:rPr lang="pt-BR" sz="1000" dirty="0">
+                <a:solidFill>
+                  <a:srgbClr val="20232A"/>
+                </a:solidFill>
+              </a:rPr>
+              <a:t>(100) </a:t>
+            </a:r>
+          </a:p>
+          <a:p>
+            <a:r>
+              <a:rPr lang="pt-BR" sz="1000" dirty="0">
+                <a:solidFill>
+                  <a:srgbClr val="20232A"/>
+                </a:solidFill>
+              </a:rPr>
+              <a:t>texto → </a:t>
+            </a:r>
+            <a:r>
+              <a:rPr lang="pt-BR" sz="1000" dirty="0" err="1">
+                <a:solidFill>
+                  <a:srgbClr val="20232A"/>
+                </a:solidFill>
+              </a:rPr>
+              <a:t>useState</a:t>
+            </a:r>
+            <a:r>
+              <a:rPr lang="pt-BR" sz="1000" dirty="0">
+                <a:solidFill>
+                  <a:srgbClr val="20232A"/>
+                </a:solidFill>
+              </a:rPr>
+              <a:t>("")</a:t>
+            </a:r>
+          </a:p>
+          <a:p>
+            <a:r>
+              <a:rPr lang="pt-BR" sz="1000" dirty="0">
+                <a:solidFill>
+                  <a:srgbClr val="20232A"/>
+                </a:solidFill>
+              </a:rPr>
+              <a:t>Lista → </a:t>
+            </a:r>
+            <a:r>
+              <a:rPr lang="pt-BR" sz="1000" dirty="0" err="1">
+                <a:solidFill>
+                  <a:srgbClr val="20232A"/>
+                </a:solidFill>
+              </a:rPr>
+              <a:t>useState</a:t>
+            </a:r>
+            <a:r>
+              <a:rPr lang="pt-BR" sz="1000" dirty="0">
+                <a:solidFill>
+                  <a:srgbClr val="20232A"/>
+                </a:solidFill>
+              </a:rPr>
+              <a:t>([])</a:t>
+            </a:r>
+          </a:p>
+          <a:p>
+            <a:endParaRPr lang="pt-BR" sz="1000" dirty="0">
+              <a:solidFill>
+                <a:srgbClr val="20232A"/>
+              </a:solidFill>
+            </a:endParaRPr>
+          </a:p>
+          <a:p>
+            <a:pPr marL="0" indent="0">
+              <a:buNone/>
+            </a:pPr>
+            <a:endParaRPr lang="en-US" sz="1000" dirty="0">
+              <a:solidFill>
+                <a:srgbClr val="20232A"/>
+              </a:solidFill>
+            </a:endParaRPr>
+          </a:p>
+          <a:p>
+            <a:pPr marL="0" indent="0">
+              <a:buNone/>
+            </a:pPr>
+            <a:endParaRPr lang="en-US" sz="1000" dirty="0"/>
+          </a:p>
+        </p:txBody>
+      </p:sp>
+      <p:sp>
+        <p:nvSpPr>
+          <p:cNvPr id="24" name="Text 6">
+            <a:extLst>
+              <a:ext uri="{FF2B5EF4-FFF2-40B4-BE49-F238E27FC236}">
+                <a16:creationId xmlns:a16="http://schemas.microsoft.com/office/drawing/2014/main" id="{53ACFC1A-3502-4E2E-F3D8-26DC708D13DC}"/>
+              </a:ext>
+            </a:extLst>
+          </p:cNvPr>
+          <p:cNvSpPr/>
+          <p:nvPr/>
+        </p:nvSpPr>
+        <p:spPr>
+          <a:xfrm>
+            <a:off x="457200" y="3716020"/>
+            <a:ext cx="1828800" cy="320040"/>
+          </a:xfrm>
+          <a:prstGeom prst="rect">
+            <a:avLst/>
+          </a:prstGeom>
+          <a:noFill/>
+          <a:ln/>
+        </p:spPr>
+        <p:txBody>
+          <a:bodyPr wrap="square" lIns="0" tIns="0" rIns="0" bIns="0" rtlCol="0" anchor="ctr"/>
+          <a:lstStyle/>
+          <a:p>
+            <a:pPr marL="0" indent="0">
+              <a:buNone/>
+            </a:pPr>
+            <a:r>
+              <a:rPr lang="en-US" sz="1300" b="1" dirty="0">
+                <a:solidFill>
+                  <a:srgbClr val="20232A"/>
+                </a:solidFill>
               </a:rPr>
               <a:t>Sintaxe:</a:t>
             </a:r>
@@ -5817,14 +6520,20 @@
       </p:sp>
       <p:sp>
         <p:nvSpPr>
-          <p:cNvPr id="9" name="Shape 7"/>
-          <p:cNvSpPr/>
-          <p:nvPr/>
-        </p:nvSpPr>
-        <p:spPr>
-          <a:xfrm>
-            <a:off x="457200" y="1947672"/>
-            <a:ext cx="8229600" cy="868680"/>
+          <p:cNvPr id="25" name="Shape 7">
+            <a:extLst>
+              <a:ext uri="{FF2B5EF4-FFF2-40B4-BE49-F238E27FC236}">
+                <a16:creationId xmlns:a16="http://schemas.microsoft.com/office/drawing/2014/main" id="{9295E894-F91D-0A24-8412-8459E6DF9330}"/>
+              </a:ext>
+            </a:extLst>
+          </p:cNvPr>
+          <p:cNvSpPr/>
+          <p:nvPr/>
+        </p:nvSpPr>
+        <p:spPr>
+          <a:xfrm>
+            <a:off x="441960" y="3997198"/>
+            <a:ext cx="8229600" cy="1036574"/>
           </a:xfrm>
           <a:prstGeom prst="rect">
             <a:avLst/>
@@ -5849,13 +6558,19 @@
       </p:sp>
       <p:sp>
         <p:nvSpPr>
-          <p:cNvPr id="10" name="Text 8"/>
-          <p:cNvSpPr/>
-          <p:nvPr/>
-        </p:nvSpPr>
-        <p:spPr>
-          <a:xfrm>
-            <a:off x="594360" y="2039112"/>
+          <p:cNvPr id="26" name="Text 8">
+            <a:extLst>
+              <a:ext uri="{FF2B5EF4-FFF2-40B4-BE49-F238E27FC236}">
+                <a16:creationId xmlns:a16="http://schemas.microsoft.com/office/drawing/2014/main" id="{D8FA5CC4-2B24-6084-C269-D6742C349FB5}"/>
+              </a:ext>
+            </a:extLst>
+          </p:cNvPr>
+          <p:cNvSpPr/>
+          <p:nvPr/>
+        </p:nvSpPr>
+        <p:spPr>
+          <a:xfrm>
+            <a:off x="502920" y="4018788"/>
             <a:ext cx="7955280" cy="685800"/>
           </a:xfrm>
           <a:prstGeom prst="rect">
@@ -5903,22 +6618,140 @@
                 <a:ea typeface="Consolas" pitchFamily="34" charset="-122"/>
                 <a:cs typeface="Consolas" pitchFamily="34" charset="-120"/>
               </a:rPr>
-              <a:t>const [ estado, definidor ] = useState(valorInicial)</a:t>
-            </a:r>
-            <a:endParaRPr lang="en-US" sz="1000" dirty="0"/>
-          </a:p>
-        </p:txBody>
-      </p:sp>
-      <p:sp>
-        <p:nvSpPr>
-          <p:cNvPr id="11" name="Shape 9"/>
-          <p:cNvSpPr/>
-          <p:nvPr/>
-        </p:nvSpPr>
-        <p:spPr>
-          <a:xfrm>
-            <a:off x="457200" y="2926080"/>
-            <a:ext cx="2606040" cy="1097280"/>
+              <a:t>const [ estado, definidor ] = useState(</a:t>
+            </a:r>
+            <a:r>
+              <a:rPr lang="en-US" sz="1000" dirty="0" err="1">
+                <a:solidFill>
+                  <a:srgbClr val="CDD6F4"/>
+                </a:solidFill>
+                <a:latin typeface="Consolas" pitchFamily="34" charset="0"/>
+                <a:ea typeface="Consolas" pitchFamily="34" charset="-122"/>
+                <a:cs typeface="Consolas" pitchFamily="34" charset="-120"/>
+              </a:rPr>
+              <a:t>valorInicial</a:t>
+            </a:r>
+            <a:r>
+              <a:rPr lang="en-US" sz="1000" dirty="0">
+                <a:solidFill>
+                  <a:srgbClr val="CDD6F4"/>
+                </a:solidFill>
+                <a:latin typeface="Consolas" pitchFamily="34" charset="0"/>
+                <a:ea typeface="Consolas" pitchFamily="34" charset="-122"/>
+                <a:cs typeface="Consolas" pitchFamily="34" charset="-120"/>
+              </a:rPr>
+              <a:t>)</a:t>
+            </a:r>
+          </a:p>
+          <a:p>
+            <a:pPr marL="0" indent="0">
+              <a:buNone/>
+            </a:pPr>
+            <a:endParaRPr lang="en-US" sz="1000" dirty="0">
+              <a:solidFill>
+                <a:srgbClr val="CDD6F4"/>
+              </a:solidFill>
+              <a:latin typeface="Consolas" pitchFamily="34" charset="0"/>
+              <a:ea typeface="Consolas" pitchFamily="34" charset="-122"/>
+              <a:cs typeface="Consolas" pitchFamily="34" charset="-120"/>
+            </a:endParaRPr>
+          </a:p>
+          <a:p>
+            <a:pPr marL="0" indent="0">
+              <a:buNone/>
+            </a:pPr>
+            <a:r>
+              <a:rPr lang="en-US" sz="1000" i="1" dirty="0">
+                <a:solidFill>
+                  <a:srgbClr val="CDD6F4"/>
+                </a:solidFill>
+                <a:latin typeface="Consolas" pitchFamily="34" charset="0"/>
+                <a:ea typeface="Consolas" pitchFamily="34" charset="-122"/>
+                <a:cs typeface="Consolas" pitchFamily="34" charset="-120"/>
+              </a:rPr>
+              <a:t>Ex.:</a:t>
+            </a:r>
+          </a:p>
+          <a:p>
+            <a:r>
+              <a:rPr lang="pt-BR" sz="1000" dirty="0" err="1">
+                <a:solidFill>
+                  <a:srgbClr val="CDD6F4"/>
+                </a:solidFill>
+                <a:latin typeface="Consolas" pitchFamily="34" charset="0"/>
+              </a:rPr>
+              <a:t>const</a:t>
+            </a:r>
+            <a:r>
+              <a:rPr lang="pt-BR" sz="1000" dirty="0">
+                <a:solidFill>
+                  <a:srgbClr val="CDD6F4"/>
+                </a:solidFill>
+                <a:latin typeface="Consolas" pitchFamily="34" charset="0"/>
+              </a:rPr>
+              <a:t> [contador, </a:t>
+            </a:r>
+            <a:r>
+              <a:rPr lang="pt-BR" sz="1000" dirty="0" err="1">
+                <a:solidFill>
+                  <a:srgbClr val="CDD6F4"/>
+                </a:solidFill>
+                <a:latin typeface="Consolas" pitchFamily="34" charset="0"/>
+              </a:rPr>
+              <a:t>setContador</a:t>
+            </a:r>
+            <a:r>
+              <a:rPr lang="pt-BR" sz="1000" dirty="0">
+                <a:solidFill>
+                  <a:srgbClr val="CDD6F4"/>
+                </a:solidFill>
+                <a:latin typeface="Consolas" pitchFamily="34" charset="0"/>
+              </a:rPr>
+              <a:t>] = </a:t>
+            </a:r>
+            <a:r>
+              <a:rPr lang="pt-BR" sz="1000" dirty="0" err="1">
+                <a:solidFill>
+                  <a:srgbClr val="CDD6F4"/>
+                </a:solidFill>
+                <a:latin typeface="Consolas" pitchFamily="34" charset="0"/>
+              </a:rPr>
+              <a:t>useState</a:t>
+            </a:r>
+            <a:r>
+              <a:rPr lang="pt-BR" sz="1000" dirty="0">
+                <a:solidFill>
+                  <a:srgbClr val="CDD6F4"/>
+                </a:solidFill>
+                <a:latin typeface="Consolas" pitchFamily="34" charset="0"/>
+              </a:rPr>
+              <a:t>(0);</a:t>
+            </a:r>
+          </a:p>
+          <a:p>
+            <a:pPr marL="0" indent="0">
+              <a:buNone/>
+            </a:pPr>
+            <a:endParaRPr lang="en-US" sz="1000" dirty="0"/>
+          </a:p>
+        </p:txBody>
+      </p:sp>
+      <p:sp>
+        <p:nvSpPr>
+          <p:cNvPr id="30" name="Shape 7">
+            <a:extLst>
+              <a:ext uri="{FF2B5EF4-FFF2-40B4-BE49-F238E27FC236}">
+                <a16:creationId xmlns:a16="http://schemas.microsoft.com/office/drawing/2014/main" id="{6BE602CC-B2C8-3108-CC6A-8D3095CC7D14}"/>
+              </a:ext>
+            </a:extLst>
+          </p:cNvPr>
+          <p:cNvSpPr/>
+          <p:nvPr/>
+        </p:nvSpPr>
+        <p:spPr>
+          <a:xfrm>
+            <a:off x="2092960" y="1805178"/>
+            <a:ext cx="5260340" cy="457200"/>
           </a:xfrm>
           <a:prstGeom prst="rect">
             <a:avLst/>
@@ -5926,9 +6759,9 @@
           <a:solidFill>
             <a:srgbClr val="D4EDDA"/>
           </a:solidFill>
-          <a:ln w="25400">
+          <a:ln w="12700">
             <a:solidFill>
-              <a:srgbClr val="28A745"/>
+              <a:srgbClr val="C3E6CB"/>
             </a:solidFill>
             <a:prstDash val="solid"/>
           </a:ln>
@@ -5943,14 +6776,20 @@
       </p:sp>
       <p:sp>
         <p:nvSpPr>
-          <p:cNvPr id="12" name="Text 10"/>
-          <p:cNvSpPr/>
-          <p:nvPr/>
-        </p:nvSpPr>
-        <p:spPr>
-          <a:xfrm>
-            <a:off x="548640" y="2971800"/>
-            <a:ext cx="2423160" cy="320040"/>
+          <p:cNvPr id="31" name="Text 8">
+            <a:extLst>
+              <a:ext uri="{FF2B5EF4-FFF2-40B4-BE49-F238E27FC236}">
+                <a16:creationId xmlns:a16="http://schemas.microsoft.com/office/drawing/2014/main" id="{628B7349-C137-3B60-4BDF-D87D2061C894}"/>
+              </a:ext>
+            </a:extLst>
+          </p:cNvPr>
+          <p:cNvSpPr/>
+          <p:nvPr/>
+        </p:nvSpPr>
+        <p:spPr>
+          <a:xfrm>
+            <a:off x="2199640" y="1823466"/>
+            <a:ext cx="4423410" cy="457200"/>
           </a:xfrm>
           <a:prstGeom prst="rect">
             <a:avLst/>
@@ -5962,80 +6801,214 @@
           <a:bodyPr wrap="square" lIns="0" tIns="0" rIns="0" bIns="0" rtlCol="0" anchor="ctr"/>
           <a:lstStyle/>
           <a:p>
-            <a:pPr marL="0" indent="0">
-              <a:buNone/>
-            </a:pPr>
-            <a:r>
-              <a:rPr lang="en-US" sz="1300" b="1" dirty="0">
-                <a:solidFill>
-                  <a:srgbClr val="20232A"/>
-                </a:solidFill>
-                <a:latin typeface="Consolas" pitchFamily="34" charset="0"/>
-                <a:ea typeface="Consolas" pitchFamily="34" charset="-122"/>
-                <a:cs typeface="Consolas" pitchFamily="34" charset="-120"/>
-              </a:rPr>
-              <a:t>estado</a:t>
-            </a:r>
-            <a:endParaRPr lang="en-US" sz="1300" dirty="0"/>
-          </a:p>
-        </p:txBody>
-      </p:sp>
-      <p:sp>
-        <p:nvSpPr>
-          <p:cNvPr id="13" name="Text 11"/>
-          <p:cNvSpPr/>
-          <p:nvPr/>
-        </p:nvSpPr>
-        <p:spPr>
-          <a:xfrm>
-            <a:off x="548640" y="3310128"/>
-            <a:ext cx="2423160" cy="640080"/>
+            <a:r>
+              <a:rPr lang="pt-BR" sz="1400" dirty="0">
+                <a:solidFill>
+                  <a:srgbClr val="155724"/>
+                </a:solidFill>
+              </a:rPr>
+              <a:t>📢</a:t>
+            </a:r>
+            <a:r>
+              <a:rPr lang="en-US" sz="1400" dirty="0">
+                <a:solidFill>
+                  <a:srgbClr val="155724"/>
+                </a:solidFill>
+              </a:rPr>
+              <a:t>No React, </a:t>
+            </a:r>
+            <a:r>
+              <a:rPr lang="en-US" sz="1400" dirty="0" err="1">
+                <a:solidFill>
+                  <a:srgbClr val="155724"/>
+                </a:solidFill>
+              </a:rPr>
+              <a:t>variáveis</a:t>
+            </a:r>
+            <a:r>
+              <a:rPr lang="en-US" sz="1400" dirty="0">
+                <a:solidFill>
+                  <a:srgbClr val="155724"/>
+                </a:solidFill>
+              </a:rPr>
+              <a:t> </a:t>
+            </a:r>
+            <a:r>
+              <a:rPr lang="en-US" sz="1400" dirty="0" err="1">
+                <a:solidFill>
+                  <a:srgbClr val="155724"/>
+                </a:solidFill>
+              </a:rPr>
+              <a:t>comuns</a:t>
+            </a:r>
+            <a:r>
+              <a:rPr lang="en-US" sz="1400" dirty="0">
+                <a:solidFill>
+                  <a:srgbClr val="155724"/>
+                </a:solidFill>
+              </a:rPr>
+              <a:t> NÃO </a:t>
+            </a:r>
+            <a:r>
+              <a:rPr lang="en-US" sz="1400" dirty="0" err="1">
+                <a:solidFill>
+                  <a:srgbClr val="155724"/>
+                </a:solidFill>
+              </a:rPr>
+              <a:t>fazem</a:t>
+            </a:r>
+            <a:r>
+              <a:rPr lang="en-US" sz="1400" dirty="0">
+                <a:solidFill>
+                  <a:srgbClr val="155724"/>
+                </a:solidFill>
+              </a:rPr>
+              <a:t> a </a:t>
+            </a:r>
+            <a:r>
+              <a:rPr lang="en-US" sz="1400" dirty="0" err="1">
+                <a:solidFill>
+                  <a:srgbClr val="155724"/>
+                </a:solidFill>
+              </a:rPr>
+              <a:t>tela</a:t>
+            </a:r>
+            <a:r>
+              <a:rPr lang="en-US" sz="1400" dirty="0">
+                <a:solidFill>
+                  <a:srgbClr val="155724"/>
+                </a:solidFill>
+              </a:rPr>
+              <a:t> </a:t>
+            </a:r>
+            <a:r>
+              <a:rPr lang="en-US" sz="1400" dirty="0" err="1">
+                <a:solidFill>
+                  <a:srgbClr val="155724"/>
+                </a:solidFill>
+              </a:rPr>
+              <a:t>atualizar</a:t>
+            </a:r>
+            <a:r>
+              <a:rPr lang="en-US" sz="1400" dirty="0">
+                <a:solidFill>
+                  <a:srgbClr val="155724"/>
+                </a:solidFill>
+              </a:rPr>
+              <a:t>.</a:t>
+            </a:r>
+            <a:endParaRPr lang="en-US" sz="1400" dirty="0"/>
+          </a:p>
+        </p:txBody>
+      </p:sp>
+      <p:sp>
+        <p:nvSpPr>
+          <p:cNvPr id="33" name="CaixaDeTexto 32">
+            <a:extLst>
+              <a:ext uri="{FF2B5EF4-FFF2-40B4-BE49-F238E27FC236}">
+                <a16:creationId xmlns:a16="http://schemas.microsoft.com/office/drawing/2014/main" id="{7D2469DA-BD60-B84D-5ADD-1F3F2F0F9B96}"/>
+              </a:ext>
+            </a:extLst>
+          </p:cNvPr>
+          <p:cNvSpPr txBox="1"/>
+          <p:nvPr/>
+        </p:nvSpPr>
+        <p:spPr>
+          <a:xfrm>
+            <a:off x="3086915" y="1475185"/>
+            <a:ext cx="2647135" cy="369332"/>
           </a:xfrm>
           <a:prstGeom prst="rect">
             <a:avLst/>
           </a:prstGeom>
           <a:noFill/>
-          <a:ln/>
-        </p:spPr>
-        <p:txBody>
-          <a:bodyPr wrap="square" lIns="0" tIns="0" rIns="0" bIns="0" rtlCol="0" anchor="ctr"/>
-          <a:lstStyle/>
-          <a:p>
-            <a:pPr marL="0" indent="0">
-              <a:buNone/>
-            </a:pPr>
-            <a:r>
-              <a:rPr lang="en-US" sz="1000" dirty="0">
-                <a:solidFill>
-                  <a:srgbClr val="20232A"/>
-                </a:solidFill>
-              </a:rPr>
-              <a:t>Guarda o valor atual. Usamos para MOSTRAR na tela.</a:t>
-            </a:r>
-            <a:endParaRPr lang="en-US" sz="1000" dirty="0"/>
-          </a:p>
-        </p:txBody>
-      </p:sp>
-      <p:sp>
-        <p:nvSpPr>
-          <p:cNvPr id="14" name="Shape 12"/>
-          <p:cNvSpPr/>
-          <p:nvPr/>
-        </p:nvSpPr>
-        <p:spPr>
-          <a:xfrm>
-            <a:off x="3246120" y="2926080"/>
-            <a:ext cx="2606040" cy="1097280"/>
+        </p:spPr>
+        <p:txBody>
+          <a:bodyPr wrap="none" rtlCol="0">
+            <a:spAutoFit/>
+          </a:bodyPr>
+          <a:lstStyle/>
+          <a:p>
+            <a:r>
+              <a:rPr lang="pt-BR" dirty="0"/>
+              <a:t>Por que o </a:t>
+            </a:r>
+            <a:r>
+              <a:rPr lang="pt-BR" dirty="0" err="1"/>
+              <a:t>useState</a:t>
+            </a:r>
+            <a:r>
+              <a:rPr lang="pt-BR" dirty="0"/>
+              <a:t> existe?</a:t>
+            </a:r>
+          </a:p>
+        </p:txBody>
+      </p:sp>
+    </p:spTree>
+  </p:cSld>
+  <p:clrMapOvr>
+    <a:masterClrMapping/>
+  </p:clrMapOvr>
+</p:sld>
+</file>
+
+<file path=ppt/slides/slide13.xml><?xml version="1.0" encoding="utf-8"?>
+<p:sld xmlns:a="http://schemas.openxmlformats.org/drawingml/2006/main" xmlns:r="http://schemas.openxmlformats.org/officeDocument/2006/relationships" xmlns:p="http://schemas.openxmlformats.org/presentationml/2006/main">
+  <p:cSld>
+    <p:bg>
+      <p:bgPr>
+        <a:solidFill>
+          <a:srgbClr val="F5F7FA"/>
+        </a:solidFill>
+        <a:effectLst/>
+      </p:bgPr>
+    </p:bg>
+    <p:spTree>
+      <p:nvGrpSpPr>
+        <p:cNvPr id="1" name="">
+          <a:extLst>
+            <a:ext uri="{FF2B5EF4-FFF2-40B4-BE49-F238E27FC236}">
+              <a16:creationId xmlns:a16="http://schemas.microsoft.com/office/drawing/2014/main" id="{EA090681-08B1-9EA2-21E7-72D45994EB83}"/>
+            </a:ext>
+          </a:extLst>
+        </p:cNvPr>
+        <p:cNvGrpSpPr/>
+        <p:nvPr/>
+      </p:nvGrpSpPr>
+      <p:grpSpPr>
+        <a:xfrm>
+          <a:off x="0" y="0"/>
+          <a:ext cx="0" cy="0"/>
+          <a:chOff x="0" y="0"/>
+          <a:chExt cx="0" cy="0"/>
+        </a:xfrm>
+      </p:grpSpPr>
+      <p:sp>
+        <p:nvSpPr>
+          <p:cNvPr id="2" name="Shape 0">
+            <a:extLst>
+              <a:ext uri="{FF2B5EF4-FFF2-40B4-BE49-F238E27FC236}">
+                <a16:creationId xmlns:a16="http://schemas.microsoft.com/office/drawing/2014/main" id="{EFCF9C2E-2072-0AF9-FDB2-CD84BE3021E6}"/>
+              </a:ext>
+            </a:extLst>
+          </p:cNvPr>
+          <p:cNvSpPr/>
+          <p:nvPr/>
+        </p:nvSpPr>
+        <p:spPr>
+          <a:xfrm>
+            <a:off x="0" y="0"/>
+            <a:ext cx="9144000" cy="685800"/>
           </a:xfrm>
           <a:prstGeom prst="rect">
             <a:avLst/>
           </a:prstGeom>
           <a:solidFill>
-            <a:srgbClr val="D1ECF1"/>
+            <a:srgbClr val="20232A"/>
           </a:solidFill>
-          <a:ln w="25400">
+          <a:ln w="12700">
             <a:solidFill>
-              <a:srgbClr val="17A2B8"/>
+              <a:srgbClr val="20232A"/>
             </a:solidFill>
             <a:prstDash val="solid"/>
           </a:ln>
@@ -6050,99 +7023,30 @@
       </p:sp>
       <p:sp>
         <p:nvSpPr>
-          <p:cNvPr id="15" name="Text 13"/>
-          <p:cNvSpPr/>
-          <p:nvPr/>
-        </p:nvSpPr>
-        <p:spPr>
-          <a:xfrm>
-            <a:off x="3337560" y="2971800"/>
-            <a:ext cx="2423160" cy="320040"/>
-          </a:xfrm>
-          <a:prstGeom prst="rect">
-            <a:avLst/>
-          </a:prstGeom>
-          <a:noFill/>
-          <a:ln/>
-        </p:spPr>
-        <p:txBody>
-          <a:bodyPr wrap="square" lIns="0" tIns="0" rIns="0" bIns="0" rtlCol="0" anchor="ctr"/>
-          <a:lstStyle/>
-          <a:p>
-            <a:pPr marL="0" indent="0">
-              <a:buNone/>
-            </a:pPr>
-            <a:r>
-              <a:rPr lang="en-US" sz="1300" b="1" dirty="0">
-                <a:solidFill>
-                  <a:srgbClr val="20232A"/>
-                </a:solidFill>
-                <a:latin typeface="Consolas" pitchFamily="34" charset="0"/>
-                <a:ea typeface="Consolas" pitchFamily="34" charset="-122"/>
-                <a:cs typeface="Consolas" pitchFamily="34" charset="-120"/>
-              </a:rPr>
-              <a:t>definidor</a:t>
-            </a:r>
-            <a:endParaRPr lang="en-US" sz="1300" dirty="0"/>
-          </a:p>
-        </p:txBody>
-      </p:sp>
-      <p:sp>
-        <p:nvSpPr>
-          <p:cNvPr id="16" name="Text 14"/>
-          <p:cNvSpPr/>
-          <p:nvPr/>
-        </p:nvSpPr>
-        <p:spPr>
-          <a:xfrm>
-            <a:off x="3337560" y="3310128"/>
-            <a:ext cx="2423160" cy="640080"/>
-          </a:xfrm>
-          <a:prstGeom prst="rect">
-            <a:avLst/>
-          </a:prstGeom>
-          <a:noFill/>
-          <a:ln/>
-        </p:spPr>
-        <p:txBody>
-          <a:bodyPr wrap="square" lIns="0" tIns="0" rIns="0" bIns="0" rtlCol="0" anchor="ctr"/>
-          <a:lstStyle/>
-          <a:p>
-            <a:pPr marL="0" indent="0">
-              <a:buNone/>
-            </a:pPr>
-            <a:r>
-              <a:rPr lang="en-US" sz="1000" dirty="0">
-                <a:solidFill>
-                  <a:srgbClr val="20232A"/>
-                </a:solidFill>
-              </a:rPr>
-              <a:t>Função para MUDAR o valor. Quando chamada, a tela atualiza!</a:t>
-            </a:r>
-            <a:endParaRPr lang="en-US" sz="1000" dirty="0"/>
-          </a:p>
-        </p:txBody>
-      </p:sp>
-      <p:sp>
-        <p:nvSpPr>
-          <p:cNvPr id="17" name="Shape 15"/>
-          <p:cNvSpPr/>
-          <p:nvPr/>
-        </p:nvSpPr>
-        <p:spPr>
-          <a:xfrm>
-            <a:off x="6035040" y="2926080"/>
-            <a:ext cx="2606040" cy="1097280"/>
+          <p:cNvPr id="3" name="Shape 1">
+            <a:extLst>
+              <a:ext uri="{FF2B5EF4-FFF2-40B4-BE49-F238E27FC236}">
+                <a16:creationId xmlns:a16="http://schemas.microsoft.com/office/drawing/2014/main" id="{D8B37A1A-E41C-B4C1-AB44-D5B6BB8D6AE1}"/>
+              </a:ext>
+            </a:extLst>
+          </p:cNvPr>
+          <p:cNvSpPr/>
+          <p:nvPr/>
+        </p:nvSpPr>
+        <p:spPr>
+          <a:xfrm>
+            <a:off x="365760" y="109728"/>
+            <a:ext cx="1005840" cy="457200"/>
           </a:xfrm>
           <a:prstGeom prst="rect">
             <a:avLst/>
           </a:prstGeom>
           <a:solidFill>
-            <a:srgbClr val="FFF3CD"/>
+            <a:srgbClr val="CB356B"/>
           </a:solidFill>
-          <a:ln w="25400">
+          <a:ln w="12700">
             <a:solidFill>
-              <a:srgbClr val="FFC107"/>
+              <a:srgbClr val="CB356B"/>
             </a:solidFill>
             <a:prstDash val="solid"/>
           </a:ln>
@@ -6157,14 +7061,20 @@
       </p:sp>
       <p:sp>
         <p:nvSpPr>
-          <p:cNvPr id="18" name="Text 16"/>
-          <p:cNvSpPr/>
-          <p:nvPr/>
-        </p:nvSpPr>
-        <p:spPr>
-          <a:xfrm>
-            <a:off x="6126480" y="2971800"/>
-            <a:ext cx="2423160" cy="320040"/>
+          <p:cNvPr id="4" name="Text 2">
+            <a:extLst>
+              <a:ext uri="{FF2B5EF4-FFF2-40B4-BE49-F238E27FC236}">
+                <a16:creationId xmlns:a16="http://schemas.microsoft.com/office/drawing/2014/main" id="{459FE3C6-C285-9546-B2AE-041C1E578932}"/>
+              </a:ext>
+            </a:extLst>
+          </p:cNvPr>
+          <p:cNvSpPr/>
+          <p:nvPr/>
+        </p:nvSpPr>
+        <p:spPr>
+          <a:xfrm>
+            <a:off x="365760" y="109728"/>
+            <a:ext cx="1005840" cy="457200"/>
           </a:xfrm>
           <a:prstGeom prst="rect">
             <a:avLst/>
@@ -6176,34 +7086,37 @@
           <a:bodyPr wrap="square" lIns="0" tIns="0" rIns="0" bIns="0" rtlCol="0" anchor="ctr"/>
           <a:lstStyle/>
           <a:p>
-            <a:pPr marL="0" indent="0">
-              <a:buNone/>
-            </a:pPr>
-            <a:r>
-              <a:rPr lang="en-US" sz="1300" b="1" dirty="0">
-                <a:solidFill>
-                  <a:srgbClr val="20232A"/>
-                </a:solidFill>
-                <a:latin typeface="Consolas" pitchFamily="34" charset="0"/>
-                <a:ea typeface="Consolas" pitchFamily="34" charset="-122"/>
-                <a:cs typeface="Consolas" pitchFamily="34" charset="-120"/>
-              </a:rPr>
-              <a:t>valorInicial</a:t>
-            </a:r>
-            <a:endParaRPr lang="en-US" sz="1300" dirty="0"/>
-          </a:p>
-        </p:txBody>
-      </p:sp>
-      <p:sp>
-        <p:nvSpPr>
-          <p:cNvPr id="19" name="Text 17"/>
-          <p:cNvSpPr/>
-          <p:nvPr/>
-        </p:nvSpPr>
-        <p:spPr>
-          <a:xfrm>
-            <a:off x="6126480" y="3310128"/>
-            <a:ext cx="2423160" cy="640080"/>
+            <a:pPr marL="0" indent="0" algn="ctr">
+              <a:buNone/>
+            </a:pPr>
+            <a:r>
+              <a:rPr lang="en-US" sz="1100" b="1" dirty="0">
+                <a:solidFill>
+                  <a:srgbClr val="FFFFFF"/>
+                </a:solidFill>
+              </a:rPr>
+              <a:t>Lesson 08</a:t>
+            </a:r>
+            <a:endParaRPr lang="en-US" sz="1100" dirty="0"/>
+          </a:p>
+        </p:txBody>
+      </p:sp>
+      <p:sp>
+        <p:nvSpPr>
+          <p:cNvPr id="5" name="Text 3">
+            <a:extLst>
+              <a:ext uri="{FF2B5EF4-FFF2-40B4-BE49-F238E27FC236}">
+                <a16:creationId xmlns:a16="http://schemas.microsoft.com/office/drawing/2014/main" id="{C0AE3E3C-CC2F-7494-C39B-65281CFCF5E2}"/>
+              </a:ext>
+            </a:extLst>
+          </p:cNvPr>
+          <p:cNvSpPr/>
+          <p:nvPr/>
+        </p:nvSpPr>
+        <p:spPr>
+          <a:xfrm>
+            <a:off x="1508760" y="109728"/>
+            <a:ext cx="7315200" cy="457200"/>
           </a:xfrm>
           <a:prstGeom prst="rect">
             <a:avLst/>
@@ -6219,27 +7132,107 @@
               <a:buNone/>
             </a:pPr>
             <a:r>
-              <a:rPr lang="en-US" sz="1000" dirty="0">
-                <a:solidFill>
-                  <a:srgbClr val="20232A"/>
-                </a:solidFill>
-              </a:rPr>
-              <a:t>O primeiro valor. Também define o TIPO de dado (texto, número, lista...).</a:t>
-            </a:r>
-            <a:endParaRPr lang="en-US" sz="1000" dirty="0"/>
-          </a:p>
-        </p:txBody>
-      </p:sp>
-      <p:sp>
-        <p:nvSpPr>
-          <p:cNvPr id="20" name="Text 18"/>
-          <p:cNvSpPr/>
-          <p:nvPr/>
-        </p:nvSpPr>
-        <p:spPr>
-          <a:xfrm>
-            <a:off x="457200" y="4160520"/>
-            <a:ext cx="3657600" cy="320040"/>
+              <a:rPr lang="en-US" sz="1800" b="1" dirty="0" err="1">
+                <a:solidFill>
+                  <a:srgbClr val="61DAFB"/>
+                </a:solidFill>
+              </a:rPr>
+              <a:t>Exemplo</a:t>
+            </a:r>
+            <a:r>
+              <a:rPr lang="en-US" sz="1800" b="1" dirty="0">
+                <a:solidFill>
+                  <a:srgbClr val="61DAFB"/>
+                </a:solidFill>
+              </a:rPr>
+              <a:t> extra para intender </a:t>
+            </a:r>
+            <a:r>
+              <a:rPr lang="en-US" sz="1800" b="1" i="1" dirty="0" err="1">
+                <a:solidFill>
+                  <a:srgbClr val="61DAFB"/>
+                </a:solidFill>
+              </a:rPr>
+              <a:t>useState</a:t>
+            </a:r>
+            <a:r>
+              <a:rPr lang="en-US" sz="1800" b="1" i="1" dirty="0">
+                <a:solidFill>
+                  <a:srgbClr val="61DAFB"/>
+                </a:solidFill>
+              </a:rPr>
+              <a:t> - </a:t>
+            </a:r>
+            <a:r>
+              <a:rPr lang="en-US" sz="1800" b="1" i="1" dirty="0" err="1">
+                <a:solidFill>
+                  <a:srgbClr val="FF0000"/>
+                </a:solidFill>
+              </a:rPr>
+              <a:t>Opcional</a:t>
+            </a:r>
+            <a:endParaRPr lang="en-US" sz="1800" i="1" dirty="0">
+              <a:solidFill>
+                <a:srgbClr val="FF0000"/>
+              </a:solidFill>
+            </a:endParaRPr>
+          </a:p>
+        </p:txBody>
+      </p:sp>
+      <p:sp>
+        <p:nvSpPr>
+          <p:cNvPr id="6" name="Shape 4">
+            <a:extLst>
+              <a:ext uri="{FF2B5EF4-FFF2-40B4-BE49-F238E27FC236}">
+                <a16:creationId xmlns:a16="http://schemas.microsoft.com/office/drawing/2014/main" id="{9A0863A1-9C95-2A7E-4A5B-8DD5EC4BFCA5}"/>
+              </a:ext>
+            </a:extLst>
+          </p:cNvPr>
+          <p:cNvSpPr/>
+          <p:nvPr/>
+        </p:nvSpPr>
+        <p:spPr>
+          <a:xfrm>
+            <a:off x="457200" y="804672"/>
+            <a:ext cx="8229600" cy="685800"/>
+          </a:xfrm>
+          <a:prstGeom prst="rect">
+            <a:avLst/>
+          </a:prstGeom>
+          <a:solidFill>
+            <a:srgbClr val="20232A"/>
+          </a:solidFill>
+          <a:ln w="12700">
+            <a:solidFill>
+              <a:srgbClr val="20232A"/>
+            </a:solidFill>
+            <a:prstDash val="solid"/>
+          </a:ln>
+        </p:spPr>
+        <p:txBody>
+          <a:bodyPr/>
+          <a:lstStyle/>
+          <a:p>
+            <a:endParaRPr lang="pt-BR"/>
+          </a:p>
+        </p:txBody>
+      </p:sp>
+      <p:sp>
+        <p:nvSpPr>
+          <p:cNvPr id="7" name="Text 5">
+            <a:extLst>
+              <a:ext uri="{FF2B5EF4-FFF2-40B4-BE49-F238E27FC236}">
+                <a16:creationId xmlns:a16="http://schemas.microsoft.com/office/drawing/2014/main" id="{54EE86A2-FF1A-C839-2F76-288E606EC27B}"/>
+              </a:ext>
+            </a:extLst>
+          </p:cNvPr>
+          <p:cNvSpPr/>
+          <p:nvPr/>
+        </p:nvSpPr>
+        <p:spPr>
+          <a:xfrm>
+            <a:off x="548640" y="804672"/>
+            <a:ext cx="8046720" cy="685800"/>
           </a:xfrm>
           <a:prstGeom prst="rect">
             <a:avLst/>
@@ -6251,16 +7244,187 @@
           <a:bodyPr wrap="square" lIns="0" tIns="0" rIns="0" bIns="0" rtlCol="0" anchor="ctr"/>
           <a:lstStyle/>
           <a:p>
-            <a:pPr marL="0" indent="0">
-              <a:buNone/>
-            </a:pPr>
+            <a:pPr algn="ctr"/>
+            <a:r>
+              <a:rPr lang="en-US" sz="1400" b="1" dirty="0">
+                <a:solidFill>
+                  <a:srgbClr val="61DAFB"/>
+                </a:solidFill>
+              </a:rPr>
+              <a:t>Obs. </a:t>
+            </a:r>
+            <a:r>
+              <a:rPr lang="en-US" sz="1400" b="1" dirty="0" err="1">
+                <a:solidFill>
+                  <a:srgbClr val="61DAFB"/>
+                </a:solidFill>
+              </a:rPr>
+              <a:t>Após</a:t>
+            </a:r>
+            <a:r>
+              <a:rPr lang="en-US" sz="1400" b="1" dirty="0">
+                <a:solidFill>
+                  <a:srgbClr val="61DAFB"/>
+                </a:solidFill>
+              </a:rPr>
+              <a:t> </a:t>
+            </a:r>
+            <a:r>
+              <a:rPr lang="en-US" sz="1400" b="1" dirty="0" err="1">
+                <a:solidFill>
+                  <a:srgbClr val="61DAFB"/>
+                </a:solidFill>
+              </a:rPr>
+              <a:t>criar</a:t>
+            </a:r>
+            <a:r>
+              <a:rPr lang="en-US" sz="1400" b="1" dirty="0">
+                <a:solidFill>
+                  <a:srgbClr val="61DAFB"/>
+                </a:solidFill>
+              </a:rPr>
+              <a:t> o </a:t>
+            </a:r>
+            <a:r>
+              <a:rPr lang="en-US" sz="1400" b="1" dirty="0" err="1">
+                <a:solidFill>
+                  <a:srgbClr val="61DAFB"/>
+                </a:solidFill>
+              </a:rPr>
+              <a:t>componente</a:t>
+            </a:r>
+            <a:r>
+              <a:rPr lang="en-US" sz="1400" b="1" dirty="0">
+                <a:solidFill>
+                  <a:srgbClr val="61DAFB"/>
+                </a:solidFill>
+              </a:rPr>
+              <a:t> </a:t>
+            </a:r>
+            <a:r>
+              <a:rPr lang="pt-BR" sz="1400" dirty="0" err="1">
+                <a:solidFill>
+                  <a:srgbClr val="CDD6F4"/>
+                </a:solidFill>
+                <a:latin typeface="Consolas" pitchFamily="34" charset="0"/>
+              </a:rPr>
+              <a:t>TesteUseState</a:t>
+            </a:r>
+            <a:r>
+              <a:rPr lang="pt-BR" sz="1400" dirty="0">
+                <a:solidFill>
+                  <a:srgbClr val="CDD6F4"/>
+                </a:solidFill>
+                <a:latin typeface="Consolas" pitchFamily="34" charset="0"/>
+              </a:rPr>
+              <a:t> </a:t>
+            </a:r>
+            <a:r>
+              <a:rPr lang="pt-BR" sz="1400" b="1" dirty="0">
+                <a:solidFill>
+                  <a:srgbClr val="61DAFB"/>
+                </a:solidFill>
+              </a:rPr>
+              <a:t>importe no </a:t>
+            </a:r>
+            <a:r>
+              <a:rPr lang="pt-BR" sz="1400" dirty="0" err="1">
+                <a:solidFill>
+                  <a:srgbClr val="CDD6F4"/>
+                </a:solidFill>
+                <a:latin typeface="Consolas" pitchFamily="34" charset="0"/>
+              </a:rPr>
+              <a:t>Inicio.jsx</a:t>
+            </a:r>
+            <a:r>
+              <a:rPr lang="pt-BR" sz="1400" dirty="0">
+                <a:solidFill>
+                  <a:srgbClr val="CDD6F4"/>
+                </a:solidFill>
+                <a:latin typeface="Consolas" pitchFamily="34" charset="0"/>
+              </a:rPr>
+              <a:t> </a:t>
+            </a:r>
+            <a:r>
+              <a:rPr lang="pt-BR" sz="1400" b="1" dirty="0">
+                <a:solidFill>
+                  <a:srgbClr val="61DAFB"/>
+                </a:solidFill>
+              </a:rPr>
+              <a:t>e chame o componente.</a:t>
+            </a:r>
+            <a:r>
+              <a:rPr lang="en-US" sz="1400" b="1" dirty="0">
+                <a:solidFill>
+                  <a:srgbClr val="61DAFB"/>
+                </a:solidFill>
+              </a:rPr>
+              <a:t> </a:t>
+            </a:r>
+          </a:p>
+        </p:txBody>
+      </p:sp>
+      <p:sp>
+        <p:nvSpPr>
+          <p:cNvPr id="8" name="Text 6">
+            <a:extLst>
+              <a:ext uri="{FF2B5EF4-FFF2-40B4-BE49-F238E27FC236}">
+                <a16:creationId xmlns:a16="http://schemas.microsoft.com/office/drawing/2014/main" id="{1AE0563B-B592-C8C4-09D8-5C5581C7E603}"/>
+              </a:ext>
+            </a:extLst>
+          </p:cNvPr>
+          <p:cNvSpPr/>
+          <p:nvPr/>
+        </p:nvSpPr>
+        <p:spPr>
+          <a:xfrm>
+            <a:off x="457200" y="1600200"/>
+            <a:ext cx="1828800" cy="320040"/>
+          </a:xfrm>
+          <a:prstGeom prst="rect">
+            <a:avLst/>
+          </a:prstGeom>
+          <a:noFill/>
+          <a:ln/>
+        </p:spPr>
+        <p:txBody>
+          <a:bodyPr wrap="square" lIns="0" tIns="0" rIns="0" bIns="0" rtlCol="0" anchor="ctr"/>
+          <a:lstStyle/>
+          <a:p>
+            <a:pPr marL="0" indent="0">
+              <a:buNone/>
+            </a:pPr>
+            <a:r>
+              <a:rPr lang="en-US" sz="1300" b="1" dirty="0" err="1">
+                <a:solidFill>
+                  <a:srgbClr val="20232A"/>
+                </a:solidFill>
+              </a:rPr>
+              <a:t>Exemplo</a:t>
+            </a:r>
             <a:r>
               <a:rPr lang="en-US" sz="1300" b="1" dirty="0">
                 <a:solidFill>
                   <a:srgbClr val="20232A"/>
                 </a:solidFill>
               </a:rPr>
-              <a:t>Exemplo prático (dinheiro):</a:t>
+              <a:t> </a:t>
+            </a:r>
+            <a:r>
+              <a:rPr lang="en-US" sz="1300" b="1" dirty="0" err="1">
+                <a:solidFill>
+                  <a:srgbClr val="20232A"/>
+                </a:solidFill>
+              </a:rPr>
+              <a:t>opcional</a:t>
+            </a:r>
+            <a:r>
+              <a:rPr lang="en-US" sz="1300" b="1" dirty="0">
+                <a:solidFill>
+                  <a:srgbClr val="20232A"/>
+                </a:solidFill>
+              </a:rPr>
+              <a:t>:</a:t>
             </a:r>
             <a:endParaRPr lang="en-US" sz="1300" dirty="0"/>
           </a:p>
@@ -6268,14 +7432,20 @@
       </p:sp>
       <p:sp>
         <p:nvSpPr>
-          <p:cNvPr id="21" name="Shape 19"/>
-          <p:cNvSpPr/>
-          <p:nvPr/>
-        </p:nvSpPr>
-        <p:spPr>
-          <a:xfrm>
-            <a:off x="457200" y="4507992"/>
-            <a:ext cx="8229600" cy="1645920"/>
+          <p:cNvPr id="9" name="Shape 7">
+            <a:extLst>
+              <a:ext uri="{FF2B5EF4-FFF2-40B4-BE49-F238E27FC236}">
+                <a16:creationId xmlns:a16="http://schemas.microsoft.com/office/drawing/2014/main" id="{CA40BF96-7998-3CA9-0633-610CDF77E175}"/>
+              </a:ext>
+            </a:extLst>
+          </p:cNvPr>
+          <p:cNvSpPr/>
+          <p:nvPr/>
+        </p:nvSpPr>
+        <p:spPr>
+          <a:xfrm>
+            <a:off x="457200" y="1947672"/>
+            <a:ext cx="4406900" cy="2617978"/>
           </a:xfrm>
           <a:prstGeom prst="rect">
             <a:avLst/>
@@ -6300,118 +7470,10 @@
       </p:sp>
       <p:sp>
         <p:nvSpPr>
-          <p:cNvPr id="22" name="Text 20"/>
-          <p:cNvSpPr/>
-          <p:nvPr/>
-        </p:nvSpPr>
-        <p:spPr>
-          <a:xfrm>
-            <a:off x="594360" y="4599432"/>
-            <a:ext cx="7955280" cy="1463040"/>
-          </a:xfrm>
-          <a:prstGeom prst="rect">
-            <a:avLst/>
-          </a:prstGeom>
-          <a:noFill/>
-          <a:ln/>
-        </p:spPr>
-        <p:txBody>
-          <a:bodyPr wrap="square" lIns="0" tIns="0" rIns="0" bIns="0" rtlCol="0" anchor="t"/>
-          <a:lstStyle/>
-          <a:p>
-            <a:pPr marL="0" indent="0">
-              <a:buNone/>
-            </a:pPr>
-            <a:r>
-              <a:rPr lang="en-US" sz="1000" dirty="0">
-                <a:solidFill>
-                  <a:srgbClr val="CDD6F4"/>
-                </a:solidFill>
-                <a:latin typeface="Consolas" pitchFamily="34" charset="0"/>
-                <a:ea typeface="Consolas" pitchFamily="34" charset="-122"/>
-                <a:cs typeface="Consolas" pitchFamily="34" charset="-120"/>
-              </a:rPr>
-              <a:t>const [ dinheiro, definirDinheiro ] = useState(100)</a:t>
-            </a:r>
-            <a:endParaRPr lang="en-US" sz="1000" dirty="0"/>
-          </a:p>
-          <a:p>
-            <a:pPr marL="0" indent="0">
-              <a:buNone/>
-            </a:pPr>
-            <a:endParaRPr lang="en-US" sz="1000" dirty="0"/>
-          </a:p>
-          <a:p>
-            <a:pPr marL="0" indent="0">
-              <a:buNone/>
-            </a:pPr>
-            <a:r>
-              <a:rPr lang="en-US" sz="1000" dirty="0">
-                <a:solidFill>
-                  <a:srgbClr val="CDD6F4"/>
-                </a:solidFill>
-                <a:latin typeface="Consolas" pitchFamily="34" charset="0"/>
-                <a:ea typeface="Consolas" pitchFamily="34" charset="-122"/>
-                <a:cs typeface="Consolas" pitchFamily="34" charset="-120"/>
-              </a:rPr>
-              <a:t>console.log(dinheiro)   // imprime: 100</a:t>
-            </a:r>
-            <a:endParaRPr lang="en-US" sz="1000" dirty="0"/>
-          </a:p>
-          <a:p>
-            <a:pPr marL="0" indent="0">
-              <a:buNone/>
-            </a:pPr>
-            <a:endParaRPr lang="en-US" sz="1000" dirty="0"/>
-          </a:p>
-          <a:p>
-            <a:pPr marL="0" indent="0">
-              <a:buNone/>
-            </a:pPr>
-            <a:r>
-              <a:rPr lang="en-US" sz="1000" dirty="0">
-                <a:solidFill>
-                  <a:srgbClr val="CDD6F4"/>
-                </a:solidFill>
-                <a:latin typeface="Consolas" pitchFamily="34" charset="0"/>
-                <a:ea typeface="Consolas" pitchFamily="34" charset="-122"/>
-                <a:cs typeface="Consolas" pitchFamily="34" charset="-120"/>
-              </a:rPr>
-              <a:t>definirDinheiro(500)    // muda o valor!</a:t>
-            </a:r>
-            <a:endParaRPr lang="en-US" sz="1000" dirty="0"/>
-          </a:p>
-          <a:p>
-            <a:pPr marL="0" indent="0">
-              <a:buNone/>
-            </a:pPr>
-            <a:endParaRPr lang="en-US" sz="1000" dirty="0"/>
-          </a:p>
-          <a:p>
-            <a:pPr marL="0" indent="0">
-              <a:buNone/>
-            </a:pPr>
-            <a:r>
-              <a:rPr lang="en-US" sz="1000" dirty="0">
-                <a:solidFill>
-                  <a:srgbClr val="CDD6F4"/>
-                </a:solidFill>
-                <a:latin typeface="Consolas" pitchFamily="34" charset="0"/>
-                <a:ea typeface="Consolas" pitchFamily="34" charset="-122"/>
-                <a:cs typeface="Consolas" pitchFamily="34" charset="-120"/>
-              </a:rPr>
-              <a:t>console.log(dinheiro)   // imprime: 500</a:t>
-            </a:r>
-            <a:endParaRPr lang="en-US" sz="1000" dirty="0"/>
-          </a:p>
-        </p:txBody>
-      </p:sp>
-      <p:sp>
-        <p:nvSpPr>
-          <p:cNvPr id="23" name="Triângulo isósceles 22">
+          <p:cNvPr id="10" name="Text 8">
             <a:extLst>
               <a:ext uri="{FF2B5EF4-FFF2-40B4-BE49-F238E27FC236}">
-                <a16:creationId xmlns:a16="http://schemas.microsoft.com/office/drawing/2014/main" id="{0E302329-CA79-2267-481F-0D5EE88C21E9}"/>
+                <a16:creationId xmlns:a16="http://schemas.microsoft.com/office/drawing/2014/main" id="{4371DE1E-7BC8-7C5B-2856-B9B37882EFD5}"/>
               </a:ext>
             </a:extLst>
           </p:cNvPr>
@@ -6420,12 +7482,528 @@
         </p:nvSpPr>
         <p:spPr>
           <a:xfrm>
-            <a:off x="2901950" y="869950"/>
-            <a:ext cx="3270252" cy="2857500"/>
-          </a:xfrm>
-          <a:prstGeom prst="triangle">
-            <a:avLst/>
-          </a:prstGeom>
+            <a:off x="594360" y="2039112"/>
+            <a:ext cx="7955280" cy="685800"/>
+          </a:xfrm>
+          <a:prstGeom prst="rect">
+            <a:avLst/>
+          </a:prstGeom>
+          <a:noFill/>
+          <a:ln/>
+        </p:spPr>
+        <p:txBody>
+          <a:bodyPr wrap="square" lIns="0" tIns="0" rIns="0" bIns="0" rtlCol="0" anchor="t"/>
+          <a:lstStyle/>
+          <a:p>
+            <a:r>
+              <a:rPr lang="pt-BR" sz="1000" dirty="0" err="1">
+                <a:solidFill>
+                  <a:srgbClr val="CDD6F4"/>
+                </a:solidFill>
+                <a:latin typeface="Consolas" pitchFamily="34" charset="0"/>
+              </a:rPr>
+              <a:t>import</a:t>
+            </a:r>
+            <a:r>
+              <a:rPr lang="pt-BR" sz="1000" dirty="0">
+                <a:solidFill>
+                  <a:srgbClr val="CDD6F4"/>
+                </a:solidFill>
+                <a:latin typeface="Consolas" pitchFamily="34" charset="0"/>
+              </a:rPr>
+              <a:t> { </a:t>
+            </a:r>
+            <a:r>
+              <a:rPr lang="pt-BR" sz="1000" dirty="0" err="1">
+                <a:solidFill>
+                  <a:srgbClr val="CDD6F4"/>
+                </a:solidFill>
+                <a:latin typeface="Consolas" pitchFamily="34" charset="0"/>
+              </a:rPr>
+              <a:t>useState</a:t>
+            </a:r>
+            <a:r>
+              <a:rPr lang="pt-BR" sz="1000" dirty="0">
+                <a:solidFill>
+                  <a:srgbClr val="CDD6F4"/>
+                </a:solidFill>
+                <a:latin typeface="Consolas" pitchFamily="34" charset="0"/>
+              </a:rPr>
+              <a:t> } </a:t>
+            </a:r>
+            <a:r>
+              <a:rPr lang="pt-BR" sz="1000" dirty="0" err="1">
+                <a:solidFill>
+                  <a:srgbClr val="CDD6F4"/>
+                </a:solidFill>
+                <a:latin typeface="Consolas" pitchFamily="34" charset="0"/>
+              </a:rPr>
+              <a:t>from</a:t>
+            </a:r>
+            <a:r>
+              <a:rPr lang="pt-BR" sz="1000" dirty="0">
+                <a:solidFill>
+                  <a:srgbClr val="CDD6F4"/>
+                </a:solidFill>
+                <a:latin typeface="Consolas" pitchFamily="34" charset="0"/>
+              </a:rPr>
+              <a:t> "</a:t>
+            </a:r>
+            <a:r>
+              <a:rPr lang="pt-BR" sz="1000" dirty="0" err="1">
+                <a:solidFill>
+                  <a:srgbClr val="CDD6F4"/>
+                </a:solidFill>
+                <a:latin typeface="Consolas" pitchFamily="34" charset="0"/>
+              </a:rPr>
+              <a:t>react</a:t>
+            </a:r>
+            <a:r>
+              <a:rPr lang="pt-BR" sz="1000" dirty="0">
+                <a:solidFill>
+                  <a:srgbClr val="CDD6F4"/>
+                </a:solidFill>
+                <a:latin typeface="Consolas" pitchFamily="34" charset="0"/>
+              </a:rPr>
+              <a:t>";</a:t>
+            </a:r>
+          </a:p>
+          <a:p>
+            <a:br>
+              <a:rPr lang="pt-BR" sz="1000" dirty="0">
+                <a:solidFill>
+                  <a:srgbClr val="CDD6F4"/>
+                </a:solidFill>
+                <a:latin typeface="Consolas" pitchFamily="34" charset="0"/>
+              </a:rPr>
+            </a:br>
+            <a:endParaRPr lang="pt-BR" sz="1000" dirty="0">
+              <a:solidFill>
+                <a:srgbClr val="CDD6F4"/>
+              </a:solidFill>
+              <a:latin typeface="Consolas" pitchFamily="34" charset="0"/>
+            </a:endParaRPr>
+          </a:p>
+          <a:p>
+            <a:r>
+              <a:rPr lang="pt-BR" sz="1000" dirty="0" err="1">
+                <a:solidFill>
+                  <a:srgbClr val="CDD6F4"/>
+                </a:solidFill>
+                <a:latin typeface="Consolas" pitchFamily="34" charset="0"/>
+              </a:rPr>
+              <a:t>export</a:t>
+            </a:r>
+            <a:r>
+              <a:rPr lang="pt-BR" sz="1000" dirty="0">
+                <a:solidFill>
+                  <a:srgbClr val="CDD6F4"/>
+                </a:solidFill>
+                <a:latin typeface="Consolas" pitchFamily="34" charset="0"/>
+              </a:rPr>
+              <a:t> </a:t>
+            </a:r>
+            <a:r>
+              <a:rPr lang="pt-BR" sz="1000" dirty="0" err="1">
+                <a:solidFill>
+                  <a:srgbClr val="CDD6F4"/>
+                </a:solidFill>
+                <a:latin typeface="Consolas" pitchFamily="34" charset="0"/>
+              </a:rPr>
+              <a:t>function</a:t>
+            </a:r>
+            <a:r>
+              <a:rPr lang="pt-BR" sz="1000" dirty="0">
+                <a:solidFill>
+                  <a:srgbClr val="CDD6F4"/>
+                </a:solidFill>
+                <a:latin typeface="Consolas" pitchFamily="34" charset="0"/>
+              </a:rPr>
+              <a:t> </a:t>
+            </a:r>
+            <a:r>
+              <a:rPr lang="pt-BR" sz="1000" dirty="0" err="1">
+                <a:solidFill>
+                  <a:srgbClr val="CDD6F4"/>
+                </a:solidFill>
+                <a:latin typeface="Consolas" pitchFamily="34" charset="0"/>
+              </a:rPr>
+              <a:t>TesteUseState</a:t>
+            </a:r>
+            <a:r>
+              <a:rPr lang="pt-BR" sz="1000" dirty="0">
+                <a:solidFill>
+                  <a:srgbClr val="CDD6F4"/>
+                </a:solidFill>
+                <a:latin typeface="Consolas" pitchFamily="34" charset="0"/>
+              </a:rPr>
+              <a:t>() {</a:t>
+            </a:r>
+          </a:p>
+          <a:p>
+            <a:r>
+              <a:rPr lang="pt-BR" sz="1000" dirty="0">
+                <a:solidFill>
+                  <a:srgbClr val="CDD6F4"/>
+                </a:solidFill>
+                <a:latin typeface="Consolas" pitchFamily="34" charset="0"/>
+              </a:rPr>
+              <a:t>  </a:t>
+            </a:r>
+            <a:r>
+              <a:rPr lang="pt-BR" sz="1000" dirty="0" err="1">
+                <a:solidFill>
+                  <a:srgbClr val="CDD6F4"/>
+                </a:solidFill>
+                <a:latin typeface="Consolas" pitchFamily="34" charset="0"/>
+              </a:rPr>
+              <a:t>const</a:t>
+            </a:r>
+            <a:r>
+              <a:rPr lang="pt-BR" sz="1000" dirty="0">
+                <a:solidFill>
+                  <a:srgbClr val="CDD6F4"/>
+                </a:solidFill>
+                <a:latin typeface="Consolas" pitchFamily="34" charset="0"/>
+              </a:rPr>
+              <a:t> [contador, </a:t>
+            </a:r>
+            <a:r>
+              <a:rPr lang="pt-BR" sz="1000" dirty="0" err="1">
+                <a:solidFill>
+                  <a:srgbClr val="CDD6F4"/>
+                </a:solidFill>
+                <a:latin typeface="Consolas" pitchFamily="34" charset="0"/>
+              </a:rPr>
+              <a:t>setContador</a:t>
+            </a:r>
+            <a:r>
+              <a:rPr lang="pt-BR" sz="1000" dirty="0">
+                <a:solidFill>
+                  <a:srgbClr val="CDD6F4"/>
+                </a:solidFill>
+                <a:latin typeface="Consolas" pitchFamily="34" charset="0"/>
+              </a:rPr>
+              <a:t>] = </a:t>
+            </a:r>
+            <a:r>
+              <a:rPr lang="pt-BR" sz="1000" dirty="0" err="1">
+                <a:solidFill>
+                  <a:srgbClr val="CDD6F4"/>
+                </a:solidFill>
+                <a:latin typeface="Consolas" pitchFamily="34" charset="0"/>
+              </a:rPr>
+              <a:t>useState</a:t>
+            </a:r>
+            <a:r>
+              <a:rPr lang="pt-BR" sz="1000" dirty="0">
+                <a:solidFill>
+                  <a:srgbClr val="CDD6F4"/>
+                </a:solidFill>
+                <a:latin typeface="Consolas" pitchFamily="34" charset="0"/>
+              </a:rPr>
+              <a:t>(0);</a:t>
+            </a:r>
+          </a:p>
+          <a:p>
+            <a:br>
+              <a:rPr lang="pt-BR" sz="1000" dirty="0">
+                <a:solidFill>
+                  <a:srgbClr val="CDD6F4"/>
+                </a:solidFill>
+                <a:latin typeface="Consolas" pitchFamily="34" charset="0"/>
+              </a:rPr>
+            </a:br>
+            <a:endParaRPr lang="pt-BR" sz="1000" dirty="0">
+              <a:solidFill>
+                <a:srgbClr val="CDD6F4"/>
+              </a:solidFill>
+              <a:latin typeface="Consolas" pitchFamily="34" charset="0"/>
+            </a:endParaRPr>
+          </a:p>
+          <a:p>
+            <a:r>
+              <a:rPr lang="pt-BR" sz="1000" dirty="0">
+                <a:solidFill>
+                  <a:srgbClr val="CDD6F4"/>
+                </a:solidFill>
+                <a:latin typeface="Consolas" pitchFamily="34" charset="0"/>
+              </a:rPr>
+              <a:t>  </a:t>
+            </a:r>
+            <a:r>
+              <a:rPr lang="pt-BR" sz="1000" dirty="0" err="1">
+                <a:solidFill>
+                  <a:srgbClr val="CDD6F4"/>
+                </a:solidFill>
+                <a:latin typeface="Consolas" pitchFamily="34" charset="0"/>
+              </a:rPr>
+              <a:t>return</a:t>
+            </a:r>
+            <a:r>
+              <a:rPr lang="pt-BR" sz="1000" dirty="0">
+                <a:solidFill>
+                  <a:srgbClr val="CDD6F4"/>
+                </a:solidFill>
+                <a:latin typeface="Consolas" pitchFamily="34" charset="0"/>
+              </a:rPr>
+              <a:t> (</a:t>
+            </a:r>
+          </a:p>
+          <a:p>
+            <a:r>
+              <a:rPr lang="pt-BR" sz="1000" dirty="0">
+                <a:solidFill>
+                  <a:srgbClr val="CDD6F4"/>
+                </a:solidFill>
+                <a:latin typeface="Consolas" pitchFamily="34" charset="0"/>
+              </a:rPr>
+              <a:t>    &lt;</a:t>
+            </a:r>
+            <a:r>
+              <a:rPr lang="pt-BR" sz="1000" dirty="0" err="1">
+                <a:solidFill>
+                  <a:srgbClr val="CDD6F4"/>
+                </a:solidFill>
+                <a:latin typeface="Consolas" pitchFamily="34" charset="0"/>
+              </a:rPr>
+              <a:t>div</a:t>
+            </a:r>
+            <a:r>
+              <a:rPr lang="pt-BR" sz="1000" dirty="0">
+                <a:solidFill>
+                  <a:srgbClr val="CDD6F4"/>
+                </a:solidFill>
+                <a:latin typeface="Consolas" pitchFamily="34" charset="0"/>
+              </a:rPr>
+              <a:t>&gt;</a:t>
+            </a:r>
+          </a:p>
+          <a:p>
+            <a:r>
+              <a:rPr lang="pt-BR" sz="1000" dirty="0">
+                <a:solidFill>
+                  <a:srgbClr val="CDD6F4"/>
+                </a:solidFill>
+                <a:latin typeface="Consolas" pitchFamily="34" charset="0"/>
+              </a:rPr>
+              <a:t>      &lt;p&gt;Você clicou {contador} vezes&lt;/p&gt;</a:t>
+            </a:r>
+          </a:p>
+          <a:p>
+            <a:r>
+              <a:rPr lang="pt-BR" sz="1000" dirty="0">
+                <a:solidFill>
+                  <a:srgbClr val="CDD6F4"/>
+                </a:solidFill>
+                <a:latin typeface="Consolas" pitchFamily="34" charset="0"/>
+              </a:rPr>
+              <a:t>      &lt;</a:t>
+            </a:r>
+            <a:r>
+              <a:rPr lang="pt-BR" sz="1000" dirty="0" err="1">
+                <a:solidFill>
+                  <a:srgbClr val="CDD6F4"/>
+                </a:solidFill>
+                <a:latin typeface="Consolas" pitchFamily="34" charset="0"/>
+              </a:rPr>
+              <a:t>button</a:t>
+            </a:r>
+            <a:r>
+              <a:rPr lang="pt-BR" sz="1000" dirty="0">
+                <a:solidFill>
+                  <a:srgbClr val="CDD6F4"/>
+                </a:solidFill>
+                <a:latin typeface="Consolas" pitchFamily="34" charset="0"/>
+              </a:rPr>
+              <a:t> </a:t>
+            </a:r>
+            <a:r>
+              <a:rPr lang="pt-BR" sz="1000" dirty="0" err="1">
+                <a:solidFill>
+                  <a:srgbClr val="CDD6F4"/>
+                </a:solidFill>
+                <a:latin typeface="Consolas" pitchFamily="34" charset="0"/>
+              </a:rPr>
+              <a:t>onClick</a:t>
+            </a:r>
+            <a:r>
+              <a:rPr lang="pt-BR" sz="1000" dirty="0">
+                <a:solidFill>
+                  <a:srgbClr val="CDD6F4"/>
+                </a:solidFill>
+                <a:latin typeface="Consolas" pitchFamily="34" charset="0"/>
+              </a:rPr>
+              <a:t>={() =&gt; </a:t>
+            </a:r>
+            <a:r>
+              <a:rPr lang="pt-BR" sz="1000" dirty="0" err="1">
+                <a:solidFill>
+                  <a:srgbClr val="CDD6F4"/>
+                </a:solidFill>
+                <a:latin typeface="Consolas" pitchFamily="34" charset="0"/>
+              </a:rPr>
+              <a:t>setContador</a:t>
+            </a:r>
+            <a:r>
+              <a:rPr lang="pt-BR" sz="1000" dirty="0">
+                <a:solidFill>
+                  <a:srgbClr val="CDD6F4"/>
+                </a:solidFill>
+                <a:latin typeface="Consolas" pitchFamily="34" charset="0"/>
+              </a:rPr>
+              <a:t>(contador + 1)}&gt;</a:t>
+            </a:r>
+          </a:p>
+          <a:p>
+            <a:r>
+              <a:rPr lang="pt-BR" sz="1000" dirty="0">
+                <a:solidFill>
+                  <a:srgbClr val="CDD6F4"/>
+                </a:solidFill>
+                <a:latin typeface="Consolas" pitchFamily="34" charset="0"/>
+              </a:rPr>
+              <a:t>        Aumentar</a:t>
+            </a:r>
+          </a:p>
+          <a:p>
+            <a:r>
+              <a:rPr lang="pt-BR" sz="1000" dirty="0">
+                <a:solidFill>
+                  <a:srgbClr val="CDD6F4"/>
+                </a:solidFill>
+                <a:latin typeface="Consolas" pitchFamily="34" charset="0"/>
+              </a:rPr>
+              <a:t>      &lt;/</a:t>
+            </a:r>
+            <a:r>
+              <a:rPr lang="pt-BR" sz="1000" dirty="0" err="1">
+                <a:solidFill>
+                  <a:srgbClr val="CDD6F4"/>
+                </a:solidFill>
+                <a:latin typeface="Consolas" pitchFamily="34" charset="0"/>
+              </a:rPr>
+              <a:t>button</a:t>
+            </a:r>
+            <a:r>
+              <a:rPr lang="pt-BR" sz="1000" dirty="0">
+                <a:solidFill>
+                  <a:srgbClr val="CDD6F4"/>
+                </a:solidFill>
+                <a:latin typeface="Consolas" pitchFamily="34" charset="0"/>
+              </a:rPr>
+              <a:t>&gt;</a:t>
+            </a:r>
+          </a:p>
+          <a:p>
+            <a:r>
+              <a:rPr lang="pt-BR" sz="1000" dirty="0">
+                <a:solidFill>
+                  <a:srgbClr val="CDD6F4"/>
+                </a:solidFill>
+                <a:latin typeface="Consolas" pitchFamily="34" charset="0"/>
+              </a:rPr>
+              <a:t>    &lt;/</a:t>
+            </a:r>
+            <a:r>
+              <a:rPr lang="pt-BR" sz="1000" dirty="0" err="1">
+                <a:solidFill>
+                  <a:srgbClr val="CDD6F4"/>
+                </a:solidFill>
+                <a:latin typeface="Consolas" pitchFamily="34" charset="0"/>
+              </a:rPr>
+              <a:t>div</a:t>
+            </a:r>
+            <a:r>
+              <a:rPr lang="pt-BR" sz="1000" dirty="0">
+                <a:solidFill>
+                  <a:srgbClr val="CDD6F4"/>
+                </a:solidFill>
+                <a:latin typeface="Consolas" pitchFamily="34" charset="0"/>
+              </a:rPr>
+              <a:t>&gt;</a:t>
+            </a:r>
+          </a:p>
+          <a:p>
+            <a:r>
+              <a:rPr lang="pt-BR" sz="1000" dirty="0">
+                <a:solidFill>
+                  <a:srgbClr val="CDD6F4"/>
+                </a:solidFill>
+                <a:latin typeface="Consolas" pitchFamily="34" charset="0"/>
+              </a:rPr>
+              <a:t>  );</a:t>
+            </a:r>
+          </a:p>
+          <a:p>
+            <a:r>
+              <a:rPr lang="pt-BR" sz="1000" dirty="0">
+                <a:solidFill>
+                  <a:srgbClr val="CDD6F4"/>
+                </a:solidFill>
+                <a:latin typeface="Consolas" pitchFamily="34" charset="0"/>
+              </a:rPr>
+              <a:t>}</a:t>
+            </a:r>
+          </a:p>
+        </p:txBody>
+      </p:sp>
+      <p:pic>
+        <p:nvPicPr>
+          <p:cNvPr id="24" name="Imagem 23">
+            <a:extLst>
+              <a:ext uri="{FF2B5EF4-FFF2-40B4-BE49-F238E27FC236}">
+                <a16:creationId xmlns:a16="http://schemas.microsoft.com/office/drawing/2014/main" id="{09F316CB-C818-149A-C367-25D8FF6B61E7}"/>
+              </a:ext>
+            </a:extLst>
+          </p:cNvPr>
+          <p:cNvPicPr>
+            <a:picLocks noChangeAspect="1"/>
+          </p:cNvPicPr>
+          <p:nvPr/>
+        </p:nvPicPr>
+        <p:blipFill>
+          <a:blip r:embed="rId3"/>
+          <a:stretch>
+            <a:fillRect/>
+          </a:stretch>
+        </p:blipFill>
+        <p:spPr>
+          <a:xfrm>
+            <a:off x="5302696" y="1609344"/>
+            <a:ext cx="3384104" cy="2596739"/>
+          </a:xfrm>
+          <a:prstGeom prst="rect">
+            <a:avLst/>
+          </a:prstGeom>
+        </p:spPr>
+      </p:pic>
+      <p:sp>
+        <p:nvSpPr>
+          <p:cNvPr id="25" name="Retângulo 24">
+            <a:extLst>
+              <a:ext uri="{FF2B5EF4-FFF2-40B4-BE49-F238E27FC236}">
+                <a16:creationId xmlns:a16="http://schemas.microsoft.com/office/drawing/2014/main" id="{385EF3C9-FB82-1361-BD67-CBC6B1DBE9EB}"/>
+              </a:ext>
+            </a:extLst>
+          </p:cNvPr>
+          <p:cNvSpPr/>
+          <p:nvPr/>
+        </p:nvSpPr>
+        <p:spPr>
+          <a:xfrm>
+            <a:off x="5562600" y="1997710"/>
+            <a:ext cx="3032760" cy="190500"/>
+          </a:xfrm>
+          <a:prstGeom prst="rect">
+            <a:avLst/>
+          </a:prstGeom>
+          <a:noFill/>
+          <a:ln>
+            <a:solidFill>
+              <a:srgbClr val="FF0000"/>
+            </a:solidFill>
+          </a:ln>
         </p:spPr>
         <p:style>
           <a:lnRef idx="2">
@@ -6452,7 +8030,341 @@
           </a:p>
         </p:txBody>
       </p:sp>
+      <p:sp>
+        <p:nvSpPr>
+          <p:cNvPr id="26" name="Retângulo 25">
+            <a:extLst>
+              <a:ext uri="{FF2B5EF4-FFF2-40B4-BE49-F238E27FC236}">
+                <a16:creationId xmlns:a16="http://schemas.microsoft.com/office/drawing/2014/main" id="{F76AF913-2812-EF44-0B6A-FD7374FECC80}"/>
+              </a:ext>
+            </a:extLst>
+          </p:cNvPr>
+          <p:cNvSpPr/>
+          <p:nvPr/>
+        </p:nvSpPr>
+        <p:spPr>
+          <a:xfrm>
+            <a:off x="6070823" y="3359531"/>
+            <a:ext cx="1847850" cy="190500"/>
+          </a:xfrm>
+          <a:prstGeom prst="rect">
+            <a:avLst/>
+          </a:prstGeom>
+          <a:noFill/>
+          <a:ln>
+            <a:solidFill>
+              <a:srgbClr val="FF0000"/>
+            </a:solidFill>
+          </a:ln>
+        </p:spPr>
+        <p:style>
+          <a:lnRef idx="2">
+            <a:schemeClr val="accent1">
+              <a:shade val="15000"/>
+            </a:schemeClr>
+          </a:lnRef>
+          <a:fillRef idx="1">
+            <a:schemeClr val="accent1"/>
+          </a:fillRef>
+          <a:effectRef idx="0">
+            <a:schemeClr val="accent1"/>
+          </a:effectRef>
+          <a:fontRef idx="minor">
+            <a:schemeClr val="lt1"/>
+          </a:fontRef>
+        </p:style>
+        <p:txBody>
+          <a:bodyPr rtlCol="0" anchor="ctr"/>
+          <a:lstStyle/>
+          <a:p>
+            <a:pPr algn="ctr"/>
+            <a:endParaRPr lang="pt-BR"/>
+          </a:p>
+        </p:txBody>
+      </p:sp>
+      <p:cxnSp>
+        <p:nvCxnSpPr>
+          <p:cNvPr id="28" name="Conector de Seta Reta 27">
+            <a:extLst>
+              <a:ext uri="{FF2B5EF4-FFF2-40B4-BE49-F238E27FC236}">
+                <a16:creationId xmlns:a16="http://schemas.microsoft.com/office/drawing/2014/main" id="{CE97A70B-211E-724B-4E4F-50A8963C3969}"/>
+              </a:ext>
+            </a:extLst>
+          </p:cNvPr>
+          <p:cNvCxnSpPr/>
+          <p:nvPr/>
+        </p:nvCxnSpPr>
+        <p:spPr>
+          <a:xfrm>
+            <a:off x="5765800" y="1238250"/>
+            <a:ext cx="305023" cy="759460"/>
+          </a:xfrm>
+          <a:prstGeom prst="straightConnector1">
+            <a:avLst/>
+          </a:prstGeom>
+          <a:ln>
+            <a:solidFill>
+              <a:srgbClr val="FF0000"/>
+            </a:solidFill>
+            <a:tailEnd type="triangle"/>
+          </a:ln>
+        </p:spPr>
+        <p:style>
+          <a:lnRef idx="1">
+            <a:schemeClr val="accent1"/>
+          </a:lnRef>
+          <a:fillRef idx="0">
+            <a:schemeClr val="accent1"/>
+          </a:fillRef>
+          <a:effectRef idx="0">
+            <a:schemeClr val="accent1"/>
+          </a:effectRef>
+          <a:fontRef idx="minor">
+            <a:schemeClr val="tx1"/>
+          </a:fontRef>
+        </p:style>
+      </p:cxnSp>
+      <p:sp>
+        <p:nvSpPr>
+          <p:cNvPr id="29" name="Shape 7">
+            <a:extLst>
+              <a:ext uri="{FF2B5EF4-FFF2-40B4-BE49-F238E27FC236}">
+                <a16:creationId xmlns:a16="http://schemas.microsoft.com/office/drawing/2014/main" id="{9AE84324-A65E-83E1-5310-655AA75A360D}"/>
+              </a:ext>
+            </a:extLst>
+          </p:cNvPr>
+          <p:cNvSpPr/>
+          <p:nvPr/>
+        </p:nvSpPr>
+        <p:spPr>
+          <a:xfrm>
+            <a:off x="5043171" y="4319778"/>
+            <a:ext cx="3643629" cy="457200"/>
+          </a:xfrm>
+          <a:prstGeom prst="rect">
+            <a:avLst/>
+          </a:prstGeom>
+          <a:solidFill>
+            <a:srgbClr val="D4EDDA"/>
+          </a:solidFill>
+          <a:ln w="12700">
+            <a:solidFill>
+              <a:srgbClr val="C3E6CB"/>
+            </a:solidFill>
+            <a:prstDash val="solid"/>
+          </a:ln>
+        </p:spPr>
+        <p:txBody>
+          <a:bodyPr/>
+          <a:lstStyle/>
+          <a:p>
+            <a:endParaRPr lang="pt-BR"/>
+          </a:p>
+        </p:txBody>
+      </p:sp>
+      <p:sp>
+        <p:nvSpPr>
+          <p:cNvPr id="30" name="Text 8">
+            <a:extLst>
+              <a:ext uri="{FF2B5EF4-FFF2-40B4-BE49-F238E27FC236}">
+                <a16:creationId xmlns:a16="http://schemas.microsoft.com/office/drawing/2014/main" id="{B0E0D828-7847-D30F-A6B1-017B37812CBD}"/>
+              </a:ext>
+            </a:extLst>
+          </p:cNvPr>
+          <p:cNvSpPr/>
+          <p:nvPr/>
+        </p:nvSpPr>
+        <p:spPr>
+          <a:xfrm>
+            <a:off x="5134611" y="4324955"/>
+            <a:ext cx="3756241" cy="457200"/>
+          </a:xfrm>
+          <a:prstGeom prst="rect">
+            <a:avLst/>
+          </a:prstGeom>
+          <a:noFill/>
+          <a:ln/>
+        </p:spPr>
+        <p:txBody>
+          <a:bodyPr wrap="square" lIns="0" tIns="0" rIns="0" bIns="0" rtlCol="0" anchor="ctr"/>
+          <a:lstStyle/>
+          <a:p>
+            <a:r>
+              <a:rPr lang="pt-BR" sz="1400" dirty="0">
+                <a:solidFill>
+                  <a:srgbClr val="155724"/>
+                </a:solidFill>
+              </a:rPr>
+              <a:t>📢</a:t>
+            </a:r>
+            <a:r>
+              <a:rPr lang="en-US" sz="1200" dirty="0" err="1">
+                <a:solidFill>
+                  <a:srgbClr val="155724"/>
+                </a:solidFill>
+              </a:rPr>
+              <a:t>Após</a:t>
+            </a:r>
+            <a:r>
+              <a:rPr lang="en-US" sz="1200" dirty="0">
+                <a:solidFill>
+                  <a:srgbClr val="155724"/>
+                </a:solidFill>
+              </a:rPr>
+              <a:t> </a:t>
+            </a:r>
+            <a:r>
+              <a:rPr lang="en-US" sz="1200" dirty="0" err="1">
+                <a:solidFill>
+                  <a:srgbClr val="155724"/>
+                </a:solidFill>
+              </a:rPr>
+              <a:t>testar</a:t>
+            </a:r>
+            <a:r>
+              <a:rPr lang="en-US" sz="1200" dirty="0">
+                <a:solidFill>
+                  <a:srgbClr val="155724"/>
+                </a:solidFill>
+              </a:rPr>
+              <a:t> </a:t>
+            </a:r>
+            <a:r>
+              <a:rPr lang="en-US" sz="1200" dirty="0" err="1">
+                <a:solidFill>
+                  <a:srgbClr val="155724"/>
+                </a:solidFill>
+              </a:rPr>
+              <a:t>pode</a:t>
+            </a:r>
+            <a:r>
+              <a:rPr lang="en-US" sz="1200" dirty="0">
+                <a:solidFill>
+                  <a:srgbClr val="155724"/>
+                </a:solidFill>
+              </a:rPr>
+              <a:t> </a:t>
+            </a:r>
+            <a:r>
+              <a:rPr lang="en-US" sz="1200" dirty="0" err="1">
+                <a:solidFill>
+                  <a:srgbClr val="155724"/>
+                </a:solidFill>
+              </a:rPr>
+              <a:t>voltar</a:t>
+            </a:r>
+            <a:r>
+              <a:rPr lang="en-US" sz="1200" dirty="0">
+                <a:solidFill>
+                  <a:srgbClr val="155724"/>
+                </a:solidFill>
+              </a:rPr>
+              <a:t> o </a:t>
+            </a:r>
+            <a:r>
+              <a:rPr lang="en-US" sz="1200" dirty="0" err="1">
+                <a:solidFill>
+                  <a:srgbClr val="155724"/>
+                </a:solidFill>
+              </a:rPr>
+              <a:t>Inicio.jsx</a:t>
+            </a:r>
+            <a:r>
+              <a:rPr lang="en-US" sz="1200" dirty="0">
+                <a:solidFill>
+                  <a:srgbClr val="155724"/>
+                </a:solidFill>
+              </a:rPr>
+              <a:t> </a:t>
+            </a:r>
+            <a:r>
+              <a:rPr lang="en-US" sz="1200" dirty="0" err="1">
+                <a:solidFill>
+                  <a:srgbClr val="155724"/>
+                </a:solidFill>
+              </a:rPr>
+              <a:t>como</a:t>
+            </a:r>
+            <a:r>
+              <a:rPr lang="en-US" sz="1200" dirty="0">
+                <a:solidFill>
+                  <a:srgbClr val="155724"/>
+                </a:solidFill>
+              </a:rPr>
+              <a:t> </a:t>
+            </a:r>
+            <a:r>
+              <a:rPr lang="en-US" sz="1200" dirty="0" err="1">
+                <a:solidFill>
+                  <a:srgbClr val="155724"/>
+                </a:solidFill>
+              </a:rPr>
+              <a:t>estava</a:t>
+            </a:r>
+            <a:r>
+              <a:rPr lang="en-US" sz="1200" dirty="0">
+                <a:solidFill>
+                  <a:srgbClr val="155724"/>
+                </a:solidFill>
+              </a:rPr>
+              <a:t>.</a:t>
+            </a:r>
+            <a:endParaRPr lang="en-US" sz="1200" dirty="0"/>
+          </a:p>
+        </p:txBody>
+      </p:sp>
+      <p:sp>
+        <p:nvSpPr>
+          <p:cNvPr id="31" name="Triângulo isósceles 30">
+            <a:extLst>
+              <a:ext uri="{FF2B5EF4-FFF2-40B4-BE49-F238E27FC236}">
+                <a16:creationId xmlns:a16="http://schemas.microsoft.com/office/drawing/2014/main" id="{4F37F253-7706-5B8D-D449-5FEF63BAE2DD}"/>
+              </a:ext>
+            </a:extLst>
+          </p:cNvPr>
+          <p:cNvSpPr/>
+          <p:nvPr/>
+        </p:nvSpPr>
+        <p:spPr>
+          <a:xfrm>
+            <a:off x="3746500" y="2089150"/>
+            <a:ext cx="1510476" cy="1695450"/>
+          </a:xfrm>
+          <a:prstGeom prst="triangle">
+            <a:avLst/>
+          </a:prstGeom>
+        </p:spPr>
+        <p:style>
+          <a:lnRef idx="2">
+            <a:schemeClr val="accent1">
+              <a:shade val="15000"/>
+            </a:schemeClr>
+          </a:lnRef>
+          <a:fillRef idx="1">
+            <a:schemeClr val="accent1"/>
+          </a:fillRef>
+          <a:effectRef idx="0">
+            <a:schemeClr val="accent1"/>
+          </a:effectRef>
+          <a:fontRef idx="minor">
+            <a:schemeClr val="lt1"/>
+          </a:fontRef>
+        </p:style>
+        <p:txBody>
+          <a:bodyPr rtlCol="0" anchor="ctr"/>
+          <a:lstStyle/>
+          <a:p>
+            <a:pPr algn="ctr"/>
+            <a:endParaRPr lang="pt-BR"/>
+          </a:p>
+        </p:txBody>
+      </p:sp>
     </p:spTree>
+    <p:extLst>
+      <p:ext uri="{BB962C8B-B14F-4D97-AF65-F5344CB8AC3E}">
+        <p14:creationId xmlns:p14="http://schemas.microsoft.com/office/powerpoint/2010/main" val="3975506279"/>
+      </p:ext>
+    </p:extLst>
   </p:cSld>
   <p:clrMapOvr>
     <a:masterClrMapping/>
@@ -6460,7 +8372,7 @@
 </p:sld>
 </file>
 
-<file path=ppt/slides/slide13.xml><?xml version="1.0" encoding="utf-8"?>
+<file path=ppt/slides/slide14.xml><?xml version="1.0" encoding="utf-8"?>
 <p:sld xmlns:a="http://schemas.openxmlformats.org/drawingml/2006/main" xmlns:r="http://schemas.openxmlformats.org/officeDocument/2006/relationships" xmlns:p="http://schemas.openxmlformats.org/presentationml/2006/main">
   <p:cSld name="Slide 11">
     <p:bg>
@@ -7604,7 +9516,7 @@
 </p:sld>
 </file>
 
-<file path=ppt/slides/slide14.xml><?xml version="1.0" encoding="utf-8"?>
+<file path=ppt/slides/slide15.xml><?xml version="1.0" encoding="utf-8"?>
 <p:sld xmlns:a="http://schemas.openxmlformats.org/drawingml/2006/main" xmlns:r="http://schemas.openxmlformats.org/officeDocument/2006/relationships" xmlns:p="http://schemas.openxmlformats.org/presentationml/2006/main">
   <p:cSld name="Slide 12">
     <p:bg>
@@ -9002,7 +10914,7 @@
 </p:sld>
 </file>
 
-<file path=ppt/slides/slide15.xml><?xml version="1.0" encoding="utf-8"?>
+<file path=ppt/slides/slide16.xml><?xml version="1.0" encoding="utf-8"?>
 <p:sld xmlns:a="http://schemas.openxmlformats.org/drawingml/2006/main" xmlns:r="http://schemas.openxmlformats.org/officeDocument/2006/relationships" xmlns:p="http://schemas.openxmlformats.org/presentationml/2006/main">
   <p:cSld name="Slide 13">
     <p:bg>
@@ -10193,7 +12105,7 @@
 </p:sld>
 </file>
 
-<file path=ppt/slides/slide16.xml><?xml version="1.0" encoding="utf-8"?>
+<file path=ppt/slides/slide17.xml><?xml version="1.0" encoding="utf-8"?>
 <p:sld xmlns:a="http://schemas.openxmlformats.org/drawingml/2006/main" xmlns:r="http://schemas.openxmlformats.org/officeDocument/2006/relationships" xmlns:p="http://schemas.openxmlformats.org/presentationml/2006/main">
   <p:cSld name="Slide 14">
     <p:bg>
@@ -11449,7 +13361,7 @@
 </p:sld>
 </file>
 
-<file path=ppt/slides/slide17.xml><?xml version="1.0" encoding="utf-8"?>
+<file path=ppt/slides/slide18.xml><?xml version="1.0" encoding="utf-8"?>
 <p:sld xmlns:a="http://schemas.openxmlformats.org/drawingml/2006/main" xmlns:r="http://schemas.openxmlformats.org/officeDocument/2006/relationships" xmlns:p="http://schemas.openxmlformats.org/presentationml/2006/main">
   <p:cSld name="Slide 15">
     <p:bg>
@@ -12566,7 +14478,7 @@
 </p:sld>
 </file>
 
-<file path=ppt/slides/slide18.xml><?xml version="1.0" encoding="utf-8"?>
+<file path=ppt/slides/slide19.xml><?xml version="1.0" encoding="utf-8"?>
 <p:sld xmlns:a="http://schemas.openxmlformats.org/drawingml/2006/main" xmlns:r="http://schemas.openxmlformats.org/officeDocument/2006/relationships" xmlns:p="http://schemas.openxmlformats.org/presentationml/2006/main">
   <p:cSld name="Slide 16">
     <p:bg>
@@ -13866,863 +15778,6 @@
               <a:t>🎉  Parabéns! Você construiu uma Todo List completa com React!</a:t>
             </a:r>
             <a:endParaRPr lang="en-US" sz="1600" dirty="0"/>
-          </a:p>
-        </p:txBody>
-      </p:sp>
-    </p:spTree>
-  </p:cSld>
-  <p:clrMapOvr>
-    <a:masterClrMapping/>
-  </p:clrMapOvr>
-</p:sld>
-</file>
-
-<file path=ppt/slides/slide19.xml><?xml version="1.0" encoding="utf-8"?>
-<p:sld xmlns:a="http://schemas.openxmlformats.org/drawingml/2006/main" xmlns:r="http://schemas.openxmlformats.org/officeDocument/2006/relationships" xmlns:p="http://schemas.openxmlformats.org/presentationml/2006/main">
-  <p:cSld name="Slide 17">
-    <p:bg>
-      <p:bgPr>
-        <a:solidFill>
-          <a:srgbClr val="F5F7FA"/>
-        </a:solidFill>
-        <a:effectLst/>
-      </p:bgPr>
-    </p:bg>
-    <p:spTree>
-      <p:nvGrpSpPr>
-        <p:cNvPr id="1" name=""/>
-        <p:cNvGrpSpPr/>
-        <p:nvPr/>
-      </p:nvGrpSpPr>
-      <p:grpSpPr>
-        <a:xfrm>
-          <a:off x="0" y="0"/>
-          <a:ext cx="0" cy="0"/>
-          <a:chOff x="0" y="0"/>
-          <a:chExt cx="0" cy="0"/>
-        </a:xfrm>
-      </p:grpSpPr>
-      <p:sp>
-        <p:nvSpPr>
-          <p:cNvPr id="2" name="Shape 0"/>
-          <p:cNvSpPr/>
-          <p:nvPr/>
-        </p:nvSpPr>
-        <p:spPr>
-          <a:xfrm>
-            <a:off x="0" y="0"/>
-            <a:ext cx="9144000" cy="685800"/>
-          </a:xfrm>
-          <a:prstGeom prst="rect">
-            <a:avLst/>
-          </a:prstGeom>
-          <a:solidFill>
-            <a:srgbClr val="20232A"/>
-          </a:solidFill>
-          <a:ln w="12700">
-            <a:solidFill>
-              <a:srgbClr val="20232A"/>
-            </a:solidFill>
-            <a:prstDash val="solid"/>
-          </a:ln>
-        </p:spPr>
-        <p:txBody>
-          <a:bodyPr/>
-          <a:lstStyle/>
-          <a:p>
-            <a:endParaRPr lang="pt-BR"/>
-          </a:p>
-        </p:txBody>
-      </p:sp>
-      <p:sp>
-        <p:nvSpPr>
-          <p:cNvPr id="3" name="Text 1"/>
-          <p:cNvSpPr/>
-          <p:nvPr/>
-        </p:nvSpPr>
-        <p:spPr>
-          <a:xfrm>
-            <a:off x="365760" y="109728"/>
-            <a:ext cx="8412480" cy="457200"/>
-          </a:xfrm>
-          <a:prstGeom prst="rect">
-            <a:avLst/>
-          </a:prstGeom>
-          <a:noFill/>
-          <a:ln/>
-        </p:spPr>
-        <p:txBody>
-          <a:bodyPr wrap="square" lIns="0" tIns="0" rIns="0" bIns="0" rtlCol="0" anchor="ctr"/>
-          <a:lstStyle/>
-          <a:p>
-            <a:pPr marL="0" indent="0">
-              <a:buNone/>
-            </a:pPr>
-            <a:r>
-              <a:rPr lang="en-US" sz="1800" b="1" dirty="0">
-                <a:solidFill>
-                  <a:srgbClr val="61DAFB"/>
-                </a:solidFill>
-              </a:rPr>
-              <a:t>Desafios Para Praticar 🚀</a:t>
-            </a:r>
-            <a:endParaRPr lang="en-US" sz="1800" dirty="0"/>
-          </a:p>
-        </p:txBody>
-      </p:sp>
-      <p:sp>
-        <p:nvSpPr>
-          <p:cNvPr id="4" name="Text 2"/>
-          <p:cNvSpPr/>
-          <p:nvPr/>
-        </p:nvSpPr>
-        <p:spPr>
-          <a:xfrm>
-            <a:off x="457200" y="804672"/>
-            <a:ext cx="8229600" cy="411480"/>
-          </a:xfrm>
-          <a:prstGeom prst="rect">
-            <a:avLst/>
-          </a:prstGeom>
-          <a:noFill/>
-          <a:ln/>
-        </p:spPr>
-        <p:txBody>
-          <a:bodyPr wrap="square" lIns="0" tIns="0" rIns="0" bIns="0" rtlCol="0" anchor="ctr"/>
-          <a:lstStyle/>
-          <a:p>
-            <a:pPr marL="0" indent="0">
-              <a:buNone/>
-            </a:pPr>
-            <a:r>
-              <a:rPr lang="en-US" sz="1500" dirty="0">
-                <a:solidFill>
-                  <a:srgbClr val="20232A"/>
-                </a:solidFill>
-              </a:rPr>
-              <a:t>Quer ir além? Tente esses desafios!</a:t>
-            </a:r>
-            <a:endParaRPr lang="en-US" sz="1500" dirty="0"/>
-          </a:p>
-        </p:txBody>
-      </p:sp>
-      <p:sp>
-        <p:nvSpPr>
-          <p:cNvPr id="5" name="Shape 3"/>
-          <p:cNvSpPr/>
-          <p:nvPr/>
-        </p:nvSpPr>
-        <p:spPr>
-          <a:xfrm>
-            <a:off x="457200" y="1325880"/>
-            <a:ext cx="8229600" cy="777240"/>
-          </a:xfrm>
-          <a:prstGeom prst="rect">
-            <a:avLst/>
-          </a:prstGeom>
-          <a:solidFill>
-            <a:srgbClr val="FFFFFF"/>
-          </a:solidFill>
-          <a:ln w="12700">
-            <a:solidFill>
-              <a:srgbClr val="E0E8F0"/>
-            </a:solidFill>
-            <a:prstDash val="solid"/>
-          </a:ln>
-        </p:spPr>
-        <p:txBody>
-          <a:bodyPr/>
-          <a:lstStyle/>
-          <a:p>
-            <a:endParaRPr lang="pt-BR"/>
-          </a:p>
-        </p:txBody>
-      </p:sp>
-      <p:sp>
-        <p:nvSpPr>
-          <p:cNvPr id="6" name="Shape 4"/>
-          <p:cNvSpPr/>
-          <p:nvPr/>
-        </p:nvSpPr>
-        <p:spPr>
-          <a:xfrm>
-            <a:off x="457200" y="1325880"/>
-            <a:ext cx="64008" cy="777240"/>
-          </a:xfrm>
-          <a:prstGeom prst="rect">
-            <a:avLst/>
-          </a:prstGeom>
-          <a:solidFill>
-            <a:srgbClr val="CB356B"/>
-          </a:solidFill>
-          <a:ln w="12700">
-            <a:solidFill>
-              <a:srgbClr val="CB356B"/>
-            </a:solidFill>
-            <a:prstDash val="solid"/>
-          </a:ln>
-        </p:spPr>
-        <p:txBody>
-          <a:bodyPr/>
-          <a:lstStyle/>
-          <a:p>
-            <a:endParaRPr lang="pt-BR"/>
-          </a:p>
-        </p:txBody>
-      </p:sp>
-      <p:sp>
-        <p:nvSpPr>
-          <p:cNvPr id="7" name="Text 5"/>
-          <p:cNvSpPr/>
-          <p:nvPr/>
-        </p:nvSpPr>
-        <p:spPr>
-          <a:xfrm>
-            <a:off x="640080" y="1371600"/>
-            <a:ext cx="1371600" cy="274320"/>
-          </a:xfrm>
-          <a:prstGeom prst="rect">
-            <a:avLst/>
-          </a:prstGeom>
-          <a:noFill/>
-          <a:ln/>
-        </p:spPr>
-        <p:txBody>
-          <a:bodyPr wrap="square" lIns="0" tIns="0" rIns="0" bIns="0" rtlCol="0" anchor="ctr"/>
-          <a:lstStyle/>
-          <a:p>
-            <a:pPr marL="0" indent="0">
-              <a:buNone/>
-            </a:pPr>
-            <a:r>
-              <a:rPr lang="en-US" sz="1000" b="1" dirty="0">
-                <a:solidFill>
-                  <a:srgbClr val="555F6E"/>
-                </a:solidFill>
-              </a:rPr>
-              <a:t>⭐ Fácil</a:t>
-            </a:r>
-            <a:endParaRPr lang="en-US" sz="1000" dirty="0"/>
-          </a:p>
-        </p:txBody>
-      </p:sp>
-      <p:sp>
-        <p:nvSpPr>
-          <p:cNvPr id="8" name="Text 6"/>
-          <p:cNvSpPr/>
-          <p:nvPr/>
-        </p:nvSpPr>
-        <p:spPr>
-          <a:xfrm>
-            <a:off x="2011680" y="1353312"/>
-            <a:ext cx="6400800" cy="292608"/>
-          </a:xfrm>
-          <a:prstGeom prst="rect">
-            <a:avLst/>
-          </a:prstGeom>
-          <a:noFill/>
-          <a:ln/>
-        </p:spPr>
-        <p:txBody>
-          <a:bodyPr wrap="square" lIns="0" tIns="0" rIns="0" bIns="0" rtlCol="0" anchor="ctr"/>
-          <a:lstStyle/>
-          <a:p>
-            <a:pPr marL="0" indent="0">
-              <a:buNone/>
-            </a:pPr>
-            <a:r>
-              <a:rPr lang="en-US" sz="1300" b="1" dirty="0">
-                <a:solidFill>
-                  <a:srgbClr val="20232A"/>
-                </a:solidFill>
-              </a:rPr>
-              <a:t>Mudar as cores do degradê</a:t>
-            </a:r>
-            <a:endParaRPr lang="en-US" sz="1300" dirty="0"/>
-          </a:p>
-        </p:txBody>
-      </p:sp>
-      <p:sp>
-        <p:nvSpPr>
-          <p:cNvPr id="9" name="Text 7"/>
-          <p:cNvSpPr/>
-          <p:nvPr/>
-        </p:nvSpPr>
-        <p:spPr>
-          <a:xfrm>
-            <a:off x="640080" y="1664208"/>
-            <a:ext cx="7955280" cy="347472"/>
-          </a:xfrm>
-          <a:prstGeom prst="rect">
-            <a:avLst/>
-          </a:prstGeom>
-          <a:noFill/>
-          <a:ln/>
-        </p:spPr>
-        <p:txBody>
-          <a:bodyPr wrap="square" lIns="0" tIns="0" rIns="0" bIns="0" rtlCol="0" anchor="ctr"/>
-          <a:lstStyle/>
-          <a:p>
-            <a:pPr marL="0" indent="0">
-              <a:buNone/>
-            </a:pPr>
-            <a:r>
-              <a:rPr lang="en-US" sz="1000" dirty="0">
-                <a:solidFill>
-                  <a:srgbClr val="555F6E"/>
-                </a:solidFill>
-              </a:rPr>
-              <a:t>Experimente novas cores no linear-gradient() do componente Título</a:t>
-            </a:r>
-            <a:endParaRPr lang="en-US" sz="1000" dirty="0"/>
-          </a:p>
-        </p:txBody>
-      </p:sp>
-      <p:sp>
-        <p:nvSpPr>
-          <p:cNvPr id="10" name="Shape 8"/>
-          <p:cNvSpPr/>
-          <p:nvPr/>
-        </p:nvSpPr>
-        <p:spPr>
-          <a:xfrm>
-            <a:off x="457200" y="2240280"/>
-            <a:ext cx="8229600" cy="777240"/>
-          </a:xfrm>
-          <a:prstGeom prst="rect">
-            <a:avLst/>
-          </a:prstGeom>
-          <a:solidFill>
-            <a:srgbClr val="FFFFFF"/>
-          </a:solidFill>
-          <a:ln w="12700">
-            <a:solidFill>
-              <a:srgbClr val="E0E8F0"/>
-            </a:solidFill>
-            <a:prstDash val="solid"/>
-          </a:ln>
-        </p:spPr>
-        <p:txBody>
-          <a:bodyPr/>
-          <a:lstStyle/>
-          <a:p>
-            <a:endParaRPr lang="pt-BR"/>
-          </a:p>
-        </p:txBody>
-      </p:sp>
-      <p:sp>
-        <p:nvSpPr>
-          <p:cNvPr id="11" name="Shape 9"/>
-          <p:cNvSpPr/>
-          <p:nvPr/>
-        </p:nvSpPr>
-        <p:spPr>
-          <a:xfrm>
-            <a:off x="457200" y="2240280"/>
-            <a:ext cx="64008" cy="777240"/>
-          </a:xfrm>
-          <a:prstGeom prst="rect">
-            <a:avLst/>
-          </a:prstGeom>
-          <a:solidFill>
-            <a:srgbClr val="CB356B"/>
-          </a:solidFill>
-          <a:ln w="12700">
-            <a:solidFill>
-              <a:srgbClr val="CB356B"/>
-            </a:solidFill>
-            <a:prstDash val="solid"/>
-          </a:ln>
-        </p:spPr>
-        <p:txBody>
-          <a:bodyPr/>
-          <a:lstStyle/>
-          <a:p>
-            <a:endParaRPr lang="pt-BR"/>
-          </a:p>
-        </p:txBody>
-      </p:sp>
-      <p:sp>
-        <p:nvSpPr>
-          <p:cNvPr id="12" name="Text 10"/>
-          <p:cNvSpPr/>
-          <p:nvPr/>
-        </p:nvSpPr>
-        <p:spPr>
-          <a:xfrm>
-            <a:off x="640080" y="2286000"/>
-            <a:ext cx="1371600" cy="274320"/>
-          </a:xfrm>
-          <a:prstGeom prst="rect">
-            <a:avLst/>
-          </a:prstGeom>
-          <a:noFill/>
-          <a:ln/>
-        </p:spPr>
-        <p:txBody>
-          <a:bodyPr wrap="square" lIns="0" tIns="0" rIns="0" bIns="0" rtlCol="0" anchor="ctr"/>
-          <a:lstStyle/>
-          <a:p>
-            <a:pPr marL="0" indent="0">
-              <a:buNone/>
-            </a:pPr>
-            <a:r>
-              <a:rPr lang="en-US" sz="1000" b="1" dirty="0">
-                <a:solidFill>
-                  <a:srgbClr val="555F6E"/>
-                </a:solidFill>
-              </a:rPr>
-              <a:t>⭐⭐ Médio</a:t>
-            </a:r>
-            <a:endParaRPr lang="en-US" sz="1000" dirty="0"/>
-          </a:p>
-        </p:txBody>
-      </p:sp>
-      <p:sp>
-        <p:nvSpPr>
-          <p:cNvPr id="13" name="Text 11"/>
-          <p:cNvSpPr/>
-          <p:nvPr/>
-        </p:nvSpPr>
-        <p:spPr>
-          <a:xfrm>
-            <a:off x="2011680" y="2267712"/>
-            <a:ext cx="6400800" cy="292608"/>
-          </a:xfrm>
-          <a:prstGeom prst="rect">
-            <a:avLst/>
-          </a:prstGeom>
-          <a:noFill/>
-          <a:ln/>
-        </p:spPr>
-        <p:txBody>
-          <a:bodyPr wrap="square" lIns="0" tIns="0" rIns="0" bIns="0" rtlCol="0" anchor="ctr"/>
-          <a:lstStyle/>
-          <a:p>
-            <a:pPr marL="0" indent="0">
-              <a:buNone/>
-            </a:pPr>
-            <a:r>
-              <a:rPr lang="en-US" sz="1300" b="1" dirty="0">
-                <a:solidFill>
-                  <a:srgbClr val="20232A"/>
-                </a:solidFill>
-              </a:rPr>
-              <a:t>Limpar o input após adicionar</a:t>
-            </a:r>
-            <a:endParaRPr lang="en-US" sz="1300" dirty="0"/>
-          </a:p>
-        </p:txBody>
-      </p:sp>
-      <p:sp>
-        <p:nvSpPr>
-          <p:cNvPr id="14" name="Text 12"/>
-          <p:cNvSpPr/>
-          <p:nvPr/>
-        </p:nvSpPr>
-        <p:spPr>
-          <a:xfrm>
-            <a:off x="640080" y="2578608"/>
-            <a:ext cx="7955280" cy="347472"/>
-          </a:xfrm>
-          <a:prstGeom prst="rect">
-            <a:avLst/>
-          </a:prstGeom>
-          <a:noFill/>
-          <a:ln/>
-        </p:spPr>
-        <p:txBody>
-          <a:bodyPr wrap="square" lIns="0" tIns="0" rIns="0" bIns="0" rtlCol="0" anchor="ctr"/>
-          <a:lstStyle/>
-          <a:p>
-            <a:pPr marL="0" indent="0">
-              <a:buNone/>
-            </a:pPr>
-            <a:r>
-              <a:rPr lang="en-US" sz="1000" dirty="0">
-                <a:solidFill>
-                  <a:srgbClr val="555F6E"/>
-                </a:solidFill>
-              </a:rPr>
-              <a:t>Após adicionar, limpe o campo: evento.target.conteudo.value = ''</a:t>
-            </a:r>
-            <a:endParaRPr lang="en-US" sz="1000" dirty="0"/>
-          </a:p>
-        </p:txBody>
-      </p:sp>
-      <p:sp>
-        <p:nvSpPr>
-          <p:cNvPr id="15" name="Shape 13"/>
-          <p:cNvSpPr/>
-          <p:nvPr/>
-        </p:nvSpPr>
-        <p:spPr>
-          <a:xfrm>
-            <a:off x="457200" y="3154680"/>
-            <a:ext cx="8229600" cy="777240"/>
-          </a:xfrm>
-          <a:prstGeom prst="rect">
-            <a:avLst/>
-          </a:prstGeom>
-          <a:solidFill>
-            <a:srgbClr val="FFFFFF"/>
-          </a:solidFill>
-          <a:ln w="12700">
-            <a:solidFill>
-              <a:srgbClr val="E0E8F0"/>
-            </a:solidFill>
-            <a:prstDash val="solid"/>
-          </a:ln>
-        </p:spPr>
-        <p:txBody>
-          <a:bodyPr/>
-          <a:lstStyle/>
-          <a:p>
-            <a:endParaRPr lang="pt-BR"/>
-          </a:p>
-        </p:txBody>
-      </p:sp>
-      <p:sp>
-        <p:nvSpPr>
-          <p:cNvPr id="16" name="Shape 14"/>
-          <p:cNvSpPr/>
-          <p:nvPr/>
-        </p:nvSpPr>
-        <p:spPr>
-          <a:xfrm>
-            <a:off x="457200" y="3154680"/>
-            <a:ext cx="64008" cy="777240"/>
-          </a:xfrm>
-          <a:prstGeom prst="rect">
-            <a:avLst/>
-          </a:prstGeom>
-          <a:solidFill>
-            <a:srgbClr val="CB356B"/>
-          </a:solidFill>
-          <a:ln w="12700">
-            <a:solidFill>
-              <a:srgbClr val="CB356B"/>
-            </a:solidFill>
-            <a:prstDash val="solid"/>
-          </a:ln>
-        </p:spPr>
-        <p:txBody>
-          <a:bodyPr/>
-          <a:lstStyle/>
-          <a:p>
-            <a:endParaRPr lang="pt-BR"/>
-          </a:p>
-        </p:txBody>
-      </p:sp>
-      <p:sp>
-        <p:nvSpPr>
-          <p:cNvPr id="17" name="Text 15"/>
-          <p:cNvSpPr/>
-          <p:nvPr/>
-        </p:nvSpPr>
-        <p:spPr>
-          <a:xfrm>
-            <a:off x="640080" y="3200400"/>
-            <a:ext cx="1371600" cy="274320"/>
-          </a:xfrm>
-          <a:prstGeom prst="rect">
-            <a:avLst/>
-          </a:prstGeom>
-          <a:noFill/>
-          <a:ln/>
-        </p:spPr>
-        <p:txBody>
-          <a:bodyPr wrap="square" lIns="0" tIns="0" rIns="0" bIns="0" rtlCol="0" anchor="ctr"/>
-          <a:lstStyle/>
-          <a:p>
-            <a:pPr marL="0" indent="0">
-              <a:buNone/>
-            </a:pPr>
-            <a:r>
-              <a:rPr lang="en-US" sz="1000" b="1" dirty="0">
-                <a:solidFill>
-                  <a:srgbClr val="555F6E"/>
-                </a:solidFill>
-              </a:rPr>
-              <a:t>⭐⭐ Médio</a:t>
-            </a:r>
-            <a:endParaRPr lang="en-US" sz="1000" dirty="0"/>
-          </a:p>
-        </p:txBody>
-      </p:sp>
-      <p:sp>
-        <p:nvSpPr>
-          <p:cNvPr id="18" name="Text 16"/>
-          <p:cNvSpPr/>
-          <p:nvPr/>
-        </p:nvSpPr>
-        <p:spPr>
-          <a:xfrm>
-            <a:off x="2011680" y="3182112"/>
-            <a:ext cx="6400800" cy="292608"/>
-          </a:xfrm>
-          <a:prstGeom prst="rect">
-            <a:avLst/>
-          </a:prstGeom>
-          <a:noFill/>
-          <a:ln/>
-        </p:spPr>
-        <p:txBody>
-          <a:bodyPr wrap="square" lIns="0" tIns="0" rIns="0" bIns="0" rtlCol="0" anchor="ctr"/>
-          <a:lstStyle/>
-          <a:p>
-            <a:pPr marL="0" indent="0">
-              <a:buNone/>
-            </a:pPr>
-            <a:r>
-              <a:rPr lang="en-US" sz="1300" b="1" dirty="0">
-                <a:solidFill>
-                  <a:srgbClr val="20232A"/>
-                </a:solidFill>
-              </a:rPr>
-              <a:t>Contador de tarefas</a:t>
-            </a:r>
-            <a:endParaRPr lang="en-US" sz="1300" dirty="0"/>
-          </a:p>
-        </p:txBody>
-      </p:sp>
-      <p:sp>
-        <p:nvSpPr>
-          <p:cNvPr id="19" name="Text 17"/>
-          <p:cNvSpPr/>
-          <p:nvPr/>
-        </p:nvSpPr>
-        <p:spPr>
-          <a:xfrm>
-            <a:off x="640080" y="3493008"/>
-            <a:ext cx="7955280" cy="347472"/>
-          </a:xfrm>
-          <a:prstGeom prst="rect">
-            <a:avLst/>
-          </a:prstGeom>
-          <a:noFill/>
-          <a:ln/>
-        </p:spPr>
-        <p:txBody>
-          <a:bodyPr wrap="square" lIns="0" tIns="0" rIns="0" bIns="0" rtlCol="0" anchor="ctr"/>
-          <a:lstStyle/>
-          <a:p>
-            <a:pPr marL="0" indent="0">
-              <a:buNone/>
-            </a:pPr>
-            <a:r>
-              <a:rPr lang="en-US" sz="1000" dirty="0">
-                <a:solidFill>
-                  <a:srgbClr val="555F6E"/>
-                </a:solidFill>
-              </a:rPr>
-              <a:t>Mostre quantas tarefas estão na lista usando lista.length</a:t>
-            </a:r>
-            <a:endParaRPr lang="en-US" sz="1000" dirty="0"/>
-          </a:p>
-        </p:txBody>
-      </p:sp>
-      <p:sp>
-        <p:nvSpPr>
-          <p:cNvPr id="20" name="Shape 18"/>
-          <p:cNvSpPr/>
-          <p:nvPr/>
-        </p:nvSpPr>
-        <p:spPr>
-          <a:xfrm>
-            <a:off x="457200" y="4069080"/>
-            <a:ext cx="8229600" cy="777240"/>
-          </a:xfrm>
-          <a:prstGeom prst="rect">
-            <a:avLst/>
-          </a:prstGeom>
-          <a:solidFill>
-            <a:srgbClr val="FFFFFF"/>
-          </a:solidFill>
-          <a:ln w="12700">
-            <a:solidFill>
-              <a:srgbClr val="E0E8F0"/>
-            </a:solidFill>
-            <a:prstDash val="solid"/>
-          </a:ln>
-        </p:spPr>
-        <p:txBody>
-          <a:bodyPr/>
-          <a:lstStyle/>
-          <a:p>
-            <a:endParaRPr lang="pt-BR"/>
-          </a:p>
-        </p:txBody>
-      </p:sp>
-      <p:sp>
-        <p:nvSpPr>
-          <p:cNvPr id="21" name="Shape 19"/>
-          <p:cNvSpPr/>
-          <p:nvPr/>
-        </p:nvSpPr>
-        <p:spPr>
-          <a:xfrm>
-            <a:off x="457200" y="4069080"/>
-            <a:ext cx="64008" cy="777240"/>
-          </a:xfrm>
-          <a:prstGeom prst="rect">
-            <a:avLst/>
-          </a:prstGeom>
-          <a:solidFill>
-            <a:srgbClr val="CB356B"/>
-          </a:solidFill>
-          <a:ln w="12700">
-            <a:solidFill>
-              <a:srgbClr val="CB356B"/>
-            </a:solidFill>
-            <a:prstDash val="solid"/>
-          </a:ln>
-        </p:spPr>
-        <p:txBody>
-          <a:bodyPr/>
-          <a:lstStyle/>
-          <a:p>
-            <a:endParaRPr lang="pt-BR"/>
-          </a:p>
-        </p:txBody>
-      </p:sp>
-      <p:sp>
-        <p:nvSpPr>
-          <p:cNvPr id="22" name="Text 20"/>
-          <p:cNvSpPr/>
-          <p:nvPr/>
-        </p:nvSpPr>
-        <p:spPr>
-          <a:xfrm>
-            <a:off x="640080" y="4114800"/>
-            <a:ext cx="1371600" cy="274320"/>
-          </a:xfrm>
-          <a:prstGeom prst="rect">
-            <a:avLst/>
-          </a:prstGeom>
-          <a:noFill/>
-          <a:ln/>
-        </p:spPr>
-        <p:txBody>
-          <a:bodyPr wrap="square" lIns="0" tIns="0" rIns="0" bIns="0" rtlCol="0" anchor="ctr"/>
-          <a:lstStyle/>
-          <a:p>
-            <a:pPr marL="0" indent="0">
-              <a:buNone/>
-            </a:pPr>
-            <a:r>
-              <a:rPr lang="en-US" sz="1000" b="1" dirty="0">
-                <a:solidFill>
-                  <a:srgbClr val="555F6E"/>
-                </a:solidFill>
-              </a:rPr>
-              <a:t>⭐⭐⭐ Difícil</a:t>
-            </a:r>
-            <a:endParaRPr lang="en-US" sz="1000" dirty="0"/>
-          </a:p>
-        </p:txBody>
-      </p:sp>
-      <p:sp>
-        <p:nvSpPr>
-          <p:cNvPr id="23" name="Text 21"/>
-          <p:cNvSpPr/>
-          <p:nvPr/>
-        </p:nvSpPr>
-        <p:spPr>
-          <a:xfrm>
-            <a:off x="2011680" y="4096512"/>
-            <a:ext cx="6400800" cy="292608"/>
-          </a:xfrm>
-          <a:prstGeom prst="rect">
-            <a:avLst/>
-          </a:prstGeom>
-          <a:noFill/>
-          <a:ln/>
-        </p:spPr>
-        <p:txBody>
-          <a:bodyPr wrap="square" lIns="0" tIns="0" rIns="0" bIns="0" rtlCol="0" anchor="ctr"/>
-          <a:lstStyle/>
-          <a:p>
-            <a:pPr marL="0" indent="0">
-              <a:buNone/>
-            </a:pPr>
-            <a:r>
-              <a:rPr lang="en-US" sz="1300" b="1" dirty="0">
-                <a:solidFill>
-                  <a:srgbClr val="20232A"/>
-                </a:solidFill>
-              </a:rPr>
-              <a:t>Remover tarefas</a:t>
-            </a:r>
-            <a:endParaRPr lang="en-US" sz="1300" dirty="0"/>
-          </a:p>
-        </p:txBody>
-      </p:sp>
-      <p:sp>
-        <p:nvSpPr>
-          <p:cNvPr id="24" name="Text 22"/>
-          <p:cNvSpPr/>
-          <p:nvPr/>
-        </p:nvSpPr>
-        <p:spPr>
-          <a:xfrm>
-            <a:off x="640080" y="4407408"/>
-            <a:ext cx="7955280" cy="347472"/>
-          </a:xfrm>
-          <a:prstGeom prst="rect">
-            <a:avLst/>
-          </a:prstGeom>
-          <a:noFill/>
-          <a:ln/>
-        </p:spPr>
-        <p:txBody>
-          <a:bodyPr wrap="square" lIns="0" tIns="0" rIns="0" bIns="0" rtlCol="0" anchor="ctr"/>
-          <a:lstStyle/>
-          <a:p>
-            <a:pPr marL="0" indent="0">
-              <a:buNone/>
-            </a:pPr>
-            <a:r>
-              <a:rPr lang="en-US" sz="1000" dirty="0">
-                <a:solidFill>
-                  <a:srgbClr val="555F6E"/>
-                </a:solidFill>
-              </a:rPr>
-              <a:t>Adicione um botão ✖ em cada tarefa para removê-la da lista usando filter()</a:t>
-            </a:r>
-            <a:endParaRPr lang="en-US" sz="1000" dirty="0"/>
-          </a:p>
-        </p:txBody>
-      </p:sp>
-      <p:sp>
-        <p:nvSpPr>
-          <p:cNvPr id="25" name="Shape 23"/>
-          <p:cNvSpPr/>
-          <p:nvPr/>
-        </p:nvSpPr>
-        <p:spPr>
-          <a:xfrm>
-            <a:off x="457200" y="4892040"/>
-            <a:ext cx="8229600" cy="155448"/>
-          </a:xfrm>
-          <a:prstGeom prst="rect">
-            <a:avLst/>
-          </a:prstGeom>
-          <a:solidFill>
-            <a:srgbClr val="61DAFB"/>
-          </a:solidFill>
-          <a:ln w="12700">
-            <a:solidFill>
-              <a:srgbClr val="61DAFB"/>
-            </a:solidFill>
-            <a:prstDash val="solid"/>
-          </a:ln>
-        </p:spPr>
-        <p:txBody>
-          <a:bodyPr/>
-          <a:lstStyle/>
-          <a:p>
-            <a:endParaRPr lang="pt-BR"/>
           </a:p>
         </p:txBody>
       </p:sp>
@@ -15831,6 +16886,863 @@
               <a:t>Adicionar e exibir tarefas</a:t>
             </a:r>
             <a:endParaRPr lang="en-US" sz="1000" dirty="0"/>
+          </a:p>
+        </p:txBody>
+      </p:sp>
+    </p:spTree>
+  </p:cSld>
+  <p:clrMapOvr>
+    <a:masterClrMapping/>
+  </p:clrMapOvr>
+</p:sld>
+</file>
+
+<file path=ppt/slides/slide20.xml><?xml version="1.0" encoding="utf-8"?>
+<p:sld xmlns:a="http://schemas.openxmlformats.org/drawingml/2006/main" xmlns:r="http://schemas.openxmlformats.org/officeDocument/2006/relationships" xmlns:p="http://schemas.openxmlformats.org/presentationml/2006/main">
+  <p:cSld name="Slide 17">
+    <p:bg>
+      <p:bgPr>
+        <a:solidFill>
+          <a:srgbClr val="F5F7FA"/>
+        </a:solidFill>
+        <a:effectLst/>
+      </p:bgPr>
+    </p:bg>
+    <p:spTree>
+      <p:nvGrpSpPr>
+        <p:cNvPr id="1" name=""/>
+        <p:cNvGrpSpPr/>
+        <p:nvPr/>
+      </p:nvGrpSpPr>
+      <p:grpSpPr>
+        <a:xfrm>
+          <a:off x="0" y="0"/>
+          <a:ext cx="0" cy="0"/>
+          <a:chOff x="0" y="0"/>
+          <a:chExt cx="0" cy="0"/>
+        </a:xfrm>
+      </p:grpSpPr>
+      <p:sp>
+        <p:nvSpPr>
+          <p:cNvPr id="2" name="Shape 0"/>
+          <p:cNvSpPr/>
+          <p:nvPr/>
+        </p:nvSpPr>
+        <p:spPr>
+          <a:xfrm>
+            <a:off x="0" y="0"/>
+            <a:ext cx="9144000" cy="685800"/>
+          </a:xfrm>
+          <a:prstGeom prst="rect">
+            <a:avLst/>
+          </a:prstGeom>
+          <a:solidFill>
+            <a:srgbClr val="20232A"/>
+          </a:solidFill>
+          <a:ln w="12700">
+            <a:solidFill>
+              <a:srgbClr val="20232A"/>
+            </a:solidFill>
+            <a:prstDash val="solid"/>
+          </a:ln>
+        </p:spPr>
+        <p:txBody>
+          <a:bodyPr/>
+          <a:lstStyle/>
+          <a:p>
+            <a:endParaRPr lang="pt-BR"/>
+          </a:p>
+        </p:txBody>
+      </p:sp>
+      <p:sp>
+        <p:nvSpPr>
+          <p:cNvPr id="3" name="Text 1"/>
+          <p:cNvSpPr/>
+          <p:nvPr/>
+        </p:nvSpPr>
+        <p:spPr>
+          <a:xfrm>
+            <a:off x="365760" y="109728"/>
+            <a:ext cx="8412480" cy="457200"/>
+          </a:xfrm>
+          <a:prstGeom prst="rect">
+            <a:avLst/>
+          </a:prstGeom>
+          <a:noFill/>
+          <a:ln/>
+        </p:spPr>
+        <p:txBody>
+          <a:bodyPr wrap="square" lIns="0" tIns="0" rIns="0" bIns="0" rtlCol="0" anchor="ctr"/>
+          <a:lstStyle/>
+          <a:p>
+            <a:pPr marL="0" indent="0">
+              <a:buNone/>
+            </a:pPr>
+            <a:r>
+              <a:rPr lang="en-US" sz="1800" b="1" dirty="0">
+                <a:solidFill>
+                  <a:srgbClr val="61DAFB"/>
+                </a:solidFill>
+              </a:rPr>
+              <a:t>Desafios Para Praticar 🚀</a:t>
+            </a:r>
+            <a:endParaRPr lang="en-US" sz="1800" dirty="0"/>
+          </a:p>
+        </p:txBody>
+      </p:sp>
+      <p:sp>
+        <p:nvSpPr>
+          <p:cNvPr id="4" name="Text 2"/>
+          <p:cNvSpPr/>
+          <p:nvPr/>
+        </p:nvSpPr>
+        <p:spPr>
+          <a:xfrm>
+            <a:off x="457200" y="804672"/>
+            <a:ext cx="8229600" cy="411480"/>
+          </a:xfrm>
+          <a:prstGeom prst="rect">
+            <a:avLst/>
+          </a:prstGeom>
+          <a:noFill/>
+          <a:ln/>
+        </p:spPr>
+        <p:txBody>
+          <a:bodyPr wrap="square" lIns="0" tIns="0" rIns="0" bIns="0" rtlCol="0" anchor="ctr"/>
+          <a:lstStyle/>
+          <a:p>
+            <a:pPr marL="0" indent="0">
+              <a:buNone/>
+            </a:pPr>
+            <a:r>
+              <a:rPr lang="en-US" sz="1500" dirty="0">
+                <a:solidFill>
+                  <a:srgbClr val="20232A"/>
+                </a:solidFill>
+              </a:rPr>
+              <a:t>Quer ir além? Tente esses desafios!</a:t>
+            </a:r>
+            <a:endParaRPr lang="en-US" sz="1500" dirty="0"/>
+          </a:p>
+        </p:txBody>
+      </p:sp>
+      <p:sp>
+        <p:nvSpPr>
+          <p:cNvPr id="5" name="Shape 3"/>
+          <p:cNvSpPr/>
+          <p:nvPr/>
+        </p:nvSpPr>
+        <p:spPr>
+          <a:xfrm>
+            <a:off x="457200" y="1325880"/>
+            <a:ext cx="8229600" cy="777240"/>
+          </a:xfrm>
+          <a:prstGeom prst="rect">
+            <a:avLst/>
+          </a:prstGeom>
+          <a:solidFill>
+            <a:srgbClr val="FFFFFF"/>
+          </a:solidFill>
+          <a:ln w="12700">
+            <a:solidFill>
+              <a:srgbClr val="E0E8F0"/>
+            </a:solidFill>
+            <a:prstDash val="solid"/>
+          </a:ln>
+        </p:spPr>
+        <p:txBody>
+          <a:bodyPr/>
+          <a:lstStyle/>
+          <a:p>
+            <a:endParaRPr lang="pt-BR"/>
+          </a:p>
+        </p:txBody>
+      </p:sp>
+      <p:sp>
+        <p:nvSpPr>
+          <p:cNvPr id="6" name="Shape 4"/>
+          <p:cNvSpPr/>
+          <p:nvPr/>
+        </p:nvSpPr>
+        <p:spPr>
+          <a:xfrm>
+            <a:off x="457200" y="1325880"/>
+            <a:ext cx="64008" cy="777240"/>
+          </a:xfrm>
+          <a:prstGeom prst="rect">
+            <a:avLst/>
+          </a:prstGeom>
+          <a:solidFill>
+            <a:srgbClr val="CB356B"/>
+          </a:solidFill>
+          <a:ln w="12700">
+            <a:solidFill>
+              <a:srgbClr val="CB356B"/>
+            </a:solidFill>
+            <a:prstDash val="solid"/>
+          </a:ln>
+        </p:spPr>
+        <p:txBody>
+          <a:bodyPr/>
+          <a:lstStyle/>
+          <a:p>
+            <a:endParaRPr lang="pt-BR"/>
+          </a:p>
+        </p:txBody>
+      </p:sp>
+      <p:sp>
+        <p:nvSpPr>
+          <p:cNvPr id="7" name="Text 5"/>
+          <p:cNvSpPr/>
+          <p:nvPr/>
+        </p:nvSpPr>
+        <p:spPr>
+          <a:xfrm>
+            <a:off x="640080" y="1371600"/>
+            <a:ext cx="1371600" cy="274320"/>
+          </a:xfrm>
+          <a:prstGeom prst="rect">
+            <a:avLst/>
+          </a:prstGeom>
+          <a:noFill/>
+          <a:ln/>
+        </p:spPr>
+        <p:txBody>
+          <a:bodyPr wrap="square" lIns="0" tIns="0" rIns="0" bIns="0" rtlCol="0" anchor="ctr"/>
+          <a:lstStyle/>
+          <a:p>
+            <a:pPr marL="0" indent="0">
+              <a:buNone/>
+            </a:pPr>
+            <a:r>
+              <a:rPr lang="en-US" sz="1000" b="1" dirty="0">
+                <a:solidFill>
+                  <a:srgbClr val="555F6E"/>
+                </a:solidFill>
+              </a:rPr>
+              <a:t>⭐ Fácil</a:t>
+            </a:r>
+            <a:endParaRPr lang="en-US" sz="1000" dirty="0"/>
+          </a:p>
+        </p:txBody>
+      </p:sp>
+      <p:sp>
+        <p:nvSpPr>
+          <p:cNvPr id="8" name="Text 6"/>
+          <p:cNvSpPr/>
+          <p:nvPr/>
+        </p:nvSpPr>
+        <p:spPr>
+          <a:xfrm>
+            <a:off x="2011680" y="1353312"/>
+            <a:ext cx="6400800" cy="292608"/>
+          </a:xfrm>
+          <a:prstGeom prst="rect">
+            <a:avLst/>
+          </a:prstGeom>
+          <a:noFill/>
+          <a:ln/>
+        </p:spPr>
+        <p:txBody>
+          <a:bodyPr wrap="square" lIns="0" tIns="0" rIns="0" bIns="0" rtlCol="0" anchor="ctr"/>
+          <a:lstStyle/>
+          <a:p>
+            <a:pPr marL="0" indent="0">
+              <a:buNone/>
+            </a:pPr>
+            <a:r>
+              <a:rPr lang="en-US" sz="1300" b="1" dirty="0">
+                <a:solidFill>
+                  <a:srgbClr val="20232A"/>
+                </a:solidFill>
+              </a:rPr>
+              <a:t>Mudar as cores do degradê</a:t>
+            </a:r>
+            <a:endParaRPr lang="en-US" sz="1300" dirty="0"/>
+          </a:p>
+        </p:txBody>
+      </p:sp>
+      <p:sp>
+        <p:nvSpPr>
+          <p:cNvPr id="9" name="Text 7"/>
+          <p:cNvSpPr/>
+          <p:nvPr/>
+        </p:nvSpPr>
+        <p:spPr>
+          <a:xfrm>
+            <a:off x="640080" y="1664208"/>
+            <a:ext cx="7955280" cy="347472"/>
+          </a:xfrm>
+          <a:prstGeom prst="rect">
+            <a:avLst/>
+          </a:prstGeom>
+          <a:noFill/>
+          <a:ln/>
+        </p:spPr>
+        <p:txBody>
+          <a:bodyPr wrap="square" lIns="0" tIns="0" rIns="0" bIns="0" rtlCol="0" anchor="ctr"/>
+          <a:lstStyle/>
+          <a:p>
+            <a:pPr marL="0" indent="0">
+              <a:buNone/>
+            </a:pPr>
+            <a:r>
+              <a:rPr lang="en-US" sz="1000" dirty="0">
+                <a:solidFill>
+                  <a:srgbClr val="555F6E"/>
+                </a:solidFill>
+              </a:rPr>
+              <a:t>Experimente novas cores no linear-gradient() do componente Título</a:t>
+            </a:r>
+            <a:endParaRPr lang="en-US" sz="1000" dirty="0"/>
+          </a:p>
+        </p:txBody>
+      </p:sp>
+      <p:sp>
+        <p:nvSpPr>
+          <p:cNvPr id="10" name="Shape 8"/>
+          <p:cNvSpPr/>
+          <p:nvPr/>
+        </p:nvSpPr>
+        <p:spPr>
+          <a:xfrm>
+            <a:off x="457200" y="2240280"/>
+            <a:ext cx="8229600" cy="777240"/>
+          </a:xfrm>
+          <a:prstGeom prst="rect">
+            <a:avLst/>
+          </a:prstGeom>
+          <a:solidFill>
+            <a:srgbClr val="FFFFFF"/>
+          </a:solidFill>
+          <a:ln w="12700">
+            <a:solidFill>
+              <a:srgbClr val="E0E8F0"/>
+            </a:solidFill>
+            <a:prstDash val="solid"/>
+          </a:ln>
+        </p:spPr>
+        <p:txBody>
+          <a:bodyPr/>
+          <a:lstStyle/>
+          <a:p>
+            <a:endParaRPr lang="pt-BR"/>
+          </a:p>
+        </p:txBody>
+      </p:sp>
+      <p:sp>
+        <p:nvSpPr>
+          <p:cNvPr id="11" name="Shape 9"/>
+          <p:cNvSpPr/>
+          <p:nvPr/>
+        </p:nvSpPr>
+        <p:spPr>
+          <a:xfrm>
+            <a:off x="457200" y="2240280"/>
+            <a:ext cx="64008" cy="777240"/>
+          </a:xfrm>
+          <a:prstGeom prst="rect">
+            <a:avLst/>
+          </a:prstGeom>
+          <a:solidFill>
+            <a:srgbClr val="CB356B"/>
+          </a:solidFill>
+          <a:ln w="12700">
+            <a:solidFill>
+              <a:srgbClr val="CB356B"/>
+            </a:solidFill>
+            <a:prstDash val="solid"/>
+          </a:ln>
+        </p:spPr>
+        <p:txBody>
+          <a:bodyPr/>
+          <a:lstStyle/>
+          <a:p>
+            <a:endParaRPr lang="pt-BR"/>
+          </a:p>
+        </p:txBody>
+      </p:sp>
+      <p:sp>
+        <p:nvSpPr>
+          <p:cNvPr id="12" name="Text 10"/>
+          <p:cNvSpPr/>
+          <p:nvPr/>
+        </p:nvSpPr>
+        <p:spPr>
+          <a:xfrm>
+            <a:off x="640080" y="2286000"/>
+            <a:ext cx="1371600" cy="274320"/>
+          </a:xfrm>
+          <a:prstGeom prst="rect">
+            <a:avLst/>
+          </a:prstGeom>
+          <a:noFill/>
+          <a:ln/>
+        </p:spPr>
+        <p:txBody>
+          <a:bodyPr wrap="square" lIns="0" tIns="0" rIns="0" bIns="0" rtlCol="0" anchor="ctr"/>
+          <a:lstStyle/>
+          <a:p>
+            <a:pPr marL="0" indent="0">
+              <a:buNone/>
+            </a:pPr>
+            <a:r>
+              <a:rPr lang="en-US" sz="1000" b="1" dirty="0">
+                <a:solidFill>
+                  <a:srgbClr val="555F6E"/>
+                </a:solidFill>
+              </a:rPr>
+              <a:t>⭐⭐ Médio</a:t>
+            </a:r>
+            <a:endParaRPr lang="en-US" sz="1000" dirty="0"/>
+          </a:p>
+        </p:txBody>
+      </p:sp>
+      <p:sp>
+        <p:nvSpPr>
+          <p:cNvPr id="13" name="Text 11"/>
+          <p:cNvSpPr/>
+          <p:nvPr/>
+        </p:nvSpPr>
+        <p:spPr>
+          <a:xfrm>
+            <a:off x="2011680" y="2267712"/>
+            <a:ext cx="6400800" cy="292608"/>
+          </a:xfrm>
+          <a:prstGeom prst="rect">
+            <a:avLst/>
+          </a:prstGeom>
+          <a:noFill/>
+          <a:ln/>
+        </p:spPr>
+        <p:txBody>
+          <a:bodyPr wrap="square" lIns="0" tIns="0" rIns="0" bIns="0" rtlCol="0" anchor="ctr"/>
+          <a:lstStyle/>
+          <a:p>
+            <a:pPr marL="0" indent="0">
+              <a:buNone/>
+            </a:pPr>
+            <a:r>
+              <a:rPr lang="en-US" sz="1300" b="1" dirty="0">
+                <a:solidFill>
+                  <a:srgbClr val="20232A"/>
+                </a:solidFill>
+              </a:rPr>
+              <a:t>Limpar o input após adicionar</a:t>
+            </a:r>
+            <a:endParaRPr lang="en-US" sz="1300" dirty="0"/>
+          </a:p>
+        </p:txBody>
+      </p:sp>
+      <p:sp>
+        <p:nvSpPr>
+          <p:cNvPr id="14" name="Text 12"/>
+          <p:cNvSpPr/>
+          <p:nvPr/>
+        </p:nvSpPr>
+        <p:spPr>
+          <a:xfrm>
+            <a:off x="640080" y="2578608"/>
+            <a:ext cx="7955280" cy="347472"/>
+          </a:xfrm>
+          <a:prstGeom prst="rect">
+            <a:avLst/>
+          </a:prstGeom>
+          <a:noFill/>
+          <a:ln/>
+        </p:spPr>
+        <p:txBody>
+          <a:bodyPr wrap="square" lIns="0" tIns="0" rIns="0" bIns="0" rtlCol="0" anchor="ctr"/>
+          <a:lstStyle/>
+          <a:p>
+            <a:pPr marL="0" indent="0">
+              <a:buNone/>
+            </a:pPr>
+            <a:r>
+              <a:rPr lang="en-US" sz="1000" dirty="0">
+                <a:solidFill>
+                  <a:srgbClr val="555F6E"/>
+                </a:solidFill>
+              </a:rPr>
+              <a:t>Após adicionar, limpe o campo: evento.target.conteudo.value = ''</a:t>
+            </a:r>
+            <a:endParaRPr lang="en-US" sz="1000" dirty="0"/>
+          </a:p>
+        </p:txBody>
+      </p:sp>
+      <p:sp>
+        <p:nvSpPr>
+          <p:cNvPr id="15" name="Shape 13"/>
+          <p:cNvSpPr/>
+          <p:nvPr/>
+        </p:nvSpPr>
+        <p:spPr>
+          <a:xfrm>
+            <a:off x="457200" y="3154680"/>
+            <a:ext cx="8229600" cy="777240"/>
+          </a:xfrm>
+          <a:prstGeom prst="rect">
+            <a:avLst/>
+          </a:prstGeom>
+          <a:solidFill>
+            <a:srgbClr val="FFFFFF"/>
+          </a:solidFill>
+          <a:ln w="12700">
+            <a:solidFill>
+              <a:srgbClr val="E0E8F0"/>
+            </a:solidFill>
+            <a:prstDash val="solid"/>
+          </a:ln>
+        </p:spPr>
+        <p:txBody>
+          <a:bodyPr/>
+          <a:lstStyle/>
+          <a:p>
+            <a:endParaRPr lang="pt-BR"/>
+          </a:p>
+        </p:txBody>
+      </p:sp>
+      <p:sp>
+        <p:nvSpPr>
+          <p:cNvPr id="16" name="Shape 14"/>
+          <p:cNvSpPr/>
+          <p:nvPr/>
+        </p:nvSpPr>
+        <p:spPr>
+          <a:xfrm>
+            <a:off x="457200" y="3154680"/>
+            <a:ext cx="64008" cy="777240"/>
+          </a:xfrm>
+          <a:prstGeom prst="rect">
+            <a:avLst/>
+          </a:prstGeom>
+          <a:solidFill>
+            <a:srgbClr val="CB356B"/>
+          </a:solidFill>
+          <a:ln w="12700">
+            <a:solidFill>
+              <a:srgbClr val="CB356B"/>
+            </a:solidFill>
+            <a:prstDash val="solid"/>
+          </a:ln>
+        </p:spPr>
+        <p:txBody>
+          <a:bodyPr/>
+          <a:lstStyle/>
+          <a:p>
+            <a:endParaRPr lang="pt-BR"/>
+          </a:p>
+        </p:txBody>
+      </p:sp>
+      <p:sp>
+        <p:nvSpPr>
+          <p:cNvPr id="17" name="Text 15"/>
+          <p:cNvSpPr/>
+          <p:nvPr/>
+        </p:nvSpPr>
+        <p:spPr>
+          <a:xfrm>
+            <a:off x="640080" y="3200400"/>
+            <a:ext cx="1371600" cy="274320"/>
+          </a:xfrm>
+          <a:prstGeom prst="rect">
+            <a:avLst/>
+          </a:prstGeom>
+          <a:noFill/>
+          <a:ln/>
+        </p:spPr>
+        <p:txBody>
+          <a:bodyPr wrap="square" lIns="0" tIns="0" rIns="0" bIns="0" rtlCol="0" anchor="ctr"/>
+          <a:lstStyle/>
+          <a:p>
+            <a:pPr marL="0" indent="0">
+              <a:buNone/>
+            </a:pPr>
+            <a:r>
+              <a:rPr lang="en-US" sz="1000" b="1" dirty="0">
+                <a:solidFill>
+                  <a:srgbClr val="555F6E"/>
+                </a:solidFill>
+              </a:rPr>
+              <a:t>⭐⭐ Médio</a:t>
+            </a:r>
+            <a:endParaRPr lang="en-US" sz="1000" dirty="0"/>
+          </a:p>
+        </p:txBody>
+      </p:sp>
+      <p:sp>
+        <p:nvSpPr>
+          <p:cNvPr id="18" name="Text 16"/>
+          <p:cNvSpPr/>
+          <p:nvPr/>
+        </p:nvSpPr>
+        <p:spPr>
+          <a:xfrm>
+            <a:off x="2011680" y="3182112"/>
+            <a:ext cx="6400800" cy="292608"/>
+          </a:xfrm>
+          <a:prstGeom prst="rect">
+            <a:avLst/>
+          </a:prstGeom>
+          <a:noFill/>
+          <a:ln/>
+        </p:spPr>
+        <p:txBody>
+          <a:bodyPr wrap="square" lIns="0" tIns="0" rIns="0" bIns="0" rtlCol="0" anchor="ctr"/>
+          <a:lstStyle/>
+          <a:p>
+            <a:pPr marL="0" indent="0">
+              <a:buNone/>
+            </a:pPr>
+            <a:r>
+              <a:rPr lang="en-US" sz="1300" b="1" dirty="0">
+                <a:solidFill>
+                  <a:srgbClr val="20232A"/>
+                </a:solidFill>
+              </a:rPr>
+              <a:t>Contador de tarefas</a:t>
+            </a:r>
+            <a:endParaRPr lang="en-US" sz="1300" dirty="0"/>
+          </a:p>
+        </p:txBody>
+      </p:sp>
+      <p:sp>
+        <p:nvSpPr>
+          <p:cNvPr id="19" name="Text 17"/>
+          <p:cNvSpPr/>
+          <p:nvPr/>
+        </p:nvSpPr>
+        <p:spPr>
+          <a:xfrm>
+            <a:off x="640080" y="3493008"/>
+            <a:ext cx="7955280" cy="347472"/>
+          </a:xfrm>
+          <a:prstGeom prst="rect">
+            <a:avLst/>
+          </a:prstGeom>
+          <a:noFill/>
+          <a:ln/>
+        </p:spPr>
+        <p:txBody>
+          <a:bodyPr wrap="square" lIns="0" tIns="0" rIns="0" bIns="0" rtlCol="0" anchor="ctr"/>
+          <a:lstStyle/>
+          <a:p>
+            <a:pPr marL="0" indent="0">
+              <a:buNone/>
+            </a:pPr>
+            <a:r>
+              <a:rPr lang="en-US" sz="1000" dirty="0">
+                <a:solidFill>
+                  <a:srgbClr val="555F6E"/>
+                </a:solidFill>
+              </a:rPr>
+              <a:t>Mostre quantas tarefas estão na lista usando lista.length</a:t>
+            </a:r>
+            <a:endParaRPr lang="en-US" sz="1000" dirty="0"/>
+          </a:p>
+        </p:txBody>
+      </p:sp>
+      <p:sp>
+        <p:nvSpPr>
+          <p:cNvPr id="20" name="Shape 18"/>
+          <p:cNvSpPr/>
+          <p:nvPr/>
+        </p:nvSpPr>
+        <p:spPr>
+          <a:xfrm>
+            <a:off x="457200" y="4069080"/>
+            <a:ext cx="8229600" cy="777240"/>
+          </a:xfrm>
+          <a:prstGeom prst="rect">
+            <a:avLst/>
+          </a:prstGeom>
+          <a:solidFill>
+            <a:srgbClr val="FFFFFF"/>
+          </a:solidFill>
+          <a:ln w="12700">
+            <a:solidFill>
+              <a:srgbClr val="E0E8F0"/>
+            </a:solidFill>
+            <a:prstDash val="solid"/>
+          </a:ln>
+        </p:spPr>
+        <p:txBody>
+          <a:bodyPr/>
+          <a:lstStyle/>
+          <a:p>
+            <a:endParaRPr lang="pt-BR"/>
+          </a:p>
+        </p:txBody>
+      </p:sp>
+      <p:sp>
+        <p:nvSpPr>
+          <p:cNvPr id="21" name="Shape 19"/>
+          <p:cNvSpPr/>
+          <p:nvPr/>
+        </p:nvSpPr>
+        <p:spPr>
+          <a:xfrm>
+            <a:off x="457200" y="4069080"/>
+            <a:ext cx="64008" cy="777240"/>
+          </a:xfrm>
+          <a:prstGeom prst="rect">
+            <a:avLst/>
+          </a:prstGeom>
+          <a:solidFill>
+            <a:srgbClr val="CB356B"/>
+          </a:solidFill>
+          <a:ln w="12700">
+            <a:solidFill>
+              <a:srgbClr val="CB356B"/>
+            </a:solidFill>
+            <a:prstDash val="solid"/>
+          </a:ln>
+        </p:spPr>
+        <p:txBody>
+          <a:bodyPr/>
+          <a:lstStyle/>
+          <a:p>
+            <a:endParaRPr lang="pt-BR"/>
+          </a:p>
+        </p:txBody>
+      </p:sp>
+      <p:sp>
+        <p:nvSpPr>
+          <p:cNvPr id="22" name="Text 20"/>
+          <p:cNvSpPr/>
+          <p:nvPr/>
+        </p:nvSpPr>
+        <p:spPr>
+          <a:xfrm>
+            <a:off x="640080" y="4114800"/>
+            <a:ext cx="1371600" cy="274320"/>
+          </a:xfrm>
+          <a:prstGeom prst="rect">
+            <a:avLst/>
+          </a:prstGeom>
+          <a:noFill/>
+          <a:ln/>
+        </p:spPr>
+        <p:txBody>
+          <a:bodyPr wrap="square" lIns="0" tIns="0" rIns="0" bIns="0" rtlCol="0" anchor="ctr"/>
+          <a:lstStyle/>
+          <a:p>
+            <a:pPr marL="0" indent="0">
+              <a:buNone/>
+            </a:pPr>
+            <a:r>
+              <a:rPr lang="en-US" sz="1000" b="1" dirty="0">
+                <a:solidFill>
+                  <a:srgbClr val="555F6E"/>
+                </a:solidFill>
+              </a:rPr>
+              <a:t>⭐⭐⭐ Difícil</a:t>
+            </a:r>
+            <a:endParaRPr lang="en-US" sz="1000" dirty="0"/>
+          </a:p>
+        </p:txBody>
+      </p:sp>
+      <p:sp>
+        <p:nvSpPr>
+          <p:cNvPr id="23" name="Text 21"/>
+          <p:cNvSpPr/>
+          <p:nvPr/>
+        </p:nvSpPr>
+        <p:spPr>
+          <a:xfrm>
+            <a:off x="2011680" y="4096512"/>
+            <a:ext cx="6400800" cy="292608"/>
+          </a:xfrm>
+          <a:prstGeom prst="rect">
+            <a:avLst/>
+          </a:prstGeom>
+          <a:noFill/>
+          <a:ln/>
+        </p:spPr>
+        <p:txBody>
+          <a:bodyPr wrap="square" lIns="0" tIns="0" rIns="0" bIns="0" rtlCol="0" anchor="ctr"/>
+          <a:lstStyle/>
+          <a:p>
+            <a:pPr marL="0" indent="0">
+              <a:buNone/>
+            </a:pPr>
+            <a:r>
+              <a:rPr lang="en-US" sz="1300" b="1" dirty="0">
+                <a:solidFill>
+                  <a:srgbClr val="20232A"/>
+                </a:solidFill>
+              </a:rPr>
+              <a:t>Remover tarefas</a:t>
+            </a:r>
+            <a:endParaRPr lang="en-US" sz="1300" dirty="0"/>
+          </a:p>
+        </p:txBody>
+      </p:sp>
+      <p:sp>
+        <p:nvSpPr>
+          <p:cNvPr id="24" name="Text 22"/>
+          <p:cNvSpPr/>
+          <p:nvPr/>
+        </p:nvSpPr>
+        <p:spPr>
+          <a:xfrm>
+            <a:off x="640080" y="4407408"/>
+            <a:ext cx="7955280" cy="347472"/>
+          </a:xfrm>
+          <a:prstGeom prst="rect">
+            <a:avLst/>
+          </a:prstGeom>
+          <a:noFill/>
+          <a:ln/>
+        </p:spPr>
+        <p:txBody>
+          <a:bodyPr wrap="square" lIns="0" tIns="0" rIns="0" bIns="0" rtlCol="0" anchor="ctr"/>
+          <a:lstStyle/>
+          <a:p>
+            <a:pPr marL="0" indent="0">
+              <a:buNone/>
+            </a:pPr>
+            <a:r>
+              <a:rPr lang="en-US" sz="1000" dirty="0">
+                <a:solidFill>
+                  <a:srgbClr val="555F6E"/>
+                </a:solidFill>
+              </a:rPr>
+              <a:t>Adicione um botão ✖ em cada tarefa para removê-la da lista usando filter()</a:t>
+            </a:r>
+            <a:endParaRPr lang="en-US" sz="1000" dirty="0"/>
+          </a:p>
+        </p:txBody>
+      </p:sp>
+      <p:sp>
+        <p:nvSpPr>
+          <p:cNvPr id="25" name="Shape 23"/>
+          <p:cNvSpPr/>
+          <p:nvPr/>
+        </p:nvSpPr>
+        <p:spPr>
+          <a:xfrm>
+            <a:off x="457200" y="4892040"/>
+            <a:ext cx="8229600" cy="155448"/>
+          </a:xfrm>
+          <a:prstGeom prst="rect">
+            <a:avLst/>
+          </a:prstGeom>
+          <a:solidFill>
+            <a:srgbClr val="61DAFB"/>
+          </a:solidFill>
+          <a:ln w="12700">
+            <a:solidFill>
+              <a:srgbClr val="61DAFB"/>
+            </a:solidFill>
+            <a:prstDash val="solid"/>
+          </a:ln>
+        </p:spPr>
+        <p:txBody>
+          <a:bodyPr/>
+          <a:lstStyle/>
+          <a:p>
+            <a:endParaRPr lang="pt-BR"/>
           </a:p>
         </p:txBody>
       </p:sp>

--- a/react-aula3.pptx
+++ b/react-aula3.pptx
@@ -5,28 +5,29 @@
     <p:sldMasterId id="2147483648" r:id="rId1"/>
   </p:sldMasterIdLst>
   <p:notesMasterIdLst>
-    <p:notesMasterId r:id="rId21"/>
+    <p:notesMasterId r:id="rId22"/>
   </p:notesMasterIdLst>
   <p:sldIdLst>
     <p:sldId id="256" r:id="rId2"/>
-    <p:sldId id="257" r:id="rId3"/>
-    <p:sldId id="258" r:id="rId4"/>
-    <p:sldId id="259" r:id="rId5"/>
-    <p:sldId id="260" r:id="rId6"/>
-    <p:sldId id="261" r:id="rId7"/>
-    <p:sldId id="262" r:id="rId8"/>
-    <p:sldId id="263" r:id="rId9"/>
-    <p:sldId id="273" r:id="rId10"/>
-    <p:sldId id="264" r:id="rId11"/>
-    <p:sldId id="274" r:id="rId12"/>
-    <p:sldId id="265" r:id="rId13"/>
-    <p:sldId id="266" r:id="rId14"/>
-    <p:sldId id="267" r:id="rId15"/>
-    <p:sldId id="268" r:id="rId16"/>
-    <p:sldId id="269" r:id="rId17"/>
-    <p:sldId id="270" r:id="rId18"/>
-    <p:sldId id="271" r:id="rId19"/>
-    <p:sldId id="272" r:id="rId20"/>
+    <p:sldId id="275" r:id="rId3"/>
+    <p:sldId id="257" r:id="rId4"/>
+    <p:sldId id="258" r:id="rId5"/>
+    <p:sldId id="259" r:id="rId6"/>
+    <p:sldId id="260" r:id="rId7"/>
+    <p:sldId id="261" r:id="rId8"/>
+    <p:sldId id="262" r:id="rId9"/>
+    <p:sldId id="263" r:id="rId10"/>
+    <p:sldId id="273" r:id="rId11"/>
+    <p:sldId id="264" r:id="rId12"/>
+    <p:sldId id="274" r:id="rId13"/>
+    <p:sldId id="265" r:id="rId14"/>
+    <p:sldId id="266" r:id="rId15"/>
+    <p:sldId id="267" r:id="rId16"/>
+    <p:sldId id="268" r:id="rId17"/>
+    <p:sldId id="269" r:id="rId18"/>
+    <p:sldId id="270" r:id="rId19"/>
+    <p:sldId id="271" r:id="rId20"/>
+    <p:sldId id="272" r:id="rId21"/>
   </p:sldIdLst>
   <p:sldSz cx="9144000" cy="5143500" type="screen16x9"/>
   <p:notesSz cx="5143500" cy="9144000"/>
@@ -351,6 +352,121 @@
   <p:cSld>
     <p:spTree>
       <p:nvGrpSpPr>
+        <p:cNvPr id="1" name="">
+          <a:extLst>
+            <a:ext uri="{FF2B5EF4-FFF2-40B4-BE49-F238E27FC236}">
+              <a16:creationId xmlns:a16="http://schemas.microsoft.com/office/drawing/2014/main" id="{18E400B8-1801-B8DD-1B04-6A651F9A52F3}"/>
+            </a:ext>
+          </a:extLst>
+        </p:cNvPr>
+        <p:cNvGrpSpPr/>
+        <p:nvPr/>
+      </p:nvGrpSpPr>
+      <p:grpSpPr>
+        <a:xfrm>
+          <a:off x="0" y="0"/>
+          <a:ext cx="0" cy="0"/>
+          <a:chOff x="0" y="0"/>
+          <a:chExt cx="0" cy="0"/>
+        </a:xfrm>
+      </p:grpSpPr>
+      <p:sp>
+        <p:nvSpPr>
+          <p:cNvPr id="2" name="Slide Image Placeholder 1">
+            <a:extLst>
+              <a:ext uri="{FF2B5EF4-FFF2-40B4-BE49-F238E27FC236}">
+                <a16:creationId xmlns:a16="http://schemas.microsoft.com/office/drawing/2014/main" id="{70001B9E-A306-32F6-EEB3-463BA5192F76}"/>
+              </a:ext>
+            </a:extLst>
+          </p:cNvPr>
+          <p:cNvSpPr>
+            <a:spLocks noGrp="1" noRot="1" noChangeAspect="1"/>
+          </p:cNvSpPr>
+          <p:nvPr>
+            <p:ph type="sldImg"/>
+          </p:nvPr>
+        </p:nvSpPr>
+        <p:spPr/>
+        <p:txBody>
+          <a:bodyPr/>
+          <a:lstStyle/>
+          <a:p>
+            <a:endParaRPr lang="pt-BR"/>
+          </a:p>
+        </p:txBody>
+      </p:sp>
+      <p:sp>
+        <p:nvSpPr>
+          <p:cNvPr id="3" name="Notes Placeholder 2">
+            <a:extLst>
+              <a:ext uri="{FF2B5EF4-FFF2-40B4-BE49-F238E27FC236}">
+                <a16:creationId xmlns:a16="http://schemas.microsoft.com/office/drawing/2014/main" id="{68026D17-9F45-B6A1-4877-E6D223319FFB}"/>
+              </a:ext>
+            </a:extLst>
+          </p:cNvPr>
+          <p:cNvSpPr>
+            <a:spLocks noGrp="1"/>
+          </p:cNvSpPr>
+          <p:nvPr>
+            <p:ph type="body" idx="1"/>
+          </p:nvPr>
+        </p:nvSpPr>
+        <p:spPr/>
+        <p:txBody>
+          <a:bodyPr/>
+          <a:lstStyle/>
+          <a:p>
+            <a:endParaRPr lang="en-US" dirty="0"/>
+          </a:p>
+        </p:txBody>
+      </p:sp>
+      <p:sp>
+        <p:nvSpPr>
+          <p:cNvPr id="4" name="Slide Number Placeholder 3">
+            <a:extLst>
+              <a:ext uri="{FF2B5EF4-FFF2-40B4-BE49-F238E27FC236}">
+                <a16:creationId xmlns:a16="http://schemas.microsoft.com/office/drawing/2014/main" id="{0A797C3D-ACFE-BEC9-8D88-5F901275DDCC}"/>
+              </a:ext>
+            </a:extLst>
+          </p:cNvPr>
+          <p:cNvSpPr>
+            <a:spLocks noGrp="1"/>
+          </p:cNvSpPr>
+          <p:nvPr>
+            <p:ph type="sldNum" sz="quarter" idx="10"/>
+          </p:nvPr>
+        </p:nvSpPr>
+        <p:spPr/>
+        <p:txBody>
+          <a:bodyPr/>
+          <a:lstStyle/>
+          <a:p>
+            <a:fld id="{F7021451-1387-4CA6-816F-3879F97B5CBC}" type="slidenum">
+              <a:rPr lang="en-US"/>
+              <a:t>10</a:t>
+            </a:fld>
+            <a:endParaRPr lang="en-US"/>
+          </a:p>
+        </p:txBody>
+      </p:sp>
+    </p:spTree>
+    <p:extLst>
+      <p:ext uri="{BB962C8B-B14F-4D97-AF65-F5344CB8AC3E}">
+        <p14:creationId xmlns:p14="http://schemas.microsoft.com/office/powerpoint/2010/main" val="571515566"/>
+      </p:ext>
+    </p:extLst>
+  </p:cSld>
+  <p:clrMapOvr>
+    <a:masterClrMapping/>
+  </p:clrMapOvr>
+</p:notes>
+</file>
+
+<file path=ppt/notesSlides/notesSlide11.xml><?xml version="1.0" encoding="utf-8"?>
+<p:notes xmlns:a="http://schemas.openxmlformats.org/drawingml/2006/main" xmlns:r="http://schemas.openxmlformats.org/officeDocument/2006/relationships" xmlns:p="http://schemas.openxmlformats.org/presentationml/2006/main">
+  <p:cSld>
+    <p:spTree>
+      <p:nvGrpSpPr>
         <p:cNvPr id="1" name=""/>
         <p:cNvGrpSpPr/>
         <p:nvPr/>
@@ -418,7 +534,7 @@
           <a:p>
             <a:fld id="{F7021451-1387-4CA6-816F-3879F97B5CBC}" type="slidenum">
               <a:rPr lang="en-US"/>
-              <a:t>10</a:t>
+              <a:t>11</a:t>
             </a:fld>
             <a:endParaRPr lang="en-US"/>
           </a:p>
@@ -437,7 +553,7 @@
 </p:notes>
 </file>
 
-<file path=ppt/notesSlides/notesSlide11.xml><?xml version="1.0" encoding="utf-8"?>
+<file path=ppt/notesSlides/notesSlide12.xml><?xml version="1.0" encoding="utf-8"?>
 <p:notes xmlns:a="http://schemas.openxmlformats.org/drawingml/2006/main" xmlns:r="http://schemas.openxmlformats.org/officeDocument/2006/relationships" xmlns:p="http://schemas.openxmlformats.org/presentationml/2006/main">
   <p:cSld>
     <p:spTree>
@@ -533,7 +649,7 @@
           <a:p>
             <a:fld id="{F7021451-1387-4CA6-816F-3879F97B5CBC}" type="slidenum">
               <a:rPr lang="en-US"/>
-              <a:t>11</a:t>
+              <a:t>12</a:t>
             </a:fld>
             <a:endParaRPr lang="en-US"/>
           </a:p>
@@ -543,97 +659,6 @@
     <p:extLst>
       <p:ext uri="{BB962C8B-B14F-4D97-AF65-F5344CB8AC3E}">
         <p14:creationId xmlns:p14="http://schemas.microsoft.com/office/powerpoint/2010/main" val="3665319159"/>
-      </p:ext>
-    </p:extLst>
-  </p:cSld>
-  <p:clrMapOvr>
-    <a:masterClrMapping/>
-  </p:clrMapOvr>
-</p:notes>
-</file>
-
-<file path=ppt/notesSlides/notesSlide12.xml><?xml version="1.0" encoding="utf-8"?>
-<p:notes xmlns:a="http://schemas.openxmlformats.org/drawingml/2006/main" xmlns:r="http://schemas.openxmlformats.org/officeDocument/2006/relationships" xmlns:p="http://schemas.openxmlformats.org/presentationml/2006/main">
-  <p:cSld>
-    <p:spTree>
-      <p:nvGrpSpPr>
-        <p:cNvPr id="1" name=""/>
-        <p:cNvGrpSpPr/>
-        <p:nvPr/>
-      </p:nvGrpSpPr>
-      <p:grpSpPr>
-        <a:xfrm>
-          <a:off x="0" y="0"/>
-          <a:ext cx="0" cy="0"/>
-          <a:chOff x="0" y="0"/>
-          <a:chExt cx="0" cy="0"/>
-        </a:xfrm>
-      </p:grpSpPr>
-      <p:sp>
-        <p:nvSpPr>
-          <p:cNvPr id="2" name="Slide Image Placeholder 1"/>
-          <p:cNvSpPr>
-            <a:spLocks noGrp="1" noRot="1" noChangeAspect="1"/>
-          </p:cNvSpPr>
-          <p:nvPr>
-            <p:ph type="sldImg"/>
-          </p:nvPr>
-        </p:nvSpPr>
-        <p:spPr/>
-        <p:txBody>
-          <a:bodyPr/>
-          <a:lstStyle/>
-          <a:p>
-            <a:endParaRPr lang="pt-BR"/>
-          </a:p>
-        </p:txBody>
-      </p:sp>
-      <p:sp>
-        <p:nvSpPr>
-          <p:cNvPr id="3" name="Notes Placeholder 2"/>
-          <p:cNvSpPr>
-            <a:spLocks noGrp="1"/>
-          </p:cNvSpPr>
-          <p:nvPr>
-            <p:ph type="body" idx="1"/>
-          </p:nvPr>
-        </p:nvSpPr>
-        <p:spPr/>
-        <p:txBody>
-          <a:bodyPr/>
-          <a:lstStyle/>
-          <a:p>
-            <a:endParaRPr lang="en-US" dirty="0"/>
-          </a:p>
-        </p:txBody>
-      </p:sp>
-      <p:sp>
-        <p:nvSpPr>
-          <p:cNvPr id="4" name="Slide Number Placeholder 3"/>
-          <p:cNvSpPr>
-            <a:spLocks noGrp="1"/>
-          </p:cNvSpPr>
-          <p:nvPr>
-            <p:ph type="sldNum" sz="quarter" idx="10"/>
-          </p:nvPr>
-        </p:nvSpPr>
-        <p:spPr/>
-        <p:txBody>
-          <a:bodyPr/>
-          <a:lstStyle/>
-          <a:p>
-            <a:fld id="{F7021451-1387-4CA6-816F-3879F97B5CBC}" type="slidenum">
-              <a:rPr lang="en-US"/>
-              <a:t>12</a:t>
-            </a:fld>
-            <a:endParaRPr lang="en-US"/>
-          </a:p>
-        </p:txBody>
-      </p:sp>
-    </p:spTree>
-    <p:extLst>
-      <p:ext uri="{BB962C8B-B14F-4D97-AF65-F5344CB8AC3E}">
-        <p14:creationId xmlns:p14="http://schemas.microsoft.com/office/powerpoint/2010/main" val="1024086991"/>
       </p:ext>
     </p:extLst>
   </p:cSld>
@@ -1285,6 +1310,121 @@
   <p:cSld>
     <p:spTree>
       <p:nvGrpSpPr>
+        <p:cNvPr id="1" name="">
+          <a:extLst>
+            <a:ext uri="{FF2B5EF4-FFF2-40B4-BE49-F238E27FC236}">
+              <a16:creationId xmlns:a16="http://schemas.microsoft.com/office/drawing/2014/main" id="{9B3D6911-D39C-CBFA-B356-72C41A1CC2C1}"/>
+            </a:ext>
+          </a:extLst>
+        </p:cNvPr>
+        <p:cNvGrpSpPr/>
+        <p:nvPr/>
+      </p:nvGrpSpPr>
+      <p:grpSpPr>
+        <a:xfrm>
+          <a:off x="0" y="0"/>
+          <a:ext cx="0" cy="0"/>
+          <a:chOff x="0" y="0"/>
+          <a:chExt cx="0" cy="0"/>
+        </a:xfrm>
+      </p:grpSpPr>
+      <p:sp>
+        <p:nvSpPr>
+          <p:cNvPr id="2" name="Slide Image Placeholder 1">
+            <a:extLst>
+              <a:ext uri="{FF2B5EF4-FFF2-40B4-BE49-F238E27FC236}">
+                <a16:creationId xmlns:a16="http://schemas.microsoft.com/office/drawing/2014/main" id="{81CAF07B-397B-98B8-3756-E854E31C886F}"/>
+              </a:ext>
+            </a:extLst>
+          </p:cNvPr>
+          <p:cNvSpPr>
+            <a:spLocks noGrp="1" noRot="1" noChangeAspect="1"/>
+          </p:cNvSpPr>
+          <p:nvPr>
+            <p:ph type="sldImg"/>
+          </p:nvPr>
+        </p:nvSpPr>
+        <p:spPr/>
+        <p:txBody>
+          <a:bodyPr/>
+          <a:lstStyle/>
+          <a:p>
+            <a:endParaRPr lang="pt-BR"/>
+          </a:p>
+        </p:txBody>
+      </p:sp>
+      <p:sp>
+        <p:nvSpPr>
+          <p:cNvPr id="3" name="Notes Placeholder 2">
+            <a:extLst>
+              <a:ext uri="{FF2B5EF4-FFF2-40B4-BE49-F238E27FC236}">
+                <a16:creationId xmlns:a16="http://schemas.microsoft.com/office/drawing/2014/main" id="{65F8C268-999D-0092-E5CE-33B08E03F370}"/>
+              </a:ext>
+            </a:extLst>
+          </p:cNvPr>
+          <p:cNvSpPr>
+            <a:spLocks noGrp="1"/>
+          </p:cNvSpPr>
+          <p:nvPr>
+            <p:ph type="body" idx="1"/>
+          </p:nvPr>
+        </p:nvSpPr>
+        <p:spPr/>
+        <p:txBody>
+          <a:bodyPr/>
+          <a:lstStyle/>
+          <a:p>
+            <a:endParaRPr lang="en-US" dirty="0"/>
+          </a:p>
+        </p:txBody>
+      </p:sp>
+      <p:sp>
+        <p:nvSpPr>
+          <p:cNvPr id="4" name="Slide Number Placeholder 3">
+            <a:extLst>
+              <a:ext uri="{FF2B5EF4-FFF2-40B4-BE49-F238E27FC236}">
+                <a16:creationId xmlns:a16="http://schemas.microsoft.com/office/drawing/2014/main" id="{08387531-544A-F184-8E2F-79D6CACE577E}"/>
+              </a:ext>
+            </a:extLst>
+          </p:cNvPr>
+          <p:cNvSpPr>
+            <a:spLocks noGrp="1"/>
+          </p:cNvSpPr>
+          <p:nvPr>
+            <p:ph type="sldNum" sz="quarter" idx="10"/>
+          </p:nvPr>
+        </p:nvSpPr>
+        <p:spPr/>
+        <p:txBody>
+          <a:bodyPr/>
+          <a:lstStyle/>
+          <a:p>
+            <a:fld id="{F7021451-1387-4CA6-816F-3879F97B5CBC}" type="slidenum">
+              <a:rPr lang="en-US"/>
+              <a:t>2</a:t>
+            </a:fld>
+            <a:endParaRPr lang="en-US"/>
+          </a:p>
+        </p:txBody>
+      </p:sp>
+    </p:spTree>
+    <p:extLst>
+      <p:ext uri="{BB962C8B-B14F-4D97-AF65-F5344CB8AC3E}">
+        <p14:creationId xmlns:p14="http://schemas.microsoft.com/office/powerpoint/2010/main" val="2939861155"/>
+      </p:ext>
+    </p:extLst>
+  </p:cSld>
+  <p:clrMapOvr>
+    <a:masterClrMapping/>
+  </p:clrMapOvr>
+</p:notes>
+</file>
+
+<file path=ppt/notesSlides/notesSlide20.xml><?xml version="1.0" encoding="utf-8"?>
+<p:notes xmlns:a="http://schemas.openxmlformats.org/drawingml/2006/main" xmlns:r="http://schemas.openxmlformats.org/officeDocument/2006/relationships" xmlns:p="http://schemas.openxmlformats.org/presentationml/2006/main">
+  <p:cSld>
+    <p:spTree>
+      <p:nvGrpSpPr>
         <p:cNvPr id="1" name=""/>
         <p:cNvGrpSpPr/>
         <p:nvPr/>
@@ -1352,7 +1492,7 @@
           <a:p>
             <a:fld id="{F7021451-1387-4CA6-816F-3879F97B5CBC}" type="slidenum">
               <a:rPr lang="en-US"/>
-              <a:t>2</a:t>
+              <a:t>20</a:t>
             </a:fld>
             <a:endParaRPr lang="en-US"/>
           </a:p>
@@ -1922,13 +2062,7 @@
   <p:cSld>
     <p:spTree>
       <p:nvGrpSpPr>
-        <p:cNvPr id="1" name="">
-          <a:extLst>
-            <a:ext uri="{FF2B5EF4-FFF2-40B4-BE49-F238E27FC236}">
-              <a16:creationId xmlns:a16="http://schemas.microsoft.com/office/drawing/2014/main" id="{18E400B8-1801-B8DD-1B04-6A651F9A52F3}"/>
-            </a:ext>
-          </a:extLst>
-        </p:cNvPr>
+        <p:cNvPr id="1" name=""/>
         <p:cNvGrpSpPr/>
         <p:nvPr/>
       </p:nvGrpSpPr>
@@ -1942,13 +2076,7 @@
       </p:grpSpPr>
       <p:sp>
         <p:nvSpPr>
-          <p:cNvPr id="2" name="Slide Image Placeholder 1">
-            <a:extLst>
-              <a:ext uri="{FF2B5EF4-FFF2-40B4-BE49-F238E27FC236}">
-                <a16:creationId xmlns:a16="http://schemas.microsoft.com/office/drawing/2014/main" id="{70001B9E-A306-32F6-EEB3-463BA5192F76}"/>
-              </a:ext>
-            </a:extLst>
-          </p:cNvPr>
+          <p:cNvPr id="2" name="Slide Image Placeholder 1"/>
           <p:cNvSpPr>
             <a:spLocks noGrp="1" noRot="1" noChangeAspect="1"/>
           </p:cNvSpPr>
@@ -1967,13 +2095,7 @@
       </p:sp>
       <p:sp>
         <p:nvSpPr>
-          <p:cNvPr id="3" name="Notes Placeholder 2">
-            <a:extLst>
-              <a:ext uri="{FF2B5EF4-FFF2-40B4-BE49-F238E27FC236}">
-                <a16:creationId xmlns:a16="http://schemas.microsoft.com/office/drawing/2014/main" id="{68026D17-9F45-B6A1-4877-E6D223319FFB}"/>
-              </a:ext>
-            </a:extLst>
-          </p:cNvPr>
+          <p:cNvPr id="3" name="Notes Placeholder 2"/>
           <p:cNvSpPr>
             <a:spLocks noGrp="1"/>
           </p:cNvSpPr>
@@ -1992,13 +2114,7 @@
       </p:sp>
       <p:sp>
         <p:nvSpPr>
-          <p:cNvPr id="4" name="Slide Number Placeholder 3">
-            <a:extLst>
-              <a:ext uri="{FF2B5EF4-FFF2-40B4-BE49-F238E27FC236}">
-                <a16:creationId xmlns:a16="http://schemas.microsoft.com/office/drawing/2014/main" id="{0A797C3D-ACFE-BEC9-8D88-5F901275DDCC}"/>
-              </a:ext>
-            </a:extLst>
-          </p:cNvPr>
+          <p:cNvPr id="4" name="Slide Number Placeholder 3"/>
           <p:cNvSpPr>
             <a:spLocks noGrp="1"/>
           </p:cNvSpPr>
@@ -2022,7 +2138,7 @@
     </p:spTree>
     <p:extLst>
       <p:ext uri="{BB962C8B-B14F-4D97-AF65-F5344CB8AC3E}">
-        <p14:creationId xmlns:p14="http://schemas.microsoft.com/office/powerpoint/2010/main" val="571515566"/>
+        <p14:creationId xmlns:p14="http://schemas.microsoft.com/office/powerpoint/2010/main" val="1024086991"/>
       </p:ext>
     </p:extLst>
   </p:cSld>
@@ -2475,40 +2591,6 @@
       </p:sp>
       <p:sp>
         <p:nvSpPr>
-          <p:cNvPr id="5" name="Shape 3"/>
-          <p:cNvSpPr/>
-          <p:nvPr/>
-        </p:nvSpPr>
-        <p:spPr>
-          <a:xfrm>
-            <a:off x="3886200" y="365760"/>
-            <a:ext cx="1371600" cy="1371600"/>
-          </a:xfrm>
-          <a:prstGeom prst="ellipse">
-            <a:avLst/>
-          </a:prstGeom>
-          <a:solidFill>
-            <a:srgbClr val="61DAFB">
-              <a:alpha val="80000"/>
-            </a:srgbClr>
-          </a:solidFill>
-          <a:ln w="25400">
-            <a:solidFill>
-              <a:srgbClr val="61DAFB"/>
-            </a:solidFill>
-            <a:prstDash val="solid"/>
-          </a:ln>
-        </p:spPr>
-        <p:txBody>
-          <a:bodyPr/>
-          <a:lstStyle/>
-          <a:p>
-            <a:endParaRPr lang="pt-BR"/>
-          </a:p>
-        </p:txBody>
-      </p:sp>
-      <p:sp>
-        <p:nvSpPr>
           <p:cNvPr id="6" name="Text 4"/>
           <p:cNvSpPr/>
           <p:nvPr/>
@@ -2720,6 +2802,1391 @@
 </file>
 
 <file path=ppt/slides/slide10.xml><?xml version="1.0" encoding="utf-8"?>
+<p:sld xmlns:a="http://schemas.openxmlformats.org/drawingml/2006/main" xmlns:r="http://schemas.openxmlformats.org/officeDocument/2006/relationships" xmlns:p="http://schemas.openxmlformats.org/presentationml/2006/main">
+  <p:cSld>
+    <p:bg>
+      <p:bgPr>
+        <a:solidFill>
+          <a:srgbClr val="F5F7FA"/>
+        </a:solidFill>
+        <a:effectLst/>
+      </p:bgPr>
+    </p:bg>
+    <p:spTree>
+      <p:nvGrpSpPr>
+        <p:cNvPr id="1" name="">
+          <a:extLst>
+            <a:ext uri="{FF2B5EF4-FFF2-40B4-BE49-F238E27FC236}">
+              <a16:creationId xmlns:a16="http://schemas.microsoft.com/office/drawing/2014/main" id="{96555E4A-C135-A656-2A54-892BB03A76BE}"/>
+            </a:ext>
+          </a:extLst>
+        </p:cNvPr>
+        <p:cNvGrpSpPr/>
+        <p:nvPr/>
+      </p:nvGrpSpPr>
+      <p:grpSpPr>
+        <a:xfrm>
+          <a:off x="0" y="0"/>
+          <a:ext cx="0" cy="0"/>
+          <a:chOff x="0" y="0"/>
+          <a:chExt cx="0" cy="0"/>
+        </a:xfrm>
+      </p:grpSpPr>
+      <p:sp>
+        <p:nvSpPr>
+          <p:cNvPr id="2" name="Shape 0">
+            <a:extLst>
+              <a:ext uri="{FF2B5EF4-FFF2-40B4-BE49-F238E27FC236}">
+                <a16:creationId xmlns:a16="http://schemas.microsoft.com/office/drawing/2014/main" id="{E847CCE0-37DD-3E5B-4F30-EA9C2B395DE6}"/>
+              </a:ext>
+            </a:extLst>
+          </p:cNvPr>
+          <p:cNvSpPr/>
+          <p:nvPr/>
+        </p:nvSpPr>
+        <p:spPr>
+          <a:xfrm>
+            <a:off x="0" y="0"/>
+            <a:ext cx="9144000" cy="685800"/>
+          </a:xfrm>
+          <a:prstGeom prst="rect">
+            <a:avLst/>
+          </a:prstGeom>
+          <a:solidFill>
+            <a:srgbClr val="20232A"/>
+          </a:solidFill>
+          <a:ln w="12700">
+            <a:solidFill>
+              <a:srgbClr val="20232A"/>
+            </a:solidFill>
+            <a:prstDash val="solid"/>
+          </a:ln>
+        </p:spPr>
+        <p:txBody>
+          <a:bodyPr/>
+          <a:lstStyle/>
+          <a:p>
+            <a:endParaRPr lang="pt-BR"/>
+          </a:p>
+        </p:txBody>
+      </p:sp>
+      <p:sp>
+        <p:nvSpPr>
+          <p:cNvPr id="3" name="Shape 1">
+            <a:extLst>
+              <a:ext uri="{FF2B5EF4-FFF2-40B4-BE49-F238E27FC236}">
+                <a16:creationId xmlns:a16="http://schemas.microsoft.com/office/drawing/2014/main" id="{2C53A907-2ED6-269E-9EFC-5257B50E0D25}"/>
+              </a:ext>
+            </a:extLst>
+          </p:cNvPr>
+          <p:cNvSpPr/>
+          <p:nvPr/>
+        </p:nvSpPr>
+        <p:spPr>
+          <a:xfrm>
+            <a:off x="365760" y="109728"/>
+            <a:ext cx="1005840" cy="457200"/>
+          </a:xfrm>
+          <a:prstGeom prst="rect">
+            <a:avLst/>
+          </a:prstGeom>
+          <a:solidFill>
+            <a:srgbClr val="CB356B"/>
+          </a:solidFill>
+          <a:ln w="12700">
+            <a:solidFill>
+              <a:srgbClr val="CB356B"/>
+            </a:solidFill>
+            <a:prstDash val="solid"/>
+          </a:ln>
+        </p:spPr>
+        <p:txBody>
+          <a:bodyPr/>
+          <a:lstStyle/>
+          <a:p>
+            <a:endParaRPr lang="pt-BR"/>
+          </a:p>
+        </p:txBody>
+      </p:sp>
+      <p:sp>
+        <p:nvSpPr>
+          <p:cNvPr id="4" name="Text 2">
+            <a:extLst>
+              <a:ext uri="{FF2B5EF4-FFF2-40B4-BE49-F238E27FC236}">
+                <a16:creationId xmlns:a16="http://schemas.microsoft.com/office/drawing/2014/main" id="{173422ED-9346-FA72-8F4C-9F4F75631774}"/>
+              </a:ext>
+            </a:extLst>
+          </p:cNvPr>
+          <p:cNvSpPr/>
+          <p:nvPr/>
+        </p:nvSpPr>
+        <p:spPr>
+          <a:xfrm>
+            <a:off x="365760" y="109728"/>
+            <a:ext cx="1005840" cy="457200"/>
+          </a:xfrm>
+          <a:prstGeom prst="rect">
+            <a:avLst/>
+          </a:prstGeom>
+          <a:noFill/>
+          <a:ln/>
+        </p:spPr>
+        <p:txBody>
+          <a:bodyPr wrap="square" lIns="0" tIns="0" rIns="0" bIns="0" rtlCol="0" anchor="ctr"/>
+          <a:lstStyle/>
+          <a:p>
+            <a:pPr marL="0" indent="0" algn="ctr">
+              <a:buNone/>
+            </a:pPr>
+            <a:r>
+              <a:rPr lang="en-US" sz="1100" b="1" dirty="0">
+                <a:solidFill>
+                  <a:srgbClr val="FFFFFF"/>
+                </a:solidFill>
+              </a:rPr>
+              <a:t>Lesson 05</a:t>
+            </a:r>
+            <a:endParaRPr lang="en-US" sz="1100" dirty="0"/>
+          </a:p>
+        </p:txBody>
+      </p:sp>
+      <p:sp>
+        <p:nvSpPr>
+          <p:cNvPr id="5" name="Text 3">
+            <a:extLst>
+              <a:ext uri="{FF2B5EF4-FFF2-40B4-BE49-F238E27FC236}">
+                <a16:creationId xmlns:a16="http://schemas.microsoft.com/office/drawing/2014/main" id="{03AAFBB0-38DC-4316-E1D0-CB268E4BC08E}"/>
+              </a:ext>
+            </a:extLst>
+          </p:cNvPr>
+          <p:cNvSpPr/>
+          <p:nvPr/>
+        </p:nvSpPr>
+        <p:spPr>
+          <a:xfrm>
+            <a:off x="1508760" y="109728"/>
+            <a:ext cx="7315200" cy="457200"/>
+          </a:xfrm>
+          <a:prstGeom prst="rect">
+            <a:avLst/>
+          </a:prstGeom>
+          <a:noFill/>
+          <a:ln/>
+        </p:spPr>
+        <p:txBody>
+          <a:bodyPr wrap="square" lIns="0" tIns="0" rIns="0" bIns="0" rtlCol="0" anchor="ctr"/>
+          <a:lstStyle/>
+          <a:p>
+            <a:pPr marL="0" indent="0">
+              <a:buNone/>
+            </a:pPr>
+            <a:r>
+              <a:rPr lang="en-US" sz="1800" b="1" dirty="0" err="1">
+                <a:solidFill>
+                  <a:srgbClr val="61DAFB"/>
+                </a:solidFill>
+              </a:rPr>
+              <a:t>Inicio.jsx</a:t>
+            </a:r>
+            <a:endParaRPr lang="en-US" sz="1800" dirty="0"/>
+          </a:p>
+        </p:txBody>
+      </p:sp>
+      <p:sp>
+        <p:nvSpPr>
+          <p:cNvPr id="6" name="Shape 4">
+            <a:extLst>
+              <a:ext uri="{FF2B5EF4-FFF2-40B4-BE49-F238E27FC236}">
+                <a16:creationId xmlns:a16="http://schemas.microsoft.com/office/drawing/2014/main" id="{47033D90-9216-0E80-EB91-53981B39DE57}"/>
+              </a:ext>
+            </a:extLst>
+          </p:cNvPr>
+          <p:cNvSpPr/>
+          <p:nvPr/>
+        </p:nvSpPr>
+        <p:spPr>
+          <a:xfrm>
+            <a:off x="457200" y="804672"/>
+            <a:ext cx="4572000" cy="4206240"/>
+          </a:xfrm>
+          <a:prstGeom prst="rect">
+            <a:avLst/>
+          </a:prstGeom>
+          <a:solidFill>
+            <a:srgbClr val="1E1E2E"/>
+          </a:solidFill>
+          <a:ln w="12700">
+            <a:solidFill>
+              <a:srgbClr val="2D2D3F"/>
+            </a:solidFill>
+            <a:prstDash val="solid"/>
+          </a:ln>
+        </p:spPr>
+        <p:txBody>
+          <a:bodyPr/>
+          <a:lstStyle/>
+          <a:p>
+            <a:endParaRPr lang="pt-BR"/>
+          </a:p>
+        </p:txBody>
+      </p:sp>
+      <p:sp>
+        <p:nvSpPr>
+          <p:cNvPr id="7" name="Text 5">
+            <a:extLst>
+              <a:ext uri="{FF2B5EF4-FFF2-40B4-BE49-F238E27FC236}">
+                <a16:creationId xmlns:a16="http://schemas.microsoft.com/office/drawing/2014/main" id="{597E9854-FF27-4F49-83EE-98F6E37377AB}"/>
+              </a:ext>
+            </a:extLst>
+          </p:cNvPr>
+          <p:cNvSpPr/>
+          <p:nvPr/>
+        </p:nvSpPr>
+        <p:spPr>
+          <a:xfrm>
+            <a:off x="594360" y="896112"/>
+            <a:ext cx="4297680" cy="4023360"/>
+          </a:xfrm>
+          <a:prstGeom prst="rect">
+            <a:avLst/>
+          </a:prstGeom>
+          <a:noFill/>
+          <a:ln/>
+        </p:spPr>
+        <p:txBody>
+          <a:bodyPr wrap="square" lIns="0" tIns="0" rIns="0" bIns="0" rtlCol="0" anchor="t"/>
+          <a:lstStyle/>
+          <a:p>
+            <a:r>
+              <a:rPr lang="pt-BR" sz="1200" dirty="0" err="1">
+                <a:solidFill>
+                  <a:srgbClr val="CDD6F4"/>
+                </a:solidFill>
+                <a:latin typeface="Consolas" pitchFamily="34" charset="0"/>
+              </a:rPr>
+              <a:t>import</a:t>
+            </a:r>
+            <a:r>
+              <a:rPr lang="pt-BR" sz="1200" dirty="0">
+                <a:solidFill>
+                  <a:srgbClr val="CDD6F4"/>
+                </a:solidFill>
+                <a:latin typeface="Consolas" pitchFamily="34" charset="0"/>
+              </a:rPr>
+              <a:t> { Titulo } </a:t>
+            </a:r>
+            <a:r>
+              <a:rPr lang="pt-BR" sz="1200" dirty="0" err="1">
+                <a:solidFill>
+                  <a:srgbClr val="CDD6F4"/>
+                </a:solidFill>
+                <a:latin typeface="Consolas" pitchFamily="34" charset="0"/>
+              </a:rPr>
+              <a:t>from</a:t>
+            </a:r>
+            <a:r>
+              <a:rPr lang="pt-BR" sz="1200" dirty="0">
+                <a:solidFill>
+                  <a:srgbClr val="CDD6F4"/>
+                </a:solidFill>
+                <a:latin typeface="Consolas" pitchFamily="34" charset="0"/>
+              </a:rPr>
+              <a:t> "./componentes/Titulo" </a:t>
+            </a:r>
+          </a:p>
+          <a:p>
+            <a:endParaRPr lang="pt-BR" sz="1200" dirty="0">
+              <a:solidFill>
+                <a:srgbClr val="CDD6F4"/>
+              </a:solidFill>
+              <a:latin typeface="Consolas" pitchFamily="34" charset="0"/>
+            </a:endParaRPr>
+          </a:p>
+          <a:p>
+            <a:endParaRPr lang="pt-BR" sz="1200" dirty="0">
+              <a:solidFill>
+                <a:srgbClr val="CDD6F4"/>
+              </a:solidFill>
+              <a:latin typeface="Consolas" pitchFamily="34" charset="0"/>
+            </a:endParaRPr>
+          </a:p>
+          <a:p>
+            <a:r>
+              <a:rPr lang="pt-BR" sz="1200" dirty="0" err="1">
+                <a:solidFill>
+                  <a:srgbClr val="CDD6F4"/>
+                </a:solidFill>
+                <a:latin typeface="Consolas" pitchFamily="34" charset="0"/>
+              </a:rPr>
+              <a:t>export</a:t>
+            </a:r>
+            <a:r>
+              <a:rPr lang="pt-BR" sz="1200" dirty="0">
+                <a:solidFill>
+                  <a:srgbClr val="CDD6F4"/>
+                </a:solidFill>
+                <a:latin typeface="Consolas" pitchFamily="34" charset="0"/>
+              </a:rPr>
+              <a:t> </a:t>
+            </a:r>
+            <a:r>
+              <a:rPr lang="pt-BR" sz="1200" dirty="0" err="1">
+                <a:solidFill>
+                  <a:srgbClr val="CDD6F4"/>
+                </a:solidFill>
+                <a:latin typeface="Consolas" pitchFamily="34" charset="0"/>
+              </a:rPr>
+              <a:t>function</a:t>
+            </a:r>
+            <a:r>
+              <a:rPr lang="pt-BR" sz="1200" dirty="0">
+                <a:solidFill>
+                  <a:srgbClr val="CDD6F4"/>
+                </a:solidFill>
+                <a:latin typeface="Consolas" pitchFamily="34" charset="0"/>
+              </a:rPr>
+              <a:t> Inicio() {</a:t>
+            </a:r>
+          </a:p>
+          <a:p>
+            <a:r>
+              <a:rPr lang="pt-BR" sz="1200" dirty="0">
+                <a:solidFill>
+                  <a:srgbClr val="CDD6F4"/>
+                </a:solidFill>
+                <a:latin typeface="Consolas" pitchFamily="34" charset="0"/>
+              </a:rPr>
+              <a:t> </a:t>
+            </a:r>
+            <a:r>
+              <a:rPr lang="pt-BR" sz="1200" dirty="0" err="1">
+                <a:solidFill>
+                  <a:srgbClr val="CDD6F4"/>
+                </a:solidFill>
+                <a:latin typeface="Consolas" pitchFamily="34" charset="0"/>
+              </a:rPr>
+              <a:t>return</a:t>
+            </a:r>
+            <a:r>
+              <a:rPr lang="pt-BR" sz="1200" dirty="0">
+                <a:solidFill>
+                  <a:srgbClr val="CDD6F4"/>
+                </a:solidFill>
+                <a:latin typeface="Consolas" pitchFamily="34" charset="0"/>
+              </a:rPr>
+              <a:t> (</a:t>
+            </a:r>
+          </a:p>
+          <a:p>
+            <a:r>
+              <a:rPr lang="pt-BR" sz="1200" dirty="0">
+                <a:solidFill>
+                  <a:srgbClr val="CDD6F4"/>
+                </a:solidFill>
+                <a:latin typeface="Consolas" pitchFamily="34" charset="0"/>
+              </a:rPr>
+              <a:t>  &lt;&gt; </a:t>
+            </a:r>
+          </a:p>
+          <a:p>
+            <a:r>
+              <a:rPr lang="pt-BR" sz="1200" dirty="0">
+                <a:solidFill>
+                  <a:srgbClr val="CDD6F4"/>
+                </a:solidFill>
+                <a:latin typeface="Consolas" pitchFamily="34" charset="0"/>
+              </a:rPr>
+              <a:t>    &lt;Titulo nome="Velejando com o </a:t>
+            </a:r>
+            <a:r>
+              <a:rPr lang="pt-BR" sz="1200" dirty="0" err="1">
+                <a:solidFill>
+                  <a:srgbClr val="CDD6F4"/>
+                </a:solidFill>
+                <a:latin typeface="Consolas" pitchFamily="34" charset="0"/>
+              </a:rPr>
+              <a:t>React</a:t>
+            </a:r>
+            <a:r>
+              <a:rPr lang="pt-BR" sz="1200" dirty="0">
+                <a:solidFill>
+                  <a:srgbClr val="CDD6F4"/>
+                </a:solidFill>
+                <a:latin typeface="Consolas" pitchFamily="34" charset="0"/>
+              </a:rPr>
+              <a:t>" /&gt;</a:t>
+            </a:r>
+          </a:p>
+          <a:p>
+            <a:r>
+              <a:rPr lang="pt-BR" sz="1200" dirty="0">
+                <a:solidFill>
+                  <a:srgbClr val="CDD6F4"/>
+                </a:solidFill>
+                <a:latin typeface="Consolas" pitchFamily="34" charset="0"/>
+              </a:rPr>
+              <a:t>  &lt;/&gt; </a:t>
+            </a:r>
+          </a:p>
+          <a:p>
+            <a:r>
+              <a:rPr lang="pt-BR" sz="1200" dirty="0">
+                <a:solidFill>
+                  <a:srgbClr val="CDD6F4"/>
+                </a:solidFill>
+                <a:latin typeface="Consolas" pitchFamily="34" charset="0"/>
+              </a:rPr>
+              <a:t> )</a:t>
+            </a:r>
+          </a:p>
+          <a:p>
+            <a:r>
+              <a:rPr lang="pt-BR" sz="1200" dirty="0">
+                <a:solidFill>
+                  <a:srgbClr val="CDD6F4"/>
+                </a:solidFill>
+                <a:latin typeface="Consolas" pitchFamily="34" charset="0"/>
+              </a:rPr>
+              <a:t>}</a:t>
+            </a:r>
+            <a:endParaRPr lang="en-US" sz="1200" dirty="0">
+              <a:solidFill>
+                <a:srgbClr val="CDD6F4"/>
+              </a:solidFill>
+              <a:latin typeface="Consolas" pitchFamily="34" charset="0"/>
+            </a:endParaRPr>
+          </a:p>
+        </p:txBody>
+      </p:sp>
+      <p:sp>
+        <p:nvSpPr>
+          <p:cNvPr id="8" name="Text 6">
+            <a:extLst>
+              <a:ext uri="{FF2B5EF4-FFF2-40B4-BE49-F238E27FC236}">
+                <a16:creationId xmlns:a16="http://schemas.microsoft.com/office/drawing/2014/main" id="{46DD0FE1-47CC-8AF4-DB31-4970D14D8861}"/>
+              </a:ext>
+            </a:extLst>
+          </p:cNvPr>
+          <p:cNvSpPr/>
+          <p:nvPr/>
+        </p:nvSpPr>
+        <p:spPr>
+          <a:xfrm>
+            <a:off x="5303520" y="804672"/>
+            <a:ext cx="3566160" cy="365760"/>
+          </a:xfrm>
+          <a:prstGeom prst="rect">
+            <a:avLst/>
+          </a:prstGeom>
+          <a:noFill/>
+          <a:ln/>
+        </p:spPr>
+        <p:txBody>
+          <a:bodyPr wrap="square" lIns="0" tIns="0" rIns="0" bIns="0" rtlCol="0" anchor="ctr"/>
+          <a:lstStyle/>
+          <a:p>
+            <a:pPr marL="0" indent="0">
+              <a:buNone/>
+            </a:pPr>
+            <a:r>
+              <a:rPr lang="en-US" sz="1300" b="1" dirty="0">
+                <a:solidFill>
+                  <a:srgbClr val="20232A"/>
+                </a:solidFill>
+              </a:rPr>
+              <a:t>Como a data é transformada:</a:t>
+            </a:r>
+            <a:endParaRPr lang="en-US" sz="1300" dirty="0"/>
+          </a:p>
+        </p:txBody>
+      </p:sp>
+      <p:sp>
+        <p:nvSpPr>
+          <p:cNvPr id="9" name="Shape 7">
+            <a:extLst>
+              <a:ext uri="{FF2B5EF4-FFF2-40B4-BE49-F238E27FC236}">
+                <a16:creationId xmlns:a16="http://schemas.microsoft.com/office/drawing/2014/main" id="{41D1F457-E5D1-A652-397B-0DDE4A5DED89}"/>
+              </a:ext>
+            </a:extLst>
+          </p:cNvPr>
+          <p:cNvSpPr/>
+          <p:nvPr/>
+        </p:nvSpPr>
+        <p:spPr>
+          <a:xfrm>
+            <a:off x="5303520" y="1261872"/>
+            <a:ext cx="3566160" cy="777240"/>
+          </a:xfrm>
+          <a:prstGeom prst="rect">
+            <a:avLst/>
+          </a:prstGeom>
+          <a:solidFill>
+            <a:srgbClr val="FFF3CD"/>
+          </a:solidFill>
+          <a:ln w="12700">
+            <a:solidFill>
+              <a:srgbClr val="E0E0E0"/>
+            </a:solidFill>
+            <a:prstDash val="solid"/>
+          </a:ln>
+        </p:spPr>
+        <p:txBody>
+          <a:bodyPr/>
+          <a:lstStyle/>
+          <a:p>
+            <a:endParaRPr lang="pt-BR"/>
+          </a:p>
+        </p:txBody>
+      </p:sp>
+      <p:sp>
+        <p:nvSpPr>
+          <p:cNvPr id="10" name="Shape 8">
+            <a:extLst>
+              <a:ext uri="{FF2B5EF4-FFF2-40B4-BE49-F238E27FC236}">
+                <a16:creationId xmlns:a16="http://schemas.microsoft.com/office/drawing/2014/main" id="{98AB11EE-4EFE-8402-04B1-9B61D9BEEFB6}"/>
+              </a:ext>
+            </a:extLst>
+          </p:cNvPr>
+          <p:cNvSpPr/>
+          <p:nvPr/>
+        </p:nvSpPr>
+        <p:spPr>
+          <a:xfrm>
+            <a:off x="5440680" y="1353312"/>
+            <a:ext cx="365760" cy="365760"/>
+          </a:xfrm>
+          <a:prstGeom prst="ellipse">
+            <a:avLst/>
+          </a:prstGeom>
+          <a:solidFill>
+            <a:srgbClr val="20232A"/>
+          </a:solidFill>
+          <a:ln w="12700">
+            <a:solidFill>
+              <a:srgbClr val="20232A"/>
+            </a:solidFill>
+            <a:prstDash val="solid"/>
+          </a:ln>
+        </p:spPr>
+        <p:txBody>
+          <a:bodyPr/>
+          <a:lstStyle/>
+          <a:p>
+            <a:endParaRPr lang="pt-BR"/>
+          </a:p>
+        </p:txBody>
+      </p:sp>
+      <p:sp>
+        <p:nvSpPr>
+          <p:cNvPr id="11" name="Text 9">
+            <a:extLst>
+              <a:ext uri="{FF2B5EF4-FFF2-40B4-BE49-F238E27FC236}">
+                <a16:creationId xmlns:a16="http://schemas.microsoft.com/office/drawing/2014/main" id="{AEAC39CC-EB0B-5466-A37F-3C27FA355AB4}"/>
+              </a:ext>
+            </a:extLst>
+          </p:cNvPr>
+          <p:cNvSpPr/>
+          <p:nvPr/>
+        </p:nvSpPr>
+        <p:spPr>
+          <a:xfrm>
+            <a:off x="5440680" y="1353312"/>
+            <a:ext cx="365760" cy="365760"/>
+          </a:xfrm>
+          <a:prstGeom prst="rect">
+            <a:avLst/>
+          </a:prstGeom>
+          <a:noFill/>
+          <a:ln/>
+        </p:spPr>
+        <p:txBody>
+          <a:bodyPr wrap="square" lIns="0" tIns="0" rIns="0" bIns="0" rtlCol="0" anchor="ctr"/>
+          <a:lstStyle/>
+          <a:p>
+            <a:pPr marL="0" indent="0" algn="ctr">
+              <a:buNone/>
+            </a:pPr>
+            <a:r>
+              <a:rPr lang="en-US" sz="1200" b="1" dirty="0">
+                <a:solidFill>
+                  <a:srgbClr val="FFFFFF"/>
+                </a:solidFill>
+              </a:rPr>
+              <a:t>1</a:t>
+            </a:r>
+            <a:endParaRPr lang="en-US" sz="1200" dirty="0"/>
+          </a:p>
+        </p:txBody>
+      </p:sp>
+      <p:sp>
+        <p:nvSpPr>
+          <p:cNvPr id="12" name="Text 10">
+            <a:extLst>
+              <a:ext uri="{FF2B5EF4-FFF2-40B4-BE49-F238E27FC236}">
+                <a16:creationId xmlns:a16="http://schemas.microsoft.com/office/drawing/2014/main" id="{C3FDEF28-51C1-C1CD-1124-E508BFBE50A8}"/>
+              </a:ext>
+            </a:extLst>
+          </p:cNvPr>
+          <p:cNvSpPr/>
+          <p:nvPr/>
+        </p:nvSpPr>
+        <p:spPr>
+          <a:xfrm>
+            <a:off x="5897880" y="1298448"/>
+            <a:ext cx="2834640" cy="274320"/>
+          </a:xfrm>
+          <a:prstGeom prst="rect">
+            <a:avLst/>
+          </a:prstGeom>
+          <a:noFill/>
+          <a:ln/>
+        </p:spPr>
+        <p:txBody>
+          <a:bodyPr wrap="square" lIns="0" tIns="0" rIns="0" bIns="0" rtlCol="0" anchor="ctr"/>
+          <a:lstStyle/>
+          <a:p>
+            <a:r>
+              <a:rPr lang="pt-BR" sz="1100" b="1" dirty="0">
+                <a:solidFill>
+                  <a:srgbClr val="20232A"/>
+                </a:solidFill>
+                <a:latin typeface="Consolas" pitchFamily="34" charset="0"/>
+              </a:rPr>
+              <a:t>1. O Componente (&lt;Titulo ... /&gt;)</a:t>
+            </a:r>
+            <a:endParaRPr lang="en-US" sz="1100" b="1" dirty="0">
+              <a:solidFill>
+                <a:srgbClr val="20232A"/>
+              </a:solidFill>
+              <a:latin typeface="Consolas" pitchFamily="34" charset="0"/>
+            </a:endParaRPr>
+          </a:p>
+        </p:txBody>
+      </p:sp>
+      <p:sp>
+        <p:nvSpPr>
+          <p:cNvPr id="13" name="Text 11">
+            <a:extLst>
+              <a:ext uri="{FF2B5EF4-FFF2-40B4-BE49-F238E27FC236}">
+                <a16:creationId xmlns:a16="http://schemas.microsoft.com/office/drawing/2014/main" id="{AE5C6735-1286-E691-2FCF-22CD585BAC1C}"/>
+              </a:ext>
+            </a:extLst>
+          </p:cNvPr>
+          <p:cNvSpPr/>
+          <p:nvPr/>
+        </p:nvSpPr>
+        <p:spPr>
+          <a:xfrm>
+            <a:off x="5897880" y="1591056"/>
+            <a:ext cx="2834640" cy="274320"/>
+          </a:xfrm>
+          <a:prstGeom prst="rect">
+            <a:avLst/>
+          </a:prstGeom>
+          <a:noFill/>
+          <a:ln/>
+        </p:spPr>
+        <p:txBody>
+          <a:bodyPr wrap="square" lIns="0" tIns="0" rIns="0" bIns="0" rtlCol="0" anchor="ctr"/>
+          <a:lstStyle/>
+          <a:p>
+            <a:r>
+              <a:rPr lang="en-US" sz="1000" dirty="0">
+                <a:solidFill>
+                  <a:srgbClr val="555F6E"/>
+                </a:solidFill>
+              </a:rPr>
+              <a:t>→ </a:t>
+            </a:r>
+            <a:r>
+              <a:rPr lang="pt-BR" sz="1000" dirty="0">
+                <a:solidFill>
+                  <a:srgbClr val="555F6E"/>
+                </a:solidFill>
+              </a:rPr>
+              <a:t>Em vez de usar uma </a:t>
+            </a:r>
+            <a:r>
+              <a:rPr lang="pt-BR" sz="1000" dirty="0" err="1">
+                <a:solidFill>
+                  <a:srgbClr val="555F6E"/>
+                </a:solidFill>
+              </a:rPr>
+              <a:t>tag</a:t>
+            </a:r>
+            <a:r>
+              <a:rPr lang="pt-BR" sz="1000" dirty="0">
+                <a:solidFill>
+                  <a:srgbClr val="555F6E"/>
+                </a:solidFill>
+              </a:rPr>
+              <a:t> HTML padrão (como &lt;h1&gt; ou &lt;</a:t>
+            </a:r>
+            <a:r>
+              <a:rPr lang="pt-BR" sz="1000" dirty="0" err="1">
+                <a:solidFill>
+                  <a:srgbClr val="555F6E"/>
+                </a:solidFill>
+              </a:rPr>
+              <a:t>div</a:t>
+            </a:r>
+            <a:r>
+              <a:rPr lang="pt-BR" sz="1000" dirty="0">
+                <a:solidFill>
+                  <a:srgbClr val="555F6E"/>
+                </a:solidFill>
+              </a:rPr>
+              <a:t>&gt;), você está chamando um componente chamado Titulo.</a:t>
+            </a:r>
+            <a:endParaRPr lang="en-US" sz="1000" dirty="0">
+              <a:solidFill>
+                <a:srgbClr val="555F6E"/>
+              </a:solidFill>
+            </a:endParaRPr>
+          </a:p>
+        </p:txBody>
+      </p:sp>
+      <p:sp>
+        <p:nvSpPr>
+          <p:cNvPr id="14" name="Shape 12">
+            <a:extLst>
+              <a:ext uri="{FF2B5EF4-FFF2-40B4-BE49-F238E27FC236}">
+                <a16:creationId xmlns:a16="http://schemas.microsoft.com/office/drawing/2014/main" id="{4F2C501A-60D0-CD05-FE7A-4F465DC664F4}"/>
+              </a:ext>
+            </a:extLst>
+          </p:cNvPr>
+          <p:cNvSpPr/>
+          <p:nvPr/>
+        </p:nvSpPr>
+        <p:spPr>
+          <a:xfrm>
+            <a:off x="5303520" y="2176272"/>
+            <a:ext cx="3566160" cy="777240"/>
+          </a:xfrm>
+          <a:prstGeom prst="rect">
+            <a:avLst/>
+          </a:prstGeom>
+          <a:solidFill>
+            <a:srgbClr val="D1ECF1"/>
+          </a:solidFill>
+          <a:ln w="12700">
+            <a:solidFill>
+              <a:srgbClr val="E0E0E0"/>
+            </a:solidFill>
+            <a:prstDash val="solid"/>
+          </a:ln>
+        </p:spPr>
+        <p:txBody>
+          <a:bodyPr/>
+          <a:lstStyle/>
+          <a:p>
+            <a:endParaRPr lang="pt-BR"/>
+          </a:p>
+        </p:txBody>
+      </p:sp>
+      <p:sp>
+        <p:nvSpPr>
+          <p:cNvPr id="15" name="Shape 13">
+            <a:extLst>
+              <a:ext uri="{FF2B5EF4-FFF2-40B4-BE49-F238E27FC236}">
+                <a16:creationId xmlns:a16="http://schemas.microsoft.com/office/drawing/2014/main" id="{E1DFFD6C-6FE4-B08A-4748-D4D8BFA26B05}"/>
+              </a:ext>
+            </a:extLst>
+          </p:cNvPr>
+          <p:cNvSpPr/>
+          <p:nvPr/>
+        </p:nvSpPr>
+        <p:spPr>
+          <a:xfrm>
+            <a:off x="5440680" y="2267712"/>
+            <a:ext cx="365760" cy="365760"/>
+          </a:xfrm>
+          <a:prstGeom prst="ellipse">
+            <a:avLst/>
+          </a:prstGeom>
+          <a:solidFill>
+            <a:srgbClr val="20232A"/>
+          </a:solidFill>
+          <a:ln w="12700">
+            <a:solidFill>
+              <a:srgbClr val="20232A"/>
+            </a:solidFill>
+            <a:prstDash val="solid"/>
+          </a:ln>
+        </p:spPr>
+        <p:txBody>
+          <a:bodyPr/>
+          <a:lstStyle/>
+          <a:p>
+            <a:endParaRPr lang="pt-BR"/>
+          </a:p>
+        </p:txBody>
+      </p:sp>
+      <p:sp>
+        <p:nvSpPr>
+          <p:cNvPr id="16" name="Text 14">
+            <a:extLst>
+              <a:ext uri="{FF2B5EF4-FFF2-40B4-BE49-F238E27FC236}">
+                <a16:creationId xmlns:a16="http://schemas.microsoft.com/office/drawing/2014/main" id="{642CCEFF-6BD9-9B05-2798-BECD4897E84E}"/>
+              </a:ext>
+            </a:extLst>
+          </p:cNvPr>
+          <p:cNvSpPr/>
+          <p:nvPr/>
+        </p:nvSpPr>
+        <p:spPr>
+          <a:xfrm>
+            <a:off x="5440680" y="2267712"/>
+            <a:ext cx="365760" cy="365760"/>
+          </a:xfrm>
+          <a:prstGeom prst="rect">
+            <a:avLst/>
+          </a:prstGeom>
+          <a:noFill/>
+          <a:ln/>
+        </p:spPr>
+        <p:txBody>
+          <a:bodyPr wrap="square" lIns="0" tIns="0" rIns="0" bIns="0" rtlCol="0" anchor="ctr"/>
+          <a:lstStyle/>
+          <a:p>
+            <a:pPr marL="0" indent="0" algn="ctr">
+              <a:buNone/>
+            </a:pPr>
+            <a:r>
+              <a:rPr lang="en-US" sz="1200" b="1" dirty="0">
+                <a:solidFill>
+                  <a:srgbClr val="FFFFFF"/>
+                </a:solidFill>
+              </a:rPr>
+              <a:t>2</a:t>
+            </a:r>
+            <a:endParaRPr lang="en-US" sz="1200" dirty="0"/>
+          </a:p>
+        </p:txBody>
+      </p:sp>
+      <p:sp>
+        <p:nvSpPr>
+          <p:cNvPr id="17" name="Text 15">
+            <a:extLst>
+              <a:ext uri="{FF2B5EF4-FFF2-40B4-BE49-F238E27FC236}">
+                <a16:creationId xmlns:a16="http://schemas.microsoft.com/office/drawing/2014/main" id="{52CF11EF-2D41-5074-5058-F1F501BF7AF4}"/>
+              </a:ext>
+            </a:extLst>
+          </p:cNvPr>
+          <p:cNvSpPr/>
+          <p:nvPr/>
+        </p:nvSpPr>
+        <p:spPr>
+          <a:xfrm>
+            <a:off x="5897880" y="2212848"/>
+            <a:ext cx="2834640" cy="274320"/>
+          </a:xfrm>
+          <a:prstGeom prst="rect">
+            <a:avLst/>
+          </a:prstGeom>
+          <a:noFill/>
+          <a:ln/>
+        </p:spPr>
+        <p:txBody>
+          <a:bodyPr wrap="square" lIns="0" tIns="0" rIns="0" bIns="0" rtlCol="0" anchor="ctr"/>
+          <a:lstStyle/>
+          <a:p>
+            <a:r>
+              <a:rPr lang="pt-BR" sz="1100" b="1" dirty="0">
+                <a:solidFill>
+                  <a:srgbClr val="20232A"/>
+                </a:solidFill>
+                <a:latin typeface="Consolas" pitchFamily="34" charset="0"/>
+              </a:rPr>
+              <a:t>A Propriedade ou Prop (nome=)</a:t>
+            </a:r>
+            <a:endParaRPr lang="en-US" sz="1100" b="1" dirty="0">
+              <a:solidFill>
+                <a:srgbClr val="20232A"/>
+              </a:solidFill>
+              <a:latin typeface="Consolas" pitchFamily="34" charset="0"/>
+            </a:endParaRPr>
+          </a:p>
+        </p:txBody>
+      </p:sp>
+      <p:sp>
+        <p:nvSpPr>
+          <p:cNvPr id="18" name="Text 16">
+            <a:extLst>
+              <a:ext uri="{FF2B5EF4-FFF2-40B4-BE49-F238E27FC236}">
+                <a16:creationId xmlns:a16="http://schemas.microsoft.com/office/drawing/2014/main" id="{A334D09F-57F0-FCC4-0EC7-1EFEB2B6259A}"/>
+              </a:ext>
+            </a:extLst>
+          </p:cNvPr>
+          <p:cNvSpPr/>
+          <p:nvPr/>
+        </p:nvSpPr>
+        <p:spPr>
+          <a:xfrm>
+            <a:off x="5897880" y="2505456"/>
+            <a:ext cx="2834640" cy="274320"/>
+          </a:xfrm>
+          <a:prstGeom prst="rect">
+            <a:avLst/>
+          </a:prstGeom>
+          <a:noFill/>
+          <a:ln/>
+        </p:spPr>
+        <p:txBody>
+          <a:bodyPr wrap="square" lIns="0" tIns="0" rIns="0" bIns="0" rtlCol="0" anchor="ctr"/>
+          <a:lstStyle/>
+          <a:p>
+            <a:r>
+              <a:rPr lang="en-US" sz="1000" dirty="0">
+                <a:solidFill>
+                  <a:srgbClr val="555F6E"/>
+                </a:solidFill>
+              </a:rPr>
+              <a:t>→ </a:t>
+            </a:r>
+            <a:r>
+              <a:rPr lang="pt-BR" sz="1000" dirty="0">
+                <a:solidFill>
+                  <a:srgbClr val="555F6E"/>
+                </a:solidFill>
+              </a:rPr>
+              <a:t>O termo </a:t>
+            </a:r>
+            <a:r>
+              <a:rPr lang="pt-BR" sz="1000" b="1" dirty="0">
+                <a:solidFill>
+                  <a:srgbClr val="555F6E"/>
+                </a:solidFill>
+              </a:rPr>
+              <a:t>nome</a:t>
+            </a:r>
+            <a:r>
+              <a:rPr lang="pt-BR" sz="1000" dirty="0">
+                <a:solidFill>
+                  <a:srgbClr val="555F6E"/>
+                </a:solidFill>
+              </a:rPr>
+              <a:t> é o que chamamos de Prop (abreviação de </a:t>
+            </a:r>
+            <a:r>
+              <a:rPr lang="pt-BR" sz="1000" dirty="0" err="1">
+                <a:solidFill>
+                  <a:srgbClr val="555F6E"/>
+                </a:solidFill>
+              </a:rPr>
+              <a:t>property</a:t>
+            </a:r>
+            <a:r>
+              <a:rPr lang="pt-BR" sz="1000" dirty="0">
+                <a:solidFill>
+                  <a:srgbClr val="555F6E"/>
+                </a:solidFill>
+              </a:rPr>
+              <a:t>). Pense nisso como o argumento de uma função</a:t>
+            </a:r>
+            <a:r>
+              <a:rPr lang="pt-BR" sz="1000" dirty="0"/>
+              <a:t>.</a:t>
+            </a:r>
+            <a:endParaRPr lang="en-US" sz="1000" dirty="0"/>
+          </a:p>
+        </p:txBody>
+      </p:sp>
+      <p:sp>
+        <p:nvSpPr>
+          <p:cNvPr id="19" name="Shape 17">
+            <a:extLst>
+              <a:ext uri="{FF2B5EF4-FFF2-40B4-BE49-F238E27FC236}">
+                <a16:creationId xmlns:a16="http://schemas.microsoft.com/office/drawing/2014/main" id="{EC4A625E-96A2-50F3-C04E-E9AF14BBA7D4}"/>
+              </a:ext>
+            </a:extLst>
+          </p:cNvPr>
+          <p:cNvSpPr/>
+          <p:nvPr/>
+        </p:nvSpPr>
+        <p:spPr>
+          <a:xfrm>
+            <a:off x="5303520" y="3090672"/>
+            <a:ext cx="3566160" cy="777240"/>
+          </a:xfrm>
+          <a:prstGeom prst="rect">
+            <a:avLst/>
+          </a:prstGeom>
+          <a:solidFill>
+            <a:srgbClr val="D4EDDA"/>
+          </a:solidFill>
+          <a:ln w="12700">
+            <a:solidFill>
+              <a:srgbClr val="E0E0E0"/>
+            </a:solidFill>
+            <a:prstDash val="solid"/>
+          </a:ln>
+        </p:spPr>
+        <p:txBody>
+          <a:bodyPr/>
+          <a:lstStyle/>
+          <a:p>
+            <a:endParaRPr lang="pt-BR"/>
+          </a:p>
+        </p:txBody>
+      </p:sp>
+      <p:sp>
+        <p:nvSpPr>
+          <p:cNvPr id="20" name="Shape 18">
+            <a:extLst>
+              <a:ext uri="{FF2B5EF4-FFF2-40B4-BE49-F238E27FC236}">
+                <a16:creationId xmlns:a16="http://schemas.microsoft.com/office/drawing/2014/main" id="{C269528E-729B-C884-B363-E667C1F54FC2}"/>
+              </a:ext>
+            </a:extLst>
+          </p:cNvPr>
+          <p:cNvSpPr/>
+          <p:nvPr/>
+        </p:nvSpPr>
+        <p:spPr>
+          <a:xfrm>
+            <a:off x="5440680" y="3182112"/>
+            <a:ext cx="365760" cy="365760"/>
+          </a:xfrm>
+          <a:prstGeom prst="ellipse">
+            <a:avLst/>
+          </a:prstGeom>
+          <a:solidFill>
+            <a:srgbClr val="20232A"/>
+          </a:solidFill>
+          <a:ln w="12700">
+            <a:solidFill>
+              <a:srgbClr val="20232A"/>
+            </a:solidFill>
+            <a:prstDash val="solid"/>
+          </a:ln>
+        </p:spPr>
+        <p:txBody>
+          <a:bodyPr/>
+          <a:lstStyle/>
+          <a:p>
+            <a:endParaRPr lang="pt-BR"/>
+          </a:p>
+        </p:txBody>
+      </p:sp>
+      <p:sp>
+        <p:nvSpPr>
+          <p:cNvPr id="21" name="Text 19">
+            <a:extLst>
+              <a:ext uri="{FF2B5EF4-FFF2-40B4-BE49-F238E27FC236}">
+                <a16:creationId xmlns:a16="http://schemas.microsoft.com/office/drawing/2014/main" id="{DF5E49DF-9738-A3C8-AAC9-AE2658ACD83B}"/>
+              </a:ext>
+            </a:extLst>
+          </p:cNvPr>
+          <p:cNvSpPr/>
+          <p:nvPr/>
+        </p:nvSpPr>
+        <p:spPr>
+          <a:xfrm>
+            <a:off x="5440680" y="3182112"/>
+            <a:ext cx="365760" cy="365760"/>
+          </a:xfrm>
+          <a:prstGeom prst="rect">
+            <a:avLst/>
+          </a:prstGeom>
+          <a:noFill/>
+          <a:ln/>
+        </p:spPr>
+        <p:txBody>
+          <a:bodyPr wrap="square" lIns="0" tIns="0" rIns="0" bIns="0" rtlCol="0" anchor="ctr"/>
+          <a:lstStyle/>
+          <a:p>
+            <a:pPr marL="0" indent="0" algn="ctr">
+              <a:buNone/>
+            </a:pPr>
+            <a:r>
+              <a:rPr lang="en-US" sz="1200" b="1" dirty="0">
+                <a:solidFill>
+                  <a:srgbClr val="FFFFFF"/>
+                </a:solidFill>
+              </a:rPr>
+              <a:t>3</a:t>
+            </a:r>
+            <a:endParaRPr lang="en-US" sz="1200" dirty="0"/>
+          </a:p>
+        </p:txBody>
+      </p:sp>
+      <p:sp>
+        <p:nvSpPr>
+          <p:cNvPr id="22" name="Text 20">
+            <a:extLst>
+              <a:ext uri="{FF2B5EF4-FFF2-40B4-BE49-F238E27FC236}">
+                <a16:creationId xmlns:a16="http://schemas.microsoft.com/office/drawing/2014/main" id="{C2AA56A4-9582-C135-4CF0-641E09DB1BEC}"/>
+              </a:ext>
+            </a:extLst>
+          </p:cNvPr>
+          <p:cNvSpPr/>
+          <p:nvPr/>
+        </p:nvSpPr>
+        <p:spPr>
+          <a:xfrm>
+            <a:off x="5897880" y="3127248"/>
+            <a:ext cx="2834640" cy="274320"/>
+          </a:xfrm>
+          <a:prstGeom prst="rect">
+            <a:avLst/>
+          </a:prstGeom>
+          <a:noFill/>
+          <a:ln/>
+        </p:spPr>
+        <p:txBody>
+          <a:bodyPr wrap="square" lIns="0" tIns="0" rIns="0" bIns="0" rtlCol="0" anchor="ctr"/>
+          <a:lstStyle/>
+          <a:p>
+            <a:r>
+              <a:rPr lang="pt-BR" sz="1100" b="1" dirty="0">
+                <a:solidFill>
+                  <a:srgbClr val="20232A"/>
+                </a:solidFill>
+                <a:latin typeface="Consolas" pitchFamily="34" charset="0"/>
+              </a:rPr>
+              <a:t>O Valor ("Velejando com o </a:t>
+            </a:r>
+            <a:r>
+              <a:rPr lang="pt-BR" sz="1100" b="1" dirty="0" err="1">
+                <a:solidFill>
+                  <a:srgbClr val="20232A"/>
+                </a:solidFill>
+                <a:latin typeface="Consolas" pitchFamily="34" charset="0"/>
+              </a:rPr>
+              <a:t>React</a:t>
+            </a:r>
+            <a:r>
+              <a:rPr lang="pt-BR" sz="1100" b="1" dirty="0">
+                <a:solidFill>
+                  <a:srgbClr val="20232A"/>
+                </a:solidFill>
+                <a:latin typeface="Consolas" pitchFamily="34" charset="0"/>
+              </a:rPr>
+              <a:t>")</a:t>
+            </a:r>
+            <a:endParaRPr lang="en-US" sz="1100" b="1" dirty="0">
+              <a:solidFill>
+                <a:srgbClr val="20232A"/>
+              </a:solidFill>
+              <a:latin typeface="Consolas" pitchFamily="34" charset="0"/>
+            </a:endParaRPr>
+          </a:p>
+        </p:txBody>
+      </p:sp>
+      <p:sp>
+        <p:nvSpPr>
+          <p:cNvPr id="23" name="Text 21">
+            <a:extLst>
+              <a:ext uri="{FF2B5EF4-FFF2-40B4-BE49-F238E27FC236}">
+                <a16:creationId xmlns:a16="http://schemas.microsoft.com/office/drawing/2014/main" id="{22569D1B-517A-D360-A513-CC8430BF733E}"/>
+              </a:ext>
+            </a:extLst>
+          </p:cNvPr>
+          <p:cNvSpPr/>
+          <p:nvPr/>
+        </p:nvSpPr>
+        <p:spPr>
+          <a:xfrm>
+            <a:off x="5897880" y="3419856"/>
+            <a:ext cx="2834640" cy="274320"/>
+          </a:xfrm>
+          <a:prstGeom prst="rect">
+            <a:avLst/>
+          </a:prstGeom>
+          <a:noFill/>
+          <a:ln/>
+        </p:spPr>
+        <p:txBody>
+          <a:bodyPr wrap="square" lIns="0" tIns="0" rIns="0" bIns="0" rtlCol="0" anchor="ctr"/>
+          <a:lstStyle/>
+          <a:p>
+            <a:r>
+              <a:rPr lang="en-US" sz="1000" dirty="0">
+                <a:solidFill>
+                  <a:srgbClr val="555F6E"/>
+                </a:solidFill>
+              </a:rPr>
+              <a:t>→ </a:t>
+            </a:r>
+            <a:r>
+              <a:rPr lang="pt-BR" sz="1000" dirty="0">
+                <a:solidFill>
+                  <a:srgbClr val="555F6E"/>
+                </a:solidFill>
+              </a:rPr>
+              <a:t>Este é o conteúdo que você está enviando. O componente </a:t>
+            </a:r>
+            <a:r>
+              <a:rPr lang="pt-BR" sz="1000" b="1" dirty="0">
+                <a:solidFill>
+                  <a:srgbClr val="555F6E"/>
+                </a:solidFill>
+              </a:rPr>
+              <a:t>Titulo</a:t>
+            </a:r>
+            <a:endParaRPr lang="en-US" sz="1000" b="1" dirty="0">
+              <a:solidFill>
+                <a:srgbClr val="555F6E"/>
+              </a:solidFill>
+            </a:endParaRPr>
+          </a:p>
+        </p:txBody>
+      </p:sp>
+      <p:sp>
+        <p:nvSpPr>
+          <p:cNvPr id="24" name="Text 22">
+            <a:extLst>
+              <a:ext uri="{FF2B5EF4-FFF2-40B4-BE49-F238E27FC236}">
+                <a16:creationId xmlns:a16="http://schemas.microsoft.com/office/drawing/2014/main" id="{8D03CD36-D297-D667-620D-821C389F5089}"/>
+              </a:ext>
+            </a:extLst>
+          </p:cNvPr>
+          <p:cNvSpPr/>
+          <p:nvPr/>
+        </p:nvSpPr>
+        <p:spPr>
+          <a:xfrm>
+            <a:off x="5303520" y="4069080"/>
+            <a:ext cx="3566160" cy="274320"/>
+          </a:xfrm>
+          <a:prstGeom prst="rect">
+            <a:avLst/>
+          </a:prstGeom>
+          <a:noFill/>
+          <a:ln/>
+        </p:spPr>
+        <p:txBody>
+          <a:bodyPr wrap="square" lIns="0" tIns="0" rIns="0" bIns="0" rtlCol="0" anchor="ctr"/>
+          <a:lstStyle/>
+          <a:p>
+            <a:pPr marL="0" indent="0">
+              <a:buNone/>
+            </a:pPr>
+            <a:r>
+              <a:rPr lang="en-US" sz="1100" b="1" dirty="0">
+                <a:solidFill>
+                  <a:srgbClr val="20232A"/>
+                </a:solidFill>
+              </a:rPr>
+              <a:t>No </a:t>
+            </a:r>
+            <a:r>
+              <a:rPr lang="en-US" sz="1100" b="1" dirty="0" err="1">
+                <a:solidFill>
+                  <a:srgbClr val="20232A"/>
+                </a:solidFill>
+              </a:rPr>
+              <a:t>Inicio.jsx</a:t>
+            </a:r>
+            <a:r>
+              <a:rPr lang="en-US" sz="1100" b="1" dirty="0">
+                <a:solidFill>
+                  <a:srgbClr val="20232A"/>
+                </a:solidFill>
+              </a:rPr>
+              <a:t>, use assim:</a:t>
+            </a:r>
+            <a:endParaRPr lang="en-US" sz="1100" dirty="0"/>
+          </a:p>
+        </p:txBody>
+      </p:sp>
+      <p:sp>
+        <p:nvSpPr>
+          <p:cNvPr id="25" name="Shape 23">
+            <a:extLst>
+              <a:ext uri="{FF2B5EF4-FFF2-40B4-BE49-F238E27FC236}">
+                <a16:creationId xmlns:a16="http://schemas.microsoft.com/office/drawing/2014/main" id="{730DE395-0563-0AD5-1D08-27B3CAA38F76}"/>
+              </a:ext>
+            </a:extLst>
+          </p:cNvPr>
+          <p:cNvSpPr/>
+          <p:nvPr/>
+        </p:nvSpPr>
+        <p:spPr>
+          <a:xfrm>
+            <a:off x="5303520" y="4389120"/>
+            <a:ext cx="3566160" cy="411480"/>
+          </a:xfrm>
+          <a:prstGeom prst="rect">
+            <a:avLst/>
+          </a:prstGeom>
+          <a:solidFill>
+            <a:srgbClr val="1E1E2E"/>
+          </a:solidFill>
+          <a:ln w="12700">
+            <a:solidFill>
+              <a:srgbClr val="2D2D3F"/>
+            </a:solidFill>
+            <a:prstDash val="solid"/>
+          </a:ln>
+        </p:spPr>
+        <p:txBody>
+          <a:bodyPr/>
+          <a:lstStyle/>
+          <a:p>
+            <a:endParaRPr lang="pt-BR"/>
+          </a:p>
+        </p:txBody>
+      </p:sp>
+      <p:sp>
+        <p:nvSpPr>
+          <p:cNvPr id="26" name="Text 24">
+            <a:extLst>
+              <a:ext uri="{FF2B5EF4-FFF2-40B4-BE49-F238E27FC236}">
+                <a16:creationId xmlns:a16="http://schemas.microsoft.com/office/drawing/2014/main" id="{9C06F581-146E-BD04-6C89-3A8D54A7FC15}"/>
+              </a:ext>
+            </a:extLst>
+          </p:cNvPr>
+          <p:cNvSpPr/>
+          <p:nvPr/>
+        </p:nvSpPr>
+        <p:spPr>
+          <a:xfrm>
+            <a:off x="5440680" y="4480560"/>
+            <a:ext cx="3291840" cy="228600"/>
+          </a:xfrm>
+          <a:prstGeom prst="rect">
+            <a:avLst/>
+          </a:prstGeom>
+          <a:noFill/>
+          <a:ln/>
+        </p:spPr>
+        <p:txBody>
+          <a:bodyPr wrap="square" lIns="0" tIns="0" rIns="0" bIns="0" rtlCol="0" anchor="t"/>
+          <a:lstStyle/>
+          <a:p>
+            <a:pPr marL="0" indent="0">
+              <a:buNone/>
+            </a:pPr>
+            <a:r>
+              <a:rPr lang="en-US" sz="1000" dirty="0">
+                <a:solidFill>
+                  <a:srgbClr val="CDD6F4"/>
+                </a:solidFill>
+                <a:latin typeface="Consolas" pitchFamily="34" charset="0"/>
+                <a:ea typeface="Consolas" pitchFamily="34" charset="-122"/>
+                <a:cs typeface="Consolas" pitchFamily="34" charset="-120"/>
+              </a:rPr>
+              <a:t>&lt;Titulo nome="Velejando com o React"/&gt;</a:t>
+            </a:r>
+            <a:endParaRPr lang="en-US" sz="1000" dirty="0"/>
+          </a:p>
+        </p:txBody>
+      </p:sp>
+    </p:spTree>
+    <p:extLst>
+      <p:ext uri="{BB962C8B-B14F-4D97-AF65-F5344CB8AC3E}">
+        <p14:creationId xmlns:p14="http://schemas.microsoft.com/office/powerpoint/2010/main" val="1845083933"/>
+      </p:ext>
+    </p:extLst>
+  </p:cSld>
+  <p:clrMapOvr>
+    <a:masterClrMapping/>
+  </p:clrMapOvr>
+</p:sld>
+</file>
+
+<file path=ppt/slides/slide11.xml><?xml version="1.0" encoding="utf-8"?>
 <p:sld xmlns:a="http://schemas.openxmlformats.org/drawingml/2006/main" xmlns:r="http://schemas.openxmlformats.org/officeDocument/2006/relationships" xmlns:p="http://schemas.openxmlformats.org/presentationml/2006/main">
   <p:cSld name="Slide 9">
     <p:bg>
@@ -2838,7 +4305,7 @@
                   <a:srgbClr val="FFFFFF"/>
                 </a:solidFill>
               </a:rPr>
-              <a:t>Lesson 06-07</a:t>
+              <a:t>Lesson 06</a:t>
             </a:r>
             <a:endParaRPr lang="en-US" sz="1100" dirty="0"/>
           </a:p>
@@ -2913,7 +4380,29 @@
               <a:buNone/>
             </a:pPr>
             <a:r>
+              <a:rPr lang="en-US" sz="1200" b="1" dirty="0" err="1">
+                <a:solidFill>
+                  <a:srgbClr val="CB356B"/>
+                </a:solidFill>
+                <a:latin typeface="Consolas" pitchFamily="34" charset="0"/>
+                <a:ea typeface="Consolas" pitchFamily="34" charset="-122"/>
+                <a:cs typeface="Consolas" pitchFamily="34" charset="-120"/>
+              </a:rPr>
+              <a:t>componentes</a:t>
+            </a:r>
+            <a:r>
               <a:rPr lang="en-US" sz="1200" b="1" dirty="0">
+                <a:solidFill>
+                  <a:srgbClr val="CB356B"/>
+                </a:solidFill>
+                <a:latin typeface="Consolas" pitchFamily="34" charset="0"/>
+                <a:ea typeface="Consolas" pitchFamily="34" charset="-122"/>
+                <a:cs typeface="Consolas" pitchFamily="34" charset="-120"/>
+              </a:rPr>
+              <a:t>/</a:t>
+            </a:r>
+            <a:r>
+              <a:rPr lang="en-US" sz="1200" b="1" dirty="0" err="1">
                 <a:solidFill>
                   <a:srgbClr val="CB356B"/>
                 </a:solidFill>
@@ -3460,18 +4949,54 @@
                 </a:solidFill>
                 <a:latin typeface="Consolas" pitchFamily="34" charset="0"/>
               </a:rPr>
-              <a:t>      &lt;Campo id="1"&gt; &lt;/Campo&gt; </a:t>
-            </a:r>
-          </a:p>
-          <a:p>
+              <a:t>      &lt;Campo id="1"&gt; </a:t>
+            </a:r>
             <a:r>
               <a:rPr lang="pt-BR" sz="1000" dirty="0">
                 <a:solidFill>
-                  <a:srgbClr val="CDD6F4"/>
-                </a:solidFill>
-                <a:latin typeface="Consolas" pitchFamily="34" charset="0"/>
-              </a:rPr>
-              <a:t>      &lt;Campo id="2"&gt; &lt;/Campo&gt;</a:t>
+                  <a:schemeClr val="accent4"/>
+                </a:solidFill>
+                <a:latin typeface="Consolas" pitchFamily="34" charset="0"/>
+              </a:rPr>
+              <a:t>teste</a:t>
+            </a:r>
+            <a:r>
+              <a:rPr lang="pt-BR" sz="1000" dirty="0">
+                <a:solidFill>
+                  <a:srgbClr val="CDD6F4"/>
+                </a:solidFill>
+                <a:latin typeface="Consolas" pitchFamily="34" charset="0"/>
+              </a:rPr>
+              <a:t> &lt;/Campo&gt; </a:t>
+            </a:r>
+          </a:p>
+          <a:p>
+            <a:r>
+              <a:rPr lang="pt-BR" sz="1000" dirty="0">
+                <a:solidFill>
+                  <a:srgbClr val="CDD6F4"/>
+                </a:solidFill>
+                <a:latin typeface="Consolas" pitchFamily="34" charset="0"/>
+              </a:rPr>
+              <a:t>      &lt;Campo id="2"&gt; </a:t>
+            </a:r>
+            <a:r>
+              <a:rPr lang="pt-BR" sz="1000" dirty="0">
+                <a:solidFill>
+                  <a:schemeClr val="accent4"/>
+                </a:solidFill>
+                <a:latin typeface="Consolas" pitchFamily="34" charset="0"/>
+              </a:rPr>
+              <a:t>teste</a:t>
+            </a:r>
+            <a:r>
+              <a:rPr lang="pt-BR" sz="1000" dirty="0">
+                <a:solidFill>
+                  <a:srgbClr val="CDD6F4"/>
+                </a:solidFill>
+                <a:latin typeface="Consolas" pitchFamily="34" charset="0"/>
+              </a:rPr>
+              <a:t> &lt;/Campo&gt;</a:t>
             </a:r>
           </a:p>
           <a:p>
@@ -4165,7 +5690,7 @@
 </p:sld>
 </file>
 
-<file path=ppt/slides/slide11.xml><?xml version="1.0" encoding="utf-8"?>
+<file path=ppt/slides/slide12.xml><?xml version="1.0" encoding="utf-8"?>
 <p:sld xmlns:a="http://schemas.openxmlformats.org/drawingml/2006/main" xmlns:r="http://schemas.openxmlformats.org/officeDocument/2006/relationships" xmlns:p="http://schemas.openxmlformats.org/presentationml/2006/main">
   <p:cSld>
     <p:bg>
@@ -4308,7 +5833,7 @@
                   <a:srgbClr val="FFFFFF"/>
                 </a:solidFill>
               </a:rPr>
-              <a:t>Lesson 06-07</a:t>
+              <a:t>Lesson 07</a:t>
             </a:r>
             <a:endParaRPr lang="en-US" sz="1100" dirty="0"/>
           </a:p>
@@ -4350,6 +5875,38 @@
                   <a:srgbClr val="61DAFB"/>
                 </a:solidFill>
               </a:rPr>
+              <a:t>Criando</a:t>
+            </a:r>
+            <a:r>
+              <a:rPr lang="en-US" sz="1800" b="1" dirty="0">
+                <a:solidFill>
+                  <a:srgbClr val="61DAFB"/>
+                </a:solidFill>
+              </a:rPr>
+              <a:t> as </a:t>
+            </a:r>
+            <a:r>
+              <a:rPr lang="en-US" sz="1800" b="1" dirty="0" err="1">
+                <a:solidFill>
+                  <a:srgbClr val="61DAFB"/>
+                </a:solidFill>
+              </a:rPr>
+              <a:t>tarefas</a:t>
+            </a:r>
+            <a:r>
+              <a:rPr lang="en-US" sz="1800" b="1" dirty="0">
+                <a:solidFill>
+                  <a:srgbClr val="61DAFB"/>
+                </a:solidFill>
+              </a:rPr>
+              <a:t> - </a:t>
+            </a:r>
+            <a:r>
+              <a:rPr lang="en-US" sz="1800" b="1" dirty="0" err="1">
+                <a:solidFill>
+                  <a:srgbClr val="61DAFB"/>
+                </a:solidFill>
+              </a:rPr>
               <a:t>Componentes</a:t>
             </a:r>
             <a:r>
@@ -4399,11 +5956,30 @@
           <a:bodyPr wrap="square" lIns="0" tIns="0" rIns="0" bIns="0" rtlCol="0" anchor="ctr"/>
           <a:lstStyle/>
           <a:p>
-            <a:pPr marL="0" indent="0">
-              <a:buNone/>
-            </a:pPr>
+            <a:r>
+              <a:rPr lang="en-US" sz="1200" b="1" dirty="0" err="1">
+                <a:solidFill>
+                  <a:srgbClr val="CB356B"/>
+                </a:solidFill>
+                <a:latin typeface="Consolas" pitchFamily="34" charset="0"/>
+                <a:ea typeface="Consolas" pitchFamily="34" charset="-122"/>
+                <a:cs typeface="Consolas" pitchFamily="34" charset="-120"/>
+              </a:rPr>
+              <a:t>Componentes</a:t>
+            </a:r>
             <a:r>
               <a:rPr lang="en-US" sz="1200" b="1" dirty="0">
+                <a:solidFill>
+                  <a:srgbClr val="CB356B"/>
+                </a:solidFill>
+                <a:latin typeface="Consolas" pitchFamily="34" charset="0"/>
+                <a:ea typeface="Consolas" pitchFamily="34" charset="-122"/>
+                <a:cs typeface="Consolas" pitchFamily="34" charset="-120"/>
+              </a:rPr>
+              <a:t>/</a:t>
+            </a:r>
+            <a:r>
+              <a:rPr lang="en-US" sz="1200" b="1" dirty="0" err="1">
                 <a:solidFill>
                   <a:srgbClr val="CB356B"/>
                 </a:solidFill>
@@ -4836,7 +6412,7 @@
         <p:spPr>
           <a:xfrm>
             <a:off x="4663440" y="1161288"/>
-            <a:ext cx="4206240" cy="3300984"/>
+            <a:ext cx="4206240" cy="3727704"/>
           </a:xfrm>
           <a:prstGeom prst="rect">
             <a:avLst/>
@@ -4887,7 +6463,7 @@
           <a:lstStyle/>
           <a:p>
             <a:r>
-              <a:rPr lang="pt-BR" sz="1000" dirty="0" err="1">
+              <a:rPr lang="pt-BR" sz="1100" dirty="0" err="1">
                 <a:solidFill>
                   <a:srgbClr val="CDD6F4"/>
                 </a:solidFill>
@@ -4896,7 +6472,7 @@
               <a:t>import</a:t>
             </a:r>
             <a:r>
-              <a:rPr lang="pt-BR" sz="1000" dirty="0">
+              <a:rPr lang="pt-BR" sz="1100" dirty="0">
                 <a:solidFill>
                   <a:srgbClr val="CDD6F4"/>
                 </a:solidFill>
@@ -4905,7 +6481,7 @@
               <a:t> { Titulo } </a:t>
             </a:r>
             <a:r>
-              <a:rPr lang="pt-BR" sz="1000" dirty="0" err="1">
+              <a:rPr lang="pt-BR" sz="1100" dirty="0" err="1">
                 <a:solidFill>
                   <a:srgbClr val="CDD6F4"/>
                 </a:solidFill>
@@ -4914,7 +6490,7 @@
               <a:t>from</a:t>
             </a:r>
             <a:r>
-              <a:rPr lang="pt-BR" sz="1000" dirty="0">
+              <a:rPr lang="pt-BR" sz="1100" dirty="0">
                 <a:solidFill>
                   <a:srgbClr val="CDD6F4"/>
                 </a:solidFill>
@@ -4925,7 +6501,7 @@
           </a:p>
           <a:p>
             <a:r>
-              <a:rPr lang="pt-BR" sz="1000" dirty="0" err="1">
+              <a:rPr lang="pt-BR" sz="1100" dirty="0" err="1">
                 <a:solidFill>
                   <a:srgbClr val="CDD6F4"/>
                 </a:solidFill>
@@ -4934,7 +6510,7 @@
               <a:t>import</a:t>
             </a:r>
             <a:r>
-              <a:rPr lang="pt-BR" sz="1000" dirty="0">
+              <a:rPr lang="pt-BR" sz="1100" dirty="0">
                 <a:solidFill>
                   <a:srgbClr val="CDD6F4"/>
                 </a:solidFill>
@@ -4943,7 +6519,7 @@
               <a:t> { Campo } </a:t>
             </a:r>
             <a:r>
-              <a:rPr lang="pt-BR" sz="1000" dirty="0" err="1">
+              <a:rPr lang="pt-BR" sz="1100" dirty="0" err="1">
                 <a:solidFill>
                   <a:srgbClr val="CDD6F4"/>
                 </a:solidFill>
@@ -4952,7 +6528,7 @@
               <a:t>from</a:t>
             </a:r>
             <a:r>
-              <a:rPr lang="pt-BR" sz="1000" dirty="0">
+              <a:rPr lang="pt-BR" sz="1100" dirty="0">
                 <a:solidFill>
                   <a:srgbClr val="CDD6F4"/>
                 </a:solidFill>
@@ -4963,7 +6539,7 @@
           </a:p>
           <a:p>
             <a:r>
-              <a:rPr lang="pt-BR" sz="1000" dirty="0" err="1">
+              <a:rPr lang="pt-BR" sz="1100" dirty="0" err="1">
                 <a:solidFill>
                   <a:srgbClr val="CDD6F4"/>
                 </a:solidFill>
@@ -4972,7 +6548,7 @@
               <a:t>import</a:t>
             </a:r>
             <a:r>
-              <a:rPr lang="pt-BR" sz="1000" dirty="0">
+              <a:rPr lang="pt-BR" sz="1100" dirty="0">
                 <a:solidFill>
                   <a:srgbClr val="CDD6F4"/>
                 </a:solidFill>
@@ -4981,7 +6557,7 @@
               <a:t> { </a:t>
             </a:r>
             <a:r>
-              <a:rPr lang="pt-BR" sz="1000" dirty="0" err="1">
+              <a:rPr lang="pt-BR" sz="1100" dirty="0" err="1">
                 <a:solidFill>
                   <a:srgbClr val="CDD6F4"/>
                 </a:solidFill>
@@ -4990,7 +6566,7 @@
               <a:t>Conteudo</a:t>
             </a:r>
             <a:r>
-              <a:rPr lang="pt-BR" sz="1000" dirty="0">
+              <a:rPr lang="pt-BR" sz="1100" dirty="0">
                 <a:solidFill>
                   <a:srgbClr val="CDD6F4"/>
                 </a:solidFill>
@@ -4999,7 +6575,7 @@
               <a:t> } </a:t>
             </a:r>
             <a:r>
-              <a:rPr lang="pt-BR" sz="1000" dirty="0" err="1">
+              <a:rPr lang="pt-BR" sz="1100" dirty="0" err="1">
                 <a:solidFill>
                   <a:srgbClr val="CDD6F4"/>
                 </a:solidFill>
@@ -5008,7 +6584,7 @@
               <a:t>from</a:t>
             </a:r>
             <a:r>
-              <a:rPr lang="pt-BR" sz="1000" dirty="0">
+              <a:rPr lang="pt-BR" sz="1100" dirty="0">
                 <a:solidFill>
                   <a:srgbClr val="CDD6F4"/>
                 </a:solidFill>
@@ -5017,7 +6593,7 @@
               <a:t> "./componentes/</a:t>
             </a:r>
             <a:r>
-              <a:rPr lang="pt-BR" sz="1000" dirty="0" err="1">
+              <a:rPr lang="pt-BR" sz="1100" dirty="0" err="1">
                 <a:solidFill>
                   <a:srgbClr val="CDD6F4"/>
                 </a:solidFill>
@@ -5026,7 +6602,7 @@
               <a:t>Conteudo</a:t>
             </a:r>
             <a:r>
-              <a:rPr lang="pt-BR" sz="1000" dirty="0">
+              <a:rPr lang="pt-BR" sz="1100" dirty="0">
                 <a:solidFill>
                   <a:srgbClr val="CDD6F4"/>
                 </a:solidFill>
@@ -5036,7 +6612,7 @@
             </a:r>
           </a:p>
           <a:p>
-            <a:endParaRPr lang="pt-BR" sz="1000" dirty="0">
+            <a:endParaRPr lang="pt-BR" sz="1100" dirty="0">
               <a:solidFill>
                 <a:srgbClr val="CDD6F4"/>
               </a:solidFill>
@@ -5045,7 +6621,7 @@
           </a:p>
           <a:p>
             <a:r>
-              <a:rPr lang="pt-BR" sz="1000" dirty="0" err="1">
+              <a:rPr lang="pt-BR" sz="1100" dirty="0" err="1">
                 <a:solidFill>
                   <a:srgbClr val="CDD6F4"/>
                 </a:solidFill>
@@ -5054,7 +6630,7 @@
               <a:t>export</a:t>
             </a:r>
             <a:r>
-              <a:rPr lang="pt-BR" sz="1000" dirty="0">
+              <a:rPr lang="pt-BR" sz="1100" dirty="0">
                 <a:solidFill>
                   <a:srgbClr val="CDD6F4"/>
                 </a:solidFill>
@@ -5063,7 +6639,7 @@
               <a:t> </a:t>
             </a:r>
             <a:r>
-              <a:rPr lang="pt-BR" sz="1000" dirty="0" err="1">
+              <a:rPr lang="pt-BR" sz="1100" dirty="0" err="1">
                 <a:solidFill>
                   <a:srgbClr val="CDD6F4"/>
                 </a:solidFill>
@@ -5072,7 +6648,7 @@
               <a:t>function</a:t>
             </a:r>
             <a:r>
-              <a:rPr lang="pt-BR" sz="1000" dirty="0">
+              <a:rPr lang="pt-BR" sz="1100" dirty="0">
                 <a:solidFill>
                   <a:srgbClr val="CDD6F4"/>
                 </a:solidFill>
@@ -5083,7 +6659,7 @@
           </a:p>
           <a:p>
             <a:r>
-              <a:rPr lang="pt-BR" sz="1000" dirty="0">
+              <a:rPr lang="pt-BR" sz="1100" dirty="0">
                 <a:solidFill>
                   <a:srgbClr val="CDD6F4"/>
                 </a:solidFill>
@@ -5092,7 +6668,7 @@
               <a:t>  </a:t>
             </a:r>
             <a:r>
-              <a:rPr lang="pt-BR" sz="1000" dirty="0" err="1">
+              <a:rPr lang="pt-BR" sz="1100" dirty="0" err="1">
                 <a:solidFill>
                   <a:srgbClr val="CDD6F4"/>
                 </a:solidFill>
@@ -5101,7 +6677,7 @@
               <a:t>return</a:t>
             </a:r>
             <a:r>
-              <a:rPr lang="pt-BR" sz="1000" dirty="0">
+              <a:rPr lang="pt-BR" sz="1100" dirty="0">
                 <a:solidFill>
                   <a:srgbClr val="CDD6F4"/>
                 </a:solidFill>
@@ -5112,7 +6688,7 @@
           </a:p>
           <a:p>
             <a:r>
-              <a:rPr lang="pt-BR" sz="1000" dirty="0">
+              <a:rPr lang="pt-BR" sz="1100" dirty="0">
                 <a:solidFill>
                   <a:srgbClr val="CDD6F4"/>
                 </a:solidFill>
@@ -5123,7 +6699,7 @@
           </a:p>
           <a:p>
             <a:r>
-              <a:rPr lang="pt-BR" sz="1000" dirty="0">
+              <a:rPr lang="pt-BR" sz="1100" dirty="0">
                 <a:solidFill>
                   <a:srgbClr val="CDD6F4"/>
                 </a:solidFill>
@@ -5132,7 +6708,7 @@
               <a:t>      &lt;Titulo nome="Velejando com o </a:t>
             </a:r>
             <a:r>
-              <a:rPr lang="pt-BR" sz="1000" dirty="0" err="1">
+              <a:rPr lang="pt-BR" sz="1100" dirty="0" err="1">
                 <a:solidFill>
                   <a:srgbClr val="CDD6F4"/>
                 </a:solidFill>
@@ -5141,7 +6717,7 @@
               <a:t>React</a:t>
             </a:r>
             <a:r>
-              <a:rPr lang="pt-BR" sz="1000" dirty="0">
+              <a:rPr lang="pt-BR" sz="1100" dirty="0">
                 <a:solidFill>
                   <a:srgbClr val="CDD6F4"/>
                 </a:solidFill>
@@ -5152,7 +6728,7 @@
           </a:p>
           <a:p>
             <a:br>
-              <a:rPr lang="pt-BR" sz="1000" dirty="0">
+              <a:rPr lang="pt-BR" sz="1100" dirty="0">
                 <a:solidFill>
                   <a:srgbClr val="CDD6F4"/>
                 </a:solidFill>
@@ -5160,7 +6736,7 @@
               </a:rPr>
             </a:br>
             <a:r>
-              <a:rPr lang="pt-BR" sz="1000" dirty="0">
+              <a:rPr lang="pt-BR" sz="1100" dirty="0">
                 <a:solidFill>
                   <a:srgbClr val="CDD6F4"/>
                 </a:solidFill>
@@ -5171,7 +6747,7 @@
           </a:p>
           <a:p>
             <a:r>
-              <a:rPr lang="pt-BR" sz="1000" dirty="0">
+              <a:rPr lang="pt-BR" sz="1100" dirty="0">
                 <a:solidFill>
                   <a:srgbClr val="CDD6F4"/>
                 </a:solidFill>
@@ -5180,7 +6756,7 @@
               <a:t>        &lt;</a:t>
             </a:r>
             <a:r>
-              <a:rPr lang="pt-BR" sz="1000" dirty="0" err="1">
+              <a:rPr lang="pt-BR" sz="1100" dirty="0" err="1">
                 <a:solidFill>
                   <a:srgbClr val="CDD6F4"/>
                 </a:solidFill>
@@ -5189,7 +6765,7 @@
               <a:t>Conteudo</a:t>
             </a:r>
             <a:r>
-              <a:rPr lang="pt-BR" sz="1000" dirty="0">
+              <a:rPr lang="pt-BR" sz="1100" dirty="0">
                 <a:solidFill>
                   <a:srgbClr val="CDD6F4"/>
                 </a:solidFill>
@@ -5198,7 +6774,7 @@
               <a:t> texto="Estudar </a:t>
             </a:r>
             <a:r>
-              <a:rPr lang="pt-BR" sz="1000" dirty="0" err="1">
+              <a:rPr lang="pt-BR" sz="1100" dirty="0" err="1">
                 <a:solidFill>
                   <a:srgbClr val="CDD6F4"/>
                 </a:solidFill>
@@ -5207,7 +6783,7 @@
               <a:t>React</a:t>
             </a:r>
             <a:r>
-              <a:rPr lang="pt-BR" sz="1000" dirty="0">
+              <a:rPr lang="pt-BR" sz="1100" dirty="0">
                 <a:solidFill>
                   <a:srgbClr val="CDD6F4"/>
                 </a:solidFill>
@@ -5218,7 +6794,7 @@
           </a:p>
           <a:p>
             <a:r>
-              <a:rPr lang="pt-BR" sz="1000" dirty="0">
+              <a:rPr lang="pt-BR" sz="1100" dirty="0">
                 <a:solidFill>
                   <a:srgbClr val="CDD6F4"/>
                 </a:solidFill>
@@ -5229,7 +6805,7 @@
           </a:p>
           <a:p>
             <a:br>
-              <a:rPr lang="pt-BR" sz="1000" dirty="0">
+              <a:rPr lang="pt-BR" sz="1100" dirty="0">
                 <a:solidFill>
                   <a:srgbClr val="CDD6F4"/>
                 </a:solidFill>
@@ -5237,7 +6813,7 @@
               </a:rPr>
             </a:br>
             <a:r>
-              <a:rPr lang="pt-BR" sz="1000" dirty="0">
+              <a:rPr lang="pt-BR" sz="1100" dirty="0">
                 <a:solidFill>
                   <a:srgbClr val="CDD6F4"/>
                 </a:solidFill>
@@ -5248,7 +6824,7 @@
           </a:p>
           <a:p>
             <a:r>
-              <a:rPr lang="pt-BR" sz="1000" dirty="0">
+              <a:rPr lang="pt-BR" sz="1100" dirty="0">
                 <a:solidFill>
                   <a:srgbClr val="CDD6F4"/>
                 </a:solidFill>
@@ -5257,7 +6833,7 @@
               <a:t>        &lt;</a:t>
             </a:r>
             <a:r>
-              <a:rPr lang="pt-BR" sz="1000" dirty="0" err="1">
+              <a:rPr lang="pt-BR" sz="1100" dirty="0" err="1">
                 <a:solidFill>
                   <a:srgbClr val="CDD6F4"/>
                 </a:solidFill>
@@ -5266,18 +6842,18 @@
               <a:t>Conteudo</a:t>
             </a:r>
             <a:r>
-              <a:rPr lang="pt-BR" sz="1000" dirty="0">
-                <a:solidFill>
-                  <a:srgbClr val="CDD6F4"/>
-                </a:solidFill>
-                <a:latin typeface="Consolas" pitchFamily="34" charset="0"/>
-              </a:rPr>
-              <a:t> texto="Tirar o lixo"/&gt;</a:t>
-            </a:r>
-          </a:p>
-          <a:p>
-            <a:r>
-              <a:rPr lang="pt-BR" sz="1000" dirty="0">
+              <a:rPr lang="pt-BR" sz="1100" dirty="0">
+                <a:solidFill>
+                  <a:srgbClr val="CDD6F4"/>
+                </a:solidFill>
+                <a:latin typeface="Consolas" pitchFamily="34" charset="0"/>
+              </a:rPr>
+              <a:t> texto=“Arrumar quarto"/&gt;</a:t>
+            </a:r>
+          </a:p>
+          <a:p>
+            <a:r>
+              <a:rPr lang="pt-BR" sz="1100" dirty="0">
                 <a:solidFill>
                   <a:srgbClr val="CDD6F4"/>
                 </a:solidFill>
@@ -5286,7 +6862,7 @@
               <a:t>        &lt;</a:t>
             </a:r>
             <a:r>
-              <a:rPr lang="pt-BR" sz="1000" dirty="0" err="1">
+              <a:rPr lang="pt-BR" sz="1100" dirty="0" err="1">
                 <a:solidFill>
                   <a:srgbClr val="CDD6F4"/>
                 </a:solidFill>
@@ -5295,18 +6871,18 @@
               <a:t>Conteudo</a:t>
             </a:r>
             <a:r>
-              <a:rPr lang="pt-BR" sz="1000" dirty="0">
-                <a:solidFill>
-                  <a:srgbClr val="CDD6F4"/>
-                </a:solidFill>
-                <a:latin typeface="Consolas" pitchFamily="34" charset="0"/>
-              </a:rPr>
-              <a:t> texto="Lavar a louça"/&gt;</a:t>
-            </a:r>
-          </a:p>
-          <a:p>
-            <a:r>
-              <a:rPr lang="pt-BR" sz="1000" dirty="0">
+              <a:rPr lang="pt-BR" sz="1100" dirty="0">
+                <a:solidFill>
+                  <a:srgbClr val="CDD6F4"/>
+                </a:solidFill>
+                <a:latin typeface="Consolas" pitchFamily="34" charset="0"/>
+              </a:rPr>
+              <a:t> texto=“Academia"/&gt;</a:t>
+            </a:r>
+          </a:p>
+          <a:p>
+            <a:r>
+              <a:rPr lang="pt-BR" sz="1100" dirty="0">
                 <a:solidFill>
                   <a:srgbClr val="CDD6F4"/>
                 </a:solidFill>
@@ -5317,7 +6893,7 @@
           </a:p>
           <a:p>
             <a:r>
-              <a:rPr lang="pt-BR" sz="1000" dirty="0">
+              <a:rPr lang="pt-BR" sz="1100" dirty="0">
                 <a:solidFill>
                   <a:srgbClr val="CDD6F4"/>
                 </a:solidFill>
@@ -5328,7 +6904,7 @@
           </a:p>
           <a:p>
             <a:r>
-              <a:rPr lang="pt-BR" sz="1000" dirty="0">
+              <a:rPr lang="pt-BR" sz="1100" dirty="0">
                 <a:solidFill>
                   <a:srgbClr val="CDD6F4"/>
                 </a:solidFill>
@@ -5339,7 +6915,7 @@
           </a:p>
           <a:p>
             <a:r>
-              <a:rPr lang="pt-BR" sz="1000" dirty="0">
+              <a:rPr lang="pt-BR" sz="1100" dirty="0">
                 <a:solidFill>
                   <a:srgbClr val="CDD6F4"/>
                 </a:solidFill>
@@ -5447,8 +7023,8 @@
         </p:nvSpPr>
         <p:spPr>
           <a:xfrm>
-            <a:off x="5353050" y="2768600"/>
-            <a:ext cx="2406650" cy="190500"/>
+            <a:off x="5166360" y="2744216"/>
+            <a:ext cx="2904744" cy="587248"/>
           </a:xfrm>
           <a:prstGeom prst="rect">
             <a:avLst/>
@@ -5499,8 +7075,8 @@
         </p:nvSpPr>
         <p:spPr>
           <a:xfrm>
-            <a:off x="5353050" y="3385946"/>
-            <a:ext cx="2406650" cy="309753"/>
+            <a:off x="5166360" y="3385946"/>
+            <a:ext cx="2904744" cy="756286"/>
           </a:xfrm>
           <a:prstGeom prst="rect">
             <a:avLst/>
@@ -5550,7 +7126,7 @@
 </p:sld>
 </file>
 
-<file path=ppt/slides/slide12.xml><?xml version="1.0" encoding="utf-8"?>
+<file path=ppt/slides/slide13.xml><?xml version="1.0" encoding="utf-8"?>
 <p:sld xmlns:a="http://schemas.openxmlformats.org/drawingml/2006/main" xmlns:r="http://schemas.openxmlformats.org/officeDocument/2006/relationships" xmlns:p="http://schemas.openxmlformats.org/presentationml/2006/main">
   <p:cSld name="Slide 10">
     <p:bg>
@@ -5720,7 +7296,7 @@
         <p:spPr>
           <a:xfrm>
             <a:off x="457200" y="804672"/>
-            <a:ext cx="8229600" cy="685800"/>
+            <a:ext cx="8229600" cy="399288"/>
           </a:xfrm>
           <a:prstGeom prst="rect">
             <a:avLst/>
@@ -5751,7 +7327,7 @@
         </p:nvSpPr>
         <p:spPr>
           <a:xfrm>
-            <a:off x="548640" y="804672"/>
+            <a:off x="548640" y="682752"/>
             <a:ext cx="8046720" cy="685800"/>
           </a:xfrm>
           <a:prstGeom prst="rect">
@@ -5768,14 +7344,14 @@
               <a:buNone/>
             </a:pPr>
             <a:r>
-              <a:rPr lang="en-US" sz="1400" b="1" dirty="0">
+              <a:rPr lang="en-US" sz="1600" b="1" dirty="0">
                 <a:solidFill>
                   <a:srgbClr val="61DAFB"/>
                 </a:solidFill>
               </a:rPr>
               <a:t>useState = uma variável especial que quando muda, atualiza a tela automaticamente!</a:t>
             </a:r>
-            <a:endParaRPr lang="en-US" sz="1400" dirty="0"/>
+            <a:endParaRPr lang="en-US" sz="1600" dirty="0"/>
           </a:p>
         </p:txBody>
       </p:sp>
@@ -5787,7 +7363,7 @@
         </p:nvSpPr>
         <p:spPr>
           <a:xfrm>
-            <a:off x="457200" y="1600200"/>
+            <a:off x="457200" y="1197864"/>
             <a:ext cx="1828800" cy="320040"/>
           </a:xfrm>
           <a:prstGeom prst="rect">
@@ -5823,8 +7399,8 @@
         </p:nvSpPr>
         <p:spPr>
           <a:xfrm>
-            <a:off x="457200" y="1947672"/>
-            <a:ext cx="8229600" cy="868680"/>
+            <a:off x="457200" y="1545336"/>
+            <a:ext cx="8229600" cy="685800"/>
           </a:xfrm>
           <a:prstGeom prst="rect">
             <a:avLst/>
@@ -5855,7 +7431,7 @@
         </p:nvSpPr>
         <p:spPr>
           <a:xfrm>
-            <a:off x="594360" y="2039112"/>
+            <a:off x="594360" y="1636776"/>
             <a:ext cx="7955280" cy="685800"/>
           </a:xfrm>
           <a:prstGeom prst="rect">
@@ -5917,7 +7493,7 @@
         </p:nvSpPr>
         <p:spPr>
           <a:xfrm>
-            <a:off x="457200" y="2926080"/>
+            <a:off x="457200" y="2328672"/>
             <a:ext cx="2606040" cy="1097280"/>
           </a:xfrm>
           <a:prstGeom prst="rect">
@@ -5949,7 +7525,7 @@
         </p:nvSpPr>
         <p:spPr>
           <a:xfrm>
-            <a:off x="548640" y="2971800"/>
+            <a:off x="548640" y="2374392"/>
             <a:ext cx="2423160" cy="320040"/>
           </a:xfrm>
           <a:prstGeom prst="rect">
@@ -5988,7 +7564,7 @@
         </p:nvSpPr>
         <p:spPr>
           <a:xfrm>
-            <a:off x="548640" y="3310128"/>
+            <a:off x="548640" y="2712720"/>
             <a:ext cx="2423160" cy="640080"/>
           </a:xfrm>
           <a:prstGeom prst="rect">
@@ -6005,14 +7581,14 @@
               <a:buNone/>
             </a:pPr>
             <a:r>
-              <a:rPr lang="en-US" sz="1000" dirty="0">
+              <a:rPr lang="en-US" sz="1200" dirty="0">
                 <a:solidFill>
                   <a:srgbClr val="20232A"/>
                 </a:solidFill>
               </a:rPr>
               <a:t>Guarda o valor atual. Usamos para MOSTRAR na tela.</a:t>
             </a:r>
-            <a:endParaRPr lang="en-US" sz="1000" dirty="0"/>
+            <a:endParaRPr lang="en-US" sz="1200" dirty="0"/>
           </a:p>
         </p:txBody>
       </p:sp>
@@ -6024,7 +7600,7 @@
         </p:nvSpPr>
         <p:spPr>
           <a:xfrm>
-            <a:off x="3246120" y="2926080"/>
+            <a:off x="3246120" y="2328672"/>
             <a:ext cx="2606040" cy="1097280"/>
           </a:xfrm>
           <a:prstGeom prst="rect">
@@ -6056,7 +7632,7 @@
         </p:nvSpPr>
         <p:spPr>
           <a:xfrm>
-            <a:off x="3337560" y="2971800"/>
+            <a:off x="3337560" y="2374392"/>
             <a:ext cx="2423160" cy="320040"/>
           </a:xfrm>
           <a:prstGeom prst="rect">
@@ -6095,7 +7671,7 @@
         </p:nvSpPr>
         <p:spPr>
           <a:xfrm>
-            <a:off x="3337560" y="3310128"/>
+            <a:off x="3337560" y="2712720"/>
             <a:ext cx="2423160" cy="640080"/>
           </a:xfrm>
           <a:prstGeom prst="rect">
@@ -6112,14 +7688,14 @@
               <a:buNone/>
             </a:pPr>
             <a:r>
-              <a:rPr lang="en-US" sz="1000" dirty="0">
+              <a:rPr lang="en-US" sz="1200" dirty="0">
                 <a:solidFill>
                   <a:srgbClr val="20232A"/>
                 </a:solidFill>
               </a:rPr>
               <a:t>Função para MUDAR o valor. Quando chamada, a tela atualiza!</a:t>
             </a:r>
-            <a:endParaRPr lang="en-US" sz="1000" dirty="0"/>
+            <a:endParaRPr lang="en-US" sz="1200" dirty="0"/>
           </a:p>
         </p:txBody>
       </p:sp>
@@ -6131,7 +7707,7 @@
         </p:nvSpPr>
         <p:spPr>
           <a:xfrm>
-            <a:off x="6035040" y="2926080"/>
+            <a:off x="6035040" y="2328672"/>
             <a:ext cx="2606040" cy="1097280"/>
           </a:xfrm>
           <a:prstGeom prst="rect">
@@ -6163,7 +7739,7 @@
         </p:nvSpPr>
         <p:spPr>
           <a:xfrm>
-            <a:off x="6126480" y="2971800"/>
+            <a:off x="6126480" y="2374392"/>
             <a:ext cx="2423160" cy="320040"/>
           </a:xfrm>
           <a:prstGeom prst="rect">
@@ -6202,7 +7778,7 @@
         </p:nvSpPr>
         <p:spPr>
           <a:xfrm>
-            <a:off x="6126480" y="3310128"/>
+            <a:off x="6126480" y="2712720"/>
             <a:ext cx="2423160" cy="640080"/>
           </a:xfrm>
           <a:prstGeom prst="rect">
@@ -6219,14 +7795,14 @@
               <a:buNone/>
             </a:pPr>
             <a:r>
-              <a:rPr lang="en-US" sz="1000" dirty="0">
+              <a:rPr lang="en-US" sz="1200" dirty="0">
                 <a:solidFill>
                   <a:srgbClr val="20232A"/>
                 </a:solidFill>
               </a:rPr>
               <a:t>O primeiro valor. Também define o TIPO de dado (texto, número, lista...).</a:t>
             </a:r>
-            <a:endParaRPr lang="en-US" sz="1000" dirty="0"/>
+            <a:endParaRPr lang="en-US" sz="1200" dirty="0"/>
           </a:p>
         </p:txBody>
       </p:sp>
@@ -6238,7 +7814,7 @@
         </p:nvSpPr>
         <p:spPr>
           <a:xfrm>
-            <a:off x="457200" y="4160520"/>
+            <a:off x="457200" y="3453384"/>
             <a:ext cx="3657600" cy="320040"/>
           </a:xfrm>
           <a:prstGeom prst="rect">
@@ -6274,8 +7850,8 @@
         </p:nvSpPr>
         <p:spPr>
           <a:xfrm>
-            <a:off x="457200" y="4507992"/>
-            <a:ext cx="8229600" cy="1645920"/>
+            <a:off x="457200" y="3800856"/>
+            <a:ext cx="8229600" cy="1342644"/>
           </a:xfrm>
           <a:prstGeom prst="rect">
             <a:avLst/>
@@ -6306,7 +7882,7 @@
         </p:nvSpPr>
         <p:spPr>
           <a:xfrm>
-            <a:off x="594360" y="4599432"/>
+            <a:off x="594360" y="3892296"/>
             <a:ext cx="7955280" cy="1463040"/>
           </a:xfrm>
           <a:prstGeom prst="rect">
@@ -6403,52 +7979,6 @@
               <a:t>console.log(dinheiro)   // imprime: 500</a:t>
             </a:r>
             <a:endParaRPr lang="en-US" sz="1000" dirty="0"/>
-          </a:p>
-        </p:txBody>
-      </p:sp>
-      <p:sp>
-        <p:nvSpPr>
-          <p:cNvPr id="23" name="Triângulo isósceles 22">
-            <a:extLst>
-              <a:ext uri="{FF2B5EF4-FFF2-40B4-BE49-F238E27FC236}">
-                <a16:creationId xmlns:a16="http://schemas.microsoft.com/office/drawing/2014/main" id="{0E302329-CA79-2267-481F-0D5EE88C21E9}"/>
-              </a:ext>
-            </a:extLst>
-          </p:cNvPr>
-          <p:cNvSpPr/>
-          <p:nvPr/>
-        </p:nvSpPr>
-        <p:spPr>
-          <a:xfrm>
-            <a:off x="2901950" y="869950"/>
-            <a:ext cx="3270252" cy="2857500"/>
-          </a:xfrm>
-          <a:prstGeom prst="triangle">
-            <a:avLst/>
-          </a:prstGeom>
-        </p:spPr>
-        <p:style>
-          <a:lnRef idx="2">
-            <a:schemeClr val="accent1">
-              <a:shade val="15000"/>
-            </a:schemeClr>
-          </a:lnRef>
-          <a:fillRef idx="1">
-            <a:schemeClr val="accent1"/>
-          </a:fillRef>
-          <a:effectRef idx="0">
-            <a:schemeClr val="accent1"/>
-          </a:effectRef>
-          <a:fontRef idx="minor">
-            <a:schemeClr val="lt1"/>
-          </a:fontRef>
-        </p:style>
-        <p:txBody>
-          <a:bodyPr rtlCol="0" anchor="ctr"/>
-          <a:lstStyle/>
-          <a:p>
-            <a:pPr algn="ctr"/>
-            <a:endParaRPr lang="pt-BR"/>
           </a:p>
         </p:txBody>
       </p:sp>
@@ -6460,7 +7990,7 @@
 </p:sld>
 </file>
 
-<file path=ppt/slides/slide13.xml><?xml version="1.0" encoding="utf-8"?>
+<file path=ppt/slides/slide14.xml><?xml version="1.0" encoding="utf-8"?>
 <p:sld xmlns:a="http://schemas.openxmlformats.org/drawingml/2006/main" xmlns:r="http://schemas.openxmlformats.org/officeDocument/2006/relationships" xmlns:p="http://schemas.openxmlformats.org/presentationml/2006/main">
   <p:cSld name="Slide 11">
     <p:bg>
@@ -6606,18 +8136,51 @@
           <a:bodyPr wrap="square" lIns="0" tIns="0" rIns="0" bIns="0" rtlCol="0" anchor="ctr"/>
           <a:lstStyle/>
           <a:p>
-            <a:pPr marL="0" indent="0">
-              <a:buNone/>
-            </a:pPr>
             <a:r>
               <a:rPr lang="en-US" sz="1800" b="1" dirty="0">
                 <a:solidFill>
                   <a:srgbClr val="61DAFB"/>
                 </a:solidFill>
               </a:rPr>
-              <a:t>Alternando Estado: feito / não feito</a:t>
-            </a:r>
-            <a:endParaRPr lang="en-US" sz="1800" dirty="0"/>
+              <a:t>Alternando Estado: feito / </a:t>
+            </a:r>
+            <a:r>
+              <a:rPr lang="en-US" sz="1800" b="1" dirty="0" err="1">
+                <a:solidFill>
+                  <a:srgbClr val="61DAFB"/>
+                </a:solidFill>
+              </a:rPr>
+              <a:t>não</a:t>
+            </a:r>
+            <a:r>
+              <a:rPr lang="en-US" sz="1800" b="1" dirty="0">
+                <a:solidFill>
+                  <a:srgbClr val="61DAFB"/>
+                </a:solidFill>
+              </a:rPr>
+              <a:t> Feito                       </a:t>
+            </a:r>
+            <a:r>
+              <a:rPr lang="pt-BR" b="1" dirty="0">
+                <a:solidFill>
+                  <a:schemeClr val="bg1"/>
+                </a:solidFill>
+              </a:rPr>
+              <a:t>componentes/</a:t>
+            </a:r>
+            <a:r>
+              <a:rPr lang="pt-BR" b="1" dirty="0" err="1">
+                <a:solidFill>
+                  <a:schemeClr val="bg1"/>
+                </a:solidFill>
+              </a:rPr>
+              <a:t>Conteudo.jsx</a:t>
+            </a:r>
+            <a:endParaRPr lang="en-US" sz="1800" dirty="0">
+              <a:solidFill>
+                <a:schemeClr val="bg1"/>
+              </a:solidFill>
+            </a:endParaRPr>
           </a:p>
         </p:txBody>
       </p:sp>
@@ -6629,7 +8192,7 @@
         </p:nvSpPr>
         <p:spPr>
           <a:xfrm>
-            <a:off x="457200" y="804672"/>
+            <a:off x="457200" y="743712"/>
             <a:ext cx="4754880" cy="4389120"/>
           </a:xfrm>
           <a:prstGeom prst="rect">
@@ -6661,7 +8224,7 @@
         </p:nvSpPr>
         <p:spPr>
           <a:xfrm>
-            <a:off x="594360" y="896112"/>
+            <a:off x="594360" y="835152"/>
             <a:ext cx="4480560" cy="4206240"/>
           </a:xfrm>
           <a:prstGeom prst="rect">
@@ -6678,7 +8241,7 @@
               <a:buNone/>
             </a:pPr>
             <a:r>
-              <a:rPr lang="en-US" sz="1000" dirty="0">
+              <a:rPr lang="en-US" sz="1200" dirty="0">
                 <a:solidFill>
                   <a:srgbClr val="CDD6F4"/>
                 </a:solidFill>
@@ -6688,14 +8251,14 @@
               </a:rPr>
               <a:t>import { useState } from "react"</a:t>
             </a:r>
-            <a:endParaRPr lang="en-US" sz="1000" dirty="0"/>
-          </a:p>
-          <a:p>
-            <a:pPr marL="0" indent="0">
-              <a:buNone/>
-            </a:pPr>
-            <a:r>
-              <a:rPr lang="en-US" sz="1000" dirty="0">
+            <a:endParaRPr lang="en-US" sz="1200" dirty="0"/>
+          </a:p>
+          <a:p>
+            <a:pPr marL="0" indent="0">
+              <a:buNone/>
+            </a:pPr>
+            <a:r>
+              <a:rPr lang="en-US" sz="1200" dirty="0">
                 <a:solidFill>
                   <a:srgbClr val="CDD6F4"/>
                 </a:solidFill>
@@ -6705,20 +8268,20 @@
               </a:rPr>
               <a:t>import styled from "styled-components"</a:t>
             </a:r>
-            <a:endParaRPr lang="en-US" sz="1000" dirty="0"/>
-          </a:p>
-          <a:p>
-            <a:pPr marL="0" indent="0">
-              <a:buNone/>
-            </a:pPr>
-            <a:endParaRPr lang="en-US" sz="1000" dirty="0"/>
-          </a:p>
-          <a:p>
-            <a:pPr marL="0" indent="0">
-              <a:buNone/>
-            </a:pPr>
-            <a:r>
-              <a:rPr lang="en-US" sz="1000" dirty="0">
+            <a:endParaRPr lang="en-US" sz="1200" dirty="0"/>
+          </a:p>
+          <a:p>
+            <a:pPr marL="0" indent="0">
+              <a:buNone/>
+            </a:pPr>
+            <a:endParaRPr lang="en-US" sz="1200" dirty="0"/>
+          </a:p>
+          <a:p>
+            <a:pPr marL="0" indent="0">
+              <a:buNone/>
+            </a:pPr>
+            <a:r>
+              <a:rPr lang="en-US" sz="1200" dirty="0">
                 <a:solidFill>
                   <a:srgbClr val="CDD6F4"/>
                 </a:solidFill>
@@ -6728,20 +8291,20 @@
               </a:rPr>
               <a:t>export function Conteudo({ texto }) {</a:t>
             </a:r>
-            <a:endParaRPr lang="en-US" sz="1000" dirty="0"/>
-          </a:p>
-          <a:p>
-            <a:pPr marL="0" indent="0">
-              <a:buNone/>
-            </a:pPr>
-            <a:endParaRPr lang="en-US" sz="1000" dirty="0"/>
-          </a:p>
-          <a:p>
-            <a:pPr marL="0" indent="0">
-              <a:buNone/>
-            </a:pPr>
-            <a:r>
-              <a:rPr lang="en-US" sz="1000" dirty="0">
+            <a:endParaRPr lang="en-US" sz="1200" dirty="0"/>
+          </a:p>
+          <a:p>
+            <a:pPr marL="0" indent="0">
+              <a:buNone/>
+            </a:pPr>
+            <a:endParaRPr lang="en-US" sz="1200" dirty="0"/>
+          </a:p>
+          <a:p>
+            <a:pPr marL="0" indent="0">
+              <a:buNone/>
+            </a:pPr>
+            <a:r>
+              <a:rPr lang="en-US" sz="1200" dirty="0">
                 <a:solidFill>
                   <a:srgbClr val="CDD6F4"/>
                 </a:solidFill>
@@ -6751,14 +8314,14 @@
               </a:rPr>
               <a:t>  // Estado: começa como false (não feito)</a:t>
             </a:r>
-            <a:endParaRPr lang="en-US" sz="1000" dirty="0"/>
-          </a:p>
-          <a:p>
-            <a:pPr marL="0" indent="0">
-              <a:buNone/>
-            </a:pPr>
-            <a:r>
-              <a:rPr lang="en-US" sz="1000" dirty="0">
+            <a:endParaRPr lang="en-US" sz="1200" dirty="0"/>
+          </a:p>
+          <a:p>
+            <a:pPr marL="0" indent="0">
+              <a:buNone/>
+            </a:pPr>
+            <a:r>
+              <a:rPr lang="en-US" sz="1200" dirty="0">
                 <a:solidFill>
                   <a:srgbClr val="CDD6F4"/>
                 </a:solidFill>
@@ -6768,20 +8331,20 @@
               </a:rPr>
               <a:t>  const [ feito, definirFeito ] = useState(false)</a:t>
             </a:r>
-            <a:endParaRPr lang="en-US" sz="1000" dirty="0"/>
-          </a:p>
-          <a:p>
-            <a:pPr marL="0" indent="0">
-              <a:buNone/>
-            </a:pPr>
-            <a:endParaRPr lang="en-US" sz="1000" dirty="0"/>
-          </a:p>
-          <a:p>
-            <a:pPr marL="0" indent="0">
-              <a:buNone/>
-            </a:pPr>
-            <a:r>
-              <a:rPr lang="en-US" sz="1000" dirty="0">
+            <a:endParaRPr lang="en-US" sz="1200" dirty="0"/>
+          </a:p>
+          <a:p>
+            <a:pPr marL="0" indent="0">
+              <a:buNone/>
+            </a:pPr>
+            <a:endParaRPr lang="en-US" sz="1200" dirty="0"/>
+          </a:p>
+          <a:p>
+            <a:pPr marL="0" indent="0">
+              <a:buNone/>
+            </a:pPr>
+            <a:r>
+              <a:rPr lang="en-US" sz="1200" dirty="0">
                 <a:solidFill>
                   <a:srgbClr val="CDD6F4"/>
                 </a:solidFill>
@@ -6791,71 +8354,109 @@
               </a:rPr>
               <a:t>  // Função que inverte o valor</a:t>
             </a:r>
-            <a:endParaRPr lang="en-US" sz="1000" dirty="0"/>
-          </a:p>
-          <a:p>
-            <a:pPr marL="0" indent="0">
-              <a:buNone/>
-            </a:pPr>
-            <a:r>
-              <a:rPr lang="en-US" sz="1000" dirty="0">
-                <a:solidFill>
-                  <a:srgbClr val="CDD6F4"/>
-                </a:solidFill>
-                <a:latin typeface="Consolas" pitchFamily="34" charset="0"/>
-                <a:ea typeface="Consolas" pitchFamily="34" charset="-122"/>
-                <a:cs typeface="Consolas" pitchFamily="34" charset="-120"/>
-              </a:rPr>
-              <a:t>  function Alternar() {</a:t>
-            </a:r>
-            <a:endParaRPr lang="en-US" sz="1000" dirty="0"/>
-          </a:p>
-          <a:p>
-            <a:pPr marL="0" indent="0">
-              <a:buNone/>
-            </a:pPr>
-            <a:r>
-              <a:rPr lang="en-US" sz="1000" dirty="0">
-                <a:solidFill>
-                  <a:srgbClr val="CDD6F4"/>
-                </a:solidFill>
-                <a:latin typeface="Consolas" pitchFamily="34" charset="0"/>
-                <a:ea typeface="Consolas" pitchFamily="34" charset="-122"/>
-                <a:cs typeface="Consolas" pitchFamily="34" charset="-120"/>
-              </a:rPr>
-              <a:t>    definirFeito(!feito)  // !false = true, !true = false</a:t>
-            </a:r>
-            <a:endParaRPr lang="en-US" sz="1000" dirty="0"/>
-          </a:p>
-          <a:p>
-            <a:pPr marL="0" indent="0">
-              <a:buNone/>
-            </a:pPr>
-            <a:r>
-              <a:rPr lang="en-US" sz="1000" dirty="0">
-                <a:solidFill>
-                  <a:srgbClr val="CDD6F4"/>
-                </a:solidFill>
-                <a:latin typeface="Consolas" pitchFamily="34" charset="0"/>
-                <a:ea typeface="Consolas" pitchFamily="34" charset="-122"/>
-                <a:cs typeface="Consolas" pitchFamily="34" charset="-120"/>
-              </a:rPr>
-              <a:t>  }</a:t>
-            </a:r>
-            <a:endParaRPr lang="en-US" sz="1000" dirty="0"/>
-          </a:p>
-          <a:p>
-            <a:pPr marL="0" indent="0">
-              <a:buNone/>
-            </a:pPr>
-            <a:endParaRPr lang="en-US" sz="1000" dirty="0"/>
-          </a:p>
-          <a:p>
-            <a:pPr marL="0" indent="0">
-              <a:buNone/>
-            </a:pPr>
-            <a:r>
-              <a:rPr lang="en-US" sz="1000" dirty="0">
+            <a:endParaRPr lang="en-US" sz="1200" dirty="0"/>
+          </a:p>
+          <a:p>
+            <a:r>
+              <a:rPr lang="en-US" sz="1200" dirty="0">
+                <a:solidFill>
+                  <a:srgbClr val="CDD6F4"/>
+                </a:solidFill>
+                <a:latin typeface="Consolas" pitchFamily="34" charset="0"/>
+                <a:ea typeface="Consolas" pitchFamily="34" charset="-122"/>
+                <a:cs typeface="Consolas" pitchFamily="34" charset="-120"/>
+              </a:rPr>
+              <a:t>  </a:t>
+            </a:r>
+            <a:r>
+              <a:rPr lang="pt-BR" sz="1200" dirty="0" err="1">
+                <a:solidFill>
+                  <a:srgbClr val="CDD6F4"/>
+                </a:solidFill>
+                <a:latin typeface="Consolas" pitchFamily="34" charset="0"/>
+              </a:rPr>
+              <a:t>function</a:t>
+            </a:r>
+            <a:r>
+              <a:rPr lang="pt-BR" sz="1200" dirty="0">
+                <a:solidFill>
+                  <a:srgbClr val="CDD6F4"/>
+                </a:solidFill>
+                <a:latin typeface="Consolas" pitchFamily="34" charset="0"/>
+              </a:rPr>
+              <a:t> Alternar() {</a:t>
+            </a:r>
+          </a:p>
+          <a:p>
+            <a:r>
+              <a:rPr lang="pt-BR" sz="1200" dirty="0">
+                <a:solidFill>
+                  <a:srgbClr val="CDD6F4"/>
+                </a:solidFill>
+                <a:latin typeface="Consolas" pitchFamily="34" charset="0"/>
+              </a:rPr>
+              <a:t>    </a:t>
+            </a:r>
+            <a:r>
+              <a:rPr lang="pt-BR" sz="1200" dirty="0" err="1">
+                <a:solidFill>
+                  <a:srgbClr val="CDD6F4"/>
+                </a:solidFill>
+                <a:latin typeface="Consolas" pitchFamily="34" charset="0"/>
+              </a:rPr>
+              <a:t>definirFeito</a:t>
+            </a:r>
+            <a:r>
+              <a:rPr lang="pt-BR" sz="1200" dirty="0">
+                <a:solidFill>
+                  <a:srgbClr val="CDD6F4"/>
+                </a:solidFill>
+                <a:latin typeface="Consolas" pitchFamily="34" charset="0"/>
+              </a:rPr>
+              <a:t>((prev) =&gt; !prev);  // inverte: se prev for </a:t>
+            </a:r>
+            <a:r>
+              <a:rPr lang="pt-BR" sz="1200" dirty="0" err="1">
+                <a:solidFill>
+                  <a:srgbClr val="CDD6F4"/>
+                </a:solidFill>
+                <a:latin typeface="Consolas" pitchFamily="34" charset="0"/>
+              </a:rPr>
+              <a:t>true</a:t>
+            </a:r>
+            <a:r>
+              <a:rPr lang="pt-BR" sz="1200" dirty="0">
+                <a:solidFill>
+                  <a:srgbClr val="CDD6F4"/>
+                </a:solidFill>
+                <a:latin typeface="Consolas" pitchFamily="34" charset="0"/>
+              </a:rPr>
+              <a:t> vira false, e vice-versa</a:t>
+            </a:r>
+          </a:p>
+          <a:p>
+            <a:r>
+              <a:rPr lang="pt-BR" sz="1200" dirty="0">
+                <a:solidFill>
+                  <a:srgbClr val="CDD6F4"/>
+                </a:solidFill>
+                <a:latin typeface="Consolas" pitchFamily="34" charset="0"/>
+              </a:rPr>
+              <a:t>  }</a:t>
+            </a:r>
+          </a:p>
+          <a:p>
+            <a:pPr marL="0" indent="0">
+              <a:buNone/>
+            </a:pPr>
+            <a:endParaRPr lang="en-US" sz="1200" dirty="0"/>
+          </a:p>
+          <a:p>
+            <a:pPr marL="0" indent="0">
+              <a:buNone/>
+            </a:pPr>
+            <a:r>
+              <a:rPr lang="en-US" sz="1200" dirty="0">
                 <a:solidFill>
                   <a:srgbClr val="CDD6F4"/>
                 </a:solidFill>
@@ -6865,14 +8466,14 @@
               </a:rPr>
               <a:t>  return (</a:t>
             </a:r>
-            <a:endParaRPr lang="en-US" sz="1000" dirty="0"/>
-          </a:p>
-          <a:p>
-            <a:pPr marL="0" indent="0">
-              <a:buNone/>
-            </a:pPr>
-            <a:r>
-              <a:rPr lang="en-US" sz="1000" dirty="0">
+            <a:endParaRPr lang="en-US" sz="1200" dirty="0"/>
+          </a:p>
+          <a:p>
+            <a:pPr marL="0" indent="0">
+              <a:buNone/>
+            </a:pPr>
+            <a:r>
+              <a:rPr lang="en-US" sz="1200" dirty="0">
                 <a:solidFill>
                   <a:srgbClr val="CDD6F4"/>
                 </a:solidFill>
@@ -6882,14 +8483,14 @@
               </a:rPr>
               <a:t>    &lt;ModeloConteudo</a:t>
             </a:r>
-            <a:endParaRPr lang="en-US" sz="1000" dirty="0"/>
-          </a:p>
-          <a:p>
-            <a:pPr marL="0" indent="0">
-              <a:buNone/>
-            </a:pPr>
-            <a:r>
-              <a:rPr lang="en-US" sz="1000" dirty="0">
+            <a:endParaRPr lang="en-US" sz="1200" dirty="0"/>
+          </a:p>
+          <a:p>
+            <a:pPr marL="0" indent="0">
+              <a:buNone/>
+            </a:pPr>
+            <a:r>
+              <a:rPr lang="en-US" sz="1200" dirty="0">
                 <a:solidFill>
                   <a:srgbClr val="CDD6F4"/>
                 </a:solidFill>
@@ -6899,14 +8500,14 @@
               </a:rPr>
               <a:t>      onClick={Alternar}</a:t>
             </a:r>
-            <a:endParaRPr lang="en-US" sz="1000" dirty="0"/>
-          </a:p>
-          <a:p>
-            <a:pPr marL="0" indent="0">
-              <a:buNone/>
-            </a:pPr>
-            <a:r>
-              <a:rPr lang="en-US" sz="1000" dirty="0">
+            <a:endParaRPr lang="en-US" sz="1200" dirty="0"/>
+          </a:p>
+          <a:p>
+            <a:pPr marL="0" indent="0">
+              <a:buNone/>
+            </a:pPr>
+            <a:r>
+              <a:rPr lang="en-US" sz="1200" dirty="0">
                 <a:solidFill>
                   <a:srgbClr val="CDD6F4"/>
                 </a:solidFill>
@@ -6916,14 +8517,14 @@
               </a:rPr>
               <a:t>      $estado={feito}</a:t>
             </a:r>
-            <a:endParaRPr lang="en-US" sz="1000" dirty="0"/>
-          </a:p>
-          <a:p>
-            <a:pPr marL="0" indent="0">
-              <a:buNone/>
-            </a:pPr>
-            <a:r>
-              <a:rPr lang="en-US" sz="1000" dirty="0">
+            <a:endParaRPr lang="en-US" sz="1200" dirty="0"/>
+          </a:p>
+          <a:p>
+            <a:pPr marL="0" indent="0">
+              <a:buNone/>
+            </a:pPr>
+            <a:r>
+              <a:rPr lang="en-US" sz="1200" dirty="0">
                 <a:solidFill>
                   <a:srgbClr val="CDD6F4"/>
                 </a:solidFill>
@@ -6933,14 +8534,14 @@
               </a:rPr>
               <a:t>    &gt;</a:t>
             </a:r>
-            <a:endParaRPr lang="en-US" sz="1000" dirty="0"/>
-          </a:p>
-          <a:p>
-            <a:pPr marL="0" indent="0">
-              <a:buNone/>
-            </a:pPr>
-            <a:r>
-              <a:rPr lang="en-US" sz="1000" dirty="0">
+            <a:endParaRPr lang="en-US" sz="1200" dirty="0"/>
+          </a:p>
+          <a:p>
+            <a:pPr marL="0" indent="0">
+              <a:buNone/>
+            </a:pPr>
+            <a:r>
+              <a:rPr lang="en-US" sz="1200" dirty="0">
                 <a:solidFill>
                   <a:srgbClr val="CDD6F4"/>
                 </a:solidFill>
@@ -6950,14 +8551,14 @@
               </a:rPr>
               <a:t>      {texto}</a:t>
             </a:r>
-            <a:endParaRPr lang="en-US" sz="1000" dirty="0"/>
-          </a:p>
-          <a:p>
-            <a:pPr marL="0" indent="0">
-              <a:buNone/>
-            </a:pPr>
-            <a:r>
-              <a:rPr lang="en-US" sz="1000" dirty="0">
+            <a:endParaRPr lang="en-US" sz="1200" dirty="0"/>
+          </a:p>
+          <a:p>
+            <a:pPr marL="0" indent="0">
+              <a:buNone/>
+            </a:pPr>
+            <a:r>
+              <a:rPr lang="en-US" sz="1200" dirty="0">
                 <a:solidFill>
                   <a:srgbClr val="CDD6F4"/>
                 </a:solidFill>
@@ -6967,14 +8568,14 @@
               </a:rPr>
               <a:t>    &lt;/ModeloConteudo&gt;</a:t>
             </a:r>
-            <a:endParaRPr lang="en-US" sz="1000" dirty="0"/>
-          </a:p>
-          <a:p>
-            <a:pPr marL="0" indent="0">
-              <a:buNone/>
-            </a:pPr>
-            <a:r>
-              <a:rPr lang="en-US" sz="1000" dirty="0">
+            <a:endParaRPr lang="en-US" sz="1200" dirty="0"/>
+          </a:p>
+          <a:p>
+            <a:pPr marL="0" indent="0">
+              <a:buNone/>
+            </a:pPr>
+            <a:r>
+              <a:rPr lang="en-US" sz="1200" dirty="0">
                 <a:solidFill>
                   <a:srgbClr val="CDD6F4"/>
                 </a:solidFill>
@@ -6984,14 +8585,14 @@
               </a:rPr>
               <a:t>  )</a:t>
             </a:r>
-            <a:endParaRPr lang="en-US" sz="1000" dirty="0"/>
-          </a:p>
-          <a:p>
-            <a:pPr marL="0" indent="0">
-              <a:buNone/>
-            </a:pPr>
-            <a:r>
-              <a:rPr lang="en-US" sz="1000" dirty="0">
+            <a:endParaRPr lang="en-US" sz="1200" dirty="0"/>
+          </a:p>
+          <a:p>
+            <a:pPr marL="0" indent="0">
+              <a:buNone/>
+            </a:pPr>
+            <a:r>
+              <a:rPr lang="en-US" sz="1200" dirty="0">
                 <a:solidFill>
                   <a:srgbClr val="CDD6F4"/>
                 </a:solidFill>
@@ -7001,7 +8602,7 @@
               </a:rPr>
               <a:t>}</a:t>
             </a:r>
-            <a:endParaRPr lang="en-US" sz="1000" dirty="0"/>
+            <a:endParaRPr lang="en-US" sz="1200" dirty="0"/>
           </a:p>
         </p:txBody>
       </p:sp>
@@ -7173,7 +8774,7 @@
           <a:bodyPr/>
           <a:lstStyle/>
           <a:p>
-            <a:endParaRPr lang="pt-BR"/>
+            <a:endParaRPr lang="pt-BR" dirty="0"/>
           </a:p>
         </p:txBody>
       </p:sp>
@@ -7202,12 +8803,84 @@
               <a:buNone/>
             </a:pPr>
             <a:r>
+              <a:rPr lang="en-US" sz="1100" b="1" dirty="0">
+                <a:solidFill>
+                  <a:srgbClr val="20232A"/>
+                </a:solidFill>
+              </a:rPr>
+              <a:t>onClick chama </a:t>
+            </a:r>
+            <a:r>
+              <a:rPr lang="en-US" sz="1100" b="1" dirty="0" err="1">
+                <a:solidFill>
+                  <a:srgbClr val="20232A"/>
+                </a:solidFill>
+              </a:rPr>
+              <a:t>Alternar</a:t>
+            </a:r>
+            <a:r>
+              <a:rPr lang="en-US" sz="1100" b="1" dirty="0">
+                <a:solidFill>
+                  <a:srgbClr val="20232A"/>
+                </a:solidFill>
+              </a:rPr>
+              <a:t>()   </a:t>
+            </a:r>
+            <a:r>
               <a:rPr lang="en-US" sz="1100" dirty="0">
                 <a:solidFill>
                   <a:srgbClr val="20232A"/>
                 </a:solidFill>
               </a:rPr>
-              <a:t>onClick chama Alternar()</a:t>
+              <a:t>-  A </a:t>
+            </a:r>
+            <a:r>
+              <a:rPr lang="en-US" sz="1100" dirty="0" err="1">
+                <a:solidFill>
+                  <a:srgbClr val="20232A"/>
+                </a:solidFill>
+              </a:rPr>
+              <a:t>função</a:t>
+            </a:r>
+            <a:r>
+              <a:rPr lang="en-US" sz="1100" dirty="0">
+                <a:solidFill>
+                  <a:srgbClr val="20232A"/>
+                </a:solidFill>
+              </a:rPr>
+              <a:t> </a:t>
+            </a:r>
+            <a:r>
+              <a:rPr lang="en-US" sz="1100" dirty="0" err="1">
+                <a:solidFill>
+                  <a:srgbClr val="20232A"/>
+                </a:solidFill>
+              </a:rPr>
+              <a:t>Alterar</a:t>
+            </a:r>
+            <a:r>
+              <a:rPr lang="en-US" sz="1100" dirty="0">
+                <a:solidFill>
+                  <a:srgbClr val="20232A"/>
+                </a:solidFill>
+              </a:rPr>
+              <a:t> é </a:t>
+            </a:r>
+            <a:r>
+              <a:rPr lang="en-US" sz="1100" dirty="0" err="1">
+                <a:solidFill>
+                  <a:srgbClr val="20232A"/>
+                </a:solidFill>
+              </a:rPr>
+              <a:t>executada</a:t>
+            </a:r>
+            <a:r>
+              <a:rPr lang="en-US" sz="1100" dirty="0">
+                <a:solidFill>
+                  <a:srgbClr val="20232A"/>
+                </a:solidFill>
+              </a:rPr>
+              <a:t>. </a:t>
             </a:r>
             <a:endParaRPr lang="en-US" sz="1100" dirty="0"/>
           </a:p>
@@ -7302,18 +8975,35 @@
           <a:bodyPr wrap="square" lIns="0" tIns="0" rIns="0" bIns="0" rtlCol="0" anchor="ctr"/>
           <a:lstStyle/>
           <a:p>
-            <a:pPr marL="0" indent="0">
-              <a:buNone/>
-            </a:pPr>
-            <a:r>
-              <a:rPr lang="en-US" sz="1100" dirty="0">
+            <a:r>
+              <a:rPr lang="pt-BR" sz="1100" b="1" dirty="0" err="1">
                 <a:solidFill>
                   <a:srgbClr val="20232A"/>
                 </a:solidFill>
               </a:rPr>
-              <a:t>definirFeito(!feito)</a:t>
-            </a:r>
-            <a:endParaRPr lang="en-US" sz="1100" dirty="0"/>
+              <a:t>definirFeito</a:t>
+            </a:r>
+            <a:r>
+              <a:rPr lang="pt-BR" sz="1100" b="1" dirty="0">
+                <a:solidFill>
+                  <a:srgbClr val="20232A"/>
+                </a:solidFill>
+              </a:rPr>
+              <a:t>((prev)    </a:t>
+            </a:r>
+            <a:r>
+              <a:rPr lang="pt-BR" sz="1100" dirty="0">
+                <a:solidFill>
+                  <a:srgbClr val="20232A"/>
+                </a:solidFill>
+              </a:rPr>
+              <a:t>-  pega o valor mais recente do estado (prev)</a:t>
+            </a:r>
+            <a:endParaRPr lang="en-US" sz="1100" dirty="0">
+              <a:solidFill>
+                <a:srgbClr val="20232A"/>
+              </a:solidFill>
+            </a:endParaRPr>
           </a:p>
         </p:txBody>
       </p:sp>
@@ -7406,18 +9096,27 @@
           <a:bodyPr wrap="square" lIns="0" tIns="0" rIns="0" bIns="0" rtlCol="0" anchor="ctr"/>
           <a:lstStyle/>
           <a:p>
-            <a:pPr marL="0" indent="0">
-              <a:buNone/>
-            </a:pPr>
-            <a:r>
-              <a:rPr lang="en-US" sz="1100" dirty="0">
+            <a:r>
+              <a:rPr lang="pt-BR" sz="1100" b="1" dirty="0">
                 <a:solidFill>
                   <a:srgbClr val="20232A"/>
                 </a:solidFill>
               </a:rPr>
-              <a:t>feito: false → true</a:t>
-            </a:r>
-            <a:endParaRPr lang="en-US" sz="1100" dirty="0"/>
+              <a:t> !prev);      </a:t>
+            </a:r>
+            <a:r>
+              <a:rPr lang="pt-BR" sz="1100" dirty="0">
+                <a:solidFill>
+                  <a:srgbClr val="20232A"/>
+                </a:solidFill>
+              </a:rPr>
+              <a:t>-  Inverte o resultado  </a:t>
+            </a:r>
+            <a:endParaRPr lang="en-US" sz="1100" dirty="0">
+              <a:solidFill>
+                <a:srgbClr val="20232A"/>
+              </a:solidFill>
+            </a:endParaRPr>
           </a:p>
         </p:txBody>
       </p:sp>
@@ -7465,14 +9164,14 @@
         </p:nvSpPr>
         <p:spPr>
           <a:xfrm>
-            <a:off x="5394960" y="3904488"/>
+            <a:off x="5394960" y="4550982"/>
             <a:ext cx="3474720" cy="502920"/>
           </a:xfrm>
           <a:prstGeom prst="rect">
             <a:avLst/>
           </a:prstGeom>
           <a:solidFill>
-            <a:srgbClr val="D4EDDA"/>
+            <a:srgbClr val="FFC000"/>
           </a:solidFill>
           <a:ln w="12700">
             <a:solidFill>
@@ -7485,7 +9184,7 @@
           <a:bodyPr/>
           <a:lstStyle/>
           <a:p>
-            <a:endParaRPr lang="pt-BR"/>
+            <a:endParaRPr lang="pt-BR" dirty="0"/>
           </a:p>
         </p:txBody>
       </p:sp>
@@ -7497,7 +9196,7 @@
         </p:nvSpPr>
         <p:spPr>
           <a:xfrm>
-            <a:off x="5486400" y="3904488"/>
+            <a:off x="5486400" y="4550982"/>
             <a:ext cx="3291840" cy="502920"/>
           </a:xfrm>
           <a:prstGeom prst="rect">
@@ -7510,18 +9209,153 @@
           <a:bodyPr wrap="square" lIns="0" tIns="0" rIns="0" bIns="0" rtlCol="0" anchor="ctr"/>
           <a:lstStyle/>
           <a:p>
-            <a:pPr marL="0" indent="0">
-              <a:buNone/>
-            </a:pPr>
-            <a:r>
-              <a:rPr lang="en-US" sz="1100" dirty="0">
-                <a:solidFill>
-                  <a:srgbClr val="20232A"/>
-                </a:solidFill>
-              </a:rPr>
-              <a:t>Componente re-renderiza!</a:t>
-            </a:r>
-            <a:endParaRPr lang="en-US" sz="1100" dirty="0"/>
+            <a:pPr marL="0" indent="0" algn="ctr">
+              <a:buNone/>
+            </a:pPr>
+            <a:r>
+              <a:rPr lang="en-US" sz="1200" b="1" dirty="0" err="1">
+                <a:solidFill>
+                  <a:srgbClr val="FF0000"/>
+                </a:solidFill>
+              </a:rPr>
+              <a:t>Ainda</a:t>
+            </a:r>
+            <a:r>
+              <a:rPr lang="en-US" sz="1200" b="1" dirty="0">
+                <a:solidFill>
+                  <a:srgbClr val="FF0000"/>
+                </a:solidFill>
+              </a:rPr>
+              <a:t> </a:t>
+            </a:r>
+            <a:r>
+              <a:rPr lang="en-US" sz="1200" b="1" dirty="0" err="1">
+                <a:solidFill>
+                  <a:srgbClr val="FF0000"/>
+                </a:solidFill>
+              </a:rPr>
+              <a:t>não</a:t>
+            </a:r>
+            <a:r>
+              <a:rPr lang="en-US" sz="1200" b="1" dirty="0">
+                <a:solidFill>
+                  <a:srgbClr val="FF0000"/>
+                </a:solidFill>
+              </a:rPr>
+              <a:t> </a:t>
+            </a:r>
+            <a:r>
+              <a:rPr lang="en-US" sz="1200" b="1" dirty="0" err="1">
+                <a:solidFill>
+                  <a:srgbClr val="FF0000"/>
+                </a:solidFill>
+              </a:rPr>
+              <a:t>vemos</a:t>
+            </a:r>
+            <a:r>
+              <a:rPr lang="en-US" sz="1200" b="1" dirty="0">
+                <a:solidFill>
+                  <a:srgbClr val="FF0000"/>
+                </a:solidFill>
+              </a:rPr>
+              <a:t> o </a:t>
+            </a:r>
+            <a:r>
+              <a:rPr lang="en-US" sz="1200" b="1" dirty="0" err="1">
+                <a:solidFill>
+                  <a:srgbClr val="FF0000"/>
+                </a:solidFill>
+              </a:rPr>
+              <a:t>resultado</a:t>
+            </a:r>
+            <a:r>
+              <a:rPr lang="en-US" sz="1200" b="1" dirty="0">
+                <a:solidFill>
+                  <a:srgbClr val="FF0000"/>
+                </a:solidFill>
+              </a:rPr>
+              <a:t>, </a:t>
+            </a:r>
+            <a:r>
+              <a:rPr lang="en-US" sz="1200" b="1" dirty="0" err="1">
+                <a:solidFill>
+                  <a:srgbClr val="FF0000"/>
+                </a:solidFill>
+              </a:rPr>
+              <a:t>precisamos</a:t>
+            </a:r>
+            <a:r>
+              <a:rPr lang="en-US" sz="1200" b="1" dirty="0">
+                <a:solidFill>
+                  <a:srgbClr val="FF0000"/>
+                </a:solidFill>
+              </a:rPr>
+              <a:t> </a:t>
+            </a:r>
+            <a:r>
+              <a:rPr lang="en-US" sz="1200" b="1" dirty="0" err="1">
+                <a:solidFill>
+                  <a:srgbClr val="FF0000"/>
+                </a:solidFill>
+              </a:rPr>
+              <a:t>ajustar</a:t>
+            </a:r>
+            <a:r>
+              <a:rPr lang="en-US" sz="1200" b="1" dirty="0">
+                <a:solidFill>
+                  <a:srgbClr val="FF0000"/>
+                </a:solidFill>
+              </a:rPr>
+              <a:t> </a:t>
+            </a:r>
+            <a:r>
+              <a:rPr lang="en-US" sz="1200" b="1" dirty="0" err="1">
+                <a:solidFill>
+                  <a:srgbClr val="FF0000"/>
+                </a:solidFill>
+              </a:rPr>
+              <a:t>alguns</a:t>
+            </a:r>
+            <a:r>
+              <a:rPr lang="en-US" sz="1200" b="1" dirty="0">
+                <a:solidFill>
+                  <a:srgbClr val="FF0000"/>
+                </a:solidFill>
+              </a:rPr>
+              <a:t> </a:t>
+            </a:r>
+            <a:r>
+              <a:rPr lang="en-US" sz="1200" b="1" dirty="0" err="1">
+                <a:solidFill>
+                  <a:srgbClr val="FF0000"/>
+                </a:solidFill>
+              </a:rPr>
+              <a:t>detalhes</a:t>
+            </a:r>
+            <a:r>
+              <a:rPr lang="en-US" sz="1200" b="1" dirty="0">
+                <a:solidFill>
+                  <a:srgbClr val="FF0000"/>
+                </a:solidFill>
+              </a:rPr>
+              <a:t> a </a:t>
+            </a:r>
+            <a:r>
+              <a:rPr lang="en-US" sz="1200" b="1" dirty="0" err="1">
+                <a:solidFill>
+                  <a:srgbClr val="FF0000"/>
+                </a:solidFill>
+              </a:rPr>
+              <a:t>seguir</a:t>
+            </a:r>
+            <a:r>
+              <a:rPr lang="en-US" sz="1200" b="1" dirty="0">
+                <a:solidFill>
+                  <a:srgbClr val="FF0000"/>
+                </a:solidFill>
+              </a:rPr>
+              <a:t>.</a:t>
+            </a:r>
           </a:p>
         </p:txBody>
       </p:sp>
@@ -7533,8 +9367,8 @@
         </p:nvSpPr>
         <p:spPr>
           <a:xfrm>
-            <a:off x="5394960" y="4617720"/>
-            <a:ext cx="3474720" cy="411480"/>
+            <a:off x="5394960" y="3916362"/>
+            <a:ext cx="3474720" cy="502920"/>
           </a:xfrm>
           <a:prstGeom prst="rect">
             <a:avLst/>
@@ -7565,7 +9399,7 @@
         </p:nvSpPr>
         <p:spPr>
           <a:xfrm>
-            <a:off x="5486400" y="4617720"/>
+            <a:off x="5489448" y="3957987"/>
             <a:ext cx="3291840" cy="411480"/>
           </a:xfrm>
           <a:prstGeom prst="rect">
@@ -7578,21 +9412,21 @@
           <a:bodyPr wrap="square" lIns="0" tIns="0" rIns="0" bIns="0" rtlCol="0" anchor="ctr"/>
           <a:lstStyle/>
           <a:p>
-            <a:pPr marL="0" indent="0">
-              <a:buNone/>
-            </a:pPr>
-            <a:r>
-              <a:rPr lang="en-US" sz="1100" dirty="0">
+            <a:pPr fontAlgn="t">
+              <a:lnSpc>
+                <a:spcPts val="1500"/>
+              </a:lnSpc>
+              <a:buNone/>
+            </a:pPr>
+            <a:r>
+              <a:rPr lang="pt-BR" sz="1100" dirty="0">
                 <a:solidFill>
                   <a:srgbClr val="61DAFB"/>
                 </a:solidFill>
                 <a:latin typeface="Consolas" pitchFamily="34" charset="0"/>
-                <a:ea typeface="Consolas" pitchFamily="34" charset="-122"/>
-                <a:cs typeface="Consolas" pitchFamily="34" charset="-120"/>
-              </a:rPr>
-              <a:t>!feito  →  inverte o valor booleano</a:t>
-            </a:r>
-            <a:endParaRPr lang="en-US" sz="1100" dirty="0"/>
+              </a:rPr>
+              <a:t>“Pegue o último valor do estado (prev) e troque para o valor oposto.”</a:t>
+            </a:r>
           </a:p>
         </p:txBody>
       </p:sp>
@@ -7604,7 +9438,7 @@
 </p:sld>
 </file>
 
-<file path=ppt/slides/slide14.xml><?xml version="1.0" encoding="utf-8"?>
+<file path=ppt/slides/slide15.xml><?xml version="1.0" encoding="utf-8"?>
 <p:sld xmlns:a="http://schemas.openxmlformats.org/drawingml/2006/main" xmlns:r="http://schemas.openxmlformats.org/officeDocument/2006/relationships" xmlns:p="http://schemas.openxmlformats.org/presentationml/2006/main">
   <p:cSld name="Slide 12">
     <p:bg>
@@ -7773,7 +9607,7 @@
         </p:nvSpPr>
         <p:spPr>
           <a:xfrm>
-            <a:off x="457200" y="804672"/>
+            <a:off x="457200" y="743712"/>
             <a:ext cx="8229600" cy="365760"/>
           </a:xfrm>
           <a:prstGeom prst="rect">
@@ -7809,7 +9643,7 @@
         </p:nvSpPr>
         <p:spPr>
           <a:xfrm>
-            <a:off x="365760" y="1234440"/>
+            <a:off x="365760" y="1100328"/>
             <a:ext cx="2651760" cy="320040"/>
           </a:xfrm>
           <a:prstGeom prst="rect">
@@ -7841,7 +9675,7 @@
         </p:nvSpPr>
         <p:spPr>
           <a:xfrm>
-            <a:off x="365760" y="1234440"/>
+            <a:off x="365760" y="1100328"/>
             <a:ext cx="2651760" cy="320040"/>
           </a:xfrm>
           <a:prstGeom prst="rect">
@@ -7877,7 +9711,7 @@
         </p:nvSpPr>
         <p:spPr>
           <a:xfrm>
-            <a:off x="365760" y="1554480"/>
+            <a:off x="365760" y="1420368"/>
             <a:ext cx="2651760" cy="1188720"/>
           </a:xfrm>
           <a:prstGeom prst="rect">
@@ -7909,7 +9743,7 @@
         </p:nvSpPr>
         <p:spPr>
           <a:xfrm>
-            <a:off x="502920" y="1645920"/>
+            <a:off x="502920" y="1511808"/>
             <a:ext cx="2377440" cy="1005840"/>
           </a:xfrm>
           <a:prstGeom prst="rect">
@@ -8016,7 +9850,7 @@
         </p:nvSpPr>
         <p:spPr>
           <a:xfrm>
-            <a:off x="3200400" y="1234440"/>
+            <a:off x="3200400" y="1100328"/>
             <a:ext cx="2651760" cy="320040"/>
           </a:xfrm>
           <a:prstGeom prst="rect">
@@ -8048,7 +9882,7 @@
         </p:nvSpPr>
         <p:spPr>
           <a:xfrm>
-            <a:off x="3200400" y="1234440"/>
+            <a:off x="3200400" y="1100328"/>
             <a:ext cx="2651760" cy="320040"/>
           </a:xfrm>
           <a:prstGeom prst="rect">
@@ -8084,7 +9918,7 @@
         </p:nvSpPr>
         <p:spPr>
           <a:xfrm>
-            <a:off x="3200400" y="1554480"/>
+            <a:off x="3200400" y="1420368"/>
             <a:ext cx="2651760" cy="1188720"/>
           </a:xfrm>
           <a:prstGeom prst="rect">
@@ -8116,7 +9950,7 @@
         </p:nvSpPr>
         <p:spPr>
           <a:xfrm>
-            <a:off x="3337560" y="1645920"/>
+            <a:off x="3337560" y="1511808"/>
             <a:ext cx="2377440" cy="1005840"/>
           </a:xfrm>
           <a:prstGeom prst="rect">
@@ -8206,7 +10040,7 @@
         </p:nvSpPr>
         <p:spPr>
           <a:xfrm>
-            <a:off x="6035040" y="1234440"/>
+            <a:off x="6035040" y="1100328"/>
             <a:ext cx="2651760" cy="320040"/>
           </a:xfrm>
           <a:prstGeom prst="rect">
@@ -8238,7 +10072,7 @@
         </p:nvSpPr>
         <p:spPr>
           <a:xfrm>
-            <a:off x="6035040" y="1234440"/>
+            <a:off x="6035040" y="1100328"/>
             <a:ext cx="2651760" cy="320040"/>
           </a:xfrm>
           <a:prstGeom prst="rect">
@@ -8274,7 +10108,7 @@
         </p:nvSpPr>
         <p:spPr>
           <a:xfrm>
-            <a:off x="6035040" y="1554480"/>
+            <a:off x="6035040" y="1420368"/>
             <a:ext cx="2651760" cy="1188720"/>
           </a:xfrm>
           <a:prstGeom prst="rect">
@@ -8306,7 +10140,7 @@
         </p:nvSpPr>
         <p:spPr>
           <a:xfrm>
-            <a:off x="6172200" y="1645920"/>
+            <a:off x="6172200" y="1511808"/>
             <a:ext cx="2377440" cy="1005840"/>
           </a:xfrm>
           <a:prstGeom prst="rect">
@@ -8379,7 +10213,7 @@
         </p:nvSpPr>
         <p:spPr>
           <a:xfrm>
-            <a:off x="457200" y="2880360"/>
+            <a:off x="457200" y="2587752"/>
             <a:ext cx="4572000" cy="365760"/>
           </a:xfrm>
           <a:prstGeom prst="rect">
@@ -8415,8 +10249,8 @@
         </p:nvSpPr>
         <p:spPr>
           <a:xfrm>
-            <a:off x="457200" y="3291840"/>
-            <a:ext cx="5029200" cy="2880360"/>
+            <a:off x="365760" y="2894076"/>
+            <a:ext cx="5212080" cy="1665732"/>
           </a:xfrm>
           <a:prstGeom prst="rect">
             <a:avLst/>
@@ -8447,8 +10281,8 @@
         </p:nvSpPr>
         <p:spPr>
           <a:xfrm>
-            <a:off x="594360" y="3383280"/>
-            <a:ext cx="4754880" cy="2697480"/>
+            <a:off x="457200" y="3017520"/>
+            <a:ext cx="5120640" cy="1943100"/>
           </a:xfrm>
           <a:prstGeom prst="rect">
             <a:avLst/>
@@ -8464,7 +10298,7 @@
               <a:buNone/>
             </a:pPr>
             <a:r>
-              <a:rPr lang="en-US" sz="1000" dirty="0">
+              <a:rPr lang="en-US" sz="1150" dirty="0">
                 <a:solidFill>
                   <a:srgbClr val="CDD6F4"/>
                 </a:solidFill>
@@ -8474,82 +10308,90 @@
               </a:rPr>
               <a:t>const ModeloConteudo = styled.div`</a:t>
             </a:r>
-            <a:endParaRPr lang="en-US" sz="1000" dirty="0"/>
-          </a:p>
-          <a:p>
-            <a:pPr marL="0" indent="0">
-              <a:buNone/>
-            </a:pPr>
-            <a:r>
-              <a:rPr lang="en-US" sz="1000" dirty="0">
-                <a:solidFill>
-                  <a:srgbClr val="CDD6F4"/>
-                </a:solidFill>
-                <a:latin typeface="Consolas" pitchFamily="34" charset="0"/>
-                <a:ea typeface="Consolas" pitchFamily="34" charset="-122"/>
-                <a:cs typeface="Consolas" pitchFamily="34" charset="-120"/>
-              </a:rPr>
-              <a:t>  background: ${</a:t>
-            </a:r>
-            <a:endParaRPr lang="en-US" sz="1000" dirty="0"/>
-          </a:p>
-          <a:p>
-            <a:pPr marL="0" indent="0">
-              <a:buNone/>
-            </a:pPr>
-            <a:r>
-              <a:rPr lang="en-US" sz="1000" dirty="0">
-                <a:solidFill>
-                  <a:srgbClr val="CDD6F4"/>
-                </a:solidFill>
-                <a:latin typeface="Consolas" pitchFamily="34" charset="0"/>
-                <a:ea typeface="Consolas" pitchFamily="34" charset="-122"/>
-                <a:cs typeface="Consolas" pitchFamily="34" charset="-120"/>
-              </a:rPr>
-              <a:t>    ({ $estado }) =&gt; $estado</a:t>
-            </a:r>
-            <a:endParaRPr lang="en-US" sz="1000" dirty="0"/>
-          </a:p>
-          <a:p>
-            <a:pPr marL="0" indent="0">
-              <a:buNone/>
-            </a:pPr>
-            <a:r>
-              <a:rPr lang="en-US" sz="1000" dirty="0">
-                <a:solidFill>
-                  <a:srgbClr val="CDD6F4"/>
-                </a:solidFill>
-                <a:latin typeface="Consolas" pitchFamily="34" charset="0"/>
-                <a:ea typeface="Consolas" pitchFamily="34" charset="-122"/>
-                <a:cs typeface="Consolas" pitchFamily="34" charset="-120"/>
-              </a:rPr>
-              <a:t>      ? 'white' : '#eee'</a:t>
-            </a:r>
-            <a:endParaRPr lang="en-US" sz="1000" dirty="0"/>
-          </a:p>
-          <a:p>
-            <a:pPr marL="0" indent="0">
-              <a:buNone/>
-            </a:pPr>
-            <a:r>
-              <a:rPr lang="en-US" sz="1000" dirty="0">
-                <a:solidFill>
-                  <a:srgbClr val="CDD6F4"/>
-                </a:solidFill>
-                <a:latin typeface="Consolas" pitchFamily="34" charset="0"/>
-                <a:ea typeface="Consolas" pitchFamily="34" charset="-122"/>
-                <a:cs typeface="Consolas" pitchFamily="34" charset="-120"/>
-              </a:rPr>
-              <a:t>  };</a:t>
-            </a:r>
-            <a:endParaRPr lang="en-US" sz="1000" dirty="0"/>
-          </a:p>
-          <a:p>
-            <a:pPr marL="0" indent="0">
-              <a:buNone/>
-            </a:pPr>
-            <a:r>
-              <a:rPr lang="en-US" sz="1000" dirty="0">
+            <a:endParaRPr lang="en-US" sz="1150" dirty="0"/>
+          </a:p>
+          <a:p>
+            <a:pPr marL="0" indent="0">
+              <a:buNone/>
+            </a:pPr>
+            <a:r>
+              <a:rPr lang="en-US" sz="1150" dirty="0">
+                <a:solidFill>
+                  <a:srgbClr val="CDD6F4"/>
+                </a:solidFill>
+                <a:latin typeface="Consolas" pitchFamily="34" charset="0"/>
+                <a:ea typeface="Consolas" pitchFamily="34" charset="-122"/>
+                <a:cs typeface="Consolas" pitchFamily="34" charset="-120"/>
+              </a:rPr>
+              <a:t>  </a:t>
+            </a:r>
+            <a:r>
+              <a:rPr lang="en-US" sz="1150" dirty="0">
+                <a:solidFill>
+                  <a:srgbClr val="FFFF00"/>
+                </a:solidFill>
+                <a:latin typeface="Consolas" pitchFamily="34" charset="0"/>
+                <a:ea typeface="Consolas" pitchFamily="34" charset="-122"/>
+                <a:cs typeface="Consolas" pitchFamily="34" charset="-120"/>
+              </a:rPr>
+              <a:t>background: ${({ $estado }) =&gt; $</a:t>
+            </a:r>
+            <a:r>
+              <a:rPr lang="en-US" sz="1150" dirty="0" err="1">
+                <a:solidFill>
+                  <a:srgbClr val="FFFF00"/>
+                </a:solidFill>
+                <a:latin typeface="Consolas" pitchFamily="34" charset="0"/>
+                <a:ea typeface="Consolas" pitchFamily="34" charset="-122"/>
+                <a:cs typeface="Consolas" pitchFamily="34" charset="-120"/>
+              </a:rPr>
+              <a:t>estado</a:t>
+            </a:r>
+            <a:r>
+              <a:rPr lang="en-US" sz="1150" dirty="0">
+                <a:solidFill>
+                  <a:srgbClr val="FFFF00"/>
+                </a:solidFill>
+                <a:latin typeface="Consolas" pitchFamily="34" charset="0"/>
+                <a:ea typeface="Consolas" pitchFamily="34" charset="-122"/>
+                <a:cs typeface="Consolas" pitchFamily="34" charset="-120"/>
+              </a:rPr>
+              <a:t> ? 'white' :'#</a:t>
+            </a:r>
+            <a:r>
+              <a:rPr lang="en-US" sz="1150" dirty="0" err="1">
+                <a:solidFill>
+                  <a:srgbClr val="FFFF00"/>
+                </a:solidFill>
+                <a:latin typeface="Consolas" pitchFamily="34" charset="0"/>
+                <a:ea typeface="Consolas" pitchFamily="34" charset="-122"/>
+                <a:cs typeface="Consolas" pitchFamily="34" charset="-120"/>
+              </a:rPr>
+              <a:t>eee</a:t>
+            </a:r>
+            <a:r>
+              <a:rPr lang="en-US" sz="1150" dirty="0">
+                <a:solidFill>
+                  <a:srgbClr val="FFFF00"/>
+                </a:solidFill>
+                <a:latin typeface="Consolas" pitchFamily="34" charset="0"/>
+                <a:ea typeface="Consolas" pitchFamily="34" charset="-122"/>
+                <a:cs typeface="Consolas" pitchFamily="34" charset="-120"/>
+              </a:rPr>
+              <a:t>’ };</a:t>
+            </a:r>
+            <a:endParaRPr lang="en-US" sz="1150" dirty="0">
+              <a:solidFill>
+                <a:srgbClr val="FFFF00"/>
+              </a:solidFill>
+            </a:endParaRPr>
+          </a:p>
+          <a:p>
+            <a:pPr marL="0" indent="0">
+              <a:buNone/>
+            </a:pPr>
+            <a:r>
+              <a:rPr lang="en-US" sz="1150" dirty="0">
                 <a:solidFill>
                   <a:srgbClr val="CDD6F4"/>
                 </a:solidFill>
@@ -8559,14 +10401,14 @@
               </a:rPr>
               <a:t>  margin-bottom: 16px;</a:t>
             </a:r>
-            <a:endParaRPr lang="en-US" sz="1000" dirty="0"/>
-          </a:p>
-          <a:p>
-            <a:pPr marL="0" indent="0">
-              <a:buNone/>
-            </a:pPr>
-            <a:r>
-              <a:rPr lang="en-US" sz="1000" dirty="0">
+            <a:endParaRPr lang="en-US" sz="1150" dirty="0"/>
+          </a:p>
+          <a:p>
+            <a:pPr marL="0" indent="0">
+              <a:buNone/>
+            </a:pPr>
+            <a:r>
+              <a:rPr lang="en-US" sz="1150" dirty="0">
                 <a:solidFill>
                   <a:srgbClr val="CDD6F4"/>
                 </a:solidFill>
@@ -8576,14 +10418,14 @@
               </a:rPr>
               <a:t>  padding: 16px;</a:t>
             </a:r>
-            <a:endParaRPr lang="en-US" sz="1000" dirty="0"/>
-          </a:p>
-          <a:p>
-            <a:pPr marL="0" indent="0">
-              <a:buNone/>
-            </a:pPr>
-            <a:r>
-              <a:rPr lang="en-US" sz="1000" dirty="0">
+            <a:endParaRPr lang="en-US" sz="1150" dirty="0"/>
+          </a:p>
+          <a:p>
+            <a:pPr marL="0" indent="0">
+              <a:buNone/>
+            </a:pPr>
+            <a:r>
+              <a:rPr lang="en-US" sz="1150" dirty="0">
                 <a:solidFill>
                   <a:srgbClr val="CDD6F4"/>
                 </a:solidFill>
@@ -8593,82 +10435,103 @@
               </a:rPr>
               <a:t>  text-align: center;</a:t>
             </a:r>
-            <a:endParaRPr lang="en-US" sz="1000" dirty="0"/>
-          </a:p>
-          <a:p>
-            <a:pPr marL="0" indent="0">
-              <a:buNone/>
-            </a:pPr>
-            <a:r>
-              <a:rPr lang="en-US" sz="1000" dirty="0">
-                <a:solidFill>
-                  <a:srgbClr val="CDD6F4"/>
-                </a:solidFill>
-                <a:latin typeface="Consolas" pitchFamily="34" charset="0"/>
-                <a:ea typeface="Consolas" pitchFamily="34" charset="-122"/>
-                <a:cs typeface="Consolas" pitchFamily="34" charset="-120"/>
-              </a:rPr>
-              <a:t>  text-decoration: ${</a:t>
-            </a:r>
-            <a:endParaRPr lang="en-US" sz="1000" dirty="0"/>
-          </a:p>
-          <a:p>
-            <a:pPr marL="0" indent="0">
-              <a:buNone/>
-            </a:pPr>
-            <a:r>
-              <a:rPr lang="en-US" sz="1000" dirty="0">
-                <a:solidFill>
-                  <a:srgbClr val="CDD6F4"/>
-                </a:solidFill>
-                <a:latin typeface="Consolas" pitchFamily="34" charset="0"/>
-                <a:ea typeface="Consolas" pitchFamily="34" charset="-122"/>
-                <a:cs typeface="Consolas" pitchFamily="34" charset="-120"/>
-              </a:rPr>
-              <a:t>    ({ $estado }) =&gt; $estado</a:t>
-            </a:r>
-            <a:endParaRPr lang="en-US" sz="1000" dirty="0"/>
-          </a:p>
-          <a:p>
-            <a:pPr marL="0" indent="0">
-              <a:buNone/>
-            </a:pPr>
-            <a:r>
-              <a:rPr lang="en-US" sz="1000" dirty="0">
-                <a:solidFill>
-                  <a:srgbClr val="CDD6F4"/>
-                </a:solidFill>
-                <a:latin typeface="Consolas" pitchFamily="34" charset="0"/>
-                <a:ea typeface="Consolas" pitchFamily="34" charset="-122"/>
-                <a:cs typeface="Consolas" pitchFamily="34" charset="-120"/>
-              </a:rPr>
-              <a:t>      ? 'line-through' : 'none'</a:t>
-            </a:r>
-            <a:endParaRPr lang="en-US" sz="1000" dirty="0"/>
-          </a:p>
-          <a:p>
-            <a:pPr marL="0" indent="0">
-              <a:buNone/>
-            </a:pPr>
-            <a:r>
-              <a:rPr lang="en-US" sz="1000" dirty="0">
-                <a:solidFill>
-                  <a:srgbClr val="CDD6F4"/>
-                </a:solidFill>
-                <a:latin typeface="Consolas" pitchFamily="34" charset="0"/>
-                <a:ea typeface="Consolas" pitchFamily="34" charset="-122"/>
-                <a:cs typeface="Consolas" pitchFamily="34" charset="-120"/>
-              </a:rPr>
-              <a:t>  };</a:t>
-            </a:r>
-            <a:endParaRPr lang="en-US" sz="1000" dirty="0"/>
-          </a:p>
-          <a:p>
-            <a:pPr marL="0" indent="0">
-              <a:buNone/>
-            </a:pPr>
-            <a:r>
-              <a:rPr lang="en-US" sz="1000" dirty="0">
+            <a:endParaRPr lang="en-US" sz="1150" dirty="0"/>
+          </a:p>
+          <a:p>
+            <a:pPr marL="0" indent="0">
+              <a:buNone/>
+            </a:pPr>
+            <a:r>
+              <a:rPr lang="en-US" sz="1150" dirty="0">
+                <a:solidFill>
+                  <a:srgbClr val="CDD6F4"/>
+                </a:solidFill>
+                <a:latin typeface="Consolas" pitchFamily="34" charset="0"/>
+                <a:ea typeface="Consolas" pitchFamily="34" charset="-122"/>
+                <a:cs typeface="Consolas" pitchFamily="34" charset="-120"/>
+              </a:rPr>
+              <a:t>  </a:t>
+            </a:r>
+            <a:r>
+              <a:rPr lang="en-US" sz="1150" dirty="0">
+                <a:solidFill>
+                  <a:srgbClr val="FFFF00"/>
+                </a:solidFill>
+                <a:latin typeface="Consolas" pitchFamily="34" charset="0"/>
+                <a:ea typeface="Consolas" pitchFamily="34" charset="-122"/>
+                <a:cs typeface="Consolas" pitchFamily="34" charset="-120"/>
+              </a:rPr>
+              <a:t>text-decoration: ${</a:t>
+            </a:r>
+            <a:endParaRPr lang="en-US" sz="1150" dirty="0">
+              <a:solidFill>
+                <a:srgbClr val="FFFF00"/>
+              </a:solidFill>
+            </a:endParaRPr>
+          </a:p>
+          <a:p>
+            <a:pPr marL="0" indent="0">
+              <a:buNone/>
+            </a:pPr>
+            <a:r>
+              <a:rPr lang="en-US" sz="1150" dirty="0">
+                <a:solidFill>
+                  <a:srgbClr val="FFFF00"/>
+                </a:solidFill>
+                <a:latin typeface="Consolas" pitchFamily="34" charset="0"/>
+                <a:ea typeface="Consolas" pitchFamily="34" charset="-122"/>
+                <a:cs typeface="Consolas" pitchFamily="34" charset="-120"/>
+              </a:rPr>
+              <a:t>    ({ $estado }) =&gt; $</a:t>
+            </a:r>
+            <a:r>
+              <a:rPr lang="en-US" sz="1150" dirty="0" err="1">
+                <a:solidFill>
+                  <a:srgbClr val="FFFF00"/>
+                </a:solidFill>
+                <a:latin typeface="Consolas" pitchFamily="34" charset="0"/>
+                <a:ea typeface="Consolas" pitchFamily="34" charset="-122"/>
+                <a:cs typeface="Consolas" pitchFamily="34" charset="-120"/>
+              </a:rPr>
+              <a:t>estado</a:t>
+            </a:r>
+            <a:r>
+              <a:rPr lang="en-US" sz="1150" dirty="0">
+                <a:solidFill>
+                  <a:srgbClr val="FFFF00"/>
+                </a:solidFill>
+                <a:latin typeface="Consolas" pitchFamily="34" charset="0"/>
+                <a:ea typeface="Consolas" pitchFamily="34" charset="-122"/>
+                <a:cs typeface="Consolas" pitchFamily="34" charset="-120"/>
+              </a:rPr>
+              <a:t> ? 'line-through' : 'none’ };</a:t>
+            </a:r>
+          </a:p>
+          <a:p>
+            <a:pPr marL="0" indent="0">
+              <a:buNone/>
+            </a:pPr>
+            <a:r>
+              <a:rPr lang="en-US" sz="1150" dirty="0">
+                <a:solidFill>
+                  <a:srgbClr val="FFFF00"/>
+                </a:solidFill>
+                <a:latin typeface="Consolas" pitchFamily="34" charset="0"/>
+              </a:rPr>
+              <a:t>  Cursor: pointer;</a:t>
+            </a:r>
+            <a:endParaRPr lang="en-US" sz="1150" dirty="0">
+              <a:solidFill>
+                <a:srgbClr val="FFFF00"/>
+              </a:solidFill>
+            </a:endParaRPr>
+          </a:p>
+          <a:p>
+            <a:pPr marL="0" indent="0">
+              <a:buNone/>
+            </a:pPr>
+            <a:r>
+              <a:rPr lang="en-US" sz="1150" dirty="0">
                 <a:solidFill>
                   <a:srgbClr val="CDD6F4"/>
                 </a:solidFill>
@@ -8678,7 +10541,7 @@
               </a:rPr>
               <a:t>`</a:t>
             </a:r>
-            <a:endParaRPr lang="en-US" sz="1000" dirty="0"/>
+            <a:endParaRPr lang="en-US" sz="1150" dirty="0"/>
           </a:p>
         </p:txBody>
       </p:sp>
@@ -8690,7 +10553,7 @@
         </p:nvSpPr>
         <p:spPr>
           <a:xfrm>
-            <a:off x="5669280" y="2880360"/>
+            <a:off x="5669280" y="2587752"/>
             <a:ext cx="3200400" cy="365760"/>
           </a:xfrm>
           <a:prstGeom prst="rect">
@@ -8726,7 +10589,7 @@
         </p:nvSpPr>
         <p:spPr>
           <a:xfrm>
-            <a:off x="5669280" y="3291840"/>
+            <a:off x="5669280" y="2999232"/>
             <a:ext cx="3200400" cy="548640"/>
           </a:xfrm>
           <a:prstGeom prst="rect">
@@ -8758,7 +10621,7 @@
         </p:nvSpPr>
         <p:spPr>
           <a:xfrm>
-            <a:off x="5669280" y="3291840"/>
+            <a:off x="5669280" y="2999232"/>
             <a:ext cx="3200400" cy="548640"/>
           </a:xfrm>
           <a:prstGeom prst="rect">
@@ -8794,7 +10657,7 @@
         </p:nvSpPr>
         <p:spPr>
           <a:xfrm>
-            <a:off x="5669280" y="3886200"/>
+            <a:off x="5669280" y="3593592"/>
             <a:ext cx="3200400" cy="228600"/>
           </a:xfrm>
           <a:prstGeom prst="rect">
@@ -8830,7 +10693,7 @@
         </p:nvSpPr>
         <p:spPr>
           <a:xfrm>
-            <a:off x="5669280" y="4160520"/>
+            <a:off x="5669280" y="3867912"/>
             <a:ext cx="3200400" cy="548640"/>
           </a:xfrm>
           <a:prstGeom prst="rect">
@@ -8862,7 +10725,7 @@
         </p:nvSpPr>
         <p:spPr>
           <a:xfrm>
-            <a:off x="5669280" y="4160520"/>
+            <a:off x="5669280" y="3867912"/>
             <a:ext cx="3200400" cy="548640"/>
           </a:xfrm>
           <a:prstGeom prst="rect">
@@ -8898,7 +10761,7 @@
         </p:nvSpPr>
         <p:spPr>
           <a:xfrm>
-            <a:off x="5669280" y="4754880"/>
+            <a:off x="5669280" y="4462272"/>
             <a:ext cx="3200400" cy="228600"/>
           </a:xfrm>
           <a:prstGeom prst="rect">
@@ -8934,8 +10797,8 @@
         </p:nvSpPr>
         <p:spPr>
           <a:xfrm>
-            <a:off x="457200" y="4846320"/>
-            <a:ext cx="5029200" cy="411480"/>
+            <a:off x="365760" y="4683252"/>
+            <a:ext cx="5212080" cy="411480"/>
           </a:xfrm>
           <a:prstGeom prst="rect">
             <a:avLst/>
@@ -8966,7 +10829,7 @@
         </p:nvSpPr>
         <p:spPr>
           <a:xfrm>
-            <a:off x="548640" y="4846320"/>
+            <a:off x="435864" y="4690872"/>
             <a:ext cx="4846320" cy="411480"/>
           </a:xfrm>
           <a:prstGeom prst="rect">
@@ -9002,7 +10865,7 @@
 </p:sld>
 </file>
 
-<file path=ppt/slides/slide15.xml><?xml version="1.0" encoding="utf-8"?>
+<file path=ppt/slides/slide16.xml><?xml version="1.0" encoding="utf-8"?>
 <p:sld xmlns:a="http://schemas.openxmlformats.org/drawingml/2006/main" xmlns:r="http://schemas.openxmlformats.org/officeDocument/2006/relationships" xmlns:p="http://schemas.openxmlformats.org/presentationml/2006/main">
   <p:cSld name="Slide 13">
     <p:bg>
@@ -10185,6 +12048,52 @@
           </a:p>
         </p:txBody>
       </p:sp>
+      <p:sp>
+        <p:nvSpPr>
+          <p:cNvPr id="23" name="Triângulo isósceles 22">
+            <a:extLst>
+              <a:ext uri="{FF2B5EF4-FFF2-40B4-BE49-F238E27FC236}">
+                <a16:creationId xmlns:a16="http://schemas.microsoft.com/office/drawing/2014/main" id="{01F77C20-D7D2-8FD1-B03F-11132B88B7F7}"/>
+              </a:ext>
+            </a:extLst>
+          </p:cNvPr>
+          <p:cNvSpPr/>
+          <p:nvPr/>
+        </p:nvSpPr>
+        <p:spPr>
+          <a:xfrm>
+            <a:off x="2676144" y="713232"/>
+            <a:ext cx="3791712" cy="3069336"/>
+          </a:xfrm>
+          <a:prstGeom prst="triangle">
+            <a:avLst/>
+          </a:prstGeom>
+        </p:spPr>
+        <p:style>
+          <a:lnRef idx="2">
+            <a:schemeClr val="accent1">
+              <a:shade val="15000"/>
+            </a:schemeClr>
+          </a:lnRef>
+          <a:fillRef idx="1">
+            <a:schemeClr val="accent1"/>
+          </a:fillRef>
+          <a:effectRef idx="0">
+            <a:schemeClr val="accent1"/>
+          </a:effectRef>
+          <a:fontRef idx="minor">
+            <a:schemeClr val="lt1"/>
+          </a:fontRef>
+        </p:style>
+        <p:txBody>
+          <a:bodyPr rtlCol="0" anchor="ctr"/>
+          <a:lstStyle/>
+          <a:p>
+            <a:pPr algn="ctr"/>
+            <a:endParaRPr lang="pt-BR"/>
+          </a:p>
+        </p:txBody>
+      </p:sp>
     </p:spTree>
   </p:cSld>
   <p:clrMapOvr>
@@ -10193,7 +12102,7 @@
 </p:sld>
 </file>
 
-<file path=ppt/slides/slide16.xml><?xml version="1.0" encoding="utf-8"?>
+<file path=ppt/slides/slide17.xml><?xml version="1.0" encoding="utf-8"?>
 <p:sld xmlns:a="http://schemas.openxmlformats.org/drawingml/2006/main" xmlns:r="http://schemas.openxmlformats.org/officeDocument/2006/relationships" xmlns:p="http://schemas.openxmlformats.org/presentationml/2006/main">
   <p:cSld name="Slide 14">
     <p:bg>
@@ -11449,7 +13358,7 @@
 </p:sld>
 </file>
 
-<file path=ppt/slides/slide17.xml><?xml version="1.0" encoding="utf-8"?>
+<file path=ppt/slides/slide18.xml><?xml version="1.0" encoding="utf-8"?>
 <p:sld xmlns:a="http://schemas.openxmlformats.org/drawingml/2006/main" xmlns:r="http://schemas.openxmlformats.org/officeDocument/2006/relationships" xmlns:p="http://schemas.openxmlformats.org/presentationml/2006/main">
   <p:cSld name="Slide 15">
     <p:bg>
@@ -12566,7 +14475,7 @@
 </p:sld>
 </file>
 
-<file path=ppt/slides/slide18.xml><?xml version="1.0" encoding="utf-8"?>
+<file path=ppt/slides/slide19.xml><?xml version="1.0" encoding="utf-8"?>
 <p:sld xmlns:a="http://schemas.openxmlformats.org/drawingml/2006/main" xmlns:r="http://schemas.openxmlformats.org/officeDocument/2006/relationships" xmlns:p="http://schemas.openxmlformats.org/presentationml/2006/main">
   <p:cSld name="Slide 16">
     <p:bg>
@@ -13877,7 +15786,520 @@
 </p:sld>
 </file>
 
-<file path=ppt/slides/slide19.xml><?xml version="1.0" encoding="utf-8"?>
+<file path=ppt/slides/slide2.xml><?xml version="1.0" encoding="utf-8"?>
+<p:sld xmlns:a="http://schemas.openxmlformats.org/drawingml/2006/main" xmlns:r="http://schemas.openxmlformats.org/officeDocument/2006/relationships" xmlns:p="http://schemas.openxmlformats.org/presentationml/2006/main">
+  <p:cSld>
+    <p:bg>
+      <p:bgPr>
+        <a:solidFill>
+          <a:srgbClr val="20232A"/>
+        </a:solidFill>
+        <a:effectLst/>
+      </p:bgPr>
+    </p:bg>
+    <p:spTree>
+      <p:nvGrpSpPr>
+        <p:cNvPr id="1" name="">
+          <a:extLst>
+            <a:ext uri="{FF2B5EF4-FFF2-40B4-BE49-F238E27FC236}">
+              <a16:creationId xmlns:a16="http://schemas.microsoft.com/office/drawing/2014/main" id="{9DD1B5E2-0FA6-655E-991E-12C55232A513}"/>
+            </a:ext>
+          </a:extLst>
+        </p:cNvPr>
+        <p:cNvGrpSpPr/>
+        <p:nvPr/>
+      </p:nvGrpSpPr>
+      <p:grpSpPr>
+        <a:xfrm>
+          <a:off x="0" y="0"/>
+          <a:ext cx="0" cy="0"/>
+          <a:chOff x="0" y="0"/>
+          <a:chExt cx="0" cy="0"/>
+        </a:xfrm>
+      </p:grpSpPr>
+      <p:sp>
+        <p:nvSpPr>
+          <p:cNvPr id="2" name="Shape 0">
+            <a:extLst>
+              <a:ext uri="{FF2B5EF4-FFF2-40B4-BE49-F238E27FC236}">
+                <a16:creationId xmlns:a16="http://schemas.microsoft.com/office/drawing/2014/main" id="{95E56CDC-E5B6-87AD-BD02-77F708757660}"/>
+              </a:ext>
+            </a:extLst>
+          </p:cNvPr>
+          <p:cNvSpPr/>
+          <p:nvPr/>
+        </p:nvSpPr>
+        <p:spPr>
+          <a:xfrm>
+            <a:off x="0" y="0"/>
+            <a:ext cx="9144000" cy="5143500"/>
+          </a:xfrm>
+          <a:prstGeom prst="rect">
+            <a:avLst/>
+          </a:prstGeom>
+          <a:solidFill>
+            <a:srgbClr val="20232A"/>
+          </a:solidFill>
+          <a:ln w="12700">
+            <a:solidFill>
+              <a:srgbClr val="20232A"/>
+            </a:solidFill>
+            <a:prstDash val="solid"/>
+          </a:ln>
+        </p:spPr>
+        <p:txBody>
+          <a:bodyPr/>
+          <a:lstStyle/>
+          <a:p>
+            <a:endParaRPr lang="pt-BR"/>
+          </a:p>
+        </p:txBody>
+      </p:sp>
+      <p:sp>
+        <p:nvSpPr>
+          <p:cNvPr id="3" name="Shape 1">
+            <a:extLst>
+              <a:ext uri="{FF2B5EF4-FFF2-40B4-BE49-F238E27FC236}">
+                <a16:creationId xmlns:a16="http://schemas.microsoft.com/office/drawing/2014/main" id="{E8F44814-7F71-E62B-1AF0-46767A3550E6}"/>
+              </a:ext>
+            </a:extLst>
+          </p:cNvPr>
+          <p:cNvSpPr/>
+          <p:nvPr/>
+        </p:nvSpPr>
+        <p:spPr>
+          <a:xfrm>
+            <a:off x="-914400" y="3200400"/>
+            <a:ext cx="4572000" cy="2743200"/>
+          </a:xfrm>
+          <a:prstGeom prst="rect">
+            <a:avLst/>
+          </a:prstGeom>
+          <a:solidFill>
+            <a:srgbClr val="CB356B">
+              <a:alpha val="15000"/>
+            </a:srgbClr>
+          </a:solidFill>
+          <a:ln w="12700">
+            <a:solidFill>
+              <a:srgbClr val="CB356B">
+                <a:alpha val="15000"/>
+              </a:srgbClr>
+            </a:solidFill>
+            <a:prstDash val="solid"/>
+          </a:ln>
+        </p:spPr>
+        <p:txBody>
+          <a:bodyPr/>
+          <a:lstStyle/>
+          <a:p>
+            <a:endParaRPr lang="pt-BR"/>
+          </a:p>
+        </p:txBody>
+      </p:sp>
+      <p:sp>
+        <p:nvSpPr>
+          <p:cNvPr id="4" name="Shape 2">
+            <a:extLst>
+              <a:ext uri="{FF2B5EF4-FFF2-40B4-BE49-F238E27FC236}">
+                <a16:creationId xmlns:a16="http://schemas.microsoft.com/office/drawing/2014/main" id="{FF156309-26E5-94F1-D0B1-4EF866CD13FB}"/>
+              </a:ext>
+            </a:extLst>
+          </p:cNvPr>
+          <p:cNvSpPr/>
+          <p:nvPr/>
+        </p:nvSpPr>
+        <p:spPr>
+          <a:xfrm>
+            <a:off x="6400800" y="-457200"/>
+            <a:ext cx="3657600" cy="3657600"/>
+          </a:xfrm>
+          <a:prstGeom prst="ellipse">
+            <a:avLst/>
+          </a:prstGeom>
+          <a:solidFill>
+            <a:srgbClr val="61DAFB">
+              <a:alpha val="10000"/>
+            </a:srgbClr>
+          </a:solidFill>
+          <a:ln w="12700">
+            <a:solidFill>
+              <a:srgbClr val="61DAFB">
+                <a:alpha val="10000"/>
+              </a:srgbClr>
+            </a:solidFill>
+            <a:prstDash val="solid"/>
+          </a:ln>
+        </p:spPr>
+        <p:txBody>
+          <a:bodyPr/>
+          <a:lstStyle/>
+          <a:p>
+            <a:endParaRPr lang="pt-BR"/>
+          </a:p>
+        </p:txBody>
+      </p:sp>
+      <p:sp>
+        <p:nvSpPr>
+          <p:cNvPr id="6" name="Text 4">
+            <a:extLst>
+              <a:ext uri="{FF2B5EF4-FFF2-40B4-BE49-F238E27FC236}">
+                <a16:creationId xmlns:a16="http://schemas.microsoft.com/office/drawing/2014/main" id="{3D211150-91E6-C1BF-A3E3-39C70641F360}"/>
+              </a:ext>
+            </a:extLst>
+          </p:cNvPr>
+          <p:cNvSpPr/>
+          <p:nvPr/>
+        </p:nvSpPr>
+        <p:spPr>
+          <a:xfrm>
+            <a:off x="3886200" y="365760"/>
+            <a:ext cx="1371600" cy="1371600"/>
+          </a:xfrm>
+          <a:prstGeom prst="rect">
+            <a:avLst/>
+          </a:prstGeom>
+          <a:noFill/>
+          <a:ln/>
+        </p:spPr>
+        <p:txBody>
+          <a:bodyPr wrap="square" lIns="0" tIns="0" rIns="0" bIns="0" rtlCol="0" anchor="ctr"/>
+          <a:lstStyle/>
+          <a:p>
+            <a:pPr marL="0" indent="0" algn="ctr">
+              <a:buNone/>
+            </a:pPr>
+            <a:r>
+              <a:rPr lang="en-US" sz="3800" dirty="0">
+                <a:solidFill>
+                  <a:srgbClr val="20232A"/>
+                </a:solidFill>
+              </a:rPr>
+              <a:t>⚛</a:t>
+            </a:r>
+            <a:endParaRPr lang="en-US" sz="3800" dirty="0"/>
+          </a:p>
+        </p:txBody>
+      </p:sp>
+      <p:sp>
+        <p:nvSpPr>
+          <p:cNvPr id="7" name="Text 5">
+            <a:extLst>
+              <a:ext uri="{FF2B5EF4-FFF2-40B4-BE49-F238E27FC236}">
+                <a16:creationId xmlns:a16="http://schemas.microsoft.com/office/drawing/2014/main" id="{A92289E4-998C-C3DB-DEDA-03C7E430C2B1}"/>
+              </a:ext>
+            </a:extLst>
+          </p:cNvPr>
+          <p:cNvSpPr/>
+          <p:nvPr/>
+        </p:nvSpPr>
+        <p:spPr>
+          <a:xfrm>
+            <a:off x="457200" y="685800"/>
+            <a:ext cx="8229600" cy="1371600"/>
+          </a:xfrm>
+          <a:prstGeom prst="rect">
+            <a:avLst/>
+          </a:prstGeom>
+          <a:noFill/>
+          <a:ln/>
+        </p:spPr>
+        <p:txBody>
+          <a:bodyPr wrap="square" lIns="0" tIns="0" rIns="0" bIns="0" rtlCol="0" anchor="ctr"/>
+          <a:lstStyle/>
+          <a:p>
+            <a:r>
+              <a:rPr lang="pt-BR" sz="3200" b="1" dirty="0">
+                <a:solidFill>
+                  <a:schemeClr val="bg1"/>
+                </a:solidFill>
+              </a:rPr>
+              <a:t>Criando o projeto</a:t>
+            </a:r>
+            <a:endParaRPr lang="pt-BR" sz="3200" dirty="0">
+              <a:solidFill>
+                <a:schemeClr val="bg1"/>
+              </a:solidFill>
+            </a:endParaRPr>
+          </a:p>
+          <a:p>
+            <a:br>
+              <a:rPr lang="pt-BR" sz="4400" dirty="0"/>
+            </a:br>
+            <a:endParaRPr lang="en-US" sz="4200" dirty="0"/>
+          </a:p>
+        </p:txBody>
+      </p:sp>
+      <p:sp>
+        <p:nvSpPr>
+          <p:cNvPr id="8" name="Text 6">
+            <a:extLst>
+              <a:ext uri="{FF2B5EF4-FFF2-40B4-BE49-F238E27FC236}">
+                <a16:creationId xmlns:a16="http://schemas.microsoft.com/office/drawing/2014/main" id="{B44266FD-A788-D40C-50F0-BB21DCEFC5DE}"/>
+              </a:ext>
+            </a:extLst>
+          </p:cNvPr>
+          <p:cNvSpPr/>
+          <p:nvPr/>
+        </p:nvSpPr>
+        <p:spPr>
+          <a:xfrm>
+            <a:off x="457200" y="2117598"/>
+            <a:ext cx="8229600" cy="1525524"/>
+          </a:xfrm>
+          <a:prstGeom prst="rect">
+            <a:avLst/>
+          </a:prstGeom>
+          <a:noFill/>
+          <a:ln/>
+        </p:spPr>
+        <p:txBody>
+          <a:bodyPr wrap="square" lIns="0" tIns="0" rIns="0" bIns="0" rtlCol="0" anchor="ctr"/>
+          <a:lstStyle/>
+          <a:p>
+            <a:pPr>
+              <a:lnSpc>
+                <a:spcPct val="150000"/>
+              </a:lnSpc>
+            </a:pPr>
+            <a:r>
+              <a:rPr lang="en-US" sz="2400" dirty="0" err="1">
+                <a:solidFill>
+                  <a:srgbClr val="61DAFB"/>
+                </a:solidFill>
+              </a:rPr>
+              <a:t>npm</a:t>
+            </a:r>
+            <a:r>
+              <a:rPr lang="en-US" sz="2400" dirty="0">
+                <a:solidFill>
+                  <a:srgbClr val="61DAFB"/>
+                </a:solidFill>
+              </a:rPr>
+              <a:t> create </a:t>
+            </a:r>
+            <a:r>
+              <a:rPr lang="en-US" sz="2400" dirty="0" err="1">
+                <a:solidFill>
+                  <a:srgbClr val="61DAFB"/>
+                </a:solidFill>
+              </a:rPr>
+              <a:t>vite@latest</a:t>
+            </a:r>
+            <a:r>
+              <a:rPr lang="en-US" sz="2400" dirty="0">
+                <a:solidFill>
+                  <a:srgbClr val="61DAFB"/>
+                </a:solidFill>
+              </a:rPr>
+              <a:t> unit3-react -- --template react</a:t>
+            </a:r>
+          </a:p>
+          <a:p>
+            <a:pPr>
+              <a:lnSpc>
+                <a:spcPct val="150000"/>
+              </a:lnSpc>
+            </a:pPr>
+            <a:endParaRPr lang="en-US" sz="2400" dirty="0">
+              <a:solidFill>
+                <a:srgbClr val="61DAFB"/>
+              </a:solidFill>
+            </a:endParaRPr>
+          </a:p>
+          <a:p>
+            <a:pPr>
+              <a:lnSpc>
+                <a:spcPct val="150000"/>
+              </a:lnSpc>
+            </a:pPr>
+            <a:r>
+              <a:rPr lang="en-US" sz="2400" dirty="0">
+                <a:solidFill>
+                  <a:srgbClr val="61DAFB"/>
+                </a:solidFill>
+              </a:rPr>
+              <a:t>cd </a:t>
+            </a:r>
+            <a:r>
+              <a:rPr lang="en-US" sz="2400" dirty="0" err="1">
+                <a:solidFill>
+                  <a:srgbClr val="61DAFB"/>
+                </a:solidFill>
+              </a:rPr>
+              <a:t>nome</a:t>
+            </a:r>
+            <a:r>
+              <a:rPr lang="en-US" sz="2400" dirty="0">
+                <a:solidFill>
+                  <a:srgbClr val="61DAFB"/>
+                </a:solidFill>
+              </a:rPr>
+              <a:t>-do-</a:t>
+            </a:r>
+            <a:r>
+              <a:rPr lang="en-US" sz="2400" dirty="0" err="1">
+                <a:solidFill>
+                  <a:srgbClr val="61DAFB"/>
+                </a:solidFill>
+              </a:rPr>
+              <a:t>projeto</a:t>
+            </a:r>
+            <a:endParaRPr lang="en-US" sz="2400" dirty="0">
+              <a:solidFill>
+                <a:srgbClr val="61DAFB"/>
+              </a:solidFill>
+            </a:endParaRPr>
+          </a:p>
+          <a:p>
+            <a:pPr>
+              <a:lnSpc>
+                <a:spcPct val="150000"/>
+              </a:lnSpc>
+            </a:pPr>
+            <a:r>
+              <a:rPr lang="en-US" sz="2400" dirty="0" err="1">
+                <a:solidFill>
+                  <a:srgbClr val="61DAFB"/>
+                </a:solidFill>
+              </a:rPr>
+              <a:t>npm</a:t>
+            </a:r>
+            <a:r>
+              <a:rPr lang="en-US" sz="2400" dirty="0">
+                <a:solidFill>
+                  <a:srgbClr val="61DAFB"/>
+                </a:solidFill>
+              </a:rPr>
+              <a:t> install</a:t>
+            </a:r>
+          </a:p>
+          <a:p>
+            <a:pPr>
+              <a:lnSpc>
+                <a:spcPct val="150000"/>
+              </a:lnSpc>
+            </a:pPr>
+            <a:r>
+              <a:rPr lang="pt-BR" altLang="pt-BR" sz="2400" dirty="0" err="1">
+                <a:solidFill>
+                  <a:srgbClr val="61DAFB"/>
+                </a:solidFill>
+              </a:rPr>
+              <a:t>npm</a:t>
+            </a:r>
+            <a:r>
+              <a:rPr lang="pt-BR" altLang="pt-BR" sz="2400" dirty="0">
+                <a:solidFill>
+                  <a:srgbClr val="61DAFB"/>
+                </a:solidFill>
+              </a:rPr>
+              <a:t> </a:t>
+            </a:r>
+            <a:r>
+              <a:rPr lang="pt-BR" altLang="pt-BR" sz="2400" dirty="0" err="1">
+                <a:solidFill>
+                  <a:srgbClr val="61DAFB"/>
+                </a:solidFill>
+              </a:rPr>
+              <a:t>install</a:t>
+            </a:r>
+            <a:r>
+              <a:rPr lang="pt-BR" altLang="pt-BR" sz="2400" dirty="0">
+                <a:solidFill>
+                  <a:srgbClr val="61DAFB"/>
+                </a:solidFill>
+              </a:rPr>
+              <a:t> </a:t>
+            </a:r>
+            <a:r>
+              <a:rPr lang="pt-BR" altLang="pt-BR" sz="2400" dirty="0" err="1">
+                <a:solidFill>
+                  <a:srgbClr val="61DAFB"/>
+                </a:solidFill>
+              </a:rPr>
+              <a:t>styled-components</a:t>
+            </a:r>
+            <a:endParaRPr lang="pt-BR" altLang="pt-BR" sz="2400" dirty="0">
+              <a:solidFill>
+                <a:srgbClr val="61DAFB"/>
+              </a:solidFill>
+            </a:endParaRPr>
+          </a:p>
+          <a:p>
+            <a:pPr>
+              <a:lnSpc>
+                <a:spcPct val="150000"/>
+              </a:lnSpc>
+            </a:pPr>
+            <a:r>
+              <a:rPr lang="en-US" sz="2400" dirty="0" err="1">
+                <a:solidFill>
+                  <a:srgbClr val="61DAFB"/>
+                </a:solidFill>
+              </a:rPr>
+              <a:t>npm</a:t>
+            </a:r>
+            <a:r>
+              <a:rPr lang="en-US" sz="2400" dirty="0">
+                <a:solidFill>
+                  <a:srgbClr val="61DAFB"/>
+                </a:solidFill>
+              </a:rPr>
+              <a:t> run dev</a:t>
+            </a:r>
+            <a:endParaRPr lang="en-US" sz="2400" dirty="0"/>
+          </a:p>
+        </p:txBody>
+      </p:sp>
+      <p:sp>
+        <p:nvSpPr>
+          <p:cNvPr id="10" name="Text 8">
+            <a:extLst>
+              <a:ext uri="{FF2B5EF4-FFF2-40B4-BE49-F238E27FC236}">
+                <a16:creationId xmlns:a16="http://schemas.microsoft.com/office/drawing/2014/main" id="{5285328D-6F26-2EE0-D7FB-E5B1BE86FF27}"/>
+              </a:ext>
+            </a:extLst>
+          </p:cNvPr>
+          <p:cNvSpPr/>
+          <p:nvPr/>
+        </p:nvSpPr>
+        <p:spPr>
+          <a:xfrm>
+            <a:off x="457200" y="4389120"/>
+            <a:ext cx="8229600" cy="365760"/>
+          </a:xfrm>
+          <a:prstGeom prst="rect">
+            <a:avLst/>
+          </a:prstGeom>
+          <a:noFill/>
+          <a:ln/>
+        </p:spPr>
+        <p:txBody>
+          <a:bodyPr wrap="square" lIns="0" tIns="0" rIns="0" bIns="0" rtlCol="0" anchor="ctr"/>
+          <a:lstStyle/>
+          <a:p>
+            <a:pPr marL="0" indent="0" algn="ctr">
+              <a:buNone/>
+            </a:pPr>
+            <a:endParaRPr lang="en-US" sz="1200" dirty="0"/>
+          </a:p>
+        </p:txBody>
+      </p:sp>
+    </p:spTree>
+    <p:extLst>
+      <p:ext uri="{BB962C8B-B14F-4D97-AF65-F5344CB8AC3E}">
+        <p14:creationId xmlns:p14="http://schemas.microsoft.com/office/powerpoint/2010/main" val="2538489859"/>
+      </p:ext>
+    </p:extLst>
+  </p:cSld>
+  <p:clrMapOvr>
+    <a:masterClrMapping/>
+  </p:clrMapOvr>
+</p:sld>
+</file>
+
+<file path=ppt/slides/slide20.xml><?xml version="1.0" encoding="utf-8"?>
 <p:sld xmlns:a="http://schemas.openxmlformats.org/drawingml/2006/main" xmlns:r="http://schemas.openxmlformats.org/officeDocument/2006/relationships" xmlns:p="http://schemas.openxmlformats.org/presentationml/2006/main">
   <p:cSld name="Slide 17">
     <p:bg>
@@ -14734,7 +17156,7 @@
 </p:sld>
 </file>
 
-<file path=ppt/slides/slide2.xml><?xml version="1.0" encoding="utf-8"?>
+<file path=ppt/slides/slide3.xml><?xml version="1.0" encoding="utf-8"?>
 <p:sld xmlns:a="http://schemas.openxmlformats.org/drawingml/2006/main" xmlns:r="http://schemas.openxmlformats.org/officeDocument/2006/relationships" xmlns:p="http://schemas.openxmlformats.org/presentationml/2006/main">
   <p:cSld name="Slide 2">
     <p:bg>
@@ -15842,7 +18264,7 @@
 </p:sld>
 </file>
 
-<file path=ppt/slides/slide3.xml><?xml version="1.0" encoding="utf-8"?>
+<file path=ppt/slides/slide4.xml><?xml version="1.0" encoding="utf-8"?>
 <p:sld xmlns:a="http://schemas.openxmlformats.org/drawingml/2006/main" xmlns:r="http://schemas.openxmlformats.org/officeDocument/2006/relationships" xmlns:p="http://schemas.openxmlformats.org/presentationml/2006/main">
   <p:cSld name="Slide 3">
     <p:bg>
@@ -16092,164 +18514,191 @@
           <a:bodyPr wrap="square" lIns="0" tIns="0" rIns="0" bIns="0" rtlCol="0" anchor="t"/>
           <a:lstStyle/>
           <a:p>
-            <a:pPr marL="0" indent="0">
-              <a:buNone/>
-            </a:pPr>
-            <a:r>
-              <a:rPr lang="en-US" sz="1000" dirty="0">
-                <a:solidFill>
-                  <a:srgbClr val="CDD6F4"/>
-                </a:solidFill>
-                <a:latin typeface="Consolas" pitchFamily="34" charset="0"/>
-                <a:ea typeface="Consolas" pitchFamily="34" charset="-122"/>
-                <a:cs typeface="Consolas" pitchFamily="34" charset="-120"/>
-              </a:rPr>
-              <a:t>cd Desktop</a:t>
-            </a:r>
-            <a:endParaRPr lang="en-US" sz="1000" dirty="0"/>
-          </a:p>
-          <a:p>
-            <a:pPr marL="0" indent="0">
-              <a:buNone/>
-            </a:pPr>
-            <a:endParaRPr lang="en-US" sz="1000" dirty="0"/>
-          </a:p>
-          <a:p>
-            <a:pPr marL="0" indent="0">
-              <a:buNone/>
-            </a:pPr>
-            <a:r>
-              <a:rPr lang="en-US" sz="1000" dirty="0">
-                <a:solidFill>
-                  <a:srgbClr val="CDD6F4"/>
-                </a:solidFill>
-                <a:latin typeface="Consolas" pitchFamily="34" charset="0"/>
-                <a:ea typeface="Consolas" pitchFamily="34" charset="-122"/>
-                <a:cs typeface="Consolas" pitchFamily="34" charset="-120"/>
-              </a:rPr>
-              <a:t>npm create vite@latest</a:t>
-            </a:r>
-            <a:endParaRPr lang="en-US" sz="1000" dirty="0"/>
-          </a:p>
-          <a:p>
-            <a:pPr marL="0" indent="0">
-              <a:buNone/>
-            </a:pPr>
-            <a:r>
-              <a:rPr lang="en-US" sz="1000" dirty="0">
-                <a:solidFill>
-                  <a:srgbClr val="CDD6F4"/>
-                </a:solidFill>
-                <a:latin typeface="Consolas" pitchFamily="34" charset="0"/>
-                <a:ea typeface="Consolas" pitchFamily="34" charset="-122"/>
-                <a:cs typeface="Consolas" pitchFamily="34" charset="-120"/>
-              </a:rPr>
-              <a:t>   → nome: proj03</a:t>
-            </a:r>
-            <a:endParaRPr lang="en-US" sz="1000" dirty="0"/>
-          </a:p>
-          <a:p>
-            <a:pPr marL="0" indent="0">
-              <a:buNone/>
-            </a:pPr>
-            <a:r>
-              <a:rPr lang="en-US" sz="1000" dirty="0">
-                <a:solidFill>
-                  <a:srgbClr val="CDD6F4"/>
-                </a:solidFill>
-                <a:latin typeface="Consolas" pitchFamily="34" charset="0"/>
-                <a:ea typeface="Consolas" pitchFamily="34" charset="-122"/>
-                <a:cs typeface="Consolas" pitchFamily="34" charset="-120"/>
-              </a:rPr>
-              <a:t>   → framework: React</a:t>
-            </a:r>
-            <a:endParaRPr lang="en-US" sz="1000" dirty="0"/>
-          </a:p>
-          <a:p>
-            <a:pPr marL="0" indent="0">
-              <a:buNone/>
-            </a:pPr>
-            <a:r>
-              <a:rPr lang="en-US" sz="1000" dirty="0">
-                <a:solidFill>
-                  <a:srgbClr val="CDD6F4"/>
-                </a:solidFill>
-                <a:latin typeface="Consolas" pitchFamily="34" charset="0"/>
-                <a:ea typeface="Consolas" pitchFamily="34" charset="-122"/>
-                <a:cs typeface="Consolas" pitchFamily="34" charset="-120"/>
-              </a:rPr>
-              <a:t>   → variant: JavaScript</a:t>
-            </a:r>
-            <a:endParaRPr lang="en-US" sz="1000" dirty="0"/>
-          </a:p>
-          <a:p>
-            <a:pPr marL="0" indent="0">
-              <a:buNone/>
-            </a:pPr>
-            <a:endParaRPr lang="en-US" sz="1000" dirty="0"/>
-          </a:p>
-          <a:p>
-            <a:pPr marL="0" indent="0">
-              <a:buNone/>
-            </a:pPr>
-            <a:r>
-              <a:rPr lang="en-US" sz="1000" dirty="0">
-                <a:solidFill>
-                  <a:srgbClr val="CDD6F4"/>
-                </a:solidFill>
-                <a:latin typeface="Consolas" pitchFamily="34" charset="0"/>
-                <a:ea typeface="Consolas" pitchFamily="34" charset="-122"/>
-                <a:cs typeface="Consolas" pitchFamily="34" charset="-120"/>
-              </a:rPr>
-              <a:t>cd proj03</a:t>
-            </a:r>
-            <a:endParaRPr lang="en-US" sz="1000" dirty="0"/>
-          </a:p>
-          <a:p>
-            <a:pPr marL="0" indent="0">
-              <a:buNone/>
-            </a:pPr>
-            <a:endParaRPr lang="en-US" sz="1000" dirty="0"/>
-          </a:p>
-          <a:p>
-            <a:pPr marL="0" indent="0">
-              <a:buNone/>
-            </a:pPr>
-            <a:r>
-              <a:rPr lang="en-US" sz="1000" dirty="0">
-                <a:solidFill>
-                  <a:srgbClr val="CDD6F4"/>
-                </a:solidFill>
-                <a:latin typeface="Consolas" pitchFamily="34" charset="0"/>
-                <a:ea typeface="Consolas" pitchFamily="34" charset="-122"/>
-                <a:cs typeface="Consolas" pitchFamily="34" charset="-120"/>
-              </a:rPr>
-              <a:t>npm install</a:t>
-            </a:r>
-            <a:endParaRPr lang="en-US" sz="1000" dirty="0"/>
-          </a:p>
-          <a:p>
-            <a:pPr marL="0" indent="0">
-              <a:buNone/>
-            </a:pPr>
-            <a:endParaRPr lang="en-US" sz="1000" dirty="0"/>
-          </a:p>
-          <a:p>
-            <a:pPr marL="0" indent="0">
-              <a:buNone/>
-            </a:pPr>
-            <a:r>
-              <a:rPr lang="en-US" sz="1000" dirty="0">
-                <a:solidFill>
-                  <a:srgbClr val="CDD6F4"/>
-                </a:solidFill>
-                <a:latin typeface="Consolas" pitchFamily="34" charset="0"/>
-                <a:ea typeface="Consolas" pitchFamily="34" charset="-122"/>
-                <a:cs typeface="Consolas" pitchFamily="34" charset="-120"/>
-              </a:rPr>
-              <a:t>npm install styled-components</a:t>
-            </a:r>
-            <a:endParaRPr lang="en-US" sz="1000" dirty="0"/>
+            <a:pPr>
+              <a:lnSpc>
+                <a:spcPct val="150000"/>
+              </a:lnSpc>
+            </a:pPr>
+            <a:r>
+              <a:rPr lang="en-US" sz="1300" dirty="0" err="1">
+                <a:solidFill>
+                  <a:srgbClr val="61DAFB"/>
+                </a:solidFill>
+              </a:rPr>
+              <a:t>npm</a:t>
+            </a:r>
+            <a:r>
+              <a:rPr lang="en-US" sz="1300" dirty="0">
+                <a:solidFill>
+                  <a:srgbClr val="61DAFB"/>
+                </a:solidFill>
+              </a:rPr>
+              <a:t> create </a:t>
+            </a:r>
+            <a:r>
+              <a:rPr lang="en-US" sz="1300" dirty="0" err="1">
+                <a:solidFill>
+                  <a:srgbClr val="61DAFB"/>
+                </a:solidFill>
+              </a:rPr>
+              <a:t>vite@latest</a:t>
+            </a:r>
+            <a:r>
+              <a:rPr lang="en-US" sz="1300" dirty="0">
+                <a:solidFill>
+                  <a:srgbClr val="61DAFB"/>
+                </a:solidFill>
+              </a:rPr>
+              <a:t> unit3-react -- --template react</a:t>
+            </a:r>
+          </a:p>
+          <a:p>
+            <a:pPr marL="0" indent="0">
+              <a:buNone/>
+            </a:pPr>
+            <a:endParaRPr lang="en-US" sz="1400" dirty="0"/>
+          </a:p>
+          <a:p>
+            <a:pPr>
+              <a:lnSpc>
+                <a:spcPct val="150000"/>
+              </a:lnSpc>
+            </a:pPr>
+            <a:r>
+              <a:rPr lang="en-US" sz="1400" dirty="0">
+                <a:solidFill>
+                  <a:schemeClr val="accent3"/>
+                </a:solidFill>
+              </a:rPr>
+              <a:t>cd </a:t>
+            </a:r>
+            <a:r>
+              <a:rPr lang="en-US" sz="1400" dirty="0" err="1">
+                <a:solidFill>
+                  <a:schemeClr val="accent3"/>
+                </a:solidFill>
+              </a:rPr>
+              <a:t>nome</a:t>
+            </a:r>
+            <a:r>
+              <a:rPr lang="en-US" sz="1400" dirty="0">
+                <a:solidFill>
+                  <a:schemeClr val="accent3"/>
+                </a:solidFill>
+              </a:rPr>
+              <a:t>-do-</a:t>
+            </a:r>
+            <a:r>
+              <a:rPr lang="en-US" sz="1400" dirty="0" err="1">
+                <a:solidFill>
+                  <a:schemeClr val="accent3"/>
+                </a:solidFill>
+              </a:rPr>
+              <a:t>projeto</a:t>
+            </a:r>
+            <a:endParaRPr lang="en-US" sz="1400" dirty="0">
+              <a:solidFill>
+                <a:schemeClr val="accent3"/>
+              </a:solidFill>
+            </a:endParaRPr>
+          </a:p>
+          <a:p>
+            <a:pPr>
+              <a:lnSpc>
+                <a:spcPct val="150000"/>
+              </a:lnSpc>
+            </a:pPr>
+            <a:r>
+              <a:rPr lang="en-US" sz="1400" dirty="0" err="1">
+                <a:solidFill>
+                  <a:schemeClr val="accent3"/>
+                </a:solidFill>
+              </a:rPr>
+              <a:t>npm</a:t>
+            </a:r>
+            <a:r>
+              <a:rPr lang="en-US" sz="1400" dirty="0">
+                <a:solidFill>
+                  <a:schemeClr val="accent3"/>
+                </a:solidFill>
+              </a:rPr>
+              <a:t> install</a:t>
+            </a:r>
+          </a:p>
+          <a:p>
+            <a:pPr>
+              <a:lnSpc>
+                <a:spcPct val="150000"/>
+              </a:lnSpc>
+            </a:pPr>
+            <a:r>
+              <a:rPr lang="pt-BR" altLang="pt-BR" sz="1400" dirty="0" err="1">
+                <a:solidFill>
+                  <a:schemeClr val="accent3"/>
+                </a:solidFill>
+              </a:rPr>
+              <a:t>npm</a:t>
+            </a:r>
+            <a:r>
+              <a:rPr lang="pt-BR" altLang="pt-BR" sz="1400" dirty="0">
+                <a:solidFill>
+                  <a:schemeClr val="accent3"/>
+                </a:solidFill>
+              </a:rPr>
+              <a:t> </a:t>
+            </a:r>
+            <a:r>
+              <a:rPr lang="pt-BR" altLang="pt-BR" sz="1400" dirty="0" err="1">
+                <a:solidFill>
+                  <a:schemeClr val="accent3"/>
+                </a:solidFill>
+              </a:rPr>
+              <a:t>install</a:t>
+            </a:r>
+            <a:r>
+              <a:rPr lang="pt-BR" altLang="pt-BR" sz="1400" dirty="0">
+                <a:solidFill>
+                  <a:schemeClr val="accent3"/>
+                </a:solidFill>
+              </a:rPr>
+              <a:t> </a:t>
+            </a:r>
+            <a:r>
+              <a:rPr lang="pt-BR" altLang="pt-BR" sz="1400" dirty="0" err="1">
+                <a:solidFill>
+                  <a:schemeClr val="accent3"/>
+                </a:solidFill>
+              </a:rPr>
+              <a:t>styled-components</a:t>
+            </a:r>
+            <a:endParaRPr lang="pt-BR" altLang="pt-BR" sz="1400" dirty="0">
+              <a:solidFill>
+                <a:schemeClr val="accent3"/>
+              </a:solidFill>
+            </a:endParaRPr>
+          </a:p>
+          <a:p>
+            <a:pPr>
+              <a:lnSpc>
+                <a:spcPct val="150000"/>
+              </a:lnSpc>
+            </a:pPr>
+            <a:r>
+              <a:rPr lang="en-US" sz="1400" dirty="0" err="1">
+                <a:solidFill>
+                  <a:schemeClr val="accent3"/>
+                </a:solidFill>
+              </a:rPr>
+              <a:t>npm</a:t>
+            </a:r>
+            <a:r>
+              <a:rPr lang="en-US" sz="1400" dirty="0">
+                <a:solidFill>
+                  <a:schemeClr val="accent3"/>
+                </a:solidFill>
+              </a:rPr>
+              <a:t> run dev</a:t>
+            </a:r>
           </a:p>
         </p:txBody>
       </p:sp>
@@ -16556,9 +19005,6 @@
           <a:bodyPr wrap="square" lIns="0" tIns="0" rIns="0" bIns="0" rtlCol="0" anchor="ctr"/>
           <a:lstStyle/>
           <a:p>
-            <a:pPr marL="0" indent="0">
-              <a:buNone/>
-            </a:pPr>
             <a:r>
               <a:rPr lang="en-US" sz="1000" b="1" dirty="0">
                 <a:solidFill>
@@ -16568,9 +19014,41 @@
                 <a:ea typeface="Consolas" pitchFamily="34" charset="-122"/>
                 <a:cs typeface="Consolas" pitchFamily="34" charset="-120"/>
               </a:rPr>
-              <a:t>cd proj03</a:t>
-            </a:r>
-            <a:endParaRPr lang="en-US" sz="1000" dirty="0"/>
+              <a:t>cd </a:t>
+            </a:r>
+            <a:r>
+              <a:rPr lang="en-US" sz="1000" b="1" dirty="0" err="1">
+                <a:solidFill>
+                  <a:srgbClr val="CB356B"/>
+                </a:solidFill>
+                <a:latin typeface="Consolas" pitchFamily="34" charset="0"/>
+              </a:rPr>
+              <a:t>nome</a:t>
+            </a:r>
+            <a:r>
+              <a:rPr lang="en-US" sz="1000" b="1" dirty="0">
+                <a:solidFill>
+                  <a:srgbClr val="CB356B"/>
+                </a:solidFill>
+                <a:latin typeface="Consolas" pitchFamily="34" charset="0"/>
+              </a:rPr>
+              <a:t>-do-</a:t>
+            </a:r>
+            <a:r>
+              <a:rPr lang="en-US" sz="1000" b="1" dirty="0" err="1">
+                <a:solidFill>
+                  <a:srgbClr val="CB356B"/>
+                </a:solidFill>
+                <a:latin typeface="Consolas" pitchFamily="34" charset="0"/>
+              </a:rPr>
+              <a:t>projeto</a:t>
+            </a:r>
+            <a:endParaRPr lang="en-US" sz="1000" b="1" dirty="0">
+              <a:solidFill>
+                <a:srgbClr val="CB356B"/>
+              </a:solidFill>
+              <a:latin typeface="Consolas" pitchFamily="34" charset="0"/>
+            </a:endParaRPr>
           </a:p>
         </p:txBody>
       </p:sp>
@@ -16818,21 +19296,31 @@
                   <a:srgbClr val="555F6E"/>
                 </a:solidFill>
               </a:rPr>
-              <a:t>Instala estilização dinâmica</a:t>
-            </a:r>
-            <a:endParaRPr lang="en-US" sz="1000" dirty="0"/>
-          </a:p>
-          <a:p>
-            <a:pPr marL="0" indent="0">
-              <a:buNone/>
-            </a:pPr>
+              <a:t>Instala </a:t>
+            </a:r>
+            <a:r>
+              <a:rPr lang="en-US" sz="1000" dirty="0" err="1">
+                <a:solidFill>
+                  <a:srgbClr val="555F6E"/>
+                </a:solidFill>
+              </a:rPr>
+              <a:t>estilização</a:t>
+            </a:r>
             <a:r>
               <a:rPr lang="en-US" sz="1000" dirty="0">
                 <a:solidFill>
                   <a:srgbClr val="555F6E"/>
                 </a:solidFill>
               </a:rPr>
-              <a:t>(--save não é mais necessário!)</a:t>
+              <a:t> </a:t>
+            </a:r>
+            <a:r>
+              <a:rPr lang="en-US" sz="1000" dirty="0" err="1">
+                <a:solidFill>
+                  <a:srgbClr val="555F6E"/>
+                </a:solidFill>
+              </a:rPr>
+              <a:t>dinâmica</a:t>
             </a:r>
             <a:endParaRPr lang="en-US" sz="1000" dirty="0"/>
           </a:p>
@@ -16914,7 +19402,7 @@
 </p:sld>
 </file>
 
-<file path=ppt/slides/slide4.xml><?xml version="1.0" encoding="utf-8"?>
+<file path=ppt/slides/slide5.xml><?xml version="1.0" encoding="utf-8"?>
 <p:sld xmlns:a="http://schemas.openxmlformats.org/drawingml/2006/main" xmlns:r="http://schemas.openxmlformats.org/officeDocument/2006/relationships" xmlns:p="http://schemas.openxmlformats.org/presentationml/2006/main">
   <p:cSld name="Slide 4">
     <p:bg>
@@ -18127,7 +20615,7 @@
 </p:sld>
 </file>
 
-<file path=ppt/slides/slide5.xml><?xml version="1.0" encoding="utf-8"?>
+<file path=ppt/slides/slide6.xml><?xml version="1.0" encoding="utf-8"?>
 <p:sld xmlns:a="http://schemas.openxmlformats.org/drawingml/2006/main" xmlns:r="http://schemas.openxmlformats.org/officeDocument/2006/relationships" xmlns:p="http://schemas.openxmlformats.org/presentationml/2006/main">
   <p:cSld name="Slide 5">
     <p:bg>
@@ -19059,7 +21547,7 @@
 </p:sld>
 </file>
 
-<file path=ppt/slides/slide6.xml><?xml version="1.0" encoding="utf-8"?>
+<file path=ppt/slides/slide7.xml><?xml version="1.0" encoding="utf-8"?>
 <p:sld xmlns:a="http://schemas.openxmlformats.org/drawingml/2006/main" xmlns:r="http://schemas.openxmlformats.org/officeDocument/2006/relationships" xmlns:p="http://schemas.openxmlformats.org/presentationml/2006/main">
   <p:cSld name="Slide 6">
     <p:bg>
@@ -19209,12 +21697,20 @@
               <a:buNone/>
             </a:pPr>
             <a:r>
+              <a:rPr lang="en-US" sz="1800" b="1" dirty="0" err="1">
+                <a:solidFill>
+                  <a:srgbClr val="61DAFB"/>
+                </a:solidFill>
+              </a:rPr>
+              <a:t>Criando</a:t>
+            </a:r>
+            <a:r>
               <a:rPr lang="en-US" sz="1800" b="1" dirty="0">
                 <a:solidFill>
                   <a:srgbClr val="61DAFB"/>
                 </a:solidFill>
               </a:rPr>
-              <a:t>Configurando o </a:t>
+              <a:t> o </a:t>
             </a:r>
             <a:r>
               <a:rPr lang="en-US" sz="1800" b="1" dirty="0" err="1">
@@ -19346,7 +21842,7 @@
               <a:buNone/>
             </a:pPr>
             <a:r>
-              <a:rPr lang="en-US" sz="1000" dirty="0">
+              <a:rPr lang="en-US" sz="1200" dirty="0">
                 <a:solidFill>
                   <a:srgbClr val="CDD6F4"/>
                 </a:solidFill>
@@ -19356,14 +21852,14 @@
               </a:rPr>
               <a:t>export function Inicio() {</a:t>
             </a:r>
-            <a:endParaRPr lang="en-US" sz="1000" dirty="0"/>
-          </a:p>
-          <a:p>
-            <a:pPr marL="0" indent="0">
-              <a:buNone/>
-            </a:pPr>
-            <a:r>
-              <a:rPr lang="en-US" sz="1000" dirty="0">
+            <a:endParaRPr lang="en-US" sz="1200" dirty="0"/>
+          </a:p>
+          <a:p>
+            <a:pPr marL="0" indent="0">
+              <a:buNone/>
+            </a:pPr>
+            <a:r>
+              <a:rPr lang="en-US" sz="1200" dirty="0">
                 <a:solidFill>
                   <a:srgbClr val="CDD6F4"/>
                 </a:solidFill>
@@ -19373,14 +21869,14 @@
               </a:rPr>
               <a:t>  return &lt;&gt;</a:t>
             </a:r>
-            <a:endParaRPr lang="en-US" sz="1000" dirty="0"/>
-          </a:p>
-          <a:p>
-            <a:pPr marL="0" indent="0">
-              <a:buNone/>
-            </a:pPr>
-            <a:r>
-              <a:rPr lang="en-US" sz="1000" dirty="0">
+            <a:endParaRPr lang="en-US" sz="1200" dirty="0"/>
+          </a:p>
+          <a:p>
+            <a:pPr marL="0" indent="0">
+              <a:buNone/>
+            </a:pPr>
+            <a:r>
+              <a:rPr lang="en-US" sz="1200" dirty="0">
                 <a:solidFill>
                   <a:srgbClr val="CDD6F4"/>
                 </a:solidFill>
@@ -19390,14 +21886,14 @@
               </a:rPr>
               <a:t>    Teste</a:t>
             </a:r>
-            <a:endParaRPr lang="en-US" sz="1000" dirty="0"/>
-          </a:p>
-          <a:p>
-            <a:pPr marL="0" indent="0">
-              <a:buNone/>
-            </a:pPr>
-            <a:r>
-              <a:rPr lang="en-US" sz="1000" dirty="0">
+            <a:endParaRPr lang="en-US" sz="1200" dirty="0"/>
+          </a:p>
+          <a:p>
+            <a:pPr marL="0" indent="0">
+              <a:buNone/>
+            </a:pPr>
+            <a:r>
+              <a:rPr lang="en-US" sz="1200" dirty="0">
                 <a:solidFill>
                   <a:srgbClr val="CDD6F4"/>
                 </a:solidFill>
@@ -19407,14 +21903,14 @@
               </a:rPr>
               <a:t>  &lt;/&gt;</a:t>
             </a:r>
-            <a:endParaRPr lang="en-US" sz="1000" dirty="0"/>
-          </a:p>
-          <a:p>
-            <a:pPr marL="0" indent="0">
-              <a:buNone/>
-            </a:pPr>
-            <a:r>
-              <a:rPr lang="en-US" sz="1000" dirty="0">
+            <a:endParaRPr lang="en-US" sz="1200" dirty="0"/>
+          </a:p>
+          <a:p>
+            <a:pPr marL="0" indent="0">
+              <a:buNone/>
+            </a:pPr>
+            <a:r>
+              <a:rPr lang="en-US" sz="1200" dirty="0">
                 <a:solidFill>
                   <a:srgbClr val="CDD6F4"/>
                 </a:solidFill>
@@ -19424,7 +21920,7 @@
               </a:rPr>
               <a:t>}</a:t>
             </a:r>
-            <a:endParaRPr lang="en-US" sz="1000" dirty="0"/>
+            <a:endParaRPr lang="en-US" sz="1200" dirty="0"/>
           </a:p>
         </p:txBody>
       </p:sp>
@@ -19482,14 +21978,14 @@
           <a:lstStyle/>
           <a:p>
             <a:r>
-              <a:rPr lang="en-US" sz="1000" dirty="0">
+              <a:rPr lang="en-US" sz="1400" b="1" dirty="0">
                 <a:solidFill>
                   <a:srgbClr val="155724"/>
                 </a:solidFill>
               </a:rPr>
               <a:t>Vai até main.jsx e troca &lt;App /&gt;  pelo &lt;Inicio / &gt;</a:t>
             </a:r>
-            <a:endParaRPr lang="en-US" sz="1000" dirty="0"/>
+            <a:endParaRPr lang="en-US" sz="1400" b="1" dirty="0"/>
           </a:p>
         </p:txBody>
       </p:sp>
@@ -19586,7 +22082,7 @@
         <p:spPr>
           <a:xfrm>
             <a:off x="365760" y="4069080"/>
-            <a:ext cx="4572000" cy="1188720"/>
+            <a:ext cx="4572000" cy="1005840"/>
           </a:xfrm>
           <a:prstGeom prst="rect">
             <a:avLst/>
@@ -19634,7 +22130,7 @@
               <a:buNone/>
             </a:pPr>
             <a:r>
-              <a:rPr lang="en-US" sz="1000" dirty="0">
+              <a:rPr lang="en-US" sz="1200" dirty="0">
                 <a:solidFill>
                   <a:srgbClr val="CDD6F4"/>
                 </a:solidFill>
@@ -19644,20 +22140,20 @@
               </a:rPr>
               <a:t>npm run dev</a:t>
             </a:r>
-            <a:endParaRPr lang="en-US" sz="1000" dirty="0"/>
-          </a:p>
-          <a:p>
-            <a:pPr marL="0" indent="0">
-              <a:buNone/>
-            </a:pPr>
-            <a:endParaRPr lang="en-US" sz="1000" dirty="0"/>
-          </a:p>
-          <a:p>
-            <a:pPr marL="0" indent="0">
-              <a:buNone/>
-            </a:pPr>
-            <a:r>
-              <a:rPr lang="en-US" sz="1000" dirty="0">
+            <a:endParaRPr lang="en-US" sz="1200" dirty="0"/>
+          </a:p>
+          <a:p>
+            <a:pPr marL="0" indent="0">
+              <a:buNone/>
+            </a:pPr>
+            <a:endParaRPr lang="en-US" sz="1200" dirty="0"/>
+          </a:p>
+          <a:p>
+            <a:pPr marL="0" indent="0">
+              <a:buNone/>
+            </a:pPr>
+            <a:r>
+              <a:rPr lang="en-US" sz="1200" dirty="0">
                 <a:solidFill>
                   <a:srgbClr val="CDD6F4"/>
                 </a:solidFill>
@@ -19667,7 +22163,7 @@
               </a:rPr>
               <a:t># Abre em: http://localhost:5173</a:t>
             </a:r>
-            <a:endParaRPr lang="en-US" sz="1000" dirty="0"/>
+            <a:endParaRPr lang="en-US" sz="1200" dirty="0"/>
           </a:p>
         </p:txBody>
       </p:sp>
@@ -20139,7 +22635,7 @@
 </p:sld>
 </file>
 
-<file path=ppt/slides/slide7.xml><?xml version="1.0" encoding="utf-8"?>
+<file path=ppt/slides/slide8.xml><?xml version="1.0" encoding="utf-8"?>
 <p:sld xmlns:a="http://schemas.openxmlformats.org/drawingml/2006/main" xmlns:r="http://schemas.openxmlformats.org/officeDocument/2006/relationships" xmlns:p="http://schemas.openxmlformats.org/presentationml/2006/main">
   <p:cSld name="Slide 7">
     <p:bg>
@@ -20348,7 +22844,7 @@
         <p:spPr>
           <a:xfrm>
             <a:off x="457200" y="1161288"/>
-            <a:ext cx="4572000" cy="4434840"/>
+            <a:ext cx="4572000" cy="3982212"/>
           </a:xfrm>
           <a:prstGeom prst="rect">
             <a:avLst/>
@@ -20380,7 +22876,7 @@
         <p:spPr>
           <a:xfrm>
             <a:off x="594360" y="1252728"/>
-            <a:ext cx="4297680" cy="4251960"/>
+            <a:ext cx="4297680" cy="3890772"/>
           </a:xfrm>
           <a:prstGeom prst="rect">
             <a:avLst/>
@@ -20444,7 +22940,7 @@
                 <a:ea typeface="Consolas" pitchFamily="34" charset="-122"/>
                 <a:cs typeface="Consolas" pitchFamily="34" charset="-120"/>
               </a:rPr>
-              <a:t>  background: linear-gradient(</a:t>
+              <a:t>  background: linear-gradient(45deg, #cb356b, #bd3f32);</a:t>
             </a:r>
             <a:endParaRPr lang="en-US" sz="1000" dirty="0"/>
           </a:p>
@@ -20461,7 +22957,7 @@
                 <a:ea typeface="Consolas" pitchFamily="34" charset="-122"/>
                 <a:cs typeface="Consolas" pitchFamily="34" charset="-120"/>
               </a:rPr>
-              <a:t>    45deg, #cb356b, #bd3f32</a:t>
+              <a:t>  color: white;</a:t>
             </a:r>
             <a:endParaRPr lang="en-US" sz="1000" dirty="0"/>
           </a:p>
@@ -20478,7 +22974,7 @@
                 <a:ea typeface="Consolas" pitchFamily="34" charset="-122"/>
                 <a:cs typeface="Consolas" pitchFamily="34" charset="-120"/>
               </a:rPr>
-              <a:t>  );</a:t>
+              <a:t>  padding: 32px;</a:t>
             </a:r>
             <a:endParaRPr lang="en-US" sz="1000" dirty="0"/>
           </a:p>
@@ -20495,8 +22991,14 @@
                 <a:ea typeface="Consolas" pitchFamily="34" charset="-122"/>
                 <a:cs typeface="Consolas" pitchFamily="34" charset="-120"/>
               </a:rPr>
-              <a:t>  color: white;</a:t>
-            </a:r>
+              <a:t>`</a:t>
+            </a:r>
+            <a:endParaRPr lang="en-US" sz="1000" dirty="0"/>
+          </a:p>
+          <a:p>
+            <a:pPr marL="0" indent="0">
+              <a:buNone/>
+            </a:pPr>
             <a:endParaRPr lang="en-US" sz="1000" dirty="0"/>
           </a:p>
           <a:p>
@@ -20512,7 +23014,7 @@
                 <a:ea typeface="Consolas" pitchFamily="34" charset="-122"/>
                 <a:cs typeface="Consolas" pitchFamily="34" charset="-120"/>
               </a:rPr>
-              <a:t>  padding: 32px;</a:t>
+              <a:t>const TituloNome = styled.div`</a:t>
             </a:r>
             <a:endParaRPr lang="en-US" sz="1000" dirty="0"/>
           </a:p>
@@ -20529,6 +23031,40 @@
                 <a:ea typeface="Consolas" pitchFamily="34" charset="-122"/>
                 <a:cs typeface="Consolas" pitchFamily="34" charset="-120"/>
               </a:rPr>
+              <a:t>  font-size: 2rem;</a:t>
+            </a:r>
+            <a:endParaRPr lang="en-US" sz="1000" dirty="0"/>
+          </a:p>
+          <a:p>
+            <a:pPr marL="0" indent="0">
+              <a:buNone/>
+            </a:pPr>
+            <a:r>
+              <a:rPr lang="en-US" sz="1000" dirty="0">
+                <a:solidFill>
+                  <a:srgbClr val="CDD6F4"/>
+                </a:solidFill>
+                <a:latin typeface="Consolas" pitchFamily="34" charset="0"/>
+                <a:ea typeface="Consolas" pitchFamily="34" charset="-122"/>
+                <a:cs typeface="Consolas" pitchFamily="34" charset="-120"/>
+              </a:rPr>
+              <a:t>  margin-top: 96px;</a:t>
+            </a:r>
+            <a:endParaRPr lang="en-US" sz="1000" dirty="0"/>
+          </a:p>
+          <a:p>
+            <a:pPr marL="0" indent="0">
+              <a:buNone/>
+            </a:pPr>
+            <a:r>
+              <a:rPr lang="en-US" sz="1000" dirty="0">
+                <a:solidFill>
+                  <a:srgbClr val="CDD6F4"/>
+                </a:solidFill>
+                <a:latin typeface="Consolas" pitchFamily="34" charset="0"/>
+                <a:ea typeface="Consolas" pitchFamily="34" charset="-122"/>
+                <a:cs typeface="Consolas" pitchFamily="34" charset="-120"/>
+              </a:rPr>
               <a:t>`</a:t>
             </a:r>
             <a:endParaRPr lang="en-US" sz="1000" dirty="0"/>
@@ -20552,7 +23088,7 @@
                 <a:ea typeface="Consolas" pitchFamily="34" charset="-122"/>
                 <a:cs typeface="Consolas" pitchFamily="34" charset="-120"/>
               </a:rPr>
-              <a:t>const TituloNome = styled.div`</a:t>
+              <a:t>const TituloData = styled.div`</a:t>
             </a:r>
             <a:endParaRPr lang="en-US" sz="1000" dirty="0"/>
           </a:p>
@@ -20569,7 +23105,7 @@
                 <a:ea typeface="Consolas" pitchFamily="34" charset="-122"/>
                 <a:cs typeface="Consolas" pitchFamily="34" charset="-120"/>
               </a:rPr>
-              <a:t>  font-size: 2rem;</a:t>
+              <a:t>  font-size: 1.2rem;</a:t>
             </a:r>
             <a:endParaRPr lang="en-US" sz="1000" dirty="0"/>
           </a:p>
@@ -20586,7 +23122,7 @@
                 <a:ea typeface="Consolas" pitchFamily="34" charset="-122"/>
                 <a:cs typeface="Consolas" pitchFamily="34" charset="-120"/>
               </a:rPr>
-              <a:t>  margin-top: 96px;</a:t>
+              <a:t>  margin-top: 8px;</a:t>
             </a:r>
             <a:endParaRPr lang="en-US" sz="1000" dirty="0"/>
           </a:p>
@@ -20626,7 +23162,7 @@
                 <a:ea typeface="Consolas" pitchFamily="34" charset="-122"/>
                 <a:cs typeface="Consolas" pitchFamily="34" charset="-120"/>
               </a:rPr>
-              <a:t>const TituloData = styled.div`</a:t>
+              <a:t>export function Titulo({ nome }) {</a:t>
             </a:r>
             <a:endParaRPr lang="en-US" sz="1000" dirty="0"/>
           </a:p>
@@ -20643,7 +23179,7 @@
                 <a:ea typeface="Consolas" pitchFamily="34" charset="-122"/>
                 <a:cs typeface="Consolas" pitchFamily="34" charset="-120"/>
               </a:rPr>
-              <a:t>  font-size: 1.2rem;</a:t>
+              <a:t>  return &lt;ModeloTitulo&gt;</a:t>
             </a:r>
             <a:endParaRPr lang="en-US" sz="1000" dirty="0"/>
           </a:p>
@@ -20660,7 +23196,7 @@
                 <a:ea typeface="Consolas" pitchFamily="34" charset="-122"/>
                 <a:cs typeface="Consolas" pitchFamily="34" charset="-120"/>
               </a:rPr>
-              <a:t>  margin-top: 8px;</a:t>
+              <a:t>    &lt;TituloNome&gt;{ nome }&lt;/TituloNome&gt;</a:t>
             </a:r>
             <a:endParaRPr lang="en-US" sz="1000" dirty="0"/>
           </a:p>
@@ -20677,98 +23213,7 @@
                 <a:ea typeface="Consolas" pitchFamily="34" charset="-122"/>
                 <a:cs typeface="Consolas" pitchFamily="34" charset="-120"/>
               </a:rPr>
-              <a:t>`</a:t>
-            </a:r>
-            <a:endParaRPr lang="en-US" sz="1000" dirty="0"/>
-          </a:p>
-          <a:p>
-            <a:pPr marL="0" indent="0">
-              <a:buNone/>
-            </a:pPr>
-            <a:endParaRPr lang="en-US" sz="1000" dirty="0"/>
-          </a:p>
-          <a:p>
-            <a:pPr marL="0" indent="0">
-              <a:buNone/>
-            </a:pPr>
-            <a:r>
-              <a:rPr lang="en-US" sz="1000" dirty="0">
-                <a:solidFill>
-                  <a:srgbClr val="CDD6F4"/>
-                </a:solidFill>
-                <a:latin typeface="Consolas" pitchFamily="34" charset="0"/>
-                <a:ea typeface="Consolas" pitchFamily="34" charset="-122"/>
-                <a:cs typeface="Consolas" pitchFamily="34" charset="-120"/>
-              </a:rPr>
-              <a:t>export function Titulo({ nome }) {</a:t>
-            </a:r>
-            <a:endParaRPr lang="en-US" sz="1000" dirty="0"/>
-          </a:p>
-          <a:p>
-            <a:pPr marL="0" indent="0">
-              <a:buNone/>
-            </a:pPr>
-            <a:r>
-              <a:rPr lang="en-US" sz="1000" dirty="0">
-                <a:solidFill>
-                  <a:srgbClr val="CDD6F4"/>
-                </a:solidFill>
-                <a:latin typeface="Consolas" pitchFamily="34" charset="0"/>
-                <a:ea typeface="Consolas" pitchFamily="34" charset="-122"/>
-                <a:cs typeface="Consolas" pitchFamily="34" charset="-120"/>
-              </a:rPr>
-              <a:t>  return &lt;ModeloTitulo&gt;</a:t>
-            </a:r>
-            <a:endParaRPr lang="en-US" sz="1000" dirty="0"/>
-          </a:p>
-          <a:p>
-            <a:pPr marL="0" indent="0">
-              <a:buNone/>
-            </a:pPr>
-            <a:r>
-              <a:rPr lang="en-US" sz="1000" dirty="0">
-                <a:solidFill>
-                  <a:srgbClr val="CDD6F4"/>
-                </a:solidFill>
-                <a:latin typeface="Consolas" pitchFamily="34" charset="0"/>
-                <a:ea typeface="Consolas" pitchFamily="34" charset="-122"/>
-                <a:cs typeface="Consolas" pitchFamily="34" charset="-120"/>
-              </a:rPr>
-              <a:t>    &lt;TituloNome&gt;{ nome }&lt;/TituloNome&gt;</a:t>
-            </a:r>
-            <a:endParaRPr lang="en-US" sz="1000" dirty="0"/>
-          </a:p>
-          <a:p>
-            <a:pPr marL="0" indent="0">
-              <a:buNone/>
-            </a:pPr>
-            <a:r>
-              <a:rPr lang="en-US" sz="1000" dirty="0">
-                <a:solidFill>
-                  <a:srgbClr val="CDD6F4"/>
-                </a:solidFill>
-                <a:latin typeface="Consolas" pitchFamily="34" charset="0"/>
-                <a:ea typeface="Consolas" pitchFamily="34" charset="-122"/>
-                <a:cs typeface="Consolas" pitchFamily="34" charset="-120"/>
-              </a:rPr>
-              <a:t>    &lt;TituloData&gt;{ dataFinal }&lt;/TituloData&gt;</a:t>
-            </a:r>
-            <a:endParaRPr lang="en-US" sz="1000" dirty="0"/>
-          </a:p>
-          <a:p>
-            <a:pPr marL="0" indent="0">
-              <a:buNone/>
-            </a:pPr>
-            <a:r>
-              <a:rPr lang="en-US" sz="1000" dirty="0">
-                <a:solidFill>
-                  <a:srgbClr val="CDD6F4"/>
-                </a:solidFill>
-                <a:latin typeface="Consolas" pitchFamily="34" charset="0"/>
-                <a:ea typeface="Consolas" pitchFamily="34" charset="-122"/>
-                <a:cs typeface="Consolas" pitchFamily="34" charset="-120"/>
-              </a:rPr>
-              <a:t>  &lt;/ModeloTitulo&gt;</a:t>
+              <a:t>&lt;/ModeloTitulo&gt;</a:t>
             </a:r>
             <a:endParaRPr lang="en-US" sz="1000" dirty="0"/>
           </a:p>
@@ -21283,7 +23728,7 @@
 </p:sld>
 </file>
 
-<file path=ppt/slides/slide8.xml><?xml version="1.0" encoding="utf-8"?>
+<file path=ppt/slides/slide9.xml><?xml version="1.0" encoding="utf-8"?>
 <p:sld xmlns:a="http://schemas.openxmlformats.org/drawingml/2006/main" xmlns:r="http://schemas.openxmlformats.org/officeDocument/2006/relationships" xmlns:p="http://schemas.openxmlformats.org/presentationml/2006/main">
   <p:cSld name="Slide 8">
     <p:bg>
@@ -22464,7 +24909,7 @@
               <a:buNone/>
             </a:pPr>
             <a:r>
-              <a:rPr lang="en-US" sz="1000" dirty="0">
+              <a:rPr lang="en-US" sz="1200" b="1" dirty="0">
                 <a:solidFill>
                   <a:srgbClr val="CDD6F4"/>
                 </a:solidFill>
@@ -22474,1434 +24919,11 @@
               </a:rPr>
               <a:t>&lt;Titulo nome="Velejando com o React"/&gt;</a:t>
             </a:r>
-            <a:endParaRPr lang="en-US" sz="1000" dirty="0"/>
+            <a:endParaRPr lang="en-US" sz="1200" b="1" dirty="0"/>
           </a:p>
         </p:txBody>
       </p:sp>
     </p:spTree>
-  </p:cSld>
-  <p:clrMapOvr>
-    <a:masterClrMapping/>
-  </p:clrMapOvr>
-</p:sld>
-</file>
-
-<file path=ppt/slides/slide9.xml><?xml version="1.0" encoding="utf-8"?>
-<p:sld xmlns:a="http://schemas.openxmlformats.org/drawingml/2006/main" xmlns:r="http://schemas.openxmlformats.org/officeDocument/2006/relationships" xmlns:p="http://schemas.openxmlformats.org/presentationml/2006/main">
-  <p:cSld>
-    <p:bg>
-      <p:bgPr>
-        <a:solidFill>
-          <a:srgbClr val="F5F7FA"/>
-        </a:solidFill>
-        <a:effectLst/>
-      </p:bgPr>
-    </p:bg>
-    <p:spTree>
-      <p:nvGrpSpPr>
-        <p:cNvPr id="1" name="">
-          <a:extLst>
-            <a:ext uri="{FF2B5EF4-FFF2-40B4-BE49-F238E27FC236}">
-              <a16:creationId xmlns:a16="http://schemas.microsoft.com/office/drawing/2014/main" id="{96555E4A-C135-A656-2A54-892BB03A76BE}"/>
-            </a:ext>
-          </a:extLst>
-        </p:cNvPr>
-        <p:cNvGrpSpPr/>
-        <p:nvPr/>
-      </p:nvGrpSpPr>
-      <p:grpSpPr>
-        <a:xfrm>
-          <a:off x="0" y="0"/>
-          <a:ext cx="0" cy="0"/>
-          <a:chOff x="0" y="0"/>
-          <a:chExt cx="0" cy="0"/>
-        </a:xfrm>
-      </p:grpSpPr>
-      <p:sp>
-        <p:nvSpPr>
-          <p:cNvPr id="2" name="Shape 0">
-            <a:extLst>
-              <a:ext uri="{FF2B5EF4-FFF2-40B4-BE49-F238E27FC236}">
-                <a16:creationId xmlns:a16="http://schemas.microsoft.com/office/drawing/2014/main" id="{E847CCE0-37DD-3E5B-4F30-EA9C2B395DE6}"/>
-              </a:ext>
-            </a:extLst>
-          </p:cNvPr>
-          <p:cNvSpPr/>
-          <p:nvPr/>
-        </p:nvSpPr>
-        <p:spPr>
-          <a:xfrm>
-            <a:off x="0" y="0"/>
-            <a:ext cx="9144000" cy="685800"/>
-          </a:xfrm>
-          <a:prstGeom prst="rect">
-            <a:avLst/>
-          </a:prstGeom>
-          <a:solidFill>
-            <a:srgbClr val="20232A"/>
-          </a:solidFill>
-          <a:ln w="12700">
-            <a:solidFill>
-              <a:srgbClr val="20232A"/>
-            </a:solidFill>
-            <a:prstDash val="solid"/>
-          </a:ln>
-        </p:spPr>
-        <p:txBody>
-          <a:bodyPr/>
-          <a:lstStyle/>
-          <a:p>
-            <a:endParaRPr lang="pt-BR"/>
-          </a:p>
-        </p:txBody>
-      </p:sp>
-      <p:sp>
-        <p:nvSpPr>
-          <p:cNvPr id="3" name="Shape 1">
-            <a:extLst>
-              <a:ext uri="{FF2B5EF4-FFF2-40B4-BE49-F238E27FC236}">
-                <a16:creationId xmlns:a16="http://schemas.microsoft.com/office/drawing/2014/main" id="{2C53A907-2ED6-269E-9EFC-5257B50E0D25}"/>
-              </a:ext>
-            </a:extLst>
-          </p:cNvPr>
-          <p:cNvSpPr/>
-          <p:nvPr/>
-        </p:nvSpPr>
-        <p:spPr>
-          <a:xfrm>
-            <a:off x="365760" y="109728"/>
-            <a:ext cx="1005840" cy="457200"/>
-          </a:xfrm>
-          <a:prstGeom prst="rect">
-            <a:avLst/>
-          </a:prstGeom>
-          <a:solidFill>
-            <a:srgbClr val="CB356B"/>
-          </a:solidFill>
-          <a:ln w="12700">
-            <a:solidFill>
-              <a:srgbClr val="CB356B"/>
-            </a:solidFill>
-            <a:prstDash val="solid"/>
-          </a:ln>
-        </p:spPr>
-        <p:txBody>
-          <a:bodyPr/>
-          <a:lstStyle/>
-          <a:p>
-            <a:endParaRPr lang="pt-BR"/>
-          </a:p>
-        </p:txBody>
-      </p:sp>
-      <p:sp>
-        <p:nvSpPr>
-          <p:cNvPr id="4" name="Text 2">
-            <a:extLst>
-              <a:ext uri="{FF2B5EF4-FFF2-40B4-BE49-F238E27FC236}">
-                <a16:creationId xmlns:a16="http://schemas.microsoft.com/office/drawing/2014/main" id="{173422ED-9346-FA72-8F4C-9F4F75631774}"/>
-              </a:ext>
-            </a:extLst>
-          </p:cNvPr>
-          <p:cNvSpPr/>
-          <p:nvPr/>
-        </p:nvSpPr>
-        <p:spPr>
-          <a:xfrm>
-            <a:off x="365760" y="109728"/>
-            <a:ext cx="1005840" cy="457200"/>
-          </a:xfrm>
-          <a:prstGeom prst="rect">
-            <a:avLst/>
-          </a:prstGeom>
-          <a:noFill/>
-          <a:ln/>
-        </p:spPr>
-        <p:txBody>
-          <a:bodyPr wrap="square" lIns="0" tIns="0" rIns="0" bIns="0" rtlCol="0" anchor="ctr"/>
-          <a:lstStyle/>
-          <a:p>
-            <a:pPr marL="0" indent="0" algn="ctr">
-              <a:buNone/>
-            </a:pPr>
-            <a:r>
-              <a:rPr lang="en-US" sz="1100" b="1" dirty="0">
-                <a:solidFill>
-                  <a:srgbClr val="FFFFFF"/>
-                </a:solidFill>
-              </a:rPr>
-              <a:t>Lesson 05</a:t>
-            </a:r>
-            <a:endParaRPr lang="en-US" sz="1100" dirty="0"/>
-          </a:p>
-        </p:txBody>
-      </p:sp>
-      <p:sp>
-        <p:nvSpPr>
-          <p:cNvPr id="5" name="Text 3">
-            <a:extLst>
-              <a:ext uri="{FF2B5EF4-FFF2-40B4-BE49-F238E27FC236}">
-                <a16:creationId xmlns:a16="http://schemas.microsoft.com/office/drawing/2014/main" id="{03AAFBB0-38DC-4316-E1D0-CB268E4BC08E}"/>
-              </a:ext>
-            </a:extLst>
-          </p:cNvPr>
-          <p:cNvSpPr/>
-          <p:nvPr/>
-        </p:nvSpPr>
-        <p:spPr>
-          <a:xfrm>
-            <a:off x="1508760" y="109728"/>
-            <a:ext cx="7315200" cy="457200"/>
-          </a:xfrm>
-          <a:prstGeom prst="rect">
-            <a:avLst/>
-          </a:prstGeom>
-          <a:noFill/>
-          <a:ln/>
-        </p:spPr>
-        <p:txBody>
-          <a:bodyPr wrap="square" lIns="0" tIns="0" rIns="0" bIns="0" rtlCol="0" anchor="ctr"/>
-          <a:lstStyle/>
-          <a:p>
-            <a:pPr marL="0" indent="0">
-              <a:buNone/>
-            </a:pPr>
-            <a:r>
-              <a:rPr lang="en-US" sz="1800" b="1" dirty="0" err="1">
-                <a:solidFill>
-                  <a:srgbClr val="61DAFB"/>
-                </a:solidFill>
-              </a:rPr>
-              <a:t>Inicio.jsx</a:t>
-            </a:r>
-            <a:endParaRPr lang="en-US" sz="1800" dirty="0"/>
-          </a:p>
-        </p:txBody>
-      </p:sp>
-      <p:sp>
-        <p:nvSpPr>
-          <p:cNvPr id="6" name="Shape 4">
-            <a:extLst>
-              <a:ext uri="{FF2B5EF4-FFF2-40B4-BE49-F238E27FC236}">
-                <a16:creationId xmlns:a16="http://schemas.microsoft.com/office/drawing/2014/main" id="{47033D90-9216-0E80-EB91-53981B39DE57}"/>
-              </a:ext>
-            </a:extLst>
-          </p:cNvPr>
-          <p:cNvSpPr/>
-          <p:nvPr/>
-        </p:nvSpPr>
-        <p:spPr>
-          <a:xfrm>
-            <a:off x="457200" y="804672"/>
-            <a:ext cx="4572000" cy="4206240"/>
-          </a:xfrm>
-          <a:prstGeom prst="rect">
-            <a:avLst/>
-          </a:prstGeom>
-          <a:solidFill>
-            <a:srgbClr val="1E1E2E"/>
-          </a:solidFill>
-          <a:ln w="12700">
-            <a:solidFill>
-              <a:srgbClr val="2D2D3F"/>
-            </a:solidFill>
-            <a:prstDash val="solid"/>
-          </a:ln>
-        </p:spPr>
-        <p:txBody>
-          <a:bodyPr/>
-          <a:lstStyle/>
-          <a:p>
-            <a:endParaRPr lang="pt-BR"/>
-          </a:p>
-        </p:txBody>
-      </p:sp>
-      <p:sp>
-        <p:nvSpPr>
-          <p:cNvPr id="7" name="Text 5">
-            <a:extLst>
-              <a:ext uri="{FF2B5EF4-FFF2-40B4-BE49-F238E27FC236}">
-                <a16:creationId xmlns:a16="http://schemas.microsoft.com/office/drawing/2014/main" id="{597E9854-FF27-4F49-83EE-98F6E37377AB}"/>
-              </a:ext>
-            </a:extLst>
-          </p:cNvPr>
-          <p:cNvSpPr/>
-          <p:nvPr/>
-        </p:nvSpPr>
-        <p:spPr>
-          <a:xfrm>
-            <a:off x="594360" y="896112"/>
-            <a:ext cx="4297680" cy="4023360"/>
-          </a:xfrm>
-          <a:prstGeom prst="rect">
-            <a:avLst/>
-          </a:prstGeom>
-          <a:noFill/>
-          <a:ln/>
-        </p:spPr>
-        <p:txBody>
-          <a:bodyPr wrap="square" lIns="0" tIns="0" rIns="0" bIns="0" rtlCol="0" anchor="t"/>
-          <a:lstStyle/>
-          <a:p>
-            <a:r>
-              <a:rPr lang="pt-BR" sz="1200" dirty="0" err="1">
-                <a:solidFill>
-                  <a:srgbClr val="CDD6F4"/>
-                </a:solidFill>
-                <a:latin typeface="Consolas" pitchFamily="34" charset="0"/>
-              </a:rPr>
-              <a:t>import</a:t>
-            </a:r>
-            <a:r>
-              <a:rPr lang="pt-BR" sz="1200" dirty="0">
-                <a:solidFill>
-                  <a:srgbClr val="CDD6F4"/>
-                </a:solidFill>
-                <a:latin typeface="Consolas" pitchFamily="34" charset="0"/>
-              </a:rPr>
-              <a:t> { Titulo } </a:t>
-            </a:r>
-            <a:r>
-              <a:rPr lang="pt-BR" sz="1200" dirty="0" err="1">
-                <a:solidFill>
-                  <a:srgbClr val="CDD6F4"/>
-                </a:solidFill>
-                <a:latin typeface="Consolas" pitchFamily="34" charset="0"/>
-              </a:rPr>
-              <a:t>from</a:t>
-            </a:r>
-            <a:r>
-              <a:rPr lang="pt-BR" sz="1200" dirty="0">
-                <a:solidFill>
-                  <a:srgbClr val="CDD6F4"/>
-                </a:solidFill>
-                <a:latin typeface="Consolas" pitchFamily="34" charset="0"/>
-              </a:rPr>
-              <a:t> "./componentes/Titulo" </a:t>
-            </a:r>
-          </a:p>
-          <a:p>
-            <a:r>
-              <a:rPr lang="pt-BR" sz="1200" dirty="0" err="1">
-                <a:solidFill>
-                  <a:srgbClr val="CDD6F4"/>
-                </a:solidFill>
-                <a:latin typeface="Consolas" pitchFamily="34" charset="0"/>
-              </a:rPr>
-              <a:t>import</a:t>
-            </a:r>
-            <a:r>
-              <a:rPr lang="pt-BR" sz="1200" dirty="0">
-                <a:solidFill>
-                  <a:srgbClr val="CDD6F4"/>
-                </a:solidFill>
-                <a:latin typeface="Consolas" pitchFamily="34" charset="0"/>
-              </a:rPr>
-              <a:t> { Campo } </a:t>
-            </a:r>
-            <a:r>
-              <a:rPr lang="pt-BR" sz="1200" dirty="0" err="1">
-                <a:solidFill>
-                  <a:srgbClr val="CDD6F4"/>
-                </a:solidFill>
-                <a:latin typeface="Consolas" pitchFamily="34" charset="0"/>
-              </a:rPr>
-              <a:t>from</a:t>
-            </a:r>
-            <a:r>
-              <a:rPr lang="pt-BR" sz="1200" dirty="0">
-                <a:solidFill>
-                  <a:srgbClr val="CDD6F4"/>
-                </a:solidFill>
-                <a:latin typeface="Consolas" pitchFamily="34" charset="0"/>
-              </a:rPr>
-              <a:t> "./componentes/Campo" </a:t>
-            </a:r>
-          </a:p>
-          <a:p>
-            <a:endParaRPr lang="pt-BR" sz="1200" dirty="0">
-              <a:solidFill>
-                <a:srgbClr val="CDD6F4"/>
-              </a:solidFill>
-              <a:latin typeface="Consolas" pitchFamily="34" charset="0"/>
-            </a:endParaRPr>
-          </a:p>
-          <a:p>
-            <a:endParaRPr lang="pt-BR" sz="1200" dirty="0">
-              <a:solidFill>
-                <a:srgbClr val="CDD6F4"/>
-              </a:solidFill>
-              <a:latin typeface="Consolas" pitchFamily="34" charset="0"/>
-            </a:endParaRPr>
-          </a:p>
-          <a:p>
-            <a:r>
-              <a:rPr lang="pt-BR" sz="1200" dirty="0" err="1">
-                <a:solidFill>
-                  <a:srgbClr val="CDD6F4"/>
-                </a:solidFill>
-                <a:latin typeface="Consolas" pitchFamily="34" charset="0"/>
-              </a:rPr>
-              <a:t>export</a:t>
-            </a:r>
-            <a:r>
-              <a:rPr lang="pt-BR" sz="1200" dirty="0">
-                <a:solidFill>
-                  <a:srgbClr val="CDD6F4"/>
-                </a:solidFill>
-                <a:latin typeface="Consolas" pitchFamily="34" charset="0"/>
-              </a:rPr>
-              <a:t> </a:t>
-            </a:r>
-            <a:r>
-              <a:rPr lang="pt-BR" sz="1200" dirty="0" err="1">
-                <a:solidFill>
-                  <a:srgbClr val="CDD6F4"/>
-                </a:solidFill>
-                <a:latin typeface="Consolas" pitchFamily="34" charset="0"/>
-              </a:rPr>
-              <a:t>function</a:t>
-            </a:r>
-            <a:r>
-              <a:rPr lang="pt-BR" sz="1200" dirty="0">
-                <a:solidFill>
-                  <a:srgbClr val="CDD6F4"/>
-                </a:solidFill>
-                <a:latin typeface="Consolas" pitchFamily="34" charset="0"/>
-              </a:rPr>
-              <a:t> Inicio() {</a:t>
-            </a:r>
-          </a:p>
-          <a:p>
-            <a:r>
-              <a:rPr lang="pt-BR" sz="1200" dirty="0">
-                <a:solidFill>
-                  <a:srgbClr val="CDD6F4"/>
-                </a:solidFill>
-                <a:latin typeface="Consolas" pitchFamily="34" charset="0"/>
-              </a:rPr>
-              <a:t> </a:t>
-            </a:r>
-            <a:r>
-              <a:rPr lang="pt-BR" sz="1200" dirty="0" err="1">
-                <a:solidFill>
-                  <a:srgbClr val="CDD6F4"/>
-                </a:solidFill>
-                <a:latin typeface="Consolas" pitchFamily="34" charset="0"/>
-              </a:rPr>
-              <a:t>return</a:t>
-            </a:r>
-            <a:r>
-              <a:rPr lang="pt-BR" sz="1200" dirty="0">
-                <a:solidFill>
-                  <a:srgbClr val="CDD6F4"/>
-                </a:solidFill>
-                <a:latin typeface="Consolas" pitchFamily="34" charset="0"/>
-              </a:rPr>
-              <a:t> (</a:t>
-            </a:r>
-          </a:p>
-          <a:p>
-            <a:r>
-              <a:rPr lang="pt-BR" sz="1200" dirty="0">
-                <a:solidFill>
-                  <a:srgbClr val="CDD6F4"/>
-                </a:solidFill>
-                <a:latin typeface="Consolas" pitchFamily="34" charset="0"/>
-              </a:rPr>
-              <a:t>  &lt;&gt; </a:t>
-            </a:r>
-          </a:p>
-          <a:p>
-            <a:r>
-              <a:rPr lang="pt-BR" sz="1200" dirty="0">
-                <a:solidFill>
-                  <a:srgbClr val="CDD6F4"/>
-                </a:solidFill>
-                <a:latin typeface="Consolas" pitchFamily="34" charset="0"/>
-              </a:rPr>
-              <a:t>    &lt;Titulo nome="Velejando com o </a:t>
-            </a:r>
-            <a:r>
-              <a:rPr lang="pt-BR" sz="1200" dirty="0" err="1">
-                <a:solidFill>
-                  <a:srgbClr val="CDD6F4"/>
-                </a:solidFill>
-                <a:latin typeface="Consolas" pitchFamily="34" charset="0"/>
-              </a:rPr>
-              <a:t>React</a:t>
-            </a:r>
-            <a:r>
-              <a:rPr lang="pt-BR" sz="1200" dirty="0">
-                <a:solidFill>
-                  <a:srgbClr val="CDD6F4"/>
-                </a:solidFill>
-                <a:latin typeface="Consolas" pitchFamily="34" charset="0"/>
-              </a:rPr>
-              <a:t>" /&gt;</a:t>
-            </a:r>
-          </a:p>
-          <a:p>
-            <a:r>
-              <a:rPr lang="pt-BR" sz="1200" dirty="0">
-                <a:solidFill>
-                  <a:srgbClr val="CDD6F4"/>
-                </a:solidFill>
-                <a:latin typeface="Consolas" pitchFamily="34" charset="0"/>
-              </a:rPr>
-              <a:t>  &lt;/&gt; </a:t>
-            </a:r>
-          </a:p>
-          <a:p>
-            <a:r>
-              <a:rPr lang="pt-BR" sz="1200" dirty="0">
-                <a:solidFill>
-                  <a:srgbClr val="CDD6F4"/>
-                </a:solidFill>
-                <a:latin typeface="Consolas" pitchFamily="34" charset="0"/>
-              </a:rPr>
-              <a:t> )</a:t>
-            </a:r>
-          </a:p>
-          <a:p>
-            <a:r>
-              <a:rPr lang="pt-BR" sz="1200" dirty="0">
-                <a:solidFill>
-                  <a:srgbClr val="CDD6F4"/>
-                </a:solidFill>
-                <a:latin typeface="Consolas" pitchFamily="34" charset="0"/>
-              </a:rPr>
-              <a:t>}</a:t>
-            </a:r>
-            <a:endParaRPr lang="en-US" sz="1200" dirty="0">
-              <a:solidFill>
-                <a:srgbClr val="CDD6F4"/>
-              </a:solidFill>
-              <a:latin typeface="Consolas" pitchFamily="34" charset="0"/>
-            </a:endParaRPr>
-          </a:p>
-        </p:txBody>
-      </p:sp>
-      <p:sp>
-        <p:nvSpPr>
-          <p:cNvPr id="8" name="Text 6">
-            <a:extLst>
-              <a:ext uri="{FF2B5EF4-FFF2-40B4-BE49-F238E27FC236}">
-                <a16:creationId xmlns:a16="http://schemas.microsoft.com/office/drawing/2014/main" id="{46DD0FE1-47CC-8AF4-DB31-4970D14D8861}"/>
-              </a:ext>
-            </a:extLst>
-          </p:cNvPr>
-          <p:cNvSpPr/>
-          <p:nvPr/>
-        </p:nvSpPr>
-        <p:spPr>
-          <a:xfrm>
-            <a:off x="5303520" y="804672"/>
-            <a:ext cx="3566160" cy="365760"/>
-          </a:xfrm>
-          <a:prstGeom prst="rect">
-            <a:avLst/>
-          </a:prstGeom>
-          <a:noFill/>
-          <a:ln/>
-        </p:spPr>
-        <p:txBody>
-          <a:bodyPr wrap="square" lIns="0" tIns="0" rIns="0" bIns="0" rtlCol="0" anchor="ctr"/>
-          <a:lstStyle/>
-          <a:p>
-            <a:pPr marL="0" indent="0">
-              <a:buNone/>
-            </a:pPr>
-            <a:r>
-              <a:rPr lang="en-US" sz="1300" b="1" dirty="0">
-                <a:solidFill>
-                  <a:srgbClr val="20232A"/>
-                </a:solidFill>
-              </a:rPr>
-              <a:t>Como a data é transformada:</a:t>
-            </a:r>
-            <a:endParaRPr lang="en-US" sz="1300" dirty="0"/>
-          </a:p>
-        </p:txBody>
-      </p:sp>
-      <p:sp>
-        <p:nvSpPr>
-          <p:cNvPr id="9" name="Shape 7">
-            <a:extLst>
-              <a:ext uri="{FF2B5EF4-FFF2-40B4-BE49-F238E27FC236}">
-                <a16:creationId xmlns:a16="http://schemas.microsoft.com/office/drawing/2014/main" id="{41D1F457-E5D1-A652-397B-0DDE4A5DED89}"/>
-              </a:ext>
-            </a:extLst>
-          </p:cNvPr>
-          <p:cNvSpPr/>
-          <p:nvPr/>
-        </p:nvSpPr>
-        <p:spPr>
-          <a:xfrm>
-            <a:off x="5303520" y="1261872"/>
-            <a:ext cx="3566160" cy="777240"/>
-          </a:xfrm>
-          <a:prstGeom prst="rect">
-            <a:avLst/>
-          </a:prstGeom>
-          <a:solidFill>
-            <a:srgbClr val="FFF3CD"/>
-          </a:solidFill>
-          <a:ln w="12700">
-            <a:solidFill>
-              <a:srgbClr val="E0E0E0"/>
-            </a:solidFill>
-            <a:prstDash val="solid"/>
-          </a:ln>
-        </p:spPr>
-        <p:txBody>
-          <a:bodyPr/>
-          <a:lstStyle/>
-          <a:p>
-            <a:endParaRPr lang="pt-BR"/>
-          </a:p>
-        </p:txBody>
-      </p:sp>
-      <p:sp>
-        <p:nvSpPr>
-          <p:cNvPr id="10" name="Shape 8">
-            <a:extLst>
-              <a:ext uri="{FF2B5EF4-FFF2-40B4-BE49-F238E27FC236}">
-                <a16:creationId xmlns:a16="http://schemas.microsoft.com/office/drawing/2014/main" id="{98AB11EE-4EFE-8402-04B1-9B61D9BEEFB6}"/>
-              </a:ext>
-            </a:extLst>
-          </p:cNvPr>
-          <p:cNvSpPr/>
-          <p:nvPr/>
-        </p:nvSpPr>
-        <p:spPr>
-          <a:xfrm>
-            <a:off x="5440680" y="1353312"/>
-            <a:ext cx="365760" cy="365760"/>
-          </a:xfrm>
-          <a:prstGeom prst="ellipse">
-            <a:avLst/>
-          </a:prstGeom>
-          <a:solidFill>
-            <a:srgbClr val="20232A"/>
-          </a:solidFill>
-          <a:ln w="12700">
-            <a:solidFill>
-              <a:srgbClr val="20232A"/>
-            </a:solidFill>
-            <a:prstDash val="solid"/>
-          </a:ln>
-        </p:spPr>
-        <p:txBody>
-          <a:bodyPr/>
-          <a:lstStyle/>
-          <a:p>
-            <a:endParaRPr lang="pt-BR"/>
-          </a:p>
-        </p:txBody>
-      </p:sp>
-      <p:sp>
-        <p:nvSpPr>
-          <p:cNvPr id="11" name="Text 9">
-            <a:extLst>
-              <a:ext uri="{FF2B5EF4-FFF2-40B4-BE49-F238E27FC236}">
-                <a16:creationId xmlns:a16="http://schemas.microsoft.com/office/drawing/2014/main" id="{AEAC39CC-EB0B-5466-A37F-3C27FA355AB4}"/>
-              </a:ext>
-            </a:extLst>
-          </p:cNvPr>
-          <p:cNvSpPr/>
-          <p:nvPr/>
-        </p:nvSpPr>
-        <p:spPr>
-          <a:xfrm>
-            <a:off x="5440680" y="1353312"/>
-            <a:ext cx="365760" cy="365760"/>
-          </a:xfrm>
-          <a:prstGeom prst="rect">
-            <a:avLst/>
-          </a:prstGeom>
-          <a:noFill/>
-          <a:ln/>
-        </p:spPr>
-        <p:txBody>
-          <a:bodyPr wrap="square" lIns="0" tIns="0" rIns="0" bIns="0" rtlCol="0" anchor="ctr"/>
-          <a:lstStyle/>
-          <a:p>
-            <a:pPr marL="0" indent="0" algn="ctr">
-              <a:buNone/>
-            </a:pPr>
-            <a:r>
-              <a:rPr lang="en-US" sz="1200" b="1" dirty="0">
-                <a:solidFill>
-                  <a:srgbClr val="FFFFFF"/>
-                </a:solidFill>
-              </a:rPr>
-              <a:t>1</a:t>
-            </a:r>
-            <a:endParaRPr lang="en-US" sz="1200" dirty="0"/>
-          </a:p>
-        </p:txBody>
-      </p:sp>
-      <p:sp>
-        <p:nvSpPr>
-          <p:cNvPr id="12" name="Text 10">
-            <a:extLst>
-              <a:ext uri="{FF2B5EF4-FFF2-40B4-BE49-F238E27FC236}">
-                <a16:creationId xmlns:a16="http://schemas.microsoft.com/office/drawing/2014/main" id="{C3FDEF28-51C1-C1CD-1124-E508BFBE50A8}"/>
-              </a:ext>
-            </a:extLst>
-          </p:cNvPr>
-          <p:cNvSpPr/>
-          <p:nvPr/>
-        </p:nvSpPr>
-        <p:spPr>
-          <a:xfrm>
-            <a:off x="5897880" y="1298448"/>
-            <a:ext cx="2834640" cy="274320"/>
-          </a:xfrm>
-          <a:prstGeom prst="rect">
-            <a:avLst/>
-          </a:prstGeom>
-          <a:noFill/>
-          <a:ln/>
-        </p:spPr>
-        <p:txBody>
-          <a:bodyPr wrap="square" lIns="0" tIns="0" rIns="0" bIns="0" rtlCol="0" anchor="ctr"/>
-          <a:lstStyle/>
-          <a:p>
-            <a:r>
-              <a:rPr lang="pt-BR" sz="1100" b="1" dirty="0">
-                <a:solidFill>
-                  <a:srgbClr val="20232A"/>
-                </a:solidFill>
-                <a:latin typeface="Consolas" pitchFamily="34" charset="0"/>
-              </a:rPr>
-              <a:t>1. O Componente (&lt;Titulo ... /&gt;)</a:t>
-            </a:r>
-            <a:endParaRPr lang="en-US" sz="1100" b="1" dirty="0">
-              <a:solidFill>
-                <a:srgbClr val="20232A"/>
-              </a:solidFill>
-              <a:latin typeface="Consolas" pitchFamily="34" charset="0"/>
-            </a:endParaRPr>
-          </a:p>
-        </p:txBody>
-      </p:sp>
-      <p:sp>
-        <p:nvSpPr>
-          <p:cNvPr id="13" name="Text 11">
-            <a:extLst>
-              <a:ext uri="{FF2B5EF4-FFF2-40B4-BE49-F238E27FC236}">
-                <a16:creationId xmlns:a16="http://schemas.microsoft.com/office/drawing/2014/main" id="{AE5C6735-1286-E691-2FCF-22CD585BAC1C}"/>
-              </a:ext>
-            </a:extLst>
-          </p:cNvPr>
-          <p:cNvSpPr/>
-          <p:nvPr/>
-        </p:nvSpPr>
-        <p:spPr>
-          <a:xfrm>
-            <a:off x="5897880" y="1591056"/>
-            <a:ext cx="2834640" cy="274320"/>
-          </a:xfrm>
-          <a:prstGeom prst="rect">
-            <a:avLst/>
-          </a:prstGeom>
-          <a:noFill/>
-          <a:ln/>
-        </p:spPr>
-        <p:txBody>
-          <a:bodyPr wrap="square" lIns="0" tIns="0" rIns="0" bIns="0" rtlCol="0" anchor="ctr"/>
-          <a:lstStyle/>
-          <a:p>
-            <a:r>
-              <a:rPr lang="en-US" sz="1000" dirty="0">
-                <a:solidFill>
-                  <a:srgbClr val="555F6E"/>
-                </a:solidFill>
-              </a:rPr>
-              <a:t>→ </a:t>
-            </a:r>
-            <a:r>
-              <a:rPr lang="pt-BR" sz="1000" dirty="0">
-                <a:solidFill>
-                  <a:srgbClr val="555F6E"/>
-                </a:solidFill>
-              </a:rPr>
-              <a:t>Em vez de usar uma </a:t>
-            </a:r>
-            <a:r>
-              <a:rPr lang="pt-BR" sz="1000" dirty="0" err="1">
-                <a:solidFill>
-                  <a:srgbClr val="555F6E"/>
-                </a:solidFill>
-              </a:rPr>
-              <a:t>tag</a:t>
-            </a:r>
-            <a:r>
-              <a:rPr lang="pt-BR" sz="1000" dirty="0">
-                <a:solidFill>
-                  <a:srgbClr val="555F6E"/>
-                </a:solidFill>
-              </a:rPr>
-              <a:t> HTML padrão (como &lt;h1&gt; ou &lt;</a:t>
-            </a:r>
-            <a:r>
-              <a:rPr lang="pt-BR" sz="1000" dirty="0" err="1">
-                <a:solidFill>
-                  <a:srgbClr val="555F6E"/>
-                </a:solidFill>
-              </a:rPr>
-              <a:t>div</a:t>
-            </a:r>
-            <a:r>
-              <a:rPr lang="pt-BR" sz="1000" dirty="0">
-                <a:solidFill>
-                  <a:srgbClr val="555F6E"/>
-                </a:solidFill>
-              </a:rPr>
-              <a:t>&gt;), você está chamando um componente chamado Titulo.</a:t>
-            </a:r>
-            <a:endParaRPr lang="en-US" sz="1000" dirty="0">
-              <a:solidFill>
-                <a:srgbClr val="555F6E"/>
-              </a:solidFill>
-            </a:endParaRPr>
-          </a:p>
-        </p:txBody>
-      </p:sp>
-      <p:sp>
-        <p:nvSpPr>
-          <p:cNvPr id="14" name="Shape 12">
-            <a:extLst>
-              <a:ext uri="{FF2B5EF4-FFF2-40B4-BE49-F238E27FC236}">
-                <a16:creationId xmlns:a16="http://schemas.microsoft.com/office/drawing/2014/main" id="{4F2C501A-60D0-CD05-FE7A-4F465DC664F4}"/>
-              </a:ext>
-            </a:extLst>
-          </p:cNvPr>
-          <p:cNvSpPr/>
-          <p:nvPr/>
-        </p:nvSpPr>
-        <p:spPr>
-          <a:xfrm>
-            <a:off x="5303520" y="2176272"/>
-            <a:ext cx="3566160" cy="777240"/>
-          </a:xfrm>
-          <a:prstGeom prst="rect">
-            <a:avLst/>
-          </a:prstGeom>
-          <a:solidFill>
-            <a:srgbClr val="D1ECF1"/>
-          </a:solidFill>
-          <a:ln w="12700">
-            <a:solidFill>
-              <a:srgbClr val="E0E0E0"/>
-            </a:solidFill>
-            <a:prstDash val="solid"/>
-          </a:ln>
-        </p:spPr>
-        <p:txBody>
-          <a:bodyPr/>
-          <a:lstStyle/>
-          <a:p>
-            <a:endParaRPr lang="pt-BR"/>
-          </a:p>
-        </p:txBody>
-      </p:sp>
-      <p:sp>
-        <p:nvSpPr>
-          <p:cNvPr id="15" name="Shape 13">
-            <a:extLst>
-              <a:ext uri="{FF2B5EF4-FFF2-40B4-BE49-F238E27FC236}">
-                <a16:creationId xmlns:a16="http://schemas.microsoft.com/office/drawing/2014/main" id="{E1DFFD6C-6FE4-B08A-4748-D4D8BFA26B05}"/>
-              </a:ext>
-            </a:extLst>
-          </p:cNvPr>
-          <p:cNvSpPr/>
-          <p:nvPr/>
-        </p:nvSpPr>
-        <p:spPr>
-          <a:xfrm>
-            <a:off x="5440680" y="2267712"/>
-            <a:ext cx="365760" cy="365760"/>
-          </a:xfrm>
-          <a:prstGeom prst="ellipse">
-            <a:avLst/>
-          </a:prstGeom>
-          <a:solidFill>
-            <a:srgbClr val="20232A"/>
-          </a:solidFill>
-          <a:ln w="12700">
-            <a:solidFill>
-              <a:srgbClr val="20232A"/>
-            </a:solidFill>
-            <a:prstDash val="solid"/>
-          </a:ln>
-        </p:spPr>
-        <p:txBody>
-          <a:bodyPr/>
-          <a:lstStyle/>
-          <a:p>
-            <a:endParaRPr lang="pt-BR"/>
-          </a:p>
-        </p:txBody>
-      </p:sp>
-      <p:sp>
-        <p:nvSpPr>
-          <p:cNvPr id="16" name="Text 14">
-            <a:extLst>
-              <a:ext uri="{FF2B5EF4-FFF2-40B4-BE49-F238E27FC236}">
-                <a16:creationId xmlns:a16="http://schemas.microsoft.com/office/drawing/2014/main" id="{642CCEFF-6BD9-9B05-2798-BECD4897E84E}"/>
-              </a:ext>
-            </a:extLst>
-          </p:cNvPr>
-          <p:cNvSpPr/>
-          <p:nvPr/>
-        </p:nvSpPr>
-        <p:spPr>
-          <a:xfrm>
-            <a:off x="5440680" y="2267712"/>
-            <a:ext cx="365760" cy="365760"/>
-          </a:xfrm>
-          <a:prstGeom prst="rect">
-            <a:avLst/>
-          </a:prstGeom>
-          <a:noFill/>
-          <a:ln/>
-        </p:spPr>
-        <p:txBody>
-          <a:bodyPr wrap="square" lIns="0" tIns="0" rIns="0" bIns="0" rtlCol="0" anchor="ctr"/>
-          <a:lstStyle/>
-          <a:p>
-            <a:pPr marL="0" indent="0" algn="ctr">
-              <a:buNone/>
-            </a:pPr>
-            <a:r>
-              <a:rPr lang="en-US" sz="1200" b="1" dirty="0">
-                <a:solidFill>
-                  <a:srgbClr val="FFFFFF"/>
-                </a:solidFill>
-              </a:rPr>
-              <a:t>2</a:t>
-            </a:r>
-            <a:endParaRPr lang="en-US" sz="1200" dirty="0"/>
-          </a:p>
-        </p:txBody>
-      </p:sp>
-      <p:sp>
-        <p:nvSpPr>
-          <p:cNvPr id="17" name="Text 15">
-            <a:extLst>
-              <a:ext uri="{FF2B5EF4-FFF2-40B4-BE49-F238E27FC236}">
-                <a16:creationId xmlns:a16="http://schemas.microsoft.com/office/drawing/2014/main" id="{52CF11EF-2D41-5074-5058-F1F501BF7AF4}"/>
-              </a:ext>
-            </a:extLst>
-          </p:cNvPr>
-          <p:cNvSpPr/>
-          <p:nvPr/>
-        </p:nvSpPr>
-        <p:spPr>
-          <a:xfrm>
-            <a:off x="5897880" y="2212848"/>
-            <a:ext cx="2834640" cy="274320"/>
-          </a:xfrm>
-          <a:prstGeom prst="rect">
-            <a:avLst/>
-          </a:prstGeom>
-          <a:noFill/>
-          <a:ln/>
-        </p:spPr>
-        <p:txBody>
-          <a:bodyPr wrap="square" lIns="0" tIns="0" rIns="0" bIns="0" rtlCol="0" anchor="ctr"/>
-          <a:lstStyle/>
-          <a:p>
-            <a:r>
-              <a:rPr lang="pt-BR" sz="1100" b="1" dirty="0">
-                <a:solidFill>
-                  <a:srgbClr val="20232A"/>
-                </a:solidFill>
-                <a:latin typeface="Consolas" pitchFamily="34" charset="0"/>
-              </a:rPr>
-              <a:t>A Propriedade ou Prop (nome=)</a:t>
-            </a:r>
-            <a:endParaRPr lang="en-US" sz="1100" b="1" dirty="0">
-              <a:solidFill>
-                <a:srgbClr val="20232A"/>
-              </a:solidFill>
-              <a:latin typeface="Consolas" pitchFamily="34" charset="0"/>
-            </a:endParaRPr>
-          </a:p>
-        </p:txBody>
-      </p:sp>
-      <p:sp>
-        <p:nvSpPr>
-          <p:cNvPr id="18" name="Text 16">
-            <a:extLst>
-              <a:ext uri="{FF2B5EF4-FFF2-40B4-BE49-F238E27FC236}">
-                <a16:creationId xmlns:a16="http://schemas.microsoft.com/office/drawing/2014/main" id="{A334D09F-57F0-FCC4-0EC7-1EFEB2B6259A}"/>
-              </a:ext>
-            </a:extLst>
-          </p:cNvPr>
-          <p:cNvSpPr/>
-          <p:nvPr/>
-        </p:nvSpPr>
-        <p:spPr>
-          <a:xfrm>
-            <a:off x="5897880" y="2505456"/>
-            <a:ext cx="2834640" cy="274320"/>
-          </a:xfrm>
-          <a:prstGeom prst="rect">
-            <a:avLst/>
-          </a:prstGeom>
-          <a:noFill/>
-          <a:ln/>
-        </p:spPr>
-        <p:txBody>
-          <a:bodyPr wrap="square" lIns="0" tIns="0" rIns="0" bIns="0" rtlCol="0" anchor="ctr"/>
-          <a:lstStyle/>
-          <a:p>
-            <a:r>
-              <a:rPr lang="en-US" sz="1000" dirty="0">
-                <a:solidFill>
-                  <a:srgbClr val="555F6E"/>
-                </a:solidFill>
-              </a:rPr>
-              <a:t>→ </a:t>
-            </a:r>
-            <a:r>
-              <a:rPr lang="pt-BR" sz="1000" dirty="0">
-                <a:solidFill>
-                  <a:srgbClr val="555F6E"/>
-                </a:solidFill>
-              </a:rPr>
-              <a:t>O termo </a:t>
-            </a:r>
-            <a:r>
-              <a:rPr lang="pt-BR" sz="1000" b="1" dirty="0">
-                <a:solidFill>
-                  <a:srgbClr val="555F6E"/>
-                </a:solidFill>
-              </a:rPr>
-              <a:t>nome</a:t>
-            </a:r>
-            <a:r>
-              <a:rPr lang="pt-BR" sz="1000" dirty="0">
-                <a:solidFill>
-                  <a:srgbClr val="555F6E"/>
-                </a:solidFill>
-              </a:rPr>
-              <a:t> é o que chamamos de Prop (abreviação de </a:t>
-            </a:r>
-            <a:r>
-              <a:rPr lang="pt-BR" sz="1000" dirty="0" err="1">
-                <a:solidFill>
-                  <a:srgbClr val="555F6E"/>
-                </a:solidFill>
-              </a:rPr>
-              <a:t>property</a:t>
-            </a:r>
-            <a:r>
-              <a:rPr lang="pt-BR" sz="1000" dirty="0">
-                <a:solidFill>
-                  <a:srgbClr val="555F6E"/>
-                </a:solidFill>
-              </a:rPr>
-              <a:t>). Pense nisso como o argumento de uma função</a:t>
-            </a:r>
-            <a:r>
-              <a:rPr lang="pt-BR" sz="1000" dirty="0"/>
-              <a:t>.</a:t>
-            </a:r>
-            <a:endParaRPr lang="en-US" sz="1000" dirty="0"/>
-          </a:p>
-        </p:txBody>
-      </p:sp>
-      <p:sp>
-        <p:nvSpPr>
-          <p:cNvPr id="19" name="Shape 17">
-            <a:extLst>
-              <a:ext uri="{FF2B5EF4-FFF2-40B4-BE49-F238E27FC236}">
-                <a16:creationId xmlns:a16="http://schemas.microsoft.com/office/drawing/2014/main" id="{EC4A625E-96A2-50F3-C04E-E9AF14BBA7D4}"/>
-              </a:ext>
-            </a:extLst>
-          </p:cNvPr>
-          <p:cNvSpPr/>
-          <p:nvPr/>
-        </p:nvSpPr>
-        <p:spPr>
-          <a:xfrm>
-            <a:off x="5303520" y="3090672"/>
-            <a:ext cx="3566160" cy="777240"/>
-          </a:xfrm>
-          <a:prstGeom prst="rect">
-            <a:avLst/>
-          </a:prstGeom>
-          <a:solidFill>
-            <a:srgbClr val="D4EDDA"/>
-          </a:solidFill>
-          <a:ln w="12700">
-            <a:solidFill>
-              <a:srgbClr val="E0E0E0"/>
-            </a:solidFill>
-            <a:prstDash val="solid"/>
-          </a:ln>
-        </p:spPr>
-        <p:txBody>
-          <a:bodyPr/>
-          <a:lstStyle/>
-          <a:p>
-            <a:endParaRPr lang="pt-BR"/>
-          </a:p>
-        </p:txBody>
-      </p:sp>
-      <p:sp>
-        <p:nvSpPr>
-          <p:cNvPr id="20" name="Shape 18">
-            <a:extLst>
-              <a:ext uri="{FF2B5EF4-FFF2-40B4-BE49-F238E27FC236}">
-                <a16:creationId xmlns:a16="http://schemas.microsoft.com/office/drawing/2014/main" id="{C269528E-729B-C884-B363-E667C1F54FC2}"/>
-              </a:ext>
-            </a:extLst>
-          </p:cNvPr>
-          <p:cNvSpPr/>
-          <p:nvPr/>
-        </p:nvSpPr>
-        <p:spPr>
-          <a:xfrm>
-            <a:off x="5440680" y="3182112"/>
-            <a:ext cx="365760" cy="365760"/>
-          </a:xfrm>
-          <a:prstGeom prst="ellipse">
-            <a:avLst/>
-          </a:prstGeom>
-          <a:solidFill>
-            <a:srgbClr val="20232A"/>
-          </a:solidFill>
-          <a:ln w="12700">
-            <a:solidFill>
-              <a:srgbClr val="20232A"/>
-            </a:solidFill>
-            <a:prstDash val="solid"/>
-          </a:ln>
-        </p:spPr>
-        <p:txBody>
-          <a:bodyPr/>
-          <a:lstStyle/>
-          <a:p>
-            <a:endParaRPr lang="pt-BR"/>
-          </a:p>
-        </p:txBody>
-      </p:sp>
-      <p:sp>
-        <p:nvSpPr>
-          <p:cNvPr id="21" name="Text 19">
-            <a:extLst>
-              <a:ext uri="{FF2B5EF4-FFF2-40B4-BE49-F238E27FC236}">
-                <a16:creationId xmlns:a16="http://schemas.microsoft.com/office/drawing/2014/main" id="{DF5E49DF-9738-A3C8-AAC9-AE2658ACD83B}"/>
-              </a:ext>
-            </a:extLst>
-          </p:cNvPr>
-          <p:cNvSpPr/>
-          <p:nvPr/>
-        </p:nvSpPr>
-        <p:spPr>
-          <a:xfrm>
-            <a:off x="5440680" y="3182112"/>
-            <a:ext cx="365760" cy="365760"/>
-          </a:xfrm>
-          <a:prstGeom prst="rect">
-            <a:avLst/>
-          </a:prstGeom>
-          <a:noFill/>
-          <a:ln/>
-        </p:spPr>
-        <p:txBody>
-          <a:bodyPr wrap="square" lIns="0" tIns="0" rIns="0" bIns="0" rtlCol="0" anchor="ctr"/>
-          <a:lstStyle/>
-          <a:p>
-            <a:pPr marL="0" indent="0" algn="ctr">
-              <a:buNone/>
-            </a:pPr>
-            <a:r>
-              <a:rPr lang="en-US" sz="1200" b="1" dirty="0">
-                <a:solidFill>
-                  <a:srgbClr val="FFFFFF"/>
-                </a:solidFill>
-              </a:rPr>
-              <a:t>3</a:t>
-            </a:r>
-            <a:endParaRPr lang="en-US" sz="1200" dirty="0"/>
-          </a:p>
-        </p:txBody>
-      </p:sp>
-      <p:sp>
-        <p:nvSpPr>
-          <p:cNvPr id="22" name="Text 20">
-            <a:extLst>
-              <a:ext uri="{FF2B5EF4-FFF2-40B4-BE49-F238E27FC236}">
-                <a16:creationId xmlns:a16="http://schemas.microsoft.com/office/drawing/2014/main" id="{C2AA56A4-9582-C135-4CF0-641E09DB1BEC}"/>
-              </a:ext>
-            </a:extLst>
-          </p:cNvPr>
-          <p:cNvSpPr/>
-          <p:nvPr/>
-        </p:nvSpPr>
-        <p:spPr>
-          <a:xfrm>
-            <a:off x="5897880" y="3127248"/>
-            <a:ext cx="2834640" cy="274320"/>
-          </a:xfrm>
-          <a:prstGeom prst="rect">
-            <a:avLst/>
-          </a:prstGeom>
-          <a:noFill/>
-          <a:ln/>
-        </p:spPr>
-        <p:txBody>
-          <a:bodyPr wrap="square" lIns="0" tIns="0" rIns="0" bIns="0" rtlCol="0" anchor="ctr"/>
-          <a:lstStyle/>
-          <a:p>
-            <a:r>
-              <a:rPr lang="pt-BR" sz="1100" b="1" dirty="0">
-                <a:solidFill>
-                  <a:srgbClr val="20232A"/>
-                </a:solidFill>
-                <a:latin typeface="Consolas" pitchFamily="34" charset="0"/>
-              </a:rPr>
-              <a:t>O Valor ("Velejando com o </a:t>
-            </a:r>
-            <a:r>
-              <a:rPr lang="pt-BR" sz="1100" b="1" dirty="0" err="1">
-                <a:solidFill>
-                  <a:srgbClr val="20232A"/>
-                </a:solidFill>
-                <a:latin typeface="Consolas" pitchFamily="34" charset="0"/>
-              </a:rPr>
-              <a:t>React</a:t>
-            </a:r>
-            <a:r>
-              <a:rPr lang="pt-BR" sz="1100" b="1" dirty="0">
-                <a:solidFill>
-                  <a:srgbClr val="20232A"/>
-                </a:solidFill>
-                <a:latin typeface="Consolas" pitchFamily="34" charset="0"/>
-              </a:rPr>
-              <a:t>")</a:t>
-            </a:r>
-            <a:endParaRPr lang="en-US" sz="1100" b="1" dirty="0">
-              <a:solidFill>
-                <a:srgbClr val="20232A"/>
-              </a:solidFill>
-              <a:latin typeface="Consolas" pitchFamily="34" charset="0"/>
-            </a:endParaRPr>
-          </a:p>
-        </p:txBody>
-      </p:sp>
-      <p:sp>
-        <p:nvSpPr>
-          <p:cNvPr id="23" name="Text 21">
-            <a:extLst>
-              <a:ext uri="{FF2B5EF4-FFF2-40B4-BE49-F238E27FC236}">
-                <a16:creationId xmlns:a16="http://schemas.microsoft.com/office/drawing/2014/main" id="{22569D1B-517A-D360-A513-CC8430BF733E}"/>
-              </a:ext>
-            </a:extLst>
-          </p:cNvPr>
-          <p:cNvSpPr/>
-          <p:nvPr/>
-        </p:nvSpPr>
-        <p:spPr>
-          <a:xfrm>
-            <a:off x="5897880" y="3419856"/>
-            <a:ext cx="2834640" cy="274320"/>
-          </a:xfrm>
-          <a:prstGeom prst="rect">
-            <a:avLst/>
-          </a:prstGeom>
-          <a:noFill/>
-          <a:ln/>
-        </p:spPr>
-        <p:txBody>
-          <a:bodyPr wrap="square" lIns="0" tIns="0" rIns="0" bIns="0" rtlCol="0" anchor="ctr"/>
-          <a:lstStyle/>
-          <a:p>
-            <a:r>
-              <a:rPr lang="en-US" sz="1000" dirty="0">
-                <a:solidFill>
-                  <a:srgbClr val="555F6E"/>
-                </a:solidFill>
-              </a:rPr>
-              <a:t>→ </a:t>
-            </a:r>
-            <a:r>
-              <a:rPr lang="pt-BR" sz="1000" dirty="0">
-                <a:solidFill>
-                  <a:srgbClr val="555F6E"/>
-                </a:solidFill>
-              </a:rPr>
-              <a:t>Este é o conteúdo que você está enviando. O componente </a:t>
-            </a:r>
-            <a:r>
-              <a:rPr lang="pt-BR" sz="1000" b="1" dirty="0">
-                <a:solidFill>
-                  <a:srgbClr val="555F6E"/>
-                </a:solidFill>
-              </a:rPr>
-              <a:t>Titulo</a:t>
-            </a:r>
-            <a:endParaRPr lang="en-US" sz="1000" b="1" dirty="0">
-              <a:solidFill>
-                <a:srgbClr val="555F6E"/>
-              </a:solidFill>
-            </a:endParaRPr>
-          </a:p>
-        </p:txBody>
-      </p:sp>
-      <p:sp>
-        <p:nvSpPr>
-          <p:cNvPr id="24" name="Text 22">
-            <a:extLst>
-              <a:ext uri="{FF2B5EF4-FFF2-40B4-BE49-F238E27FC236}">
-                <a16:creationId xmlns:a16="http://schemas.microsoft.com/office/drawing/2014/main" id="{8D03CD36-D297-D667-620D-821C389F5089}"/>
-              </a:ext>
-            </a:extLst>
-          </p:cNvPr>
-          <p:cNvSpPr/>
-          <p:nvPr/>
-        </p:nvSpPr>
-        <p:spPr>
-          <a:xfrm>
-            <a:off x="5303520" y="4069080"/>
-            <a:ext cx="3566160" cy="274320"/>
-          </a:xfrm>
-          <a:prstGeom prst="rect">
-            <a:avLst/>
-          </a:prstGeom>
-          <a:noFill/>
-          <a:ln/>
-        </p:spPr>
-        <p:txBody>
-          <a:bodyPr wrap="square" lIns="0" tIns="0" rIns="0" bIns="0" rtlCol="0" anchor="ctr"/>
-          <a:lstStyle/>
-          <a:p>
-            <a:pPr marL="0" indent="0">
-              <a:buNone/>
-            </a:pPr>
-            <a:r>
-              <a:rPr lang="en-US" sz="1100" b="1" dirty="0">
-                <a:solidFill>
-                  <a:srgbClr val="20232A"/>
-                </a:solidFill>
-              </a:rPr>
-              <a:t>No </a:t>
-            </a:r>
-            <a:r>
-              <a:rPr lang="en-US" sz="1100" b="1" dirty="0" err="1">
-                <a:solidFill>
-                  <a:srgbClr val="20232A"/>
-                </a:solidFill>
-              </a:rPr>
-              <a:t>Inicio.jsx</a:t>
-            </a:r>
-            <a:r>
-              <a:rPr lang="en-US" sz="1100" b="1" dirty="0">
-                <a:solidFill>
-                  <a:srgbClr val="20232A"/>
-                </a:solidFill>
-              </a:rPr>
-              <a:t>, use assim:</a:t>
-            </a:r>
-            <a:endParaRPr lang="en-US" sz="1100" dirty="0"/>
-          </a:p>
-        </p:txBody>
-      </p:sp>
-      <p:sp>
-        <p:nvSpPr>
-          <p:cNvPr id="25" name="Shape 23">
-            <a:extLst>
-              <a:ext uri="{FF2B5EF4-FFF2-40B4-BE49-F238E27FC236}">
-                <a16:creationId xmlns:a16="http://schemas.microsoft.com/office/drawing/2014/main" id="{730DE395-0563-0AD5-1D08-27B3CAA38F76}"/>
-              </a:ext>
-            </a:extLst>
-          </p:cNvPr>
-          <p:cNvSpPr/>
-          <p:nvPr/>
-        </p:nvSpPr>
-        <p:spPr>
-          <a:xfrm>
-            <a:off x="5303520" y="4389120"/>
-            <a:ext cx="3566160" cy="411480"/>
-          </a:xfrm>
-          <a:prstGeom prst="rect">
-            <a:avLst/>
-          </a:prstGeom>
-          <a:solidFill>
-            <a:srgbClr val="1E1E2E"/>
-          </a:solidFill>
-          <a:ln w="12700">
-            <a:solidFill>
-              <a:srgbClr val="2D2D3F"/>
-            </a:solidFill>
-            <a:prstDash val="solid"/>
-          </a:ln>
-        </p:spPr>
-        <p:txBody>
-          <a:bodyPr/>
-          <a:lstStyle/>
-          <a:p>
-            <a:endParaRPr lang="pt-BR"/>
-          </a:p>
-        </p:txBody>
-      </p:sp>
-      <p:sp>
-        <p:nvSpPr>
-          <p:cNvPr id="26" name="Text 24">
-            <a:extLst>
-              <a:ext uri="{FF2B5EF4-FFF2-40B4-BE49-F238E27FC236}">
-                <a16:creationId xmlns:a16="http://schemas.microsoft.com/office/drawing/2014/main" id="{9C06F581-146E-BD04-6C89-3A8D54A7FC15}"/>
-              </a:ext>
-            </a:extLst>
-          </p:cNvPr>
-          <p:cNvSpPr/>
-          <p:nvPr/>
-        </p:nvSpPr>
-        <p:spPr>
-          <a:xfrm>
-            <a:off x="5440680" y="4480560"/>
-            <a:ext cx="3291840" cy="228600"/>
-          </a:xfrm>
-          <a:prstGeom prst="rect">
-            <a:avLst/>
-          </a:prstGeom>
-          <a:noFill/>
-          <a:ln/>
-        </p:spPr>
-        <p:txBody>
-          <a:bodyPr wrap="square" lIns="0" tIns="0" rIns="0" bIns="0" rtlCol="0" anchor="t"/>
-          <a:lstStyle/>
-          <a:p>
-            <a:pPr marL="0" indent="0">
-              <a:buNone/>
-            </a:pPr>
-            <a:r>
-              <a:rPr lang="en-US" sz="1000" dirty="0">
-                <a:solidFill>
-                  <a:srgbClr val="CDD6F4"/>
-                </a:solidFill>
-                <a:latin typeface="Consolas" pitchFamily="34" charset="0"/>
-                <a:ea typeface="Consolas" pitchFamily="34" charset="-122"/>
-                <a:cs typeface="Consolas" pitchFamily="34" charset="-120"/>
-              </a:rPr>
-              <a:t>&lt;Titulo nome="Velejando com o React"/&gt;</a:t>
-            </a:r>
-            <a:endParaRPr lang="en-US" sz="1000" dirty="0"/>
-          </a:p>
-        </p:txBody>
-      </p:sp>
-    </p:spTree>
-    <p:extLst>
-      <p:ext uri="{BB962C8B-B14F-4D97-AF65-F5344CB8AC3E}">
-        <p14:creationId xmlns:p14="http://schemas.microsoft.com/office/powerpoint/2010/main" val="1845083933"/>
-      </p:ext>
-    </p:extLst>
   </p:cSld>
   <p:clrMapOvr>
     <a:masterClrMapping/>
